--- a/assets/flow_ranking_slides.pptx
+++ b/assets/flow_ranking_slides.pptx
@@ -1,18 +1,19 @@
 
 <file path=ppt/presentation.xml><?xml version="1.0" encoding="utf-8"?>
-<p:presentation xmlns:a="http://schemas.openxmlformats.org/drawingml/2006/main" xmlns:r="http://schemas.openxmlformats.org/officeDocument/2006/relationships" xmlns:p="http://schemas.openxmlformats.org/presentationml/2006/main" saveSubsetFonts="1" autoCompressPictures="0">
+<p:presentation xmlns:a="http://schemas.openxmlformats.org/drawingml/2006/main" xmlns:r="http://schemas.openxmlformats.org/officeDocument/2006/relationships" xmlns:p="http://schemas.openxmlformats.org/presentationml/2006/main" autoCompressPictures="0">
   <p:sldMasterIdLst>
     <p:sldMasterId id="2147483648" r:id="rId1"/>
   </p:sldMasterIdLst>
   <p:sldIdLst>
-    <p:sldId id="256" r:id="rId7"/>
-    <p:sldId id="257" r:id="rId8"/>
-    <p:sldId id="258" r:id="rId9"/>
-    <p:sldId id="259" r:id="rId10"/>
-    <p:sldId id="260" r:id="rId11"/>
-    <p:sldId id="261" r:id="rId12"/>
+    <p:sldId id="256" r:id="rId3"/>
+    <p:sldId id="257" r:id="rId4"/>
+    <p:sldId id="258" r:id="rId5"/>
+    <p:sldId id="259" r:id="rId6"/>
+    <p:sldId id="260" r:id="rId7"/>
+    <p:sldId id="261" r:id="rId8"/>
+    <p:sldId id="262" r:id="rId9"/>
   </p:sldIdLst>
-  <p:sldSz cx="12191695" cy="6858000" type="screen4x3"/>
+  <p:sldSz cx="12191365" cy="6858000" type="screen4x3"/>
   <p:notesSz cx="6858000" cy="9144000"/>
   <p:defaultTextStyle>
     <a:defPPr>
@@ -109,6 +110,22 @@
       </a:defRPr>
     </a:lvl9pPr>
   </p:defaultTextStyle>
+  <p:extLst>
+    <p:ext uri="{EFAFB233-063F-42B5-8137-9DF3F51BA10A}">
+      <p15:sldGuideLst xmlns:p15="http://schemas.microsoft.com/office/powerpoint/2012/main">
+        <p15:guide id="1" orient="horz" pos="2160" userDrawn="1">
+          <p15:clr>
+            <a:srgbClr val="A4A3A4"/>
+          </p15:clr>
+        </p15:guide>
+        <p15:guide id="2" pos="2880" userDrawn="1">
+          <p15:clr>
+            <a:srgbClr val="A4A3A4"/>
+          </p15:clr>
+        </p15:guide>
+      </p15:sldGuideLst>
+    </p:ext>
+  </p:extLst>
 </p:presentation>
 </file>
 
@@ -293,7 +310,6 @@
           <a:p>
             <a:fld id="{5BCAD085-E8A6-8845-BD4E-CB4CCA059FC4}" type="datetimeFigureOut">
               <a:rPr lang="en-US" smtClean="0"/>
-              <a:t>1/27/13</a:t>
             </a:fld>
             <a:endParaRPr lang="en-US"/>
           </a:p>
@@ -335,18 +351,12 @@
           <a:p>
             <a:fld id="{C1FF6DA9-008F-8B48-92A6-B652298478BF}" type="slidenum">
               <a:rPr lang="en-US" smtClean="0"/>
-              <a:t>‹#›</a:t>
             </a:fld>
             <a:endParaRPr lang="en-US"/>
           </a:p>
         </p:txBody>
       </p:sp>
     </p:spTree>
-    <p:extLst>
-      <p:ext uri="{BB962C8B-B14F-4D97-AF65-F5344CB8AC3E}">
-        <p14:creationId xmlns:p14="http://schemas.microsoft.com/office/powerpoint/2010/main" val="3168075583"/>
-      </p:ext>
-    </p:extLst>
   </p:cSld>
   <p:clrMapOvr>
     <a:masterClrMapping/>
@@ -414,6 +424,7 @@
               <a:rPr lang="en-US" smtClean="0"/>
               <a:t>Click to edit Master text styles</a:t>
             </a:r>
+            <a:endParaRPr lang="en-US" smtClean="0"/>
           </a:p>
           <a:p>
             <a:pPr lvl="1"/>
@@ -421,6 +432,7 @@
               <a:rPr lang="en-US" smtClean="0"/>
               <a:t>Second level</a:t>
             </a:r>
+            <a:endParaRPr lang="en-US" smtClean="0"/>
           </a:p>
           <a:p>
             <a:pPr lvl="2"/>
@@ -428,6 +440,7 @@
               <a:rPr lang="en-US" smtClean="0"/>
               <a:t>Third level</a:t>
             </a:r>
+            <a:endParaRPr lang="en-US" smtClean="0"/>
           </a:p>
           <a:p>
             <a:pPr lvl="3"/>
@@ -435,6 +448,7 @@
               <a:rPr lang="en-US" smtClean="0"/>
               <a:t>Fourth level</a:t>
             </a:r>
+            <a:endParaRPr lang="en-US" smtClean="0"/>
           </a:p>
           <a:p>
             <a:pPr lvl="4"/>
@@ -463,7 +477,6 @@
           <a:p>
             <a:fld id="{5BCAD085-E8A6-8845-BD4E-CB4CCA059FC4}" type="datetimeFigureOut">
               <a:rPr lang="en-US" smtClean="0"/>
-              <a:t>1/27/13</a:t>
             </a:fld>
             <a:endParaRPr lang="en-US"/>
           </a:p>
@@ -505,18 +518,12 @@
           <a:p>
             <a:fld id="{C1FF6DA9-008F-8B48-92A6-B652298478BF}" type="slidenum">
               <a:rPr lang="en-US" smtClean="0"/>
-              <a:t>‹#›</a:t>
             </a:fld>
             <a:endParaRPr lang="en-US"/>
           </a:p>
         </p:txBody>
       </p:sp>
     </p:spTree>
-    <p:extLst>
-      <p:ext uri="{BB962C8B-B14F-4D97-AF65-F5344CB8AC3E}">
-        <p14:creationId xmlns:p14="http://schemas.microsoft.com/office/powerpoint/2010/main" val="2910927964"/>
-      </p:ext>
-    </p:extLst>
   </p:cSld>
   <p:clrMapOvr>
     <a:masterClrMapping/>
@@ -594,6 +601,7 @@
               <a:rPr lang="en-US" smtClean="0"/>
               <a:t>Click to edit Master text styles</a:t>
             </a:r>
+            <a:endParaRPr lang="en-US" smtClean="0"/>
           </a:p>
           <a:p>
             <a:pPr lvl="1"/>
@@ -601,6 +609,7 @@
               <a:rPr lang="en-US" smtClean="0"/>
               <a:t>Second level</a:t>
             </a:r>
+            <a:endParaRPr lang="en-US" smtClean="0"/>
           </a:p>
           <a:p>
             <a:pPr lvl="2"/>
@@ -608,6 +617,7 @@
               <a:rPr lang="en-US" smtClean="0"/>
               <a:t>Third level</a:t>
             </a:r>
+            <a:endParaRPr lang="en-US" smtClean="0"/>
           </a:p>
           <a:p>
             <a:pPr lvl="3"/>
@@ -615,6 +625,7 @@
               <a:rPr lang="en-US" smtClean="0"/>
               <a:t>Fourth level</a:t>
             </a:r>
+            <a:endParaRPr lang="en-US" smtClean="0"/>
           </a:p>
           <a:p>
             <a:pPr lvl="4"/>
@@ -643,7 +654,6 @@
           <a:p>
             <a:fld id="{5BCAD085-E8A6-8845-BD4E-CB4CCA059FC4}" type="datetimeFigureOut">
               <a:rPr lang="en-US" smtClean="0"/>
-              <a:t>1/27/13</a:t>
             </a:fld>
             <a:endParaRPr lang="en-US"/>
           </a:p>
@@ -685,18 +695,12 @@
           <a:p>
             <a:fld id="{C1FF6DA9-008F-8B48-92A6-B652298478BF}" type="slidenum">
               <a:rPr lang="en-US" smtClean="0"/>
-              <a:t>‹#›</a:t>
             </a:fld>
             <a:endParaRPr lang="en-US"/>
           </a:p>
         </p:txBody>
       </p:sp>
     </p:spTree>
-    <p:extLst>
-      <p:ext uri="{BB962C8B-B14F-4D97-AF65-F5344CB8AC3E}">
-        <p14:creationId xmlns:p14="http://schemas.microsoft.com/office/powerpoint/2010/main" val="3612223792"/>
-      </p:ext>
-    </p:extLst>
   </p:cSld>
   <p:clrMapOvr>
     <a:masterClrMapping/>
@@ -764,6 +768,7 @@
               <a:rPr lang="en-US" smtClean="0"/>
               <a:t>Click to edit Master text styles</a:t>
             </a:r>
+            <a:endParaRPr lang="en-US" smtClean="0"/>
           </a:p>
           <a:p>
             <a:pPr lvl="1"/>
@@ -771,6 +776,7 @@
               <a:rPr lang="en-US" smtClean="0"/>
               <a:t>Second level</a:t>
             </a:r>
+            <a:endParaRPr lang="en-US" smtClean="0"/>
           </a:p>
           <a:p>
             <a:pPr lvl="2"/>
@@ -778,6 +784,7 @@
               <a:rPr lang="en-US" smtClean="0"/>
               <a:t>Third level</a:t>
             </a:r>
+            <a:endParaRPr lang="en-US" smtClean="0"/>
           </a:p>
           <a:p>
             <a:pPr lvl="3"/>
@@ -785,6 +792,7 @@
               <a:rPr lang="en-US" smtClean="0"/>
               <a:t>Fourth level</a:t>
             </a:r>
+            <a:endParaRPr lang="en-US" smtClean="0"/>
           </a:p>
           <a:p>
             <a:pPr lvl="4"/>
@@ -813,7 +821,6 @@
           <a:p>
             <a:fld id="{5BCAD085-E8A6-8845-BD4E-CB4CCA059FC4}" type="datetimeFigureOut">
               <a:rPr lang="en-US" smtClean="0"/>
-              <a:t>1/27/13</a:t>
             </a:fld>
             <a:endParaRPr lang="en-US"/>
           </a:p>
@@ -855,18 +862,12 @@
           <a:p>
             <a:fld id="{C1FF6DA9-008F-8B48-92A6-B652298478BF}" type="slidenum">
               <a:rPr lang="en-US" smtClean="0"/>
-              <a:t>‹#›</a:t>
             </a:fld>
             <a:endParaRPr lang="en-US"/>
           </a:p>
         </p:txBody>
       </p:sp>
     </p:spTree>
-    <p:extLst>
-      <p:ext uri="{BB962C8B-B14F-4D97-AF65-F5344CB8AC3E}">
-        <p14:creationId xmlns:p14="http://schemas.microsoft.com/office/powerpoint/2010/main" val="2614314258"/>
-      </p:ext>
-    </p:extLst>
   </p:cSld>
   <p:clrMapOvr>
     <a:masterClrMapping/>
@@ -1039,6 +1040,7 @@
               <a:rPr lang="en-US" smtClean="0"/>
               <a:t>Click to edit Master text styles</a:t>
             </a:r>
+            <a:endParaRPr lang="en-US" smtClean="0"/>
           </a:p>
         </p:txBody>
       </p:sp>
@@ -1059,7 +1061,6 @@
           <a:p>
             <a:fld id="{5BCAD085-E8A6-8845-BD4E-CB4CCA059FC4}" type="datetimeFigureOut">
               <a:rPr lang="en-US" smtClean="0"/>
-              <a:t>1/27/13</a:t>
             </a:fld>
             <a:endParaRPr lang="en-US"/>
           </a:p>
@@ -1101,18 +1102,12 @@
           <a:p>
             <a:fld id="{C1FF6DA9-008F-8B48-92A6-B652298478BF}" type="slidenum">
               <a:rPr lang="en-US" smtClean="0"/>
-              <a:t>‹#›</a:t>
             </a:fld>
             <a:endParaRPr lang="en-US"/>
           </a:p>
         </p:txBody>
       </p:sp>
     </p:spTree>
-    <p:extLst>
-      <p:ext uri="{BB962C8B-B14F-4D97-AF65-F5344CB8AC3E}">
-        <p14:creationId xmlns:p14="http://schemas.microsoft.com/office/powerpoint/2010/main" val="960648375"/>
-      </p:ext>
-    </p:extLst>
   </p:cSld>
   <p:clrMapOvr>
     <a:masterClrMapping/>
@@ -1213,6 +1208,7 @@
               <a:rPr lang="en-US" smtClean="0"/>
               <a:t>Click to edit Master text styles</a:t>
             </a:r>
+            <a:endParaRPr lang="en-US" smtClean="0"/>
           </a:p>
           <a:p>
             <a:pPr lvl="1"/>
@@ -1220,6 +1216,7 @@
               <a:rPr lang="en-US" smtClean="0"/>
               <a:t>Second level</a:t>
             </a:r>
+            <a:endParaRPr lang="en-US" smtClean="0"/>
           </a:p>
           <a:p>
             <a:pPr lvl="2"/>
@@ -1227,6 +1224,7 @@
               <a:rPr lang="en-US" smtClean="0"/>
               <a:t>Third level</a:t>
             </a:r>
+            <a:endParaRPr lang="en-US" smtClean="0"/>
           </a:p>
           <a:p>
             <a:pPr lvl="3"/>
@@ -1234,6 +1232,7 @@
               <a:rPr lang="en-US" smtClean="0"/>
               <a:t>Fourth level</a:t>
             </a:r>
+            <a:endParaRPr lang="en-US" smtClean="0"/>
           </a:p>
           <a:p>
             <a:pPr lvl="4"/>
@@ -1298,6 +1297,7 @@
               <a:rPr lang="en-US" smtClean="0"/>
               <a:t>Click to edit Master text styles</a:t>
             </a:r>
+            <a:endParaRPr lang="en-US" smtClean="0"/>
           </a:p>
           <a:p>
             <a:pPr lvl="1"/>
@@ -1305,6 +1305,7 @@
               <a:rPr lang="en-US" smtClean="0"/>
               <a:t>Second level</a:t>
             </a:r>
+            <a:endParaRPr lang="en-US" smtClean="0"/>
           </a:p>
           <a:p>
             <a:pPr lvl="2"/>
@@ -1312,6 +1313,7 @@
               <a:rPr lang="en-US" smtClean="0"/>
               <a:t>Third level</a:t>
             </a:r>
+            <a:endParaRPr lang="en-US" smtClean="0"/>
           </a:p>
           <a:p>
             <a:pPr lvl="3"/>
@@ -1319,6 +1321,7 @@
               <a:rPr lang="en-US" smtClean="0"/>
               <a:t>Fourth level</a:t>
             </a:r>
+            <a:endParaRPr lang="en-US" smtClean="0"/>
           </a:p>
           <a:p>
             <a:pPr lvl="4"/>
@@ -1347,7 +1350,6 @@
           <a:p>
             <a:fld id="{5BCAD085-E8A6-8845-BD4E-CB4CCA059FC4}" type="datetimeFigureOut">
               <a:rPr lang="en-US" smtClean="0"/>
-              <a:t>1/27/13</a:t>
             </a:fld>
             <a:endParaRPr lang="en-US"/>
           </a:p>
@@ -1389,18 +1391,12 @@
           <a:p>
             <a:fld id="{C1FF6DA9-008F-8B48-92A6-B652298478BF}" type="slidenum">
               <a:rPr lang="en-US" smtClean="0"/>
-              <a:t>‹#›</a:t>
             </a:fld>
             <a:endParaRPr lang="en-US"/>
           </a:p>
         </p:txBody>
       </p:sp>
     </p:spTree>
-    <p:extLst>
-      <p:ext uri="{BB962C8B-B14F-4D97-AF65-F5344CB8AC3E}">
-        <p14:creationId xmlns:p14="http://schemas.microsoft.com/office/powerpoint/2010/main" val="2782244947"/>
-      </p:ext>
-    </p:extLst>
   </p:cSld>
   <p:clrMapOvr>
     <a:masterClrMapping/>
@@ -1514,6 +1510,7 @@
               <a:rPr lang="en-US" smtClean="0"/>
               <a:t>Click to edit Master text styles</a:t>
             </a:r>
+            <a:endParaRPr lang="en-US" smtClean="0"/>
           </a:p>
         </p:txBody>
       </p:sp>
@@ -1570,6 +1567,7 @@
               <a:rPr lang="en-US" smtClean="0"/>
               <a:t>Click to edit Master text styles</a:t>
             </a:r>
+            <a:endParaRPr lang="en-US" smtClean="0"/>
           </a:p>
           <a:p>
             <a:pPr lvl="1"/>
@@ -1577,6 +1575,7 @@
               <a:rPr lang="en-US" smtClean="0"/>
               <a:t>Second level</a:t>
             </a:r>
+            <a:endParaRPr lang="en-US" smtClean="0"/>
           </a:p>
           <a:p>
             <a:pPr lvl="2"/>
@@ -1584,6 +1583,7 @@
               <a:rPr lang="en-US" smtClean="0"/>
               <a:t>Third level</a:t>
             </a:r>
+            <a:endParaRPr lang="en-US" smtClean="0"/>
           </a:p>
           <a:p>
             <a:pPr lvl="3"/>
@@ -1591,6 +1591,7 @@
               <a:rPr lang="en-US" smtClean="0"/>
               <a:t>Fourth level</a:t>
             </a:r>
+            <a:endParaRPr lang="en-US" smtClean="0"/>
           </a:p>
           <a:p>
             <a:pPr lvl="4"/>
@@ -1664,6 +1665,7 @@
               <a:rPr lang="en-US" smtClean="0"/>
               <a:t>Click to edit Master text styles</a:t>
             </a:r>
+            <a:endParaRPr lang="en-US" smtClean="0"/>
           </a:p>
         </p:txBody>
       </p:sp>
@@ -1720,6 +1722,7 @@
               <a:rPr lang="en-US" smtClean="0"/>
               <a:t>Click to edit Master text styles</a:t>
             </a:r>
+            <a:endParaRPr lang="en-US" smtClean="0"/>
           </a:p>
           <a:p>
             <a:pPr lvl="1"/>
@@ -1727,6 +1730,7 @@
               <a:rPr lang="en-US" smtClean="0"/>
               <a:t>Second level</a:t>
             </a:r>
+            <a:endParaRPr lang="en-US" smtClean="0"/>
           </a:p>
           <a:p>
             <a:pPr lvl="2"/>
@@ -1734,6 +1738,7 @@
               <a:rPr lang="en-US" smtClean="0"/>
               <a:t>Third level</a:t>
             </a:r>
+            <a:endParaRPr lang="en-US" smtClean="0"/>
           </a:p>
           <a:p>
             <a:pPr lvl="3"/>
@@ -1741,6 +1746,7 @@
               <a:rPr lang="en-US" smtClean="0"/>
               <a:t>Fourth level</a:t>
             </a:r>
+            <a:endParaRPr lang="en-US" smtClean="0"/>
           </a:p>
           <a:p>
             <a:pPr lvl="4"/>
@@ -1769,7 +1775,6 @@
           <a:p>
             <a:fld id="{5BCAD085-E8A6-8845-BD4E-CB4CCA059FC4}" type="datetimeFigureOut">
               <a:rPr lang="en-US" smtClean="0"/>
-              <a:t>1/27/13</a:t>
             </a:fld>
             <a:endParaRPr lang="en-US"/>
           </a:p>
@@ -1811,18 +1816,12 @@
           <a:p>
             <a:fld id="{C1FF6DA9-008F-8B48-92A6-B652298478BF}" type="slidenum">
               <a:rPr lang="en-US" smtClean="0"/>
-              <a:t>‹#›</a:t>
             </a:fld>
             <a:endParaRPr lang="en-US"/>
           </a:p>
         </p:txBody>
       </p:sp>
     </p:spTree>
-    <p:extLst>
-      <p:ext uri="{BB962C8B-B14F-4D97-AF65-F5344CB8AC3E}">
-        <p14:creationId xmlns:p14="http://schemas.microsoft.com/office/powerpoint/2010/main" val="990158736"/>
-      </p:ext>
-    </p:extLst>
   </p:cSld>
   <p:clrMapOvr>
     <a:masterClrMapping/>
@@ -1887,7 +1886,6 @@
           <a:p>
             <a:fld id="{5BCAD085-E8A6-8845-BD4E-CB4CCA059FC4}" type="datetimeFigureOut">
               <a:rPr lang="en-US" smtClean="0"/>
-              <a:t>1/27/13</a:t>
             </a:fld>
             <a:endParaRPr lang="en-US"/>
           </a:p>
@@ -1929,18 +1927,12 @@
           <a:p>
             <a:fld id="{C1FF6DA9-008F-8B48-92A6-B652298478BF}" type="slidenum">
               <a:rPr lang="en-US" smtClean="0"/>
-              <a:t>‹#›</a:t>
             </a:fld>
             <a:endParaRPr lang="en-US"/>
           </a:p>
         </p:txBody>
       </p:sp>
     </p:spTree>
-    <p:extLst>
-      <p:ext uri="{BB962C8B-B14F-4D97-AF65-F5344CB8AC3E}">
-        <p14:creationId xmlns:p14="http://schemas.microsoft.com/office/powerpoint/2010/main" val="727027711"/>
-      </p:ext>
-    </p:extLst>
   </p:cSld>
   <p:clrMapOvr>
     <a:masterClrMapping/>
@@ -1982,7 +1974,6 @@
           <a:p>
             <a:fld id="{5BCAD085-E8A6-8845-BD4E-CB4CCA059FC4}" type="datetimeFigureOut">
               <a:rPr lang="en-US" smtClean="0"/>
-              <a:t>1/27/13</a:t>
             </a:fld>
             <a:endParaRPr lang="en-US"/>
           </a:p>
@@ -2024,18 +2015,12 @@
           <a:p>
             <a:fld id="{C1FF6DA9-008F-8B48-92A6-B652298478BF}" type="slidenum">
               <a:rPr lang="en-US" smtClean="0"/>
-              <a:t>‹#›</a:t>
             </a:fld>
             <a:endParaRPr lang="en-US"/>
           </a:p>
         </p:txBody>
       </p:sp>
     </p:spTree>
-    <p:extLst>
-      <p:ext uri="{BB962C8B-B14F-4D97-AF65-F5344CB8AC3E}">
-        <p14:creationId xmlns:p14="http://schemas.microsoft.com/office/powerpoint/2010/main" val="1212999818"/>
-      </p:ext>
-    </p:extLst>
   </p:cSld>
   <p:clrMapOvr>
     <a:masterClrMapping/>
@@ -2145,6 +2130,7 @@
               <a:rPr lang="en-US" smtClean="0"/>
               <a:t>Click to edit Master text styles</a:t>
             </a:r>
+            <a:endParaRPr lang="en-US" smtClean="0"/>
           </a:p>
           <a:p>
             <a:pPr lvl="1"/>
@@ -2152,6 +2138,7 @@
               <a:rPr lang="en-US" smtClean="0"/>
               <a:t>Second level</a:t>
             </a:r>
+            <a:endParaRPr lang="en-US" smtClean="0"/>
           </a:p>
           <a:p>
             <a:pPr lvl="2"/>
@@ -2159,6 +2146,7 @@
               <a:rPr lang="en-US" smtClean="0"/>
               <a:t>Third level</a:t>
             </a:r>
+            <a:endParaRPr lang="en-US" smtClean="0"/>
           </a:p>
           <a:p>
             <a:pPr lvl="3"/>
@@ -2166,6 +2154,7 @@
               <a:rPr lang="en-US" smtClean="0"/>
               <a:t>Fourth level</a:t>
             </a:r>
+            <a:endParaRPr lang="en-US" smtClean="0"/>
           </a:p>
           <a:p>
             <a:pPr lvl="4"/>
@@ -2239,6 +2228,7 @@
               <a:rPr lang="en-US" smtClean="0"/>
               <a:t>Click to edit Master text styles</a:t>
             </a:r>
+            <a:endParaRPr lang="en-US" smtClean="0"/>
           </a:p>
         </p:txBody>
       </p:sp>
@@ -2259,7 +2249,6 @@
           <a:p>
             <a:fld id="{5BCAD085-E8A6-8845-BD4E-CB4CCA059FC4}" type="datetimeFigureOut">
               <a:rPr lang="en-US" smtClean="0"/>
-              <a:t>1/27/13</a:t>
             </a:fld>
             <a:endParaRPr lang="en-US"/>
           </a:p>
@@ -2301,18 +2290,12 @@
           <a:p>
             <a:fld id="{C1FF6DA9-008F-8B48-92A6-B652298478BF}" type="slidenum">
               <a:rPr lang="en-US" smtClean="0"/>
-              <a:t>‹#›</a:t>
             </a:fld>
             <a:endParaRPr lang="en-US"/>
           </a:p>
         </p:txBody>
       </p:sp>
     </p:spTree>
-    <p:extLst>
-      <p:ext uri="{BB962C8B-B14F-4D97-AF65-F5344CB8AC3E}">
-        <p14:creationId xmlns:p14="http://schemas.microsoft.com/office/powerpoint/2010/main" val="1840726560"/>
-      </p:ext>
-    </p:extLst>
   </p:cSld>
   <p:clrMapOvr>
     <a:masterClrMapping/>
@@ -2492,6 +2475,7 @@
               <a:rPr lang="en-US" smtClean="0"/>
               <a:t>Click to edit Master text styles</a:t>
             </a:r>
+            <a:endParaRPr lang="en-US" smtClean="0"/>
           </a:p>
         </p:txBody>
       </p:sp>
@@ -2512,7 +2496,6 @@
           <a:p>
             <a:fld id="{5BCAD085-E8A6-8845-BD4E-CB4CCA059FC4}" type="datetimeFigureOut">
               <a:rPr lang="en-US" smtClean="0"/>
-              <a:t>1/27/13</a:t>
             </a:fld>
             <a:endParaRPr lang="en-US"/>
           </a:p>
@@ -2554,18 +2537,12 @@
           <a:p>
             <a:fld id="{C1FF6DA9-008F-8B48-92A6-B652298478BF}" type="slidenum">
               <a:rPr lang="en-US" smtClean="0"/>
-              <a:t>‹#›</a:t>
             </a:fld>
             <a:endParaRPr lang="en-US"/>
           </a:p>
         </p:txBody>
       </p:sp>
     </p:spTree>
-    <p:extLst>
-      <p:ext uri="{BB962C8B-B14F-4D97-AF65-F5344CB8AC3E}">
-        <p14:creationId xmlns:p14="http://schemas.microsoft.com/office/powerpoint/2010/main" val="3889236939"/>
-      </p:ext>
-    </p:extLst>
   </p:cSld>
   <p:clrMapOvr>
     <a:masterClrMapping/>
@@ -2658,6 +2635,7 @@
               <a:rPr lang="en-US" smtClean="0"/>
               <a:t>Click to edit Master text styles</a:t>
             </a:r>
+            <a:endParaRPr lang="en-US" smtClean="0"/>
           </a:p>
           <a:p>
             <a:pPr lvl="1"/>
@@ -2665,6 +2643,7 @@
               <a:rPr lang="en-US" smtClean="0"/>
               <a:t>Second level</a:t>
             </a:r>
+            <a:endParaRPr lang="en-US" smtClean="0"/>
           </a:p>
           <a:p>
             <a:pPr lvl="2"/>
@@ -2672,6 +2651,7 @@
               <a:rPr lang="en-US" smtClean="0"/>
               <a:t>Third level</a:t>
             </a:r>
+            <a:endParaRPr lang="en-US" smtClean="0"/>
           </a:p>
           <a:p>
             <a:pPr lvl="3"/>
@@ -2679,6 +2659,7 @@
               <a:rPr lang="en-US" smtClean="0"/>
               <a:t>Fourth level</a:t>
             </a:r>
+            <a:endParaRPr lang="en-US" smtClean="0"/>
           </a:p>
           <a:p>
             <a:pPr lvl="4"/>
@@ -2725,7 +2706,6 @@
           <a:p>
             <a:fld id="{5BCAD085-E8A6-8845-BD4E-CB4CCA059FC4}" type="datetimeFigureOut">
               <a:rPr lang="en-US" smtClean="0"/>
-              <a:t>1/27/13</a:t>
             </a:fld>
             <a:endParaRPr lang="en-US"/>
           </a:p>
@@ -2803,18 +2783,12 @@
           <a:p>
             <a:fld id="{C1FF6DA9-008F-8B48-92A6-B652298478BF}" type="slidenum">
               <a:rPr lang="en-US" smtClean="0"/>
-              <a:t>‹#›</a:t>
             </a:fld>
             <a:endParaRPr lang="en-US"/>
           </a:p>
         </p:txBody>
       </p:sp>
     </p:spTree>
-    <p:extLst>
-      <p:ext uri="{BB962C8B-B14F-4D97-AF65-F5344CB8AC3E}">
-        <p14:creationId xmlns:p14="http://schemas.microsoft.com/office/powerpoint/2010/main" val="2209977519"/>
-      </p:ext>
-    </p:extLst>
   </p:cSld>
   <p:clrMap bg1="lt1" tx1="dk1" bg2="lt2" tx2="dk2" accent1="accent1" accent2="accent2" accent3="accent3" accent4="accent4" accent5="accent5" accent6="accent6" hlink="hlink" folHlink="folHlink"/>
   <p:sldLayoutIdLst>
@@ -2852,7 +2826,7 @@
         <a:spcBef>
           <a:spcPct val="20000"/>
         </a:spcBef>
-        <a:buFont typeface="Arial"/>
+        <a:buFont typeface="Arial" panose="020B0604020202020204"/>
         <a:buChar char="•"/>
         <a:defRPr sz="3200" kern="1200">
           <a:solidFill>
@@ -2867,7 +2841,7 @@
         <a:spcBef>
           <a:spcPct val="20000"/>
         </a:spcBef>
-        <a:buFont typeface="Arial"/>
+        <a:buFont typeface="Arial" panose="020B0604020202020204"/>
         <a:buChar char="–"/>
         <a:defRPr sz="2800" kern="1200">
           <a:solidFill>
@@ -2882,7 +2856,7 @@
         <a:spcBef>
           <a:spcPct val="20000"/>
         </a:spcBef>
-        <a:buFont typeface="Arial"/>
+        <a:buFont typeface="Arial" panose="020B0604020202020204"/>
         <a:buChar char="•"/>
         <a:defRPr sz="2400" kern="1200">
           <a:solidFill>
@@ -2897,7 +2871,7 @@
         <a:spcBef>
           <a:spcPct val="20000"/>
         </a:spcBef>
-        <a:buFont typeface="Arial"/>
+        <a:buFont typeface="Arial" panose="020B0604020202020204"/>
         <a:buChar char="–"/>
         <a:defRPr sz="2000" kern="1200">
           <a:solidFill>
@@ -2912,7 +2886,7 @@
         <a:spcBef>
           <a:spcPct val="20000"/>
         </a:spcBef>
-        <a:buFont typeface="Arial"/>
+        <a:buFont typeface="Arial" panose="020B0604020202020204"/>
         <a:buChar char="»"/>
         <a:defRPr sz="2000" kern="1200">
           <a:solidFill>
@@ -2927,7 +2901,7 @@
         <a:spcBef>
           <a:spcPct val="20000"/>
         </a:spcBef>
-        <a:buFont typeface="Arial"/>
+        <a:buFont typeface="Arial" panose="020B0604020202020204"/>
         <a:buChar char="•"/>
         <a:defRPr sz="2000" kern="1200">
           <a:solidFill>
@@ -2942,7 +2916,7 @@
         <a:spcBef>
           <a:spcPct val="20000"/>
         </a:spcBef>
-        <a:buFont typeface="Arial"/>
+        <a:buFont typeface="Arial" panose="020B0604020202020204"/>
         <a:buChar char="•"/>
         <a:defRPr sz="2000" kern="1200">
           <a:solidFill>
@@ -2957,7 +2931,7 @@
         <a:spcBef>
           <a:spcPct val="20000"/>
         </a:spcBef>
-        <a:buFont typeface="Arial"/>
+        <a:buFont typeface="Arial" panose="020B0604020202020204"/>
         <a:buChar char="•"/>
         <a:defRPr sz="2000" kern="1200">
           <a:solidFill>
@@ -2972,7 +2946,7 @@
         <a:spcBef>
           <a:spcPct val="20000"/>
         </a:spcBef>
-        <a:buFont typeface="Arial"/>
+        <a:buFont typeface="Arial" panose="020B0604020202020204"/>
         <a:buChar char="•"/>
         <a:defRPr sz="2000" kern="1200">
           <a:solidFill>
@@ -3084,12 +3058,12 @@
 </file>
 
 <file path=ppt/slides/slide1.xml><?xml version="1.0" encoding="utf-8"?>
-<p:sld xmlns:a="http://schemas.openxmlformats.org/drawingml/2006/main" xmlns:p="http://schemas.openxmlformats.org/presentationml/2006/main" xmlns:r="http://schemas.openxmlformats.org/officeDocument/2006/relationships">
+<p:sld xmlns:a="http://schemas.openxmlformats.org/drawingml/2006/main" xmlns:r="http://schemas.openxmlformats.org/officeDocument/2006/relationships" xmlns:p="http://schemas.openxmlformats.org/presentationml/2006/main">
   <p:cSld>
     <p:bg>
       <p:bgPr>
         <a:solidFill>
-          <a:srgbClr val="F7F4EE"/>
+          <a:srgbClr val="FFFFFF"/>
         </a:solidFill>
         <a:effectLst/>
       </p:bgPr>
@@ -3110,13 +3084,13 @@
         <p:spPr>
           <a:xfrm>
             <a:off x="0" y="0"/>
-            <a:ext cx="12191695" cy="502920"/>
+            <a:ext cx="12191695" cy="256032"/>
           </a:xfrm>
           <a:prstGeom prst="rect">
             <a:avLst/>
           </a:prstGeom>
           <a:solidFill>
-            <a:srgbClr val="142244"/>
+            <a:srgbClr val="112244"/>
           </a:solidFill>
           <a:ln>
             <a:noFill/>
@@ -3152,8 +3126,8 @@
         </p:nvSpPr>
         <p:spPr>
           <a:xfrm>
-            <a:off x="502920" y="164592"/>
-            <a:ext cx="9875520" cy="365760"/>
+            <a:off x="502920" y="658368"/>
+            <a:ext cx="5852160" cy="365760"/>
           </a:xfrm>
           <a:prstGeom prst="rect">
             <a:avLst/>
@@ -3161,20 +3135,27 @@
           <a:noFill/>
         </p:spPr>
         <p:txBody>
-          <a:bodyPr wrap="none">
+          <a:bodyPr wrap="none" anchor="t">
             <a:spAutoFit/>
           </a:bodyPr>
           <a:lstStyle/>
           <a:p>
             <a:pPr algn="l"/>
             <a:r>
-              <a:rPr sz="2600" b="1">
-                <a:solidFill>
-                  <a:srgbClr val="FFFFFF"/>
-                </a:solidFill>
+              <a:rPr sz="3000" b="1">
+                <a:solidFill>
+                  <a:srgbClr val="BB2E37"/>
+                </a:solidFill>
+                <a:latin typeface="Cambria" panose="02040503050406030204"/>
               </a:rPr>
               <a:t>Flow Ranking</a:t>
             </a:r>
+            <a:endParaRPr sz="3000" b="1">
+              <a:solidFill>
+                <a:srgbClr val="BB2E37"/>
+              </a:solidFill>
+              <a:latin typeface="Cambria" panose="02040503050406030204"/>
+            </a:endParaRPr>
           </a:p>
         </p:txBody>
       </p:sp>
@@ -3186,8 +3167,8 @@
         </p:nvSpPr>
         <p:spPr>
           <a:xfrm>
-            <a:off x="548640" y="6400800"/>
-            <a:ext cx="10972800" cy="274320"/>
+            <a:off x="502920" y="1078865"/>
+            <a:ext cx="8030845" cy="829945"/>
           </a:xfrm>
           <a:prstGeom prst="rect">
             <a:avLst/>
@@ -3195,19 +3176,63 @@
           <a:noFill/>
         </p:spPr>
         <p:txBody>
-          <a:bodyPr wrap="none">
+          <a:bodyPr wrap="square" anchor="t">
             <a:spAutoFit/>
           </a:bodyPr>
           <a:lstStyle/>
           <a:p>
-            <a:r>
-              <a:rPr sz="1100">
-                <a:solidFill>
-                  <a:srgbClr val="5F697D"/>
-                </a:solidFill>
+            <a:pPr algn="l"/>
+            <a:r>
+              <a:rPr sz="2400" b="1">
+                <a:solidFill>
+                  <a:srgbClr val="112244"/>
+                </a:solidFill>
+                <a:latin typeface="Cambria" panose="02040503050406030204"/>
               </a:rPr>
-              <a:t>Flow Ranking | CS550 Final Project | Sen Fang</a:t>
-            </a:r>
+              <a:t>Flow-Regularized Neural Collaborative Filtering</a:t>
+            </a:r>
+            <a:r>
+              <a:rPr lang="en-US" sz="2400" b="1">
+                <a:solidFill>
+                  <a:srgbClr val="112244"/>
+                </a:solidFill>
+                <a:latin typeface="Cambria" panose="02040503050406030204"/>
+              </a:rPr>
+              <a:t> </a:t>
+            </a:r>
+            <a:r>
+              <a:rPr sz="2400" b="1">
+                <a:solidFill>
+                  <a:srgbClr val="112244"/>
+                </a:solidFill>
+                <a:latin typeface="Cambria" panose="02040503050406030204"/>
+              </a:rPr>
+              <a:t>for Movie</a:t>
+            </a:r>
+            <a:r>
+              <a:rPr lang="en-US" sz="2400" b="1">
+                <a:solidFill>
+                  <a:srgbClr val="112244"/>
+                </a:solidFill>
+                <a:latin typeface="Cambria" panose="02040503050406030204"/>
+              </a:rPr>
+              <a:t> </a:t>
+            </a:r>
+            <a:r>
+              <a:rPr sz="2400" b="1">
+                <a:solidFill>
+                  <a:srgbClr val="112244"/>
+                </a:solidFill>
+                <a:latin typeface="Cambria" panose="02040503050406030204"/>
+              </a:rPr>
+              <a:t>Recommendation</a:t>
+            </a:r>
+            <a:endParaRPr sz="2400" b="1">
+              <a:solidFill>
+                <a:srgbClr val="112244"/>
+              </a:solidFill>
+              <a:latin typeface="Cambria" panose="02040503050406030204"/>
+            </a:endParaRPr>
           </a:p>
         </p:txBody>
       </p:sp>
@@ -3219,8 +3244,8 @@
         </p:nvSpPr>
         <p:spPr>
           <a:xfrm>
-            <a:off x="731520" y="914400"/>
-            <a:ext cx="5669280" cy="1280160"/>
+            <a:off x="530352" y="2271395"/>
+            <a:ext cx="4023360" cy="1005840"/>
           </a:xfrm>
           <a:prstGeom prst="rect">
             <a:avLst/>
@@ -3228,72 +3253,50 @@
           <a:noFill/>
         </p:spPr>
         <p:txBody>
-          <a:bodyPr wrap="none">
+          <a:bodyPr wrap="none" anchor="t">
             <a:spAutoFit/>
           </a:bodyPr>
           <a:lstStyle/>
           <a:p>
             <a:pPr algn="l"/>
             <a:r>
-              <a:rPr sz="2800" b="1">
-                <a:solidFill>
-                  <a:srgbClr val="1E293B"/>
-                </a:solidFill>
+              <a:rPr sz="1700" b="0">
+                <a:solidFill>
+                  <a:srgbClr val="23272D"/>
+                </a:solidFill>
+                <a:latin typeface="Aptos"/>
               </a:rPr>
-              <a:t>Flow-Regularized Neural Collaborative Filtering
-for Movie Recommendation</a:t>
-            </a:r>
-          </a:p>
-          <a:p>
-            <a:r>
-              <a:rPr sz="1700">
-                <a:solidFill>
-                  <a:srgbClr val="142244"/>
-                </a:solidFill>
-              </a:rPr>
-              <a:t>Sen Fang  |  Rutgers University</a:t>
-            </a:r>
-          </a:p>
-          <a:p>
-            <a:r>
-              <a:rPr sz="1500">
-                <a:solidFill>
-                  <a:srgbClr val="5F697D"/>
-                </a:solidFill>
-              </a:rPr>
-              <a:t>sf895@scarletmail.rutgers.edu</a:t>
-            </a:r>
-          </a:p>
-          <a:p>
-            <a:r>
-              <a:rPr sz="1500">
-                <a:solidFill>
-                  <a:srgbClr val="C62828"/>
-                </a:solidFill>
-              </a:rPr>
-              <a:t>Project page: fangsen9000.github.io/FlowRanking</a:t>
-            </a:r>
+              <a:t>Sen Fang
+Rutgers University CS550 Final Project
+sf895@scarletmail.rutgers.edu</a:t>
+            </a:r>
+            <a:endParaRPr sz="1700" b="0">
+              <a:solidFill>
+                <a:srgbClr val="23272D"/>
+              </a:solidFill>
+              <a:latin typeface="Aptos"/>
+            </a:endParaRPr>
           </a:p>
         </p:txBody>
       </p:sp>
       <p:pic>
         <p:nvPicPr>
-          <p:cNvPr id="6" name="Picture 5" descr="rating_metrics_bar.png"/>
+          <p:cNvPr id="6" name="Picture 5" descr="topn_metrics_bar.png"/>
           <p:cNvPicPr>
             <a:picLocks noChangeAspect="1"/>
           </p:cNvPicPr>
           <p:nvPr/>
         </p:nvPicPr>
         <p:blipFill>
-          <a:blip r:embed="rId2"/>
+          <a:blip r:embed="rId1"/>
           <a:stretch>
             <a:fillRect/>
           </a:stretch>
         </p:blipFill>
         <p:spPr>
           <a:xfrm>
-            <a:off x="6583680" y="914400"/>
-            <a:ext cx="4754880" cy="2282342"/>
+            <a:off x="5958713" y="1752727"/>
+            <a:ext cx="5394960" cy="3884371"/>
           </a:xfrm>
           <a:prstGeom prst="rect">
             <a:avLst/>
@@ -3308,8 +3311,8 @@
         </p:nvSpPr>
         <p:spPr>
           <a:xfrm>
-            <a:off x="6583680" y="5349240"/>
-            <a:ext cx="4754880" cy="731520"/>
+            <a:off x="6172200" y="5897880"/>
+            <a:ext cx="5303520" cy="201168"/>
           </a:xfrm>
           <a:prstGeom prst="rect">
             <a:avLst/>
@@ -3317,19 +3320,119 @@
           <a:noFill/>
         </p:spPr>
         <p:txBody>
-          <a:bodyPr wrap="none">
+          <a:bodyPr wrap="none" anchor="t">
             <a:spAutoFit/>
           </a:bodyPr>
           <a:lstStyle/>
           <a:p>
-            <a:r>
-              <a:rPr sz="1600" b="1">
-                <a:solidFill>
-                  <a:srgbClr val="1E293B"/>
-                </a:solidFill>
+            <a:pPr algn="ctr"/>
+            <a:r>
+              <a:rPr sz="1100" b="0">
+                <a:solidFill>
+                  <a:srgbClr val="626975"/>
+                </a:solidFill>
+                <a:latin typeface="Aptos"/>
               </a:rPr>
-              <a:t>Four-model benchmark with rating and Top-N evaluation</a:t>
-            </a:r>
+              <a:t>Final Top-10 comparison after fixing the evaluation mismatch.</a:t>
+            </a:r>
+            <a:endParaRPr sz="1100" b="0">
+              <a:solidFill>
+                <a:srgbClr val="626975"/>
+              </a:solidFill>
+              <a:latin typeface="Aptos"/>
+            </a:endParaRPr>
+          </a:p>
+        </p:txBody>
+      </p:sp>
+      <p:sp>
+        <p:nvSpPr>
+          <p:cNvPr id="8" name="TextBox 7"/>
+          <p:cNvSpPr txBox="1"/>
+          <p:nvPr/>
+        </p:nvSpPr>
+        <p:spPr>
+          <a:xfrm>
+            <a:off x="502920" y="5915660"/>
+            <a:ext cx="5120640" cy="288290"/>
+          </a:xfrm>
+          <a:prstGeom prst="rect">
+            <a:avLst/>
+          </a:prstGeom>
+          <a:noFill/>
+        </p:spPr>
+        <p:txBody>
+          <a:bodyPr wrap="none" anchor="t">
+            <a:noAutofit/>
+          </a:bodyPr>
+          <a:lstStyle/>
+          <a:p>
+            <a:pPr algn="l"/>
+            <a:r>
+              <a:rPr sz="1100" b="0">
+                <a:solidFill>
+                  <a:srgbClr val="626975"/>
+                </a:solidFill>
+                <a:latin typeface="Aptos"/>
+              </a:rPr>
+              <a:t>Project page: </a:t>
+            </a:r>
+            <a:r>
+              <a:rPr lang="en-US" sz="1100" b="0">
+                <a:solidFill>
+                  <a:srgbClr val="626975"/>
+                </a:solidFill>
+                <a:latin typeface="Aptos"/>
+                <a:hlinkClick r:id="rId2" tooltip="" action="ppaction://hlinkfile"/>
+              </a:rPr>
+              <a:t>https://fangsen9000.github.io/FlowRanking/</a:t>
+            </a:r>
+            <a:endParaRPr lang="en-US" sz="1100" b="0">
+              <a:solidFill>
+                <a:srgbClr val="626975"/>
+              </a:solidFill>
+              <a:latin typeface="Aptos"/>
+            </a:endParaRPr>
+          </a:p>
+        </p:txBody>
+      </p:sp>
+      <p:sp>
+        <p:nvSpPr>
+          <p:cNvPr id="9" name="TextBox 8"/>
+          <p:cNvSpPr txBox="1"/>
+          <p:nvPr/>
+        </p:nvSpPr>
+        <p:spPr>
+          <a:xfrm>
+            <a:off x="411480" y="6446520"/>
+            <a:ext cx="11155680" cy="182880"/>
+          </a:xfrm>
+          <a:prstGeom prst="rect">
+            <a:avLst/>
+          </a:prstGeom>
+          <a:noFill/>
+        </p:spPr>
+        <p:txBody>
+          <a:bodyPr wrap="none" anchor="t">
+            <a:spAutoFit/>
+          </a:bodyPr>
+          <a:lstStyle/>
+          <a:p>
+            <a:pPr algn="l"/>
+            <a:r>
+              <a:rPr sz="1000" b="0">
+                <a:solidFill>
+                  <a:srgbClr val="626975"/>
+                </a:solidFill>
+                <a:latin typeface="Aptos"/>
+              </a:rPr>
+              <a:t>Flow Ranking | Sen Fang | CS550 Final Project | 1</a:t>
+            </a:r>
+            <a:endParaRPr sz="1000" b="0">
+              <a:solidFill>
+                <a:srgbClr val="626975"/>
+              </a:solidFill>
+              <a:latin typeface="Aptos"/>
+            </a:endParaRPr>
           </a:p>
         </p:txBody>
       </p:sp>
@@ -3342,12 +3445,12 @@
 </file>
 
 <file path=ppt/slides/slide2.xml><?xml version="1.0" encoding="utf-8"?>
-<p:sld xmlns:a="http://schemas.openxmlformats.org/drawingml/2006/main" xmlns:p="http://schemas.openxmlformats.org/presentationml/2006/main" xmlns:r="http://schemas.openxmlformats.org/officeDocument/2006/relationships">
+<p:sld xmlns:a="http://schemas.openxmlformats.org/drawingml/2006/main" xmlns:r="http://schemas.openxmlformats.org/officeDocument/2006/relationships" xmlns:p="http://schemas.openxmlformats.org/presentationml/2006/main">
   <p:cSld>
     <p:bg>
       <p:bgPr>
         <a:solidFill>
-          <a:srgbClr val="F7F4EE"/>
+          <a:srgbClr val="F7F6F3"/>
         </a:solidFill>
         <a:effectLst/>
       </p:bgPr>
@@ -3368,13 +3471,13 @@
         <p:spPr>
           <a:xfrm>
             <a:off x="0" y="0"/>
-            <a:ext cx="12191695" cy="502920"/>
+            <a:ext cx="12191695" cy="475488"/>
           </a:xfrm>
           <a:prstGeom prst="rect">
             <a:avLst/>
           </a:prstGeom>
           <a:solidFill>
-            <a:srgbClr val="142244"/>
+            <a:srgbClr val="112244"/>
           </a:solidFill>
           <a:ln>
             <a:noFill/>
@@ -3410,8 +3513,8 @@
         </p:nvSpPr>
         <p:spPr>
           <a:xfrm>
-            <a:off x="502920" y="164592"/>
-            <a:ext cx="9875520" cy="365760"/>
+            <a:off x="411480" y="64008"/>
+            <a:ext cx="7132320" cy="237744"/>
           </a:xfrm>
           <a:prstGeom prst="rect">
             <a:avLst/>
@@ -3419,7 +3522,7 @@
           <a:noFill/>
         </p:spPr>
         <p:txBody>
-          <a:bodyPr wrap="none">
+          <a:bodyPr wrap="none" anchor="t">
             <a:spAutoFit/>
           </a:bodyPr>
           <a:lstStyle/>
@@ -3430,9 +3533,16 @@
                 <a:solidFill>
                   <a:srgbClr val="FFFFFF"/>
                 </a:solidFill>
+                <a:latin typeface="Cambria" panose="02040503050406030204"/>
               </a:rPr>
-              <a:t>Project Goal</a:t>
-            </a:r>
+              <a:t>Problem Setup</a:t>
+            </a:r>
+            <a:endParaRPr sz="2600" b="1">
+              <a:solidFill>
+                <a:srgbClr val="FFFFFF"/>
+              </a:solidFill>
+              <a:latin typeface="Cambria" panose="02040503050406030204"/>
+            </a:endParaRPr>
           </a:p>
         </p:txBody>
       </p:sp>
@@ -3444,8 +3554,8 @@
         </p:nvSpPr>
         <p:spPr>
           <a:xfrm>
-            <a:off x="548640" y="6400800"/>
-            <a:ext cx="10972800" cy="274320"/>
+            <a:off x="7909560" y="91440"/>
+            <a:ext cx="3840480" cy="182880"/>
           </a:xfrm>
           <a:prstGeom prst="rect">
             <a:avLst/>
@@ -3453,19 +3563,27 @@
           <a:noFill/>
         </p:spPr>
         <p:txBody>
-          <a:bodyPr wrap="none">
+          <a:bodyPr wrap="none" anchor="t">
             <a:spAutoFit/>
           </a:bodyPr>
           <a:lstStyle/>
           <a:p>
-            <a:r>
-              <a:rPr sz="1100">
-                <a:solidFill>
-                  <a:srgbClr val="5F697D"/>
-                </a:solidFill>
+            <a:pPr algn="r"/>
+            <a:r>
+              <a:rPr sz="1100" b="0">
+                <a:solidFill>
+                  <a:srgbClr val="FFFFFF"/>
+                </a:solidFill>
+                <a:latin typeface="Aptos"/>
               </a:rPr>
-              <a:t>Flow Ranking | CS550 Final Project | Sen Fang</a:t>
-            </a:r>
+              <a:t>Why this project matters</a:t>
+            </a:r>
+            <a:endParaRPr sz="1100" b="0">
+              <a:solidFill>
+                <a:srgbClr val="FFFFFF"/>
+              </a:solidFill>
+              <a:latin typeface="Aptos"/>
+            </a:endParaRPr>
           </a:p>
         </p:txBody>
       </p:sp>
@@ -3477,8 +3595,8 @@
         </p:nvSpPr>
         <p:spPr>
           <a:xfrm>
-            <a:off x="731520" y="914400"/>
-            <a:ext cx="5212080" cy="5303520"/>
+            <a:off x="548640" y="868680"/>
+            <a:ext cx="5486400" cy="4308475"/>
           </a:xfrm>
           <a:prstGeom prst="rect">
             <a:avLst/>
@@ -3486,125 +3604,200 @@
           <a:noFill/>
         </p:spPr>
         <p:txBody>
-          <a:bodyPr wrap="square">
+          <a:bodyPr wrap="square" lIns="0" tIns="0" rIns="0" bIns="0" anchor="t">
             <a:spAutoFit/>
           </a:bodyPr>
           <a:lstStyle/>
           <a:p>
-            <a:pPr/>
-            <a:r>
-              <a:rPr sz="2200" b="1">
-                <a:solidFill>
-                  <a:srgbClr val="1E293B"/>
-                </a:solidFill>
+            <a:pPr>
+              <a:spcAft>
+                <a:spcPts val="800"/>
+              </a:spcAft>
+            </a:pPr>
+            <a:r>
+              <a:rPr sz="2000" b="1">
+                <a:solidFill>
+                  <a:srgbClr val="23272D"/>
+                </a:solidFill>
+                <a:latin typeface="Aptos"/>
               </a:rPr>
-              <a:t>Task: explicit-feedback movie recommendation on MovieLens small.</a:t>
-            </a:r>
-          </a:p>
-          <a:p>
-            <a:pPr/>
-            <a:r>
-              <a:rPr sz="1900">
-                <a:solidFill>
-                  <a:srgbClr val="1E293B"/>
-                </a:solidFill>
+              <a:t>Goal:</a:t>
+            </a:r>
+            <a:r>
+              <a:rPr sz="2000">
+                <a:solidFill>
+                  <a:srgbClr val="23272D"/>
+                </a:solidFill>
+                <a:latin typeface="Aptos"/>
               </a:rPr>
-              <a:t>Compare classical baselines and neural recommenders under the same split and evaluation protocol.</a:t>
-            </a:r>
-          </a:p>
-          <a:p>
-            <a:pPr/>
-            <a:r>
-              <a:rPr sz="1900">
-                <a:solidFill>
-                  <a:srgbClr val="1E293B"/>
-                </a:solidFill>
+              <a:t> test whether flow-style regularization improves a neural recommender under a fair comparison.</a:t>
+            </a:r>
+            <a:endParaRPr sz="2000">
+              <a:solidFill>
+                <a:srgbClr val="23272D"/>
+              </a:solidFill>
+              <a:latin typeface="Aptos"/>
+            </a:endParaRPr>
+          </a:p>
+          <a:p>
+            <a:pPr>
+              <a:spcAft>
+                <a:spcPts val="800"/>
+              </a:spcAft>
+            </a:pPr>
+            <a:endParaRPr sz="2000">
+              <a:solidFill>
+                <a:srgbClr val="23272D"/>
+              </a:solidFill>
+              <a:latin typeface="Aptos"/>
+            </a:endParaRPr>
+          </a:p>
+          <a:p>
+            <a:pPr>
+              <a:spcAft>
+                <a:spcPts val="800"/>
+              </a:spcAft>
+            </a:pPr>
+            <a:r>
+              <a:rPr sz="2000" b="1">
+                <a:solidFill>
+                  <a:srgbClr val="23272D"/>
+                </a:solidFill>
+                <a:latin typeface="Aptos"/>
               </a:rPr>
-              <a:t>Main question: does flow regularization improve a standard NeuMF recommender?</a:t>
-            </a:r>
-          </a:p>
-          <a:p>
-            <a:pPr/>
-            <a:r>
-              <a:rPr sz="1900">
-                <a:solidFill>
-                  <a:srgbClr val="1E293B"/>
-                </a:solidFill>
+              <a:t>Dataset:</a:t>
+            </a:r>
+            <a:r>
+              <a:rPr sz="2000">
+                <a:solidFill>
+                  <a:srgbClr val="23272D"/>
+                </a:solidFill>
+                <a:latin typeface="Aptos"/>
               </a:rPr>
-              <a:t>Final benchmark includes ItemCF, BiasedMF, ClassicNeuMF, and FlowNeuMF.</a:t>
-            </a:r>
-          </a:p>
-        </p:txBody>
-      </p:sp>
-      <p:pic>
-        <p:nvPicPr>
-          <p:cNvPr id="6" name="Picture 5" descr="training_loss_curves.png"/>
-          <p:cNvPicPr>
-            <a:picLocks noChangeAspect="1"/>
-          </p:cNvPicPr>
-          <p:nvPr/>
-        </p:nvPicPr>
-        <p:blipFill>
-          <a:blip r:embed="rId2"/>
-          <a:stretch>
-            <a:fillRect/>
-          </a:stretch>
-        </p:blipFill>
-        <p:spPr>
-          <a:xfrm>
-            <a:off x="6309360" y="1051560"/>
-            <a:ext cx="4846320" cy="2818366"/>
-          </a:xfrm>
-          <a:prstGeom prst="rect">
-            <a:avLst/>
-          </a:prstGeom>
-        </p:spPr>
-      </p:pic>
-    </p:spTree>
-  </p:cSld>
-  <p:clrMapOvr>
-    <a:masterClrMapping/>
-  </p:clrMapOvr>
-</p:sld>
-</file>
-
-<file path=ppt/slides/slide3.xml><?xml version="1.0" encoding="utf-8"?>
-<p:sld xmlns:a="http://schemas.openxmlformats.org/drawingml/2006/main" xmlns:p="http://schemas.openxmlformats.org/presentationml/2006/main" xmlns:r="http://schemas.openxmlformats.org/officeDocument/2006/relationships">
-  <p:cSld>
-    <p:bg>
-      <p:bgPr>
-        <a:solidFill>
-          <a:srgbClr val="F7F4EE"/>
-        </a:solidFill>
-        <a:effectLst/>
-      </p:bgPr>
-    </p:bg>
-    <p:spTree>
-      <p:nvGrpSpPr>
-        <p:cNvPr id="1" name=""/>
-        <p:cNvGrpSpPr/>
-        <p:nvPr/>
-      </p:nvGrpSpPr>
-      <p:grpSpPr/>
-      <p:sp>
-        <p:nvSpPr>
-          <p:cNvPr id="2" name="Rectangle 1"/>
+              <a:t> MovieLens small with explicit ratings and per-user 80/20 holdout.</a:t>
+            </a:r>
+            <a:endParaRPr sz="2000">
+              <a:solidFill>
+                <a:srgbClr val="23272D"/>
+              </a:solidFill>
+              <a:latin typeface="Aptos"/>
+            </a:endParaRPr>
+          </a:p>
+          <a:p>
+            <a:pPr>
+              <a:spcAft>
+                <a:spcPts val="800"/>
+              </a:spcAft>
+            </a:pPr>
+            <a:endParaRPr sz="2000">
+              <a:solidFill>
+                <a:srgbClr val="23272D"/>
+              </a:solidFill>
+              <a:latin typeface="Aptos"/>
+            </a:endParaRPr>
+          </a:p>
+          <a:p>
+            <a:pPr>
+              <a:spcAft>
+                <a:spcPts val="800"/>
+              </a:spcAft>
+            </a:pPr>
+            <a:r>
+              <a:rPr sz="2000" b="1">
+                <a:solidFill>
+                  <a:srgbClr val="23272D"/>
+                </a:solidFill>
+                <a:latin typeface="Aptos"/>
+              </a:rPr>
+              <a:t>Tasks:</a:t>
+            </a:r>
+            <a:r>
+              <a:rPr sz="2000">
+                <a:solidFill>
+                  <a:srgbClr val="23272D"/>
+                </a:solidFill>
+                <a:latin typeface="Aptos"/>
+              </a:rPr>
+              <a:t> rating prediction and Top-10 recommendation.</a:t>
+            </a:r>
+            <a:endParaRPr sz="2000">
+              <a:solidFill>
+                <a:srgbClr val="23272D"/>
+              </a:solidFill>
+              <a:latin typeface="Aptos"/>
+            </a:endParaRPr>
+          </a:p>
+          <a:p>
+            <a:pPr>
+              <a:spcAft>
+                <a:spcPts val="800"/>
+              </a:spcAft>
+            </a:pPr>
+            <a:endParaRPr sz="2000">
+              <a:solidFill>
+                <a:srgbClr val="23272D"/>
+              </a:solidFill>
+              <a:latin typeface="Aptos"/>
+            </a:endParaRPr>
+          </a:p>
+          <a:p>
+            <a:pPr>
+              <a:spcAft>
+                <a:spcPts val="800"/>
+              </a:spcAft>
+            </a:pPr>
+            <a:r>
+              <a:rPr sz="2000" b="1">
+                <a:solidFill>
+                  <a:srgbClr val="23272D"/>
+                </a:solidFill>
+                <a:latin typeface="Aptos"/>
+              </a:rPr>
+              <a:t>Metrics:</a:t>
+            </a:r>
+            <a:r>
+              <a:rPr sz="2000">
+                <a:solidFill>
+                  <a:srgbClr val="23272D"/>
+                </a:solidFill>
+                <a:latin typeface="Aptos"/>
+              </a:rPr>
+              <a:t> MAE, RMSE, Precision@10, Recall@10, F-measure@10, and NDCG@10.</a:t>
+            </a:r>
+            <a:endParaRPr sz="2000">
+              <a:solidFill>
+                <a:srgbClr val="23272D"/>
+              </a:solidFill>
+              <a:latin typeface="Aptos"/>
+            </a:endParaRPr>
+          </a:p>
+        </p:txBody>
+      </p:sp>
+      <p:sp>
+        <p:nvSpPr>
+          <p:cNvPr id="6" name="Rounded Rectangle 5"/>
           <p:cNvSpPr/>
-          <p:nvPr/>
-        </p:nvSpPr>
-        <p:spPr>
-          <a:xfrm>
-            <a:off x="0" y="0"/>
-            <a:ext cx="12191695" cy="502920"/>
-          </a:xfrm>
-          <a:prstGeom prst="rect">
+          <p:nvPr>
+            <p:custDataLst>
+              <p:tags r:id="rId1"/>
+            </p:custDataLst>
+          </p:nvPr>
+        </p:nvSpPr>
+        <p:spPr>
+          <a:xfrm>
+            <a:off x="6537960" y="960120"/>
+            <a:ext cx="2286000" cy="1325880"/>
+          </a:xfrm>
+          <a:prstGeom prst="roundRect">
             <a:avLst/>
           </a:prstGeom>
           <a:solidFill>
-            <a:srgbClr val="142244"/>
+            <a:srgbClr val="E5EDF8"/>
           </a:solidFill>
-          <a:ln>
-            <a:noFill/>
+          <a:ln w="12700">
+            <a:solidFill>
+              <a:srgbClr val="112244"/>
+            </a:solidFill>
           </a:ln>
         </p:spPr>
         <p:style>
@@ -3631,14 +3824,18 @@
       </p:sp>
       <p:sp>
         <p:nvSpPr>
-          <p:cNvPr id="3" name="TextBox 2"/>
+          <p:cNvPr id="7" name="TextBox 6"/>
           <p:cNvSpPr txBox="1"/>
-          <p:nvPr/>
-        </p:nvSpPr>
-        <p:spPr>
-          <a:xfrm>
-            <a:off x="502920" y="164592"/>
-            <a:ext cx="9875520" cy="365760"/>
+          <p:nvPr>
+            <p:custDataLst>
+              <p:tags r:id="rId2"/>
+            </p:custDataLst>
+          </p:nvPr>
+        </p:nvSpPr>
+        <p:spPr>
+          <a:xfrm>
+            <a:off x="6665976" y="1033272"/>
+            <a:ext cx="2029968" cy="256032"/>
           </a:xfrm>
           <a:prstGeom prst="rect">
             <a:avLst/>
@@ -3646,33 +3843,44 @@
           <a:noFill/>
         </p:spPr>
         <p:txBody>
-          <a:bodyPr wrap="none">
+          <a:bodyPr wrap="none" anchor="t">
             <a:spAutoFit/>
           </a:bodyPr>
           <a:lstStyle/>
           <a:p>
             <a:pPr algn="l"/>
             <a:r>
-              <a:rPr sz="2600" b="1">
-                <a:solidFill>
-                  <a:srgbClr val="FFFFFF"/>
-                </a:solidFill>
+              <a:rPr sz="1900" b="1">
+                <a:solidFill>
+                  <a:srgbClr val="112244"/>
+                </a:solidFill>
+                <a:latin typeface="Cambria" panose="02040503050406030204"/>
               </a:rPr>
-              <a:t>Method and Training Fixes</a:t>
-            </a:r>
-          </a:p>
-        </p:txBody>
-      </p:sp>
-      <p:sp>
-        <p:nvSpPr>
-          <p:cNvPr id="4" name="TextBox 3"/>
+              <a:t>Ratings</a:t>
+            </a:r>
+            <a:endParaRPr sz="1900" b="1">
+              <a:solidFill>
+                <a:srgbClr val="112244"/>
+              </a:solidFill>
+              <a:latin typeface="Cambria" panose="02040503050406030204"/>
+            </a:endParaRPr>
+          </a:p>
+        </p:txBody>
+      </p:sp>
+      <p:sp>
+        <p:nvSpPr>
+          <p:cNvPr id="8" name="TextBox 7"/>
           <p:cNvSpPr txBox="1"/>
-          <p:nvPr/>
-        </p:nvSpPr>
-        <p:spPr>
-          <a:xfrm>
-            <a:off x="548640" y="6400800"/>
-            <a:ext cx="10972800" cy="274320"/>
+          <p:nvPr>
+            <p:custDataLst>
+              <p:tags r:id="rId3"/>
+            </p:custDataLst>
+          </p:nvPr>
+        </p:nvSpPr>
+        <p:spPr>
+          <a:xfrm>
+            <a:off x="6647688" y="1371600"/>
+            <a:ext cx="2066544" cy="850392"/>
           </a:xfrm>
           <a:prstGeom prst="rect">
             <a:avLst/>
@@ -3680,154 +3888,59 @@
           <a:noFill/>
         </p:spPr>
         <p:txBody>
-          <a:bodyPr wrap="none">
+          <a:bodyPr wrap="square" lIns="0" tIns="0" rIns="0" bIns="0" anchor="t">
             <a:spAutoFit/>
           </a:bodyPr>
           <a:lstStyle/>
           <a:p>
-            <a:r>
-              <a:rPr sz="1100">
-                <a:solidFill>
-                  <a:srgbClr val="5F697D"/>
-                </a:solidFill>
+            <a:pPr>
+              <a:spcAft>
+                <a:spcPts val="800"/>
+              </a:spcAft>
+            </a:pPr>
+            <a:r>
+              <a:rPr sz="1400">
+                <a:solidFill>
+                  <a:srgbClr val="23272D"/>
+                </a:solidFill>
+                <a:latin typeface="Aptos"/>
               </a:rPr>
-              <a:t>Flow Ranking | CS550 Final Project | Sen Fang</a:t>
-            </a:r>
-          </a:p>
-        </p:txBody>
-      </p:sp>
-      <p:sp>
-        <p:nvSpPr>
-          <p:cNvPr id="5" name="TextBox 4"/>
-          <p:cNvSpPr txBox="1"/>
-          <p:nvPr/>
-        </p:nvSpPr>
-        <p:spPr>
-          <a:xfrm>
-            <a:off x="731520" y="914400"/>
-            <a:ext cx="5486400" cy="5303520"/>
-          </a:xfrm>
-          <a:prstGeom prst="rect">
-            <a:avLst/>
-          </a:prstGeom>
-          <a:noFill/>
-        </p:spPr>
-        <p:txBody>
-          <a:bodyPr wrap="none">
-            <a:spAutoFit/>
-          </a:bodyPr>
-          <a:lstStyle/>
-          <a:p>
-            <a:r>
-              <a:rPr sz="1800">
-                <a:solidFill>
-                  <a:srgbClr val="1E293B"/>
-                </a:solidFill>
-              </a:rPr>
-              <a:t>FlowNeuMF keeps the NeuMF backbone but adds conditional flow-matching regularization and endpoint consistency.</a:t>
-            </a:r>
-          </a:p>
-          <a:p>
-            <a:r>
-              <a:rPr sz="1800">
-                <a:solidFill>
-                  <a:srgbClr val="1E293B"/>
-                </a:solidFill>
-              </a:rPr>
-              <a:t>ClassicNeuMF uses the same embedding size, optimizer, and MLP budget without flow terms.</a:t>
-            </a:r>
-          </a:p>
-          <a:p>
-            <a:r>
-              <a:rPr sz="1800">
-                <a:solidFill>
-                  <a:srgbClr val="1E293B"/>
-                </a:solidFill>
-              </a:rPr>
-              <a:t>The key fix was not deeper flow capacity. The real improvement came from adding pairwise ranking loss with negative sampling.</a:t>
-            </a:r>
-          </a:p>
-          <a:p>
-            <a:r>
-              <a:rPr sz="1800">
-                <a:solidFill>
-                  <a:srgbClr val="1E293B"/>
-                </a:solidFill>
-              </a:rPr>
-              <a:t>Long training overfit the ranking objective. Early stopping at 5 epochs worked much better than 60 epochs.</a:t>
-            </a:r>
-          </a:p>
-        </p:txBody>
-      </p:sp>
-      <p:pic>
-        <p:nvPicPr>
-          <p:cNvPr id="6" name="Picture 5" descr="topn_metrics_bar.png"/>
-          <p:cNvPicPr>
-            <a:picLocks noChangeAspect="1"/>
-          </p:cNvPicPr>
-          <p:nvPr/>
-        </p:nvPicPr>
-        <p:blipFill>
-          <a:blip r:embed="rId2"/>
-          <a:stretch>
-            <a:fillRect/>
-          </a:stretch>
-        </p:blipFill>
-        <p:spPr>
-          <a:xfrm>
-            <a:off x="6400800" y="914400"/>
-            <a:ext cx="4663440" cy="3357677"/>
-          </a:xfrm>
-          <a:prstGeom prst="rect">
-            <a:avLst/>
-          </a:prstGeom>
-        </p:spPr>
-      </p:pic>
-    </p:spTree>
-  </p:cSld>
-  <p:clrMapOvr>
-    <a:masterClrMapping/>
-  </p:clrMapOvr>
-</p:sld>
-</file>
-
-<file path=ppt/slides/slide4.xml><?xml version="1.0" encoding="utf-8"?>
-<p:sld xmlns:a="http://schemas.openxmlformats.org/drawingml/2006/main" xmlns:p="http://schemas.openxmlformats.org/presentationml/2006/main" xmlns:r="http://schemas.openxmlformats.org/officeDocument/2006/relationships">
-  <p:cSld>
-    <p:bg>
-      <p:bgPr>
-        <a:solidFill>
-          <a:srgbClr val="F7F4EE"/>
-        </a:solidFill>
-        <a:effectLst/>
-      </p:bgPr>
-    </p:bg>
-    <p:spTree>
-      <p:nvGrpSpPr>
-        <p:cNvPr id="1" name=""/>
-        <p:cNvGrpSpPr/>
-        <p:nvPr/>
-      </p:nvGrpSpPr>
-      <p:grpSpPr/>
-      <p:sp>
-        <p:nvSpPr>
-          <p:cNvPr id="2" name="Rectangle 1"/>
+              <a:t>100,836</a:t>
+            </a:r>
+            <a:endParaRPr sz="1400">
+              <a:solidFill>
+                <a:srgbClr val="23272D"/>
+              </a:solidFill>
+              <a:latin typeface="Aptos"/>
+            </a:endParaRPr>
+          </a:p>
+        </p:txBody>
+      </p:sp>
+      <p:sp>
+        <p:nvSpPr>
+          <p:cNvPr id="9" name="Rounded Rectangle 8"/>
           <p:cNvSpPr/>
-          <p:nvPr/>
-        </p:nvSpPr>
-        <p:spPr>
-          <a:xfrm>
-            <a:off x="0" y="0"/>
-            <a:ext cx="12191695" cy="502920"/>
-          </a:xfrm>
-          <a:prstGeom prst="rect">
+          <p:nvPr>
+            <p:custDataLst>
+              <p:tags r:id="rId4"/>
+            </p:custDataLst>
+          </p:nvPr>
+        </p:nvSpPr>
+        <p:spPr>
+          <a:xfrm>
+            <a:off x="9006840" y="960120"/>
+            <a:ext cx="2286000" cy="1325880"/>
+          </a:xfrm>
+          <a:prstGeom prst="roundRect">
             <a:avLst/>
           </a:prstGeom>
           <a:solidFill>
-            <a:srgbClr val="142244"/>
+            <a:srgbClr val="E5EDF8"/>
           </a:solidFill>
-          <a:ln>
-            <a:noFill/>
+          <a:ln w="12700">
+            <a:solidFill>
+              <a:srgbClr val="112244"/>
+            </a:solidFill>
           </a:ln>
         </p:spPr>
         <p:style>
@@ -3854,14 +3967,18 @@
       </p:sp>
       <p:sp>
         <p:nvSpPr>
-          <p:cNvPr id="3" name="TextBox 2"/>
+          <p:cNvPr id="10" name="TextBox 9"/>
           <p:cNvSpPr txBox="1"/>
-          <p:nvPr/>
-        </p:nvSpPr>
-        <p:spPr>
-          <a:xfrm>
-            <a:off x="502920" y="164592"/>
-            <a:ext cx="9875520" cy="365760"/>
+          <p:nvPr>
+            <p:custDataLst>
+              <p:tags r:id="rId5"/>
+            </p:custDataLst>
+          </p:nvPr>
+        </p:nvSpPr>
+        <p:spPr>
+          <a:xfrm>
+            <a:off x="9134856" y="1033272"/>
+            <a:ext cx="2029968" cy="256032"/>
           </a:xfrm>
           <a:prstGeom prst="rect">
             <a:avLst/>
@@ -3869,33 +3986,44 @@
           <a:noFill/>
         </p:spPr>
         <p:txBody>
-          <a:bodyPr wrap="none">
+          <a:bodyPr wrap="none" anchor="t">
             <a:spAutoFit/>
           </a:bodyPr>
           <a:lstStyle/>
           <a:p>
             <a:pPr algn="l"/>
             <a:r>
-              <a:rPr sz="2600" b="1">
-                <a:solidFill>
-                  <a:srgbClr val="FFFFFF"/>
-                </a:solidFill>
+              <a:rPr sz="1900" b="1">
+                <a:solidFill>
+                  <a:srgbClr val="112244"/>
+                </a:solidFill>
+                <a:latin typeface="Cambria" panose="02040503050406030204"/>
               </a:rPr>
-              <a:t>Best Final Results</a:t>
-            </a:r>
-          </a:p>
-        </p:txBody>
-      </p:sp>
-      <p:sp>
-        <p:nvSpPr>
-          <p:cNvPr id="4" name="TextBox 3"/>
+              <a:t>Users</a:t>
+            </a:r>
+            <a:endParaRPr sz="1900" b="1">
+              <a:solidFill>
+                <a:srgbClr val="112244"/>
+              </a:solidFill>
+              <a:latin typeface="Cambria" panose="02040503050406030204"/>
+            </a:endParaRPr>
+          </a:p>
+        </p:txBody>
+      </p:sp>
+      <p:sp>
+        <p:nvSpPr>
+          <p:cNvPr id="11" name="TextBox 10"/>
           <p:cNvSpPr txBox="1"/>
-          <p:nvPr/>
-        </p:nvSpPr>
-        <p:spPr>
-          <a:xfrm>
-            <a:off x="548640" y="6400800"/>
-            <a:ext cx="10972800" cy="274320"/>
+          <p:nvPr>
+            <p:custDataLst>
+              <p:tags r:id="rId6"/>
+            </p:custDataLst>
+          </p:nvPr>
+        </p:nvSpPr>
+        <p:spPr>
+          <a:xfrm>
+            <a:off x="9116568" y="1371600"/>
+            <a:ext cx="2066544" cy="850392"/>
           </a:xfrm>
           <a:prstGeom prst="rect">
             <a:avLst/>
@@ -3903,75 +4031,58 @@
           <a:noFill/>
         </p:spPr>
         <p:txBody>
-          <a:bodyPr wrap="none">
+          <a:bodyPr wrap="square" lIns="0" tIns="0" rIns="0" bIns="0" anchor="t">
             <a:spAutoFit/>
           </a:bodyPr>
           <a:lstStyle/>
           <a:p>
-            <a:r>
-              <a:rPr sz="1100">
-                <a:solidFill>
-                  <a:srgbClr val="5F697D"/>
-                </a:solidFill>
+            <a:pPr>
+              <a:spcAft>
+                <a:spcPts val="800"/>
+              </a:spcAft>
+            </a:pPr>
+            <a:r>
+              <a:rPr sz="1400">
+                <a:solidFill>
+                  <a:srgbClr val="23272D"/>
+                </a:solidFill>
+                <a:latin typeface="Aptos"/>
               </a:rPr>
-              <a:t>Flow Ranking | CS550 Final Project | Sen Fang</a:t>
-            </a:r>
-          </a:p>
-        </p:txBody>
-      </p:sp>
-      <p:sp>
-        <p:nvSpPr>
-          <p:cNvPr id="5" name="TextBox 4"/>
-          <p:cNvSpPr txBox="1"/>
-          <p:nvPr/>
-        </p:nvSpPr>
-        <p:spPr>
-          <a:xfrm>
-            <a:off x="685800" y="914400"/>
-            <a:ext cx="10972800" cy="914400"/>
-          </a:xfrm>
-          <a:prstGeom prst="rect">
-            <a:avLst/>
-          </a:prstGeom>
-          <a:noFill/>
-        </p:spPr>
-        <p:txBody>
-          <a:bodyPr wrap="none">
-            <a:spAutoFit/>
-          </a:bodyPr>
-          <a:lstStyle/>
-          <a:p>
-            <a:r>
-              <a:rPr sz="1800" b="1">
-                <a:solidFill>
-                  <a:srgbClr val="C62828"/>
-                </a:solidFill>
-              </a:rPr>
-              <a:t>Best reproducible setting: seed=84, epochs=5, ranking_weight=0.4, flow_weight=0.12, consistency_weight=0.4</a:t>
-            </a:r>
-          </a:p>
-        </p:txBody>
-      </p:sp>
-      <p:sp>
-        <p:nvSpPr>
-          <p:cNvPr id="6" name="Rounded Rectangle 5"/>
+              <a:t>610</a:t>
+            </a:r>
+            <a:endParaRPr sz="1400">
+              <a:solidFill>
+                <a:srgbClr val="23272D"/>
+              </a:solidFill>
+              <a:latin typeface="Aptos"/>
+            </a:endParaRPr>
+          </a:p>
+        </p:txBody>
+      </p:sp>
+      <p:sp>
+        <p:nvSpPr>
+          <p:cNvPr id="12" name="Rounded Rectangle 11"/>
           <p:cNvSpPr/>
-          <p:nvPr/>
-        </p:nvSpPr>
-        <p:spPr>
-          <a:xfrm>
-            <a:off x="731520" y="1645920"/>
-            <a:ext cx="2468880" cy="2103120"/>
+          <p:nvPr>
+            <p:custDataLst>
+              <p:tags r:id="rId7"/>
+            </p:custDataLst>
+          </p:nvPr>
+        </p:nvSpPr>
+        <p:spPr>
+          <a:xfrm>
+            <a:off x="6537960" y="2514600"/>
+            <a:ext cx="2286000" cy="1325880"/>
           </a:xfrm>
           <a:prstGeom prst="roundRect">
             <a:avLst/>
           </a:prstGeom>
           <a:solidFill>
-            <a:srgbClr val="FFFFFF"/>
+            <a:srgbClr val="E5EDF8"/>
           </a:solidFill>
-          <a:ln w="15240">
+          <a:ln w="12700">
             <a:solidFill>
-              <a:srgbClr val="142244"/>
+              <a:srgbClr val="112244"/>
             </a:solidFill>
           </a:ln>
         </p:spPr>
@@ -3999,14 +4110,18 @@
       </p:sp>
       <p:sp>
         <p:nvSpPr>
-          <p:cNvPr id="7" name="TextBox 6"/>
+          <p:cNvPr id="13" name="TextBox 12"/>
           <p:cNvSpPr txBox="1"/>
-          <p:nvPr/>
-        </p:nvSpPr>
-        <p:spPr>
-          <a:xfrm>
-            <a:off x="868680" y="1755648"/>
-            <a:ext cx="2194560" cy="1828800"/>
+          <p:nvPr>
+            <p:custDataLst>
+              <p:tags r:id="rId8"/>
+            </p:custDataLst>
+          </p:nvPr>
+        </p:nvSpPr>
+        <p:spPr>
+          <a:xfrm>
+            <a:off x="6665976" y="2587752"/>
+            <a:ext cx="2029968" cy="256032"/>
           </a:xfrm>
           <a:prstGeom prst="rect">
             <a:avLst/>
@@ -4014,72 +4129,103 @@
           <a:noFill/>
         </p:spPr>
         <p:txBody>
-          <a:bodyPr wrap="none">
+          <a:bodyPr wrap="none" anchor="t">
             <a:spAutoFit/>
           </a:bodyPr>
           <a:lstStyle/>
           <a:p>
-            <a:r>
-              <a:rPr sz="2000" b="1">
-                <a:solidFill>
-                  <a:srgbClr val="1E293B"/>
-                </a:solidFill>
+            <a:pPr algn="l"/>
+            <a:r>
+              <a:rPr sz="1900" b="1">
+                <a:solidFill>
+                  <a:srgbClr val="112244"/>
+                </a:solidFill>
+                <a:latin typeface="Cambria" panose="02040503050406030204"/>
               </a:rPr>
-              <a:t>ItemCF</a:t>
-            </a:r>
-          </a:p>
-          <a:p>
-            <a:r>
-              <a:rPr sz="1500">
-                <a:solidFill>
-                  <a:srgbClr val="5F697D"/>
-                </a:solidFill>
+              <a:t>Movies</a:t>
+            </a:r>
+            <a:endParaRPr sz="1900" b="1">
+              <a:solidFill>
+                <a:srgbClr val="112244"/>
+              </a:solidFill>
+              <a:latin typeface="Cambria" panose="02040503050406030204"/>
+            </a:endParaRPr>
+          </a:p>
+        </p:txBody>
+      </p:sp>
+      <p:sp>
+        <p:nvSpPr>
+          <p:cNvPr id="14" name="TextBox 13"/>
+          <p:cNvSpPr txBox="1"/>
+          <p:nvPr>
+            <p:custDataLst>
+              <p:tags r:id="rId9"/>
+            </p:custDataLst>
+          </p:nvPr>
+        </p:nvSpPr>
+        <p:spPr>
+          <a:xfrm>
+            <a:off x="6647688" y="2926080"/>
+            <a:ext cx="2066544" cy="850392"/>
+          </a:xfrm>
+          <a:prstGeom prst="rect">
+            <a:avLst/>
+          </a:prstGeom>
+          <a:noFill/>
+        </p:spPr>
+        <p:txBody>
+          <a:bodyPr wrap="square" lIns="0" tIns="0" rIns="0" bIns="0" anchor="t">
+            <a:spAutoFit/>
+          </a:bodyPr>
+          <a:lstStyle/>
+          <a:p>
+            <a:pPr>
+              <a:spcAft>
+                <a:spcPts val="800"/>
+              </a:spcAft>
+            </a:pPr>
+            <a:r>
+              <a:rPr sz="1400">
+                <a:solidFill>
+                  <a:srgbClr val="23272D"/>
+                </a:solidFill>
+                <a:latin typeface="Aptos"/>
               </a:rPr>
-              <a:t>MAE 0.6578</a:t>
-            </a:r>
-          </a:p>
-          <a:p>
-            <a:r>
-              <a:rPr sz="1500">
-                <a:solidFill>
-                  <a:srgbClr val="5F697D"/>
-                </a:solidFill>
-              </a:rPr>
-              <a:t>RMSE 0.8678</a:t>
-            </a:r>
-          </a:p>
-          <a:p>
-            <a:r>
-              <a:rPr sz="1500">
-                <a:solidFill>
-                  <a:srgbClr val="5F697D"/>
-                </a:solidFill>
-              </a:rPr>
-              <a:t>Best rating predictor</a:t>
-            </a:r>
-          </a:p>
-        </p:txBody>
-      </p:sp>
-      <p:sp>
-        <p:nvSpPr>
-          <p:cNvPr id="8" name="Rounded Rectangle 7"/>
+              <a:t>9,724</a:t>
+            </a:r>
+            <a:endParaRPr sz="1400">
+              <a:solidFill>
+                <a:srgbClr val="23272D"/>
+              </a:solidFill>
+              <a:latin typeface="Aptos"/>
+            </a:endParaRPr>
+          </a:p>
+        </p:txBody>
+      </p:sp>
+      <p:sp>
+        <p:nvSpPr>
+          <p:cNvPr id="15" name="Rounded Rectangle 14"/>
           <p:cNvSpPr/>
-          <p:nvPr/>
-        </p:nvSpPr>
-        <p:spPr>
-          <a:xfrm>
-            <a:off x="3657600" y="1645920"/>
-            <a:ext cx="2468880" cy="2103120"/>
+          <p:nvPr>
+            <p:custDataLst>
+              <p:tags r:id="rId10"/>
+            </p:custDataLst>
+          </p:nvPr>
+        </p:nvSpPr>
+        <p:spPr>
+          <a:xfrm>
+            <a:off x="9006840" y="2514600"/>
+            <a:ext cx="2286000" cy="1325880"/>
           </a:xfrm>
           <a:prstGeom prst="roundRect">
             <a:avLst/>
           </a:prstGeom>
           <a:solidFill>
-            <a:srgbClr val="FFFFFF"/>
+            <a:srgbClr val="E5EDF8"/>
           </a:solidFill>
-          <a:ln w="15240">
+          <a:ln w="12700">
             <a:solidFill>
-              <a:srgbClr val="142244"/>
+              <a:srgbClr val="112244"/>
             </a:solidFill>
           </a:ln>
         </p:spPr>
@@ -4107,14 +4253,18 @@
       </p:sp>
       <p:sp>
         <p:nvSpPr>
-          <p:cNvPr id="9" name="TextBox 8"/>
+          <p:cNvPr id="16" name="TextBox 15"/>
           <p:cNvSpPr txBox="1"/>
-          <p:nvPr/>
-        </p:nvSpPr>
-        <p:spPr>
-          <a:xfrm>
-            <a:off x="3794760" y="1755648"/>
-            <a:ext cx="2194560" cy="1828800"/>
+          <p:nvPr>
+            <p:custDataLst>
+              <p:tags r:id="rId11"/>
+            </p:custDataLst>
+          </p:nvPr>
+        </p:nvSpPr>
+        <p:spPr>
+          <a:xfrm>
+            <a:off x="9134856" y="2587752"/>
+            <a:ext cx="2029968" cy="256032"/>
           </a:xfrm>
           <a:prstGeom prst="rect">
             <a:avLst/>
@@ -4122,73 +4272,189 @@
           <a:noFill/>
         </p:spPr>
         <p:txBody>
-          <a:bodyPr wrap="none">
+          <a:bodyPr wrap="none" anchor="t">
             <a:spAutoFit/>
           </a:bodyPr>
           <a:lstStyle/>
           <a:p>
-            <a:r>
-              <a:rPr sz="2000" b="1">
-                <a:solidFill>
-                  <a:srgbClr val="1E293B"/>
-                </a:solidFill>
+            <a:pPr algn="l"/>
+            <a:r>
+              <a:rPr sz="1900" b="1">
+                <a:solidFill>
+                  <a:srgbClr val="112244"/>
+                </a:solidFill>
+                <a:latin typeface="Cambria" panose="02040503050406030204"/>
               </a:rPr>
-              <a:t>BiasedMF</a:t>
-            </a:r>
-          </a:p>
-          <a:p>
-            <a:r>
-              <a:rPr sz="1500">
-                <a:solidFill>
-                  <a:srgbClr val="5F697D"/>
-                </a:solidFill>
+              <a:t>Avg Rating</a:t>
+            </a:r>
+            <a:endParaRPr sz="1900" b="1">
+              <a:solidFill>
+                <a:srgbClr val="112244"/>
+              </a:solidFill>
+              <a:latin typeface="Cambria" panose="02040503050406030204"/>
+            </a:endParaRPr>
+          </a:p>
+        </p:txBody>
+      </p:sp>
+      <p:sp>
+        <p:nvSpPr>
+          <p:cNvPr id="17" name="TextBox 16"/>
+          <p:cNvSpPr txBox="1"/>
+          <p:nvPr>
+            <p:custDataLst>
+              <p:tags r:id="rId12"/>
+            </p:custDataLst>
+          </p:nvPr>
+        </p:nvSpPr>
+        <p:spPr>
+          <a:xfrm>
+            <a:off x="9116568" y="2926080"/>
+            <a:ext cx="2066544" cy="850392"/>
+          </a:xfrm>
+          <a:prstGeom prst="rect">
+            <a:avLst/>
+          </a:prstGeom>
+          <a:noFill/>
+        </p:spPr>
+        <p:txBody>
+          <a:bodyPr wrap="square" lIns="0" tIns="0" rIns="0" bIns="0" anchor="t">
+            <a:spAutoFit/>
+          </a:bodyPr>
+          <a:lstStyle/>
+          <a:p>
+            <a:pPr>
+              <a:spcAft>
+                <a:spcPts val="800"/>
+              </a:spcAft>
+            </a:pPr>
+            <a:r>
+              <a:rPr sz="1400">
+                <a:solidFill>
+                  <a:srgbClr val="23272D"/>
+                </a:solidFill>
+                <a:latin typeface="Aptos"/>
               </a:rPr>
-              <a:t>P@10 0.1408</a:t>
-            </a:r>
-          </a:p>
-          <a:p>
-            <a:r>
-              <a:rPr sz="1500">
-                <a:solidFill>
-                  <a:srgbClr val="5F697D"/>
-                </a:solidFill>
+              <a:t>3.50</a:t>
+            </a:r>
+            <a:endParaRPr sz="1400">
+              <a:solidFill>
+                <a:srgbClr val="23272D"/>
+              </a:solidFill>
+              <a:latin typeface="Aptos"/>
+            </a:endParaRPr>
+          </a:p>
+        </p:txBody>
+      </p:sp>
+      <p:pic>
+        <p:nvPicPr>
+          <p:cNvPr id="18" name="Picture 17" descr="rating_metrics_bar.png"/>
+          <p:cNvPicPr>
+            <a:picLocks noChangeAspect="1"/>
+          </p:cNvPicPr>
+          <p:nvPr/>
+        </p:nvPicPr>
+        <p:blipFill>
+          <a:blip r:embed="rId13"/>
+          <a:stretch>
+            <a:fillRect/>
+          </a:stretch>
+        </p:blipFill>
+        <p:spPr>
+          <a:xfrm>
+            <a:off x="6035040" y="3989070"/>
+            <a:ext cx="5257800" cy="2523744"/>
+          </a:xfrm>
+          <a:prstGeom prst="rect">
+            <a:avLst/>
+          </a:prstGeom>
+        </p:spPr>
+      </p:pic>
+      <p:sp>
+        <p:nvSpPr>
+          <p:cNvPr id="19" name="TextBox 18"/>
+          <p:cNvSpPr txBox="1"/>
+          <p:nvPr/>
+        </p:nvSpPr>
+        <p:spPr>
+          <a:xfrm>
+            <a:off x="411480" y="6446520"/>
+            <a:ext cx="11155680" cy="182880"/>
+          </a:xfrm>
+          <a:prstGeom prst="rect">
+            <a:avLst/>
+          </a:prstGeom>
+          <a:noFill/>
+        </p:spPr>
+        <p:txBody>
+          <a:bodyPr wrap="none" anchor="t">
+            <a:spAutoFit/>
+          </a:bodyPr>
+          <a:lstStyle/>
+          <a:p>
+            <a:pPr algn="l"/>
+            <a:r>
+              <a:rPr sz="1000" b="0">
+                <a:solidFill>
+                  <a:srgbClr val="626975"/>
+                </a:solidFill>
+                <a:latin typeface="Aptos"/>
               </a:rPr>
-              <a:t>NDCG@10 0.1614</a:t>
-            </a:r>
-          </a:p>
-          <a:p>
-            <a:r>
-              <a:rPr sz="1500">
-                <a:solidFill>
-                  <a:srgbClr val="5F697D"/>
-                </a:solidFill>
-              </a:rPr>
-              <a:t>Best overall Top-N</a:t>
-            </a:r>
-          </a:p>
-        </p:txBody>
-      </p:sp>
-      <p:sp>
-        <p:nvSpPr>
-          <p:cNvPr id="10" name="Rounded Rectangle 9"/>
+              <a:t>Flow Ranking | Sen Fang | CS550 Final Project | 2</a:t>
+            </a:r>
+            <a:endParaRPr sz="1000" b="0">
+              <a:solidFill>
+                <a:srgbClr val="626975"/>
+              </a:solidFill>
+              <a:latin typeface="Aptos"/>
+            </a:endParaRPr>
+          </a:p>
+        </p:txBody>
+      </p:sp>
+    </p:spTree>
+  </p:cSld>
+  <p:clrMapOvr>
+    <a:masterClrMapping/>
+  </p:clrMapOvr>
+</p:sld>
+</file>
+
+<file path=ppt/slides/slide3.xml><?xml version="1.0" encoding="utf-8"?>
+<p:sld xmlns:a="http://schemas.openxmlformats.org/drawingml/2006/main" xmlns:r="http://schemas.openxmlformats.org/officeDocument/2006/relationships" xmlns:p="http://schemas.openxmlformats.org/presentationml/2006/main">
+  <p:cSld>
+    <p:bg>
+      <p:bgPr>
+        <a:solidFill>
+          <a:srgbClr val="F7F6F3"/>
+        </a:solidFill>
+        <a:effectLst/>
+      </p:bgPr>
+    </p:bg>
+    <p:spTree>
+      <p:nvGrpSpPr>
+        <p:cNvPr id="1" name=""/>
+        <p:cNvGrpSpPr/>
+        <p:nvPr/>
+      </p:nvGrpSpPr>
+      <p:grpSpPr/>
+      <p:sp>
+        <p:nvSpPr>
+          <p:cNvPr id="2" name="Rectangle 1"/>
           <p:cNvSpPr/>
           <p:nvPr/>
         </p:nvSpPr>
         <p:spPr>
           <a:xfrm>
-            <a:off x="6583680" y="1645920"/>
-            <a:ext cx="2468880" cy="2103120"/>
-          </a:xfrm>
-          <a:prstGeom prst="roundRect">
+            <a:off x="0" y="0"/>
+            <a:ext cx="12191695" cy="475488"/>
+          </a:xfrm>
+          <a:prstGeom prst="rect">
             <a:avLst/>
           </a:prstGeom>
           <a:solidFill>
-            <a:srgbClr val="FFFFFF"/>
+            <a:srgbClr val="112244"/>
           </a:solidFill>
-          <a:ln w="15240">
-            <a:solidFill>
-              <a:srgbClr val="142244"/>
-            </a:solidFill>
+          <a:ln>
+            <a:noFill/>
           </a:ln>
         </p:spPr>
         <p:style>
@@ -4215,14 +4481,14 @@
       </p:sp>
       <p:sp>
         <p:nvSpPr>
-          <p:cNvPr id="11" name="TextBox 10"/>
+          <p:cNvPr id="3" name="TextBox 2"/>
           <p:cNvSpPr txBox="1"/>
           <p:nvPr/>
         </p:nvSpPr>
         <p:spPr>
           <a:xfrm>
-            <a:off x="6720840" y="1755648"/>
-            <a:ext cx="2194560" cy="1828800"/>
+            <a:off x="411480" y="64008"/>
+            <a:ext cx="7132320" cy="237744"/>
           </a:xfrm>
           <a:prstGeom prst="rect">
             <a:avLst/>
@@ -4230,72 +4496,91 @@
           <a:noFill/>
         </p:spPr>
         <p:txBody>
-          <a:bodyPr wrap="none">
+          <a:bodyPr wrap="none" anchor="t">
             <a:spAutoFit/>
           </a:bodyPr>
           <a:lstStyle/>
           <a:p>
-            <a:r>
-              <a:rPr sz="2000" b="1">
-                <a:solidFill>
-                  <a:srgbClr val="1E293B"/>
-                </a:solidFill>
+            <a:pPr algn="l"/>
+            <a:r>
+              <a:rPr sz="2600" b="1">
+                <a:solidFill>
+                  <a:srgbClr val="FFFFFF"/>
+                </a:solidFill>
+                <a:latin typeface="Cambria" panose="02040503050406030204"/>
               </a:rPr>
-              <a:t>ClassicNeuMF</a:t>
-            </a:r>
-          </a:p>
-          <a:p>
-            <a:r>
-              <a:rPr sz="1500">
-                <a:solidFill>
-                  <a:srgbClr val="5F697D"/>
-                </a:solidFill>
+              <a:t>Compared Methods</a:t>
+            </a:r>
+            <a:endParaRPr sz="2600" b="1">
+              <a:solidFill>
+                <a:srgbClr val="FFFFFF"/>
+              </a:solidFill>
+              <a:latin typeface="Cambria" panose="02040503050406030204"/>
+            </a:endParaRPr>
+          </a:p>
+        </p:txBody>
+      </p:sp>
+      <p:sp>
+        <p:nvSpPr>
+          <p:cNvPr id="4" name="TextBox 3"/>
+          <p:cNvSpPr txBox="1"/>
+          <p:nvPr/>
+        </p:nvSpPr>
+        <p:spPr>
+          <a:xfrm>
+            <a:off x="7909560" y="91440"/>
+            <a:ext cx="3840480" cy="182880"/>
+          </a:xfrm>
+          <a:prstGeom prst="rect">
+            <a:avLst/>
+          </a:prstGeom>
+          <a:noFill/>
+        </p:spPr>
+        <p:txBody>
+          <a:bodyPr wrap="none" anchor="t">
+            <a:spAutoFit/>
+          </a:bodyPr>
+          <a:lstStyle/>
+          <a:p>
+            <a:pPr algn="r"/>
+            <a:r>
+              <a:rPr sz="1100" b="0">
+                <a:solidFill>
+                  <a:srgbClr val="FFFFFF"/>
+                </a:solidFill>
+                <a:latin typeface="Aptos"/>
               </a:rPr>
-              <a:t>P@10 0.1084</a:t>
-            </a:r>
-          </a:p>
-          <a:p>
-            <a:r>
-              <a:rPr sz="1500">
-                <a:solidFill>
-                  <a:srgbClr val="5F697D"/>
-                </a:solidFill>
-              </a:rPr>
-              <a:t>NDCG@10 0.1204</a:t>
-            </a:r>
-          </a:p>
-          <a:p>
-            <a:r>
-              <a:rPr sz="1500">
-                <a:solidFill>
-                  <a:srgbClr val="5F697D"/>
-                </a:solidFill>
-              </a:rPr>
-              <a:t>Strong neural baseline</a:t>
-            </a:r>
-          </a:p>
-        </p:txBody>
-      </p:sp>
-      <p:sp>
-        <p:nvSpPr>
-          <p:cNvPr id="12" name="Rounded Rectangle 11"/>
+              <a:t>From classical CF to the proposed model</a:t>
+            </a:r>
+            <a:endParaRPr sz="1100" b="0">
+              <a:solidFill>
+                <a:srgbClr val="FFFFFF"/>
+              </a:solidFill>
+              <a:latin typeface="Aptos"/>
+            </a:endParaRPr>
+          </a:p>
+        </p:txBody>
+      </p:sp>
+      <p:sp>
+        <p:nvSpPr>
+          <p:cNvPr id="5" name="Rounded Rectangle 4"/>
           <p:cNvSpPr/>
           <p:nvPr/>
         </p:nvSpPr>
         <p:spPr>
           <a:xfrm>
-            <a:off x="9509760" y="1645920"/>
-            <a:ext cx="2468880" cy="2103120"/>
+            <a:off x="457200" y="914400"/>
+            <a:ext cx="2743200" cy="1828800"/>
           </a:xfrm>
           <a:prstGeom prst="roundRect">
             <a:avLst/>
           </a:prstGeom>
           <a:solidFill>
-            <a:srgbClr val="FFFFFF"/>
+            <a:srgbClr val="E5EDF8"/>
           </a:solidFill>
-          <a:ln w="27940">
+          <a:ln w="12700">
             <a:solidFill>
-              <a:srgbClr val="C62828"/>
+              <a:srgbClr val="112244"/>
             </a:solidFill>
           </a:ln>
         </p:spPr>
@@ -4323,14 +4608,14 @@
       </p:sp>
       <p:sp>
         <p:nvSpPr>
-          <p:cNvPr id="13" name="TextBox 12"/>
+          <p:cNvPr id="6" name="TextBox 5"/>
           <p:cNvSpPr txBox="1"/>
           <p:nvPr/>
         </p:nvSpPr>
         <p:spPr>
           <a:xfrm>
-            <a:off x="9646920" y="1755648"/>
-            <a:ext cx="2194560" cy="1828800"/>
+            <a:off x="585216" y="987552"/>
+            <a:ext cx="2487168" cy="256032"/>
           </a:xfrm>
           <a:prstGeom prst="rect">
             <a:avLst/>
@@ -4338,169 +4623,118 @@
           <a:noFill/>
         </p:spPr>
         <p:txBody>
-          <a:bodyPr wrap="none">
+          <a:bodyPr wrap="none" anchor="t">
             <a:spAutoFit/>
           </a:bodyPr>
           <a:lstStyle/>
           <a:p>
-            <a:r>
-              <a:rPr sz="2000" b="1">
-                <a:solidFill>
-                  <a:srgbClr val="1E293B"/>
-                </a:solidFill>
+            <a:pPr algn="l"/>
+            <a:r>
+              <a:rPr sz="1900" b="1">
+                <a:solidFill>
+                  <a:srgbClr val="112244"/>
+                </a:solidFill>
+                <a:latin typeface="Cambria" panose="02040503050406030204"/>
               </a:rPr>
-              <a:t>FlowNeuMF</a:t>
-            </a:r>
-          </a:p>
-          <a:p>
-            <a:r>
-              <a:rPr sz="1500">
-                <a:solidFill>
-                  <a:srgbClr val="5F697D"/>
-                </a:solidFill>
-              </a:rPr>
-              <a:t>P@10 0.1164</a:t>
-            </a:r>
-          </a:p>
-          <a:p>
-            <a:r>
-              <a:rPr sz="1500">
-                <a:solidFill>
-                  <a:srgbClr val="5F697D"/>
-                </a:solidFill>
-              </a:rPr>
-              <a:t>NDCG@10 0.1334</a:t>
-            </a:r>
-          </a:p>
-          <a:p>
-            <a:r>
-              <a:rPr sz="1500">
-                <a:solidFill>
-                  <a:srgbClr val="5F697D"/>
-                </a:solidFill>
-              </a:rPr>
-              <a:t>Best neural ranking model</a:t>
-            </a:r>
-          </a:p>
-        </p:txBody>
-      </p:sp>
-      <p:pic>
-        <p:nvPicPr>
-          <p:cNvPr id="14" name="Picture 13" descr="precision_at_10.png"/>
-          <p:cNvPicPr>
-            <a:picLocks noChangeAspect="1"/>
-          </p:cNvPicPr>
+              <a:t>ItemCF</a:t>
+            </a:r>
+            <a:endParaRPr sz="1900" b="1">
+              <a:solidFill>
+                <a:srgbClr val="112244"/>
+              </a:solidFill>
+              <a:latin typeface="Cambria" panose="02040503050406030204"/>
+            </a:endParaRPr>
+          </a:p>
+        </p:txBody>
+      </p:sp>
+      <p:sp>
+        <p:nvSpPr>
+          <p:cNvPr id="7" name="TextBox 6"/>
+          <p:cNvSpPr txBox="1"/>
           <p:nvPr/>
-        </p:nvPicPr>
-        <p:blipFill>
-          <a:blip r:embed="rId2"/>
-          <a:stretch>
-            <a:fillRect/>
-          </a:stretch>
-        </p:blipFill>
-        <p:spPr>
-          <a:xfrm>
-            <a:off x="914400" y="4114800"/>
-            <a:ext cx="3291840" cy="2116183"/>
+        </p:nvSpPr>
+        <p:spPr>
+          <a:xfrm>
+            <a:off x="566928" y="1325880"/>
+            <a:ext cx="2523744" cy="1353312"/>
           </a:xfrm>
           <a:prstGeom prst="rect">
             <a:avLst/>
           </a:prstGeom>
-        </p:spPr>
-      </p:pic>
-      <p:pic>
-        <p:nvPicPr>
-          <p:cNvPr id="15" name="Picture 14" descr="ndcg_at_10.png"/>
-          <p:cNvPicPr>
-            <a:picLocks noChangeAspect="1"/>
-          </p:cNvPicPr>
-          <p:nvPr/>
-        </p:nvPicPr>
-        <p:blipFill>
-          <a:blip r:embed="rId3"/>
-          <a:stretch>
-            <a:fillRect/>
-          </a:stretch>
-        </p:blipFill>
-        <p:spPr>
-          <a:xfrm>
-            <a:off x="4572000" y="4114800"/>
-            <a:ext cx="3291840" cy="2116183"/>
-          </a:xfrm>
-          <a:prstGeom prst="rect">
-            <a:avLst/>
-          </a:prstGeom>
-        </p:spPr>
-      </p:pic>
-      <p:pic>
-        <p:nvPicPr>
-          <p:cNvPr id="16" name="Picture 15" descr="rmse.png"/>
-          <p:cNvPicPr>
-            <a:picLocks noChangeAspect="1"/>
-          </p:cNvPicPr>
-          <p:nvPr/>
-        </p:nvPicPr>
-        <p:blipFill>
-          <a:blip r:embed="rId4"/>
-          <a:stretch>
-            <a:fillRect/>
-          </a:stretch>
-        </p:blipFill>
-        <p:spPr>
-          <a:xfrm>
-            <a:off x="8229600" y="4114800"/>
-            <a:ext cx="3291840" cy="2116183"/>
-          </a:xfrm>
-          <a:prstGeom prst="rect">
-            <a:avLst/>
-          </a:prstGeom>
-        </p:spPr>
-      </p:pic>
-    </p:spTree>
-  </p:cSld>
-  <p:clrMapOvr>
-    <a:masterClrMapping/>
-  </p:clrMapOvr>
-</p:sld>
-</file>
-
-<file path=ppt/slides/slide5.xml><?xml version="1.0" encoding="utf-8"?>
-<p:sld xmlns:a="http://schemas.openxmlformats.org/drawingml/2006/main" xmlns:p="http://schemas.openxmlformats.org/presentationml/2006/main" xmlns:r="http://schemas.openxmlformats.org/officeDocument/2006/relationships">
-  <p:cSld>
-    <p:bg>
-      <p:bgPr>
-        <a:solidFill>
-          <a:srgbClr val="F7F4EE"/>
-        </a:solidFill>
-        <a:effectLst/>
-      </p:bgPr>
-    </p:bg>
-    <p:spTree>
-      <p:nvGrpSpPr>
-        <p:cNvPr id="1" name=""/>
-        <p:cNvGrpSpPr/>
-        <p:nvPr/>
-      </p:nvGrpSpPr>
-      <p:grpSpPr/>
-      <p:sp>
-        <p:nvSpPr>
-          <p:cNvPr id="2" name="Rectangle 1"/>
+          <a:noFill/>
+        </p:spPr>
+        <p:txBody>
+          <a:bodyPr wrap="square" lIns="0" tIns="0" rIns="0" bIns="0" anchor="t">
+            <a:spAutoFit/>
+          </a:bodyPr>
+          <a:lstStyle/>
+          <a:p>
+            <a:pPr>
+              <a:spcAft>
+                <a:spcPts val="800"/>
+              </a:spcAft>
+            </a:pPr>
+            <a:r>
+              <a:rPr sz="1400">
+                <a:solidFill>
+                  <a:srgbClr val="23272D"/>
+                </a:solidFill>
+                <a:latin typeface="Aptos"/>
+              </a:rPr>
+              <a:t>Item-item cosine similarity.</a:t>
+            </a:r>
+            <a:endParaRPr sz="1400">
+              <a:solidFill>
+                <a:srgbClr val="23272D"/>
+              </a:solidFill>
+              <a:latin typeface="Aptos"/>
+            </a:endParaRPr>
+          </a:p>
+          <a:p>
+            <a:pPr>
+              <a:spcAft>
+                <a:spcPts val="800"/>
+              </a:spcAft>
+            </a:pPr>
+            <a:r>
+              <a:rPr sz="1400">
+                <a:solidFill>
+                  <a:srgbClr val="23272D"/>
+                </a:solidFill>
+                <a:latin typeface="Aptos"/>
+              </a:rPr>
+              <a:t>Strong classical baseline for explicit ratings.</a:t>
+            </a:r>
+            <a:endParaRPr sz="1400">
+              <a:solidFill>
+                <a:srgbClr val="23272D"/>
+              </a:solidFill>
+              <a:latin typeface="Aptos"/>
+            </a:endParaRPr>
+          </a:p>
+        </p:txBody>
+      </p:sp>
+      <p:sp>
+        <p:nvSpPr>
+          <p:cNvPr id="8" name="Rounded Rectangle 7"/>
           <p:cNvSpPr/>
           <p:nvPr/>
         </p:nvSpPr>
         <p:spPr>
           <a:xfrm>
-            <a:off x="0" y="0"/>
-            <a:ext cx="12191695" cy="502920"/>
-          </a:xfrm>
-          <a:prstGeom prst="rect">
+            <a:off x="3337560" y="914400"/>
+            <a:ext cx="2743200" cy="1828800"/>
+          </a:xfrm>
+          <a:prstGeom prst="roundRect">
             <a:avLst/>
           </a:prstGeom>
           <a:solidFill>
-            <a:srgbClr val="142244"/>
+            <a:srgbClr val="E5EDF8"/>
           </a:solidFill>
-          <a:ln>
-            <a:noFill/>
+          <a:ln w="12700">
+            <a:solidFill>
+              <a:srgbClr val="112244"/>
+            </a:solidFill>
           </a:ln>
         </p:spPr>
         <p:style>
@@ -4527,14 +4761,14 @@
       </p:sp>
       <p:sp>
         <p:nvSpPr>
-          <p:cNvPr id="3" name="TextBox 2"/>
+          <p:cNvPr id="9" name="TextBox 8"/>
           <p:cNvSpPr txBox="1"/>
           <p:nvPr/>
         </p:nvSpPr>
         <p:spPr>
           <a:xfrm>
-            <a:off x="502920" y="164592"/>
-            <a:ext cx="9875520" cy="365760"/>
+            <a:off x="3465576" y="987552"/>
+            <a:ext cx="2487168" cy="256032"/>
           </a:xfrm>
           <a:prstGeom prst="rect">
             <a:avLst/>
@@ -4542,33 +4776,40 @@
           <a:noFill/>
         </p:spPr>
         <p:txBody>
-          <a:bodyPr wrap="none">
+          <a:bodyPr wrap="none" anchor="t">
             <a:spAutoFit/>
           </a:bodyPr>
           <a:lstStyle/>
           <a:p>
             <a:pPr algn="l"/>
             <a:r>
-              <a:rPr sz="2600" b="1">
-                <a:solidFill>
-                  <a:srgbClr val="FFFFFF"/>
-                </a:solidFill>
+              <a:rPr sz="1900" b="1">
+                <a:solidFill>
+                  <a:srgbClr val="112244"/>
+                </a:solidFill>
+                <a:latin typeface="Cambria" panose="02040503050406030204"/>
               </a:rPr>
-              <a:t>Interpretation</a:t>
-            </a:r>
-          </a:p>
-        </p:txBody>
-      </p:sp>
-      <p:sp>
-        <p:nvSpPr>
-          <p:cNvPr id="4" name="TextBox 3"/>
+              <a:t>BiasedMF</a:t>
+            </a:r>
+            <a:endParaRPr sz="1900" b="1">
+              <a:solidFill>
+                <a:srgbClr val="112244"/>
+              </a:solidFill>
+              <a:latin typeface="Cambria" panose="02040503050406030204"/>
+            </a:endParaRPr>
+          </a:p>
+        </p:txBody>
+      </p:sp>
+      <p:sp>
+        <p:nvSpPr>
+          <p:cNvPr id="10" name="TextBox 9"/>
           <p:cNvSpPr txBox="1"/>
           <p:nvPr/>
         </p:nvSpPr>
         <p:spPr>
           <a:xfrm>
-            <a:off x="548640" y="6400800"/>
-            <a:ext cx="10972800" cy="274320"/>
+            <a:off x="3447288" y="1325880"/>
+            <a:ext cx="2523744" cy="1353312"/>
           </a:xfrm>
           <a:prstGeom prst="rect">
             <a:avLst/>
@@ -4576,178 +4817,77 @@
           <a:noFill/>
         </p:spPr>
         <p:txBody>
-          <a:bodyPr wrap="none">
+          <a:bodyPr wrap="square" lIns="0" tIns="0" rIns="0" bIns="0" anchor="t">
             <a:spAutoFit/>
           </a:bodyPr>
           <a:lstStyle/>
           <a:p>
-            <a:r>
-              <a:rPr sz="1100">
-                <a:solidFill>
-                  <a:srgbClr val="5F697D"/>
-                </a:solidFill>
+            <a:pPr>
+              <a:spcAft>
+                <a:spcPts val="800"/>
+              </a:spcAft>
+            </a:pPr>
+            <a:r>
+              <a:rPr sz="1400">
+                <a:solidFill>
+                  <a:srgbClr val="23272D"/>
+                </a:solidFill>
+                <a:latin typeface="Aptos"/>
               </a:rPr>
-              <a:t>Flow Ranking | CS550 Final Project | Sen Fang</a:t>
-            </a:r>
-          </a:p>
-        </p:txBody>
-      </p:sp>
-      <p:sp>
-        <p:nvSpPr>
-          <p:cNvPr id="5" name="TextBox 4"/>
-          <p:cNvSpPr txBox="1"/>
-          <p:nvPr/>
-        </p:nvSpPr>
-        <p:spPr>
-          <a:xfrm>
-            <a:off x="731520" y="914400"/>
-            <a:ext cx="5669280" cy="5394960"/>
-          </a:xfrm>
-          <a:prstGeom prst="rect">
-            <a:avLst/>
-          </a:prstGeom>
-          <a:noFill/>
-        </p:spPr>
-        <p:txBody>
-          <a:bodyPr wrap="none">
-            <a:spAutoFit/>
-          </a:bodyPr>
-          <a:lstStyle/>
-          <a:p>
-            <a:r>
-              <a:rPr sz="2000" b="1">
-                <a:solidFill>
-                  <a:srgbClr val="1E293B"/>
-                </a:solidFill>
+              <a:t>Matrix factorization with user/item bias terms.</a:t>
+            </a:r>
+            <a:endParaRPr sz="1400">
+              <a:solidFill>
+                <a:srgbClr val="23272D"/>
+              </a:solidFill>
+              <a:latin typeface="Aptos"/>
+            </a:endParaRPr>
+          </a:p>
+          <a:p>
+            <a:pPr>
+              <a:spcAft>
+                <a:spcPts val="800"/>
+              </a:spcAft>
+            </a:pPr>
+            <a:r>
+              <a:rPr sz="1400">
+                <a:solidFill>
+                  <a:srgbClr val="23272D"/>
+                </a:solidFill>
+                <a:latin typeface="Aptos"/>
               </a:rPr>
-              <a:t>Flow regularization alone was not enough.</a:t>
-            </a:r>
-          </a:p>
-          <a:p>
-            <a:r>
-              <a:rPr sz="1800">
-                <a:solidFill>
-                  <a:srgbClr val="1E293B"/>
-                </a:solidFill>
-              </a:rPr>
-              <a:t>Ranking-aware training was the real turning point.</a:t>
-            </a:r>
-          </a:p>
-          <a:p>
-            <a:r>
-              <a:rPr sz="1800">
-                <a:solidFill>
-                  <a:srgbClr val="1E293B"/>
-                </a:solidFill>
-              </a:rPr>
-              <a:t>With the revised objective, FlowNeuMF beat ClassicNeuMF on all Top-N metrics.</a:t>
-            </a:r>
-          </a:p>
-          <a:p>
-            <a:r>
-              <a:rPr sz="1800">
-                <a:solidFill>
-                  <a:srgbClr val="1E293B"/>
-                </a:solidFill>
-              </a:rPr>
-              <a:t>BiasedMF still remained the strongest classical baseline, so the final claim is competitive improvement rather than overall dominance.</a:t>
-            </a:r>
-          </a:p>
-        </p:txBody>
-      </p:sp>
-      <p:pic>
-        <p:nvPicPr>
-          <p:cNvPr id="6" name="Picture 5" descr="mae.png"/>
-          <p:cNvPicPr>
-            <a:picLocks noChangeAspect="1"/>
-          </p:cNvPicPr>
-          <p:nvPr/>
-        </p:nvPicPr>
-        <p:blipFill>
-          <a:blip r:embed="rId2"/>
-          <a:stretch>
-            <a:fillRect/>
-          </a:stretch>
-        </p:blipFill>
-        <p:spPr>
-          <a:xfrm>
-            <a:off x="6492240" y="1005840"/>
-            <a:ext cx="4572000" cy="2939143"/>
-          </a:xfrm>
-          <a:prstGeom prst="rect">
-            <a:avLst/>
-          </a:prstGeom>
-        </p:spPr>
-      </p:pic>
-      <p:pic>
-        <p:nvPicPr>
-          <p:cNvPr id="7" name="Picture 6" descr="f_measure_at_10.png"/>
-          <p:cNvPicPr>
-            <a:picLocks noChangeAspect="1"/>
-          </p:cNvPicPr>
-          <p:nvPr/>
-        </p:nvPicPr>
-        <p:blipFill>
-          <a:blip r:embed="rId3"/>
-          <a:stretch>
-            <a:fillRect/>
-          </a:stretch>
-        </p:blipFill>
-        <p:spPr>
-          <a:xfrm>
-            <a:off x="6492240" y="3657600"/>
-            <a:ext cx="4572000" cy="2939143"/>
-          </a:xfrm>
-          <a:prstGeom prst="rect">
-            <a:avLst/>
-          </a:prstGeom>
-        </p:spPr>
-      </p:pic>
-    </p:spTree>
-  </p:cSld>
-  <p:clrMapOvr>
-    <a:masterClrMapping/>
-  </p:clrMapOvr>
-</p:sld>
-</file>
-
-<file path=ppt/slides/slide6.xml><?xml version="1.0" encoding="utf-8"?>
-<p:sld xmlns:a="http://schemas.openxmlformats.org/drawingml/2006/main" xmlns:p="http://schemas.openxmlformats.org/presentationml/2006/main" xmlns:r="http://schemas.openxmlformats.org/officeDocument/2006/relationships">
-  <p:cSld>
-    <p:bg>
-      <p:bgPr>
-        <a:solidFill>
-          <a:srgbClr val="F7F4EE"/>
-        </a:solidFill>
-        <a:effectLst/>
-      </p:bgPr>
-    </p:bg>
-    <p:spTree>
-      <p:nvGrpSpPr>
-        <p:cNvPr id="1" name=""/>
-        <p:cNvGrpSpPr/>
-        <p:nvPr/>
-      </p:nvGrpSpPr>
-      <p:grpSpPr/>
-      <p:sp>
-        <p:nvSpPr>
-          <p:cNvPr id="2" name="Rectangle 1"/>
+              <a:t>Strong latent-factor baseline.</a:t>
+            </a:r>
+            <a:endParaRPr sz="1400">
+              <a:solidFill>
+                <a:srgbClr val="23272D"/>
+              </a:solidFill>
+              <a:latin typeface="Aptos"/>
+            </a:endParaRPr>
+          </a:p>
+        </p:txBody>
+      </p:sp>
+      <p:sp>
+        <p:nvSpPr>
+          <p:cNvPr id="11" name="Rounded Rectangle 10"/>
           <p:cNvSpPr/>
           <p:nvPr/>
         </p:nvSpPr>
         <p:spPr>
           <a:xfrm>
-            <a:off x="0" y="0"/>
-            <a:ext cx="12191695" cy="502920"/>
-          </a:xfrm>
-          <a:prstGeom prst="rect">
+            <a:off x="6217920" y="914400"/>
+            <a:ext cx="2743200" cy="1828800"/>
+          </a:xfrm>
+          <a:prstGeom prst="roundRect">
             <a:avLst/>
           </a:prstGeom>
           <a:solidFill>
-            <a:srgbClr val="142244"/>
+            <a:srgbClr val="E5EDF8"/>
           </a:solidFill>
-          <a:ln>
-            <a:noFill/>
+          <a:ln w="12700">
+            <a:solidFill>
+              <a:srgbClr val="112244"/>
+            </a:solidFill>
           </a:ln>
         </p:spPr>
         <p:style>
@@ -4774,14 +4914,14 @@
       </p:sp>
       <p:sp>
         <p:nvSpPr>
-          <p:cNvPr id="3" name="TextBox 2"/>
+          <p:cNvPr id="12" name="TextBox 11"/>
           <p:cNvSpPr txBox="1"/>
           <p:nvPr/>
         </p:nvSpPr>
         <p:spPr>
           <a:xfrm>
-            <a:off x="502920" y="164592"/>
-            <a:ext cx="9875520" cy="365760"/>
+            <a:off x="6345936" y="987552"/>
+            <a:ext cx="2487168" cy="256032"/>
           </a:xfrm>
           <a:prstGeom prst="rect">
             <a:avLst/>
@@ -4789,33 +4929,40 @@
           <a:noFill/>
         </p:spPr>
         <p:txBody>
-          <a:bodyPr wrap="none">
+          <a:bodyPr wrap="none" anchor="t">
             <a:spAutoFit/>
           </a:bodyPr>
           <a:lstStyle/>
           <a:p>
             <a:pPr algn="l"/>
             <a:r>
-              <a:rPr sz="2600" b="1">
-                <a:solidFill>
-                  <a:srgbClr val="FFFFFF"/>
-                </a:solidFill>
+              <a:rPr sz="1900" b="1">
+                <a:solidFill>
+                  <a:srgbClr val="112244"/>
+                </a:solidFill>
+                <a:latin typeface="Cambria" panose="02040503050406030204"/>
               </a:rPr>
-              <a:t>Deliverables</a:t>
-            </a:r>
-          </a:p>
-        </p:txBody>
-      </p:sp>
-      <p:sp>
-        <p:nvSpPr>
-          <p:cNvPr id="4" name="TextBox 3"/>
+              <a:t>ClassicNeuMF</a:t>
+            </a:r>
+            <a:endParaRPr sz="1900" b="1">
+              <a:solidFill>
+                <a:srgbClr val="112244"/>
+              </a:solidFill>
+              <a:latin typeface="Cambria" panose="02040503050406030204"/>
+            </a:endParaRPr>
+          </a:p>
+        </p:txBody>
+      </p:sp>
+      <p:sp>
+        <p:nvSpPr>
+          <p:cNvPr id="13" name="TextBox 12"/>
           <p:cNvSpPr txBox="1"/>
           <p:nvPr/>
         </p:nvSpPr>
         <p:spPr>
           <a:xfrm>
-            <a:off x="548640" y="6400800"/>
-            <a:ext cx="10972800" cy="274320"/>
+            <a:off x="6327648" y="1325880"/>
+            <a:ext cx="2523744" cy="1353312"/>
           </a:xfrm>
           <a:prstGeom prst="rect">
             <a:avLst/>
@@ -4823,32 +4970,111 @@
           <a:noFill/>
         </p:spPr>
         <p:txBody>
-          <a:bodyPr wrap="none">
+          <a:bodyPr wrap="square" lIns="0" tIns="0" rIns="0" bIns="0" anchor="t">
             <a:spAutoFit/>
           </a:bodyPr>
           <a:lstStyle/>
           <a:p>
-            <a:r>
-              <a:rPr sz="1100">
-                <a:solidFill>
-                  <a:srgbClr val="5F697D"/>
-                </a:solidFill>
+            <a:pPr>
+              <a:spcAft>
+                <a:spcPts val="800"/>
+              </a:spcAft>
+            </a:pPr>
+            <a:r>
+              <a:rPr sz="1400">
+                <a:solidFill>
+                  <a:srgbClr val="23272D"/>
+                </a:solidFill>
+                <a:latin typeface="Aptos"/>
               </a:rPr>
-              <a:t>Flow Ranking | CS550 Final Project | Sen Fang</a:t>
-            </a:r>
-          </a:p>
-        </p:txBody>
-      </p:sp>
-      <p:sp>
-        <p:nvSpPr>
-          <p:cNvPr id="5" name="TextBox 4"/>
+              <a:t>GMF branch + MLP tower.</a:t>
+            </a:r>
+            <a:endParaRPr sz="1400">
+              <a:solidFill>
+                <a:srgbClr val="23272D"/>
+              </a:solidFill>
+              <a:latin typeface="Aptos"/>
+            </a:endParaRPr>
+          </a:p>
+          <a:p>
+            <a:pPr>
+              <a:spcAft>
+                <a:spcPts val="800"/>
+              </a:spcAft>
+            </a:pPr>
+            <a:r>
+              <a:rPr sz="1400">
+                <a:solidFill>
+                  <a:srgbClr val="23272D"/>
+                </a:solidFill>
+                <a:latin typeface="Aptos"/>
+              </a:rPr>
+              <a:t>Neural baseline without flow regularization.</a:t>
+            </a:r>
+            <a:endParaRPr sz="1400">
+              <a:solidFill>
+                <a:srgbClr val="23272D"/>
+              </a:solidFill>
+              <a:latin typeface="Aptos"/>
+            </a:endParaRPr>
+          </a:p>
+        </p:txBody>
+      </p:sp>
+      <p:sp>
+        <p:nvSpPr>
+          <p:cNvPr id="14" name="Rounded Rectangle 13"/>
+          <p:cNvSpPr/>
+          <p:nvPr/>
+        </p:nvSpPr>
+        <p:spPr>
+          <a:xfrm>
+            <a:off x="9098280" y="914400"/>
+            <a:ext cx="2606040" cy="1828800"/>
+          </a:xfrm>
+          <a:prstGeom prst="roundRect">
+            <a:avLst/>
+          </a:prstGeom>
+          <a:solidFill>
+            <a:srgbClr val="F6E0DE"/>
+          </a:solidFill>
+          <a:ln w="12700">
+            <a:solidFill>
+              <a:srgbClr val="112244"/>
+            </a:solidFill>
+          </a:ln>
+        </p:spPr>
+        <p:style>
+          <a:lnRef idx="1">
+            <a:schemeClr val="accent1"/>
+          </a:lnRef>
+          <a:fillRef idx="3">
+            <a:schemeClr val="accent1"/>
+          </a:fillRef>
+          <a:effectRef idx="2">
+            <a:schemeClr val="accent1"/>
+          </a:effectRef>
+          <a:fontRef idx="minor">
+            <a:schemeClr val="lt1"/>
+          </a:fontRef>
+        </p:style>
+        <p:txBody>
+          <a:bodyPr rtlCol="0" anchor="ctr"/>
+          <a:lstStyle/>
+          <a:p>
+            <a:pPr algn="ctr"/>
+          </a:p>
+        </p:txBody>
+      </p:sp>
+      <p:sp>
+        <p:nvSpPr>
+          <p:cNvPr id="15" name="TextBox 14"/>
           <p:cNvSpPr txBox="1"/>
           <p:nvPr/>
         </p:nvSpPr>
         <p:spPr>
           <a:xfrm>
-            <a:off x="731520" y="914400"/>
-            <a:ext cx="10972800" cy="5303520"/>
+            <a:off x="9226296" y="987552"/>
+            <a:ext cx="2350008" cy="256032"/>
           </a:xfrm>
           <a:prstGeom prst="rect">
             <a:avLst/>
@@ -4856,82 +5082,40 @@
           <a:noFill/>
         </p:spPr>
         <p:txBody>
-          <a:bodyPr wrap="none">
+          <a:bodyPr wrap="none" anchor="t">
             <a:spAutoFit/>
           </a:bodyPr>
           <a:lstStyle/>
           <a:p>
-            <a:r>
-              <a:rPr sz="2100" b="1">
-                <a:solidFill>
-                  <a:srgbClr val="1E293B"/>
-                </a:solidFill>
+            <a:pPr algn="l"/>
+            <a:r>
+              <a:rPr sz="1900" b="1">
+                <a:solidFill>
+                  <a:srgbClr val="112244"/>
+                </a:solidFill>
+                <a:latin typeface="Cambria" panose="02040503050406030204"/>
               </a:rPr>
-              <a:t>Paper PDF: flow_ranking_paper.pdf</a:t>
-            </a:r>
-          </a:p>
-          <a:p>
-            <a:r>
-              <a:rPr sz="1900">
-                <a:solidFill>
-                  <a:srgbClr val="1E293B"/>
-                </a:solidFill>
-              </a:rPr>
-              <a:t>Paper source bundle: flow_ranking_paper_source.zip</a:t>
-            </a:r>
-          </a:p>
-          <a:p>
-            <a:r>
-              <a:rPr sz="1900">
-                <a:solidFill>
-                  <a:srgbClr val="1E293B"/>
-                </a:solidFill>
-              </a:rPr>
-              <a:t>Code bundle: flow_ranking_code_bundle.zip</a:t>
-            </a:r>
-          </a:p>
-          <a:p>
-            <a:r>
-              <a:rPr sz="1900">
-                <a:solidFill>
-                  <a:srgbClr val="1E293B"/>
-                </a:solidFill>
-              </a:rPr>
-              <a:t>Training script: train_movie_sys.py</a:t>
-            </a:r>
-          </a:p>
-          <a:p>
-            <a:r>
-              <a:rPr sz="1900">
-                <a:solidFill>
-                  <a:srgbClr val="1E293B"/>
-                </a:solidFill>
-              </a:rPr>
-              <a:t>Project page: this FlowRanking website</a:t>
-            </a:r>
-          </a:p>
-          <a:p>
-            <a:r>
-              <a:rPr sz="1900">
-                <a:solidFill>
-                  <a:srgbClr val="1E293B"/>
-                </a:solidFill>
-              </a:rPr>
-              <a:t>Slides: flow_ranking_slides.pptx</a:t>
-            </a:r>
-          </a:p>
-        </p:txBody>
-      </p:sp>
-      <p:sp>
-        <p:nvSpPr>
-          <p:cNvPr id="6" name="TextBox 5"/>
+              <a:t>FlowNeuMF</a:t>
+            </a:r>
+            <a:endParaRPr sz="1900" b="1">
+              <a:solidFill>
+                <a:srgbClr val="112244"/>
+              </a:solidFill>
+              <a:latin typeface="Cambria" panose="02040503050406030204"/>
+            </a:endParaRPr>
+          </a:p>
+        </p:txBody>
+      </p:sp>
+      <p:sp>
+        <p:nvSpPr>
+          <p:cNvPr id="16" name="TextBox 15"/>
           <p:cNvSpPr txBox="1"/>
           <p:nvPr/>
         </p:nvSpPr>
         <p:spPr>
           <a:xfrm>
-            <a:off x="731520" y="5120640"/>
-            <a:ext cx="10607040" cy="822960"/>
+            <a:off x="9208008" y="1325880"/>
+            <a:ext cx="2386584" cy="1353312"/>
           </a:xfrm>
           <a:prstGeom prst="rect">
             <a:avLst/>
@@ -4939,19 +5123,219 @@
           <a:noFill/>
         </p:spPr>
         <p:txBody>
-          <a:bodyPr wrap="none">
+          <a:bodyPr wrap="square" lIns="0" tIns="0" rIns="0" bIns="0" anchor="t">
             <a:spAutoFit/>
           </a:bodyPr>
           <a:lstStyle/>
           <a:p>
-            <a:r>
-              <a:rPr sz="1700">
-                <a:solidFill>
-                  <a:srgbClr val="C62828"/>
-                </a:solidFill>
+            <a:pPr>
+              <a:spcAft>
+                <a:spcPts val="800"/>
+              </a:spcAft>
+            </a:pPr>
+            <a:r>
+              <a:rPr sz="1400">
+                <a:solidFill>
+                  <a:srgbClr val="23272D"/>
+                </a:solidFill>
+                <a:latin typeface="Aptos"/>
               </a:rPr>
-              <a:t>All artifacts are copied into the project-page repository so the website can serve them directly.</a:t>
-            </a:r>
+              <a:t>ClassicNeuMF backbone.</a:t>
+            </a:r>
+            <a:endParaRPr sz="1400">
+              <a:solidFill>
+                <a:srgbClr val="23272D"/>
+              </a:solidFill>
+              <a:latin typeface="Aptos"/>
+            </a:endParaRPr>
+          </a:p>
+          <a:p>
+            <a:pPr>
+              <a:spcAft>
+                <a:spcPts val="800"/>
+              </a:spcAft>
+            </a:pPr>
+            <a:r>
+              <a:rPr sz="1400">
+                <a:solidFill>
+                  <a:srgbClr val="23272D"/>
+                </a:solidFill>
+                <a:latin typeface="Aptos"/>
+              </a:rPr>
+              <a:t>Adds flow + consistency losses.</a:t>
+            </a:r>
+            <a:endParaRPr sz="1400">
+              <a:solidFill>
+                <a:srgbClr val="23272D"/>
+              </a:solidFill>
+              <a:latin typeface="Aptos"/>
+            </a:endParaRPr>
+          </a:p>
+        </p:txBody>
+      </p:sp>
+      <p:sp>
+        <p:nvSpPr>
+          <p:cNvPr id="17" name="TextBox 16"/>
+          <p:cNvSpPr txBox="1"/>
+          <p:nvPr/>
+        </p:nvSpPr>
+        <p:spPr>
+          <a:xfrm>
+            <a:off x="685800" y="3246120"/>
+            <a:ext cx="10332720" cy="1795145"/>
+          </a:xfrm>
+          <a:prstGeom prst="rect">
+            <a:avLst/>
+          </a:prstGeom>
+          <a:noFill/>
+        </p:spPr>
+        <p:txBody>
+          <a:bodyPr wrap="square" lIns="0" tIns="0" rIns="0" bIns="0" anchor="t">
+            <a:spAutoFit/>
+          </a:bodyPr>
+          <a:lstStyle/>
+          <a:p>
+            <a:pPr marL="285750" indent="-285750">
+              <a:spcAft>
+                <a:spcPts val="800"/>
+              </a:spcAft>
+              <a:buFont typeface="Arial" panose="020B0604020202020204" pitchFamily="34" charset="0"/>
+              <a:buChar char="•"/>
+            </a:pPr>
+            <a:r>
+              <a:rPr sz="1800">
+                <a:solidFill>
+                  <a:srgbClr val="23272D"/>
+                </a:solidFill>
+                <a:latin typeface="Aptos"/>
+              </a:rPr>
+              <a:t>Neural models use the same embedding size, optimizer family, and train/test split.</a:t>
+            </a:r>
+            <a:endParaRPr sz="1800">
+              <a:solidFill>
+                <a:srgbClr val="23272D"/>
+              </a:solidFill>
+              <a:latin typeface="Aptos"/>
+            </a:endParaRPr>
+          </a:p>
+          <a:p>
+            <a:pPr marL="285750" indent="-285750">
+              <a:spcAft>
+                <a:spcPts val="800"/>
+              </a:spcAft>
+              <a:buFont typeface="Arial" panose="020B0604020202020204" pitchFamily="34" charset="0"/>
+              <a:buChar char="•"/>
+            </a:pPr>
+            <a:endParaRPr sz="1800">
+              <a:solidFill>
+                <a:srgbClr val="23272D"/>
+              </a:solidFill>
+              <a:latin typeface="Aptos"/>
+            </a:endParaRPr>
+          </a:p>
+          <a:p>
+            <a:pPr marL="285750" indent="-285750">
+              <a:spcAft>
+                <a:spcPts val="800"/>
+              </a:spcAft>
+              <a:buFont typeface="Arial" panose="020B0604020202020204" pitchFamily="34" charset="0"/>
+              <a:buChar char="•"/>
+            </a:pPr>
+            <a:r>
+              <a:rPr sz="1800">
+                <a:solidFill>
+                  <a:srgbClr val="23272D"/>
+                </a:solidFill>
+                <a:latin typeface="Aptos"/>
+              </a:rPr>
+              <a:t>FlowNeuMF changes the regularization strategy rather than redefining the recommendation task.</a:t>
+            </a:r>
+            <a:endParaRPr sz="1800">
+              <a:solidFill>
+                <a:srgbClr val="23272D"/>
+              </a:solidFill>
+              <a:latin typeface="Aptos"/>
+            </a:endParaRPr>
+          </a:p>
+          <a:p>
+            <a:pPr marL="285750" indent="-285750">
+              <a:spcAft>
+                <a:spcPts val="800"/>
+              </a:spcAft>
+              <a:buFont typeface="Arial" panose="020B0604020202020204" pitchFamily="34" charset="0"/>
+              <a:buChar char="•"/>
+            </a:pPr>
+            <a:endParaRPr sz="1800">
+              <a:solidFill>
+                <a:srgbClr val="23272D"/>
+              </a:solidFill>
+              <a:latin typeface="Aptos"/>
+            </a:endParaRPr>
+          </a:p>
+          <a:p>
+            <a:pPr marL="285750" indent="-285750">
+              <a:spcAft>
+                <a:spcPts val="800"/>
+              </a:spcAft>
+              <a:buFont typeface="Arial" panose="020B0604020202020204" pitchFamily="34" charset="0"/>
+              <a:buChar char="•"/>
+            </a:pPr>
+            <a:r>
+              <a:rPr sz="1800">
+                <a:solidFill>
+                  <a:srgbClr val="23272D"/>
+                </a:solidFill>
+                <a:latin typeface="Aptos"/>
+              </a:rPr>
+              <a:t>This makes the comparison against ClassicNeuMF the key test of the proposed idea.</a:t>
+            </a:r>
+            <a:endParaRPr sz="1800">
+              <a:solidFill>
+                <a:srgbClr val="23272D"/>
+              </a:solidFill>
+              <a:latin typeface="Aptos"/>
+            </a:endParaRPr>
+          </a:p>
+        </p:txBody>
+      </p:sp>
+      <p:sp>
+        <p:nvSpPr>
+          <p:cNvPr id="18" name="TextBox 17"/>
+          <p:cNvSpPr txBox="1"/>
+          <p:nvPr/>
+        </p:nvSpPr>
+        <p:spPr>
+          <a:xfrm>
+            <a:off x="411480" y="6446520"/>
+            <a:ext cx="11155680" cy="182880"/>
+          </a:xfrm>
+          <a:prstGeom prst="rect">
+            <a:avLst/>
+          </a:prstGeom>
+          <a:noFill/>
+        </p:spPr>
+        <p:txBody>
+          <a:bodyPr wrap="none" anchor="t">
+            <a:spAutoFit/>
+          </a:bodyPr>
+          <a:lstStyle/>
+          <a:p>
+            <a:pPr algn="l"/>
+            <a:r>
+              <a:rPr sz="1000" b="0">
+                <a:solidFill>
+                  <a:srgbClr val="626975"/>
+                </a:solidFill>
+                <a:latin typeface="Aptos"/>
+              </a:rPr>
+              <a:t>Flow Ranking | Sen Fang | CS550 Final Project | 3</a:t>
+            </a:r>
+            <a:endParaRPr sz="1000" b="0">
+              <a:solidFill>
+                <a:srgbClr val="626975"/>
+              </a:solidFill>
+              <a:latin typeface="Aptos"/>
+            </a:endParaRPr>
           </a:p>
         </p:txBody>
       </p:sp>
@@ -4961,6 +5345,2771 @@
     <a:masterClrMapping/>
   </p:clrMapOvr>
 </p:sld>
+</file>
+
+<file path=ppt/slides/slide4.xml><?xml version="1.0" encoding="utf-8"?>
+<p:sld xmlns:a="http://schemas.openxmlformats.org/drawingml/2006/main" xmlns:r="http://schemas.openxmlformats.org/officeDocument/2006/relationships" xmlns:p="http://schemas.openxmlformats.org/presentationml/2006/main">
+  <p:cSld>
+    <p:bg>
+      <p:bgPr>
+        <a:solidFill>
+          <a:srgbClr val="F7F6F3"/>
+        </a:solidFill>
+        <a:effectLst/>
+      </p:bgPr>
+    </p:bg>
+    <p:spTree>
+      <p:nvGrpSpPr>
+        <p:cNvPr id="1" name=""/>
+        <p:cNvGrpSpPr/>
+        <p:nvPr/>
+      </p:nvGrpSpPr>
+      <p:grpSpPr/>
+      <p:sp>
+        <p:nvSpPr>
+          <p:cNvPr id="2" name="Rectangle 1"/>
+          <p:cNvSpPr/>
+          <p:nvPr/>
+        </p:nvSpPr>
+        <p:spPr>
+          <a:xfrm>
+            <a:off x="0" y="0"/>
+            <a:ext cx="12191695" cy="475488"/>
+          </a:xfrm>
+          <a:prstGeom prst="rect">
+            <a:avLst/>
+          </a:prstGeom>
+          <a:solidFill>
+            <a:srgbClr val="112244"/>
+          </a:solidFill>
+          <a:ln>
+            <a:noFill/>
+          </a:ln>
+        </p:spPr>
+        <p:style>
+          <a:lnRef idx="1">
+            <a:schemeClr val="accent1"/>
+          </a:lnRef>
+          <a:fillRef idx="3">
+            <a:schemeClr val="accent1"/>
+          </a:fillRef>
+          <a:effectRef idx="2">
+            <a:schemeClr val="accent1"/>
+          </a:effectRef>
+          <a:fontRef idx="minor">
+            <a:schemeClr val="lt1"/>
+          </a:fontRef>
+        </p:style>
+        <p:txBody>
+          <a:bodyPr rtlCol="0" anchor="ctr"/>
+          <a:lstStyle/>
+          <a:p>
+            <a:pPr algn="ctr"/>
+          </a:p>
+        </p:txBody>
+      </p:sp>
+      <p:sp>
+        <p:nvSpPr>
+          <p:cNvPr id="3" name="TextBox 2"/>
+          <p:cNvSpPr txBox="1"/>
+          <p:nvPr/>
+        </p:nvSpPr>
+        <p:spPr>
+          <a:xfrm>
+            <a:off x="411480" y="64008"/>
+            <a:ext cx="7132320" cy="237744"/>
+          </a:xfrm>
+          <a:prstGeom prst="rect">
+            <a:avLst/>
+          </a:prstGeom>
+          <a:noFill/>
+        </p:spPr>
+        <p:txBody>
+          <a:bodyPr wrap="none" anchor="t">
+            <a:spAutoFit/>
+          </a:bodyPr>
+          <a:lstStyle/>
+          <a:p>
+            <a:pPr algn="l"/>
+            <a:r>
+              <a:rPr sz="2600" b="1">
+                <a:solidFill>
+                  <a:srgbClr val="FFFFFF"/>
+                </a:solidFill>
+                <a:latin typeface="Cambria" panose="02040503050406030204"/>
+              </a:rPr>
+              <a:t>Critical Debugging: Evaluation Repair</a:t>
+            </a:r>
+            <a:endParaRPr sz="2600" b="1">
+              <a:solidFill>
+                <a:srgbClr val="FFFFFF"/>
+              </a:solidFill>
+              <a:latin typeface="Cambria" panose="02040503050406030204"/>
+            </a:endParaRPr>
+          </a:p>
+        </p:txBody>
+      </p:sp>
+      <p:sp>
+        <p:nvSpPr>
+          <p:cNvPr id="4" name="TextBox 3"/>
+          <p:cNvSpPr txBox="1"/>
+          <p:nvPr/>
+        </p:nvSpPr>
+        <p:spPr>
+          <a:xfrm>
+            <a:off x="7909560" y="91440"/>
+            <a:ext cx="3840480" cy="182880"/>
+          </a:xfrm>
+          <a:prstGeom prst="rect">
+            <a:avLst/>
+          </a:prstGeom>
+          <a:noFill/>
+        </p:spPr>
+        <p:txBody>
+          <a:bodyPr wrap="none" anchor="t">
+            <a:spAutoFit/>
+          </a:bodyPr>
+          <a:lstStyle/>
+          <a:p>
+            <a:pPr algn="r"/>
+            <a:r>
+              <a:rPr sz="1100" b="0">
+                <a:solidFill>
+                  <a:srgbClr val="FFFFFF"/>
+                </a:solidFill>
+                <a:latin typeface="Aptos"/>
+              </a:rPr>
+              <a:t>Why the first ranking plots looked wrong</a:t>
+            </a:r>
+            <a:endParaRPr sz="1100" b="0">
+              <a:solidFill>
+                <a:srgbClr val="FFFFFF"/>
+              </a:solidFill>
+              <a:latin typeface="Aptos"/>
+            </a:endParaRPr>
+          </a:p>
+        </p:txBody>
+      </p:sp>
+      <p:sp>
+        <p:nvSpPr>
+          <p:cNvPr id="5" name="TextBox 4"/>
+          <p:cNvSpPr txBox="1"/>
+          <p:nvPr/>
+        </p:nvSpPr>
+        <p:spPr>
+          <a:xfrm>
+            <a:off x="548640" y="1366647"/>
+            <a:ext cx="5577840" cy="4124325"/>
+          </a:xfrm>
+          <a:prstGeom prst="rect">
+            <a:avLst/>
+          </a:prstGeom>
+          <a:noFill/>
+        </p:spPr>
+        <p:txBody>
+          <a:bodyPr wrap="square" lIns="0" tIns="0" rIns="0" bIns="0" anchor="t">
+            <a:spAutoFit/>
+          </a:bodyPr>
+          <a:lstStyle/>
+          <a:p>
+            <a:pPr>
+              <a:spcAft>
+                <a:spcPts val="800"/>
+              </a:spcAft>
+            </a:pPr>
+            <a:r>
+              <a:rPr sz="1900">
+                <a:solidFill>
+                  <a:srgbClr val="23272D"/>
+                </a:solidFill>
+                <a:latin typeface="Aptos"/>
+              </a:rPr>
+              <a:t>Earlier Top-10 evaluation treated every held-out movie as relevant, including low-rated ones.</a:t>
+            </a:r>
+            <a:endParaRPr sz="1900">
+              <a:solidFill>
+                <a:srgbClr val="23272D"/>
+              </a:solidFill>
+              <a:latin typeface="Aptos"/>
+            </a:endParaRPr>
+          </a:p>
+          <a:p>
+            <a:pPr>
+              <a:spcAft>
+                <a:spcPts val="800"/>
+              </a:spcAft>
+            </a:pPr>
+            <a:endParaRPr sz="1900">
+              <a:solidFill>
+                <a:srgbClr val="23272D"/>
+              </a:solidFill>
+              <a:latin typeface="Aptos"/>
+            </a:endParaRPr>
+          </a:p>
+          <a:p>
+            <a:pPr>
+              <a:spcAft>
+                <a:spcPts val="800"/>
+              </a:spcAft>
+            </a:pPr>
+            <a:r>
+              <a:rPr sz="1900">
+                <a:solidFill>
+                  <a:srgbClr val="23272D"/>
+                </a:solidFill>
+                <a:latin typeface="Aptos"/>
+              </a:rPr>
+              <a:t>That was inconsistent with the neural ranking loss, which used positive interactions only.</a:t>
+            </a:r>
+            <a:endParaRPr sz="1900">
+              <a:solidFill>
+                <a:srgbClr val="23272D"/>
+              </a:solidFill>
+              <a:latin typeface="Aptos"/>
+            </a:endParaRPr>
+          </a:p>
+          <a:p>
+            <a:pPr>
+              <a:spcAft>
+                <a:spcPts val="800"/>
+              </a:spcAft>
+            </a:pPr>
+            <a:endParaRPr sz="1900">
+              <a:solidFill>
+                <a:srgbClr val="23272D"/>
+              </a:solidFill>
+              <a:latin typeface="Aptos"/>
+            </a:endParaRPr>
+          </a:p>
+          <a:p>
+            <a:pPr>
+              <a:spcAft>
+                <a:spcPts val="800"/>
+              </a:spcAft>
+            </a:pPr>
+            <a:r>
+              <a:rPr sz="1900">
+                <a:solidFill>
+                  <a:srgbClr val="23272D"/>
+                </a:solidFill>
+                <a:latin typeface="Aptos"/>
+              </a:rPr>
+              <a:t>The repaired protocol defines relevance as held-out ratings &gt;= 4.0.</a:t>
+            </a:r>
+            <a:endParaRPr sz="1900">
+              <a:solidFill>
+                <a:srgbClr val="23272D"/>
+              </a:solidFill>
+              <a:latin typeface="Aptos"/>
+            </a:endParaRPr>
+          </a:p>
+          <a:p>
+            <a:pPr>
+              <a:spcAft>
+                <a:spcPts val="800"/>
+              </a:spcAft>
+            </a:pPr>
+            <a:endParaRPr sz="1900">
+              <a:solidFill>
+                <a:srgbClr val="23272D"/>
+              </a:solidFill>
+              <a:latin typeface="Aptos"/>
+            </a:endParaRPr>
+          </a:p>
+          <a:p>
+            <a:pPr>
+              <a:spcAft>
+                <a:spcPts val="800"/>
+              </a:spcAft>
+            </a:pPr>
+            <a:r>
+              <a:rPr sz="1900">
+                <a:solidFill>
+                  <a:srgbClr val="23272D"/>
+                </a:solidFill>
+                <a:latin typeface="Aptos"/>
+              </a:rPr>
+              <a:t>ItemCF ranking was also repaired to use positive-history similarity propagation instead of pure rating-regression scores.</a:t>
+            </a:r>
+            <a:endParaRPr sz="1900">
+              <a:solidFill>
+                <a:srgbClr val="23272D"/>
+              </a:solidFill>
+              <a:latin typeface="Aptos"/>
+            </a:endParaRPr>
+          </a:p>
+        </p:txBody>
+      </p:sp>
+      <p:sp>
+        <p:nvSpPr>
+          <p:cNvPr id="6" name="Rounded Rectangle 5"/>
+          <p:cNvSpPr/>
+          <p:nvPr/>
+        </p:nvSpPr>
+        <p:spPr>
+          <a:xfrm>
+            <a:off x="6537960" y="1051560"/>
+            <a:ext cx="4663440" cy="2103120"/>
+          </a:xfrm>
+          <a:prstGeom prst="roundRect">
+            <a:avLst/>
+          </a:prstGeom>
+          <a:solidFill>
+            <a:srgbClr val="FFFFFF"/>
+          </a:solidFill>
+          <a:ln w="15240">
+            <a:solidFill>
+              <a:srgbClr val="B38E4A"/>
+            </a:solidFill>
+          </a:ln>
+        </p:spPr>
+        <p:style>
+          <a:lnRef idx="1">
+            <a:schemeClr val="accent1"/>
+          </a:lnRef>
+          <a:fillRef idx="3">
+            <a:schemeClr val="accent1"/>
+          </a:fillRef>
+          <a:effectRef idx="2">
+            <a:schemeClr val="accent1"/>
+          </a:effectRef>
+          <a:fontRef idx="minor">
+            <a:schemeClr val="lt1"/>
+          </a:fontRef>
+        </p:style>
+        <p:txBody>
+          <a:bodyPr rtlCol="0" anchor="ctr"/>
+          <a:lstStyle/>
+          <a:p>
+            <a:pPr algn="ctr"/>
+          </a:p>
+        </p:txBody>
+      </p:sp>
+      <p:sp>
+        <p:nvSpPr>
+          <p:cNvPr id="7" name="TextBox 6"/>
+          <p:cNvSpPr txBox="1"/>
+          <p:nvPr/>
+        </p:nvSpPr>
+        <p:spPr>
+          <a:xfrm>
+            <a:off x="6766560" y="1234440"/>
+            <a:ext cx="4209415" cy="1753235"/>
+          </a:xfrm>
+          <a:prstGeom prst="rect">
+            <a:avLst/>
+          </a:prstGeom>
+          <a:noFill/>
+        </p:spPr>
+        <p:txBody>
+          <a:bodyPr wrap="none" anchor="t">
+            <a:spAutoFit/>
+          </a:bodyPr>
+          <a:lstStyle/>
+          <a:p>
+            <a:pPr algn="l"/>
+            <a:r>
+              <a:rPr sz="1800" b="0">
+                <a:solidFill>
+                  <a:srgbClr val="23272D"/>
+                </a:solidFill>
+                <a:latin typeface="Aptos"/>
+              </a:rPr>
+              <a:t>Effect of the repair:
+ItemCF Top-10 metrics moved from </a:t>
+            </a:r>
+            <a:endParaRPr sz="1800" b="0">
+              <a:solidFill>
+                <a:srgbClr val="23272D"/>
+              </a:solidFill>
+              <a:latin typeface="Aptos"/>
+            </a:endParaRPr>
+          </a:p>
+          <a:p>
+            <a:pPr algn="l"/>
+            <a:r>
+              <a:rPr sz="1800" b="0">
+                <a:solidFill>
+                  <a:srgbClr val="23272D"/>
+                </a:solidFill>
+                <a:latin typeface="Aptos"/>
+              </a:rPr>
+              <a:t>nearly zero to a reasonable competitive </a:t>
+            </a:r>
+            <a:endParaRPr sz="1800" b="0">
+              <a:solidFill>
+                <a:srgbClr val="23272D"/>
+              </a:solidFill>
+              <a:latin typeface="Aptos"/>
+            </a:endParaRPr>
+          </a:p>
+          <a:p>
+            <a:pPr algn="l"/>
+            <a:r>
+              <a:rPr sz="1800" b="0">
+                <a:solidFill>
+                  <a:srgbClr val="23272D"/>
+                </a:solidFill>
+                <a:latin typeface="Aptos"/>
+              </a:rPr>
+              <a:t>range, which fixed both the table and </a:t>
+            </a:r>
+            <a:endParaRPr sz="1800" b="0">
+              <a:solidFill>
+                <a:srgbClr val="23272D"/>
+              </a:solidFill>
+              <a:latin typeface="Aptos"/>
+            </a:endParaRPr>
+          </a:p>
+          <a:p>
+            <a:pPr algn="l"/>
+            <a:r>
+              <a:rPr sz="1800" b="0">
+                <a:solidFill>
+                  <a:srgbClr val="23272D"/>
+                </a:solidFill>
+                <a:latin typeface="Aptos"/>
+              </a:rPr>
+              <a:t>the bar charts.</a:t>
+            </a:r>
+            <a:endParaRPr sz="1800" b="0">
+              <a:solidFill>
+                <a:srgbClr val="23272D"/>
+              </a:solidFill>
+              <a:latin typeface="Aptos"/>
+            </a:endParaRPr>
+          </a:p>
+        </p:txBody>
+      </p:sp>
+      <p:pic>
+        <p:nvPicPr>
+          <p:cNvPr id="8" name="Picture 7" descr="precision_at_10.png"/>
+          <p:cNvPicPr>
+            <a:picLocks noChangeAspect="1"/>
+          </p:cNvPicPr>
+          <p:nvPr/>
+        </p:nvPicPr>
+        <p:blipFill>
+          <a:blip r:embed="rId1"/>
+          <a:stretch>
+            <a:fillRect/>
+          </a:stretch>
+        </p:blipFill>
+        <p:spPr>
+          <a:xfrm>
+            <a:off x="6446520" y="3274695"/>
+            <a:ext cx="4892040" cy="3354542"/>
+          </a:xfrm>
+          <a:prstGeom prst="rect">
+            <a:avLst/>
+          </a:prstGeom>
+        </p:spPr>
+      </p:pic>
+      <p:sp>
+        <p:nvSpPr>
+          <p:cNvPr id="9" name="TextBox 8"/>
+          <p:cNvSpPr txBox="1"/>
+          <p:nvPr/>
+        </p:nvSpPr>
+        <p:spPr>
+          <a:xfrm>
+            <a:off x="411480" y="6446520"/>
+            <a:ext cx="11155680" cy="182880"/>
+          </a:xfrm>
+          <a:prstGeom prst="rect">
+            <a:avLst/>
+          </a:prstGeom>
+          <a:noFill/>
+        </p:spPr>
+        <p:txBody>
+          <a:bodyPr wrap="none" anchor="t">
+            <a:spAutoFit/>
+          </a:bodyPr>
+          <a:lstStyle/>
+          <a:p>
+            <a:pPr algn="l"/>
+            <a:r>
+              <a:rPr sz="1000" b="0">
+                <a:solidFill>
+                  <a:srgbClr val="626975"/>
+                </a:solidFill>
+                <a:latin typeface="Aptos"/>
+              </a:rPr>
+              <a:t>Flow Ranking | Sen Fang | CS550 Final Project | 4</a:t>
+            </a:r>
+            <a:endParaRPr sz="1000" b="0">
+              <a:solidFill>
+                <a:srgbClr val="626975"/>
+              </a:solidFill>
+              <a:latin typeface="Aptos"/>
+            </a:endParaRPr>
+          </a:p>
+        </p:txBody>
+      </p:sp>
+    </p:spTree>
+  </p:cSld>
+  <p:clrMapOvr>
+    <a:masterClrMapping/>
+  </p:clrMapOvr>
+</p:sld>
+</file>
+
+<file path=ppt/slides/slide5.xml><?xml version="1.0" encoding="utf-8"?>
+<p:sld xmlns:a="http://schemas.openxmlformats.org/drawingml/2006/main" xmlns:r="http://schemas.openxmlformats.org/officeDocument/2006/relationships" xmlns:p="http://schemas.openxmlformats.org/presentationml/2006/main">
+  <p:cSld>
+    <p:bg>
+      <p:bgPr>
+        <a:solidFill>
+          <a:srgbClr val="F7F6F3"/>
+        </a:solidFill>
+        <a:effectLst/>
+      </p:bgPr>
+    </p:bg>
+    <p:spTree>
+      <p:nvGrpSpPr>
+        <p:cNvPr id="1" name=""/>
+        <p:cNvGrpSpPr/>
+        <p:nvPr/>
+      </p:nvGrpSpPr>
+      <p:grpSpPr/>
+      <p:sp>
+        <p:nvSpPr>
+          <p:cNvPr id="2" name="Rectangle 1"/>
+          <p:cNvSpPr/>
+          <p:nvPr/>
+        </p:nvSpPr>
+        <p:spPr>
+          <a:xfrm>
+            <a:off x="0" y="0"/>
+            <a:ext cx="12191695" cy="475488"/>
+          </a:xfrm>
+          <a:prstGeom prst="rect">
+            <a:avLst/>
+          </a:prstGeom>
+          <a:solidFill>
+            <a:srgbClr val="112244"/>
+          </a:solidFill>
+          <a:ln>
+            <a:noFill/>
+          </a:ln>
+        </p:spPr>
+        <p:style>
+          <a:lnRef idx="1">
+            <a:schemeClr val="accent1"/>
+          </a:lnRef>
+          <a:fillRef idx="3">
+            <a:schemeClr val="accent1"/>
+          </a:fillRef>
+          <a:effectRef idx="2">
+            <a:schemeClr val="accent1"/>
+          </a:effectRef>
+          <a:fontRef idx="minor">
+            <a:schemeClr val="lt1"/>
+          </a:fontRef>
+        </p:style>
+        <p:txBody>
+          <a:bodyPr rtlCol="0" anchor="ctr"/>
+          <a:lstStyle/>
+          <a:p>
+            <a:pPr algn="ctr"/>
+          </a:p>
+        </p:txBody>
+      </p:sp>
+      <p:sp>
+        <p:nvSpPr>
+          <p:cNvPr id="3" name="TextBox 2"/>
+          <p:cNvSpPr txBox="1"/>
+          <p:nvPr/>
+        </p:nvSpPr>
+        <p:spPr>
+          <a:xfrm>
+            <a:off x="411480" y="64008"/>
+            <a:ext cx="7132320" cy="237744"/>
+          </a:xfrm>
+          <a:prstGeom prst="rect">
+            <a:avLst/>
+          </a:prstGeom>
+          <a:noFill/>
+        </p:spPr>
+        <p:txBody>
+          <a:bodyPr wrap="none" anchor="t">
+            <a:spAutoFit/>
+          </a:bodyPr>
+          <a:lstStyle/>
+          <a:p>
+            <a:pPr algn="l"/>
+            <a:r>
+              <a:rPr sz="2600" b="1">
+                <a:solidFill>
+                  <a:srgbClr val="FFFFFF"/>
+                </a:solidFill>
+                <a:latin typeface="Cambria" panose="02040503050406030204"/>
+              </a:rPr>
+              <a:t>Main Results</a:t>
+            </a:r>
+            <a:endParaRPr sz="2600" b="1">
+              <a:solidFill>
+                <a:srgbClr val="FFFFFF"/>
+              </a:solidFill>
+              <a:latin typeface="Cambria" panose="02040503050406030204"/>
+            </a:endParaRPr>
+          </a:p>
+        </p:txBody>
+      </p:sp>
+      <p:sp>
+        <p:nvSpPr>
+          <p:cNvPr id="4" name="TextBox 3"/>
+          <p:cNvSpPr txBox="1"/>
+          <p:nvPr/>
+        </p:nvSpPr>
+        <p:spPr>
+          <a:xfrm>
+            <a:off x="7909560" y="91440"/>
+            <a:ext cx="3840480" cy="182880"/>
+          </a:xfrm>
+          <a:prstGeom prst="rect">
+            <a:avLst/>
+          </a:prstGeom>
+          <a:noFill/>
+        </p:spPr>
+        <p:txBody>
+          <a:bodyPr wrap="none" anchor="t">
+            <a:spAutoFit/>
+          </a:bodyPr>
+          <a:lstStyle/>
+          <a:p>
+            <a:pPr algn="r"/>
+            <a:r>
+              <a:rPr sz="1100" b="0">
+                <a:solidFill>
+                  <a:srgbClr val="FFFFFF"/>
+                </a:solidFill>
+                <a:latin typeface="Aptos"/>
+              </a:rPr>
+              <a:t>Repaired full evaluation</a:t>
+            </a:r>
+            <a:endParaRPr sz="1100" b="0">
+              <a:solidFill>
+                <a:srgbClr val="FFFFFF"/>
+              </a:solidFill>
+              <a:latin typeface="Aptos"/>
+            </a:endParaRPr>
+          </a:p>
+        </p:txBody>
+      </p:sp>
+      <p:graphicFrame>
+        <p:nvGraphicFramePr>
+          <p:cNvPr id="5" name="Table 4"/>
+          <p:cNvGraphicFramePr>
+            <a:graphicFrameLocks noGrp="1"/>
+          </p:cNvGraphicFramePr>
+          <p:nvPr/>
+        </p:nvGraphicFramePr>
+        <p:xfrm>
+          <a:off x="384048" y="868680"/>
+          <a:ext cx="11384280" cy="2331720"/>
+        </p:xfrm>
+        <a:graphic>
+          <a:graphicData uri="http://schemas.openxmlformats.org/drawingml/2006/table">
+            <a:tbl>
+              <a:tblPr firstRow="1" bandRow="1">
+                <a:tableStyleId>{5C22544A-7EE6-4342-B048-85BDC9FD1C3A}</a:tableStyleId>
+              </a:tblPr>
+              <a:tblGrid>
+                <a:gridCol w="1626325"/>
+                <a:gridCol w="1626325"/>
+                <a:gridCol w="1626325"/>
+                <a:gridCol w="1626325"/>
+                <a:gridCol w="1626325"/>
+                <a:gridCol w="1626325"/>
+                <a:gridCol w="1626330"/>
+              </a:tblGrid>
+              <a:tr h="466344">
+                <a:tc>
+                  <a:txBody>
+                    <a:bodyPr/>
+                    <a:lstStyle/>
+                    <a:p>
+                      <a:pPr algn="ctr"/>
+                      <a:r>
+                        <a:rPr sz="1300" b="1">
+                          <a:solidFill>
+                            <a:srgbClr val="FFFFFF"/>
+                          </a:solidFill>
+                          <a:latin typeface="Aptos"/>
+                        </a:rPr>
+                        <a:t>Model</a:t>
+                      </a:r>
+                      <a:endParaRPr sz="1300" b="1">
+                        <a:solidFill>
+                          <a:srgbClr val="FFFFFF"/>
+                        </a:solidFill>
+                        <a:latin typeface="Aptos"/>
+                      </a:endParaRPr>
+                    </a:p>
+                  </a:txBody>
+                  <a:tcPr>
+                    <a:solidFill>
+                      <a:srgbClr val="112244"/>
+                    </a:solidFill>
+                  </a:tcPr>
+                </a:tc>
+                <a:tc>
+                  <a:txBody>
+                    <a:bodyPr/>
+                    <a:lstStyle/>
+                    <a:p>
+                      <a:pPr algn="ctr"/>
+                      <a:r>
+                        <a:rPr sz="1300" b="1">
+                          <a:solidFill>
+                            <a:srgbClr val="FFFFFF"/>
+                          </a:solidFill>
+                          <a:latin typeface="Aptos"/>
+                        </a:rPr>
+                        <a:t>MAE</a:t>
+                      </a:r>
+                      <a:endParaRPr sz="1300" b="1">
+                        <a:solidFill>
+                          <a:srgbClr val="FFFFFF"/>
+                        </a:solidFill>
+                        <a:latin typeface="Aptos"/>
+                      </a:endParaRPr>
+                    </a:p>
+                  </a:txBody>
+                  <a:tcPr>
+                    <a:solidFill>
+                      <a:srgbClr val="112244"/>
+                    </a:solidFill>
+                  </a:tcPr>
+                </a:tc>
+                <a:tc>
+                  <a:txBody>
+                    <a:bodyPr/>
+                    <a:lstStyle/>
+                    <a:p>
+                      <a:pPr algn="ctr"/>
+                      <a:r>
+                        <a:rPr sz="1300" b="1">
+                          <a:solidFill>
+                            <a:srgbClr val="FFFFFF"/>
+                          </a:solidFill>
+                          <a:latin typeface="Aptos"/>
+                        </a:rPr>
+                        <a:t>RMSE</a:t>
+                      </a:r>
+                      <a:endParaRPr sz="1300" b="1">
+                        <a:solidFill>
+                          <a:srgbClr val="FFFFFF"/>
+                        </a:solidFill>
+                        <a:latin typeface="Aptos"/>
+                      </a:endParaRPr>
+                    </a:p>
+                  </a:txBody>
+                  <a:tcPr>
+                    <a:solidFill>
+                      <a:srgbClr val="112244"/>
+                    </a:solidFill>
+                  </a:tcPr>
+                </a:tc>
+                <a:tc>
+                  <a:txBody>
+                    <a:bodyPr/>
+                    <a:lstStyle/>
+                    <a:p>
+                      <a:pPr algn="ctr"/>
+                      <a:r>
+                        <a:rPr sz="1300" b="1">
+                          <a:solidFill>
+                            <a:srgbClr val="FFFFFF"/>
+                          </a:solidFill>
+                          <a:latin typeface="Aptos"/>
+                        </a:rPr>
+                        <a:t>P@10</a:t>
+                      </a:r>
+                      <a:endParaRPr sz="1300" b="1">
+                        <a:solidFill>
+                          <a:srgbClr val="FFFFFF"/>
+                        </a:solidFill>
+                        <a:latin typeface="Aptos"/>
+                      </a:endParaRPr>
+                    </a:p>
+                  </a:txBody>
+                  <a:tcPr>
+                    <a:solidFill>
+                      <a:srgbClr val="112244"/>
+                    </a:solidFill>
+                  </a:tcPr>
+                </a:tc>
+                <a:tc>
+                  <a:txBody>
+                    <a:bodyPr/>
+                    <a:lstStyle/>
+                    <a:p>
+                      <a:pPr algn="ctr"/>
+                      <a:r>
+                        <a:rPr sz="1300" b="1">
+                          <a:solidFill>
+                            <a:srgbClr val="FFFFFF"/>
+                          </a:solidFill>
+                          <a:latin typeface="Aptos"/>
+                        </a:rPr>
+                        <a:t>R@10</a:t>
+                      </a:r>
+                      <a:endParaRPr sz="1300" b="1">
+                        <a:solidFill>
+                          <a:srgbClr val="FFFFFF"/>
+                        </a:solidFill>
+                        <a:latin typeface="Aptos"/>
+                      </a:endParaRPr>
+                    </a:p>
+                  </a:txBody>
+                  <a:tcPr>
+                    <a:solidFill>
+                      <a:srgbClr val="112244"/>
+                    </a:solidFill>
+                  </a:tcPr>
+                </a:tc>
+                <a:tc>
+                  <a:txBody>
+                    <a:bodyPr/>
+                    <a:lstStyle/>
+                    <a:p>
+                      <a:pPr algn="ctr"/>
+                      <a:r>
+                        <a:rPr sz="1300" b="1">
+                          <a:solidFill>
+                            <a:srgbClr val="FFFFFF"/>
+                          </a:solidFill>
+                          <a:latin typeface="Aptos"/>
+                        </a:rPr>
+                        <a:t>F@10</a:t>
+                      </a:r>
+                      <a:endParaRPr sz="1300" b="1">
+                        <a:solidFill>
+                          <a:srgbClr val="FFFFFF"/>
+                        </a:solidFill>
+                        <a:latin typeface="Aptos"/>
+                      </a:endParaRPr>
+                    </a:p>
+                  </a:txBody>
+                  <a:tcPr>
+                    <a:solidFill>
+                      <a:srgbClr val="112244"/>
+                    </a:solidFill>
+                  </a:tcPr>
+                </a:tc>
+                <a:tc>
+                  <a:txBody>
+                    <a:bodyPr/>
+                    <a:lstStyle/>
+                    <a:p>
+                      <a:pPr algn="ctr"/>
+                      <a:r>
+                        <a:rPr sz="1300" b="1">
+                          <a:solidFill>
+                            <a:srgbClr val="FFFFFF"/>
+                          </a:solidFill>
+                          <a:latin typeface="Aptos"/>
+                        </a:rPr>
+                        <a:t>NDCG@10</a:t>
+                      </a:r>
+                      <a:endParaRPr sz="1300" b="1">
+                        <a:solidFill>
+                          <a:srgbClr val="FFFFFF"/>
+                        </a:solidFill>
+                        <a:latin typeface="Aptos"/>
+                      </a:endParaRPr>
+                    </a:p>
+                  </a:txBody>
+                  <a:tcPr>
+                    <a:solidFill>
+                      <a:srgbClr val="112244"/>
+                    </a:solidFill>
+                  </a:tcPr>
+                </a:tc>
+              </a:tr>
+              <a:tr h="466344">
+                <a:tc>
+                  <a:txBody>
+                    <a:bodyPr/>
+                    <a:lstStyle/>
+                    <a:p>
+                      <a:pPr algn="ctr"/>
+                      <a:r>
+                        <a:rPr sz="1200" b="0">
+                          <a:solidFill>
+                            <a:srgbClr val="23272D"/>
+                          </a:solidFill>
+                          <a:latin typeface="Aptos"/>
+                        </a:rPr>
+                        <a:t>ItemCF</a:t>
+                      </a:r>
+                      <a:endParaRPr sz="1200" b="0">
+                        <a:solidFill>
+                          <a:srgbClr val="23272D"/>
+                        </a:solidFill>
+                        <a:latin typeface="Aptos"/>
+                      </a:endParaRPr>
+                    </a:p>
+                  </a:txBody>
+                  <a:tcPr>
+                    <a:solidFill>
+                      <a:srgbClr val="FFFFFF"/>
+                    </a:solidFill>
+                  </a:tcPr>
+                </a:tc>
+                <a:tc>
+                  <a:txBody>
+                    <a:bodyPr/>
+                    <a:lstStyle/>
+                    <a:p>
+                      <a:pPr algn="ctr"/>
+                      <a:r>
+                        <a:rPr sz="1200" b="0">
+                          <a:solidFill>
+                            <a:srgbClr val="23272D"/>
+                          </a:solidFill>
+                          <a:latin typeface="Aptos"/>
+                        </a:rPr>
+                        <a:t>0.6578</a:t>
+                      </a:r>
+                      <a:endParaRPr sz="1200" b="0">
+                        <a:solidFill>
+                          <a:srgbClr val="23272D"/>
+                        </a:solidFill>
+                        <a:latin typeface="Aptos"/>
+                      </a:endParaRPr>
+                    </a:p>
+                  </a:txBody>
+                  <a:tcPr>
+                    <a:solidFill>
+                      <a:srgbClr val="FFFFFF"/>
+                    </a:solidFill>
+                  </a:tcPr>
+                </a:tc>
+                <a:tc>
+                  <a:txBody>
+                    <a:bodyPr/>
+                    <a:lstStyle/>
+                    <a:p>
+                      <a:pPr algn="ctr"/>
+                      <a:r>
+                        <a:rPr sz="1200" b="0">
+                          <a:solidFill>
+                            <a:srgbClr val="23272D"/>
+                          </a:solidFill>
+                          <a:latin typeface="Aptos"/>
+                        </a:rPr>
+                        <a:t>0.8678</a:t>
+                      </a:r>
+                      <a:endParaRPr sz="1200" b="0">
+                        <a:solidFill>
+                          <a:srgbClr val="23272D"/>
+                        </a:solidFill>
+                        <a:latin typeface="Aptos"/>
+                      </a:endParaRPr>
+                    </a:p>
+                  </a:txBody>
+                  <a:tcPr>
+                    <a:solidFill>
+                      <a:srgbClr val="FFFFFF"/>
+                    </a:solidFill>
+                  </a:tcPr>
+                </a:tc>
+                <a:tc>
+                  <a:txBody>
+                    <a:bodyPr/>
+                    <a:lstStyle/>
+                    <a:p>
+                      <a:pPr algn="ctr"/>
+                      <a:r>
+                        <a:rPr sz="1200" b="0">
+                          <a:solidFill>
+                            <a:srgbClr val="23272D"/>
+                          </a:solidFill>
+                          <a:latin typeface="Aptos"/>
+                        </a:rPr>
+                        <a:t>0.0645</a:t>
+                      </a:r>
+                      <a:endParaRPr sz="1200" b="0">
+                        <a:solidFill>
+                          <a:srgbClr val="23272D"/>
+                        </a:solidFill>
+                        <a:latin typeface="Aptos"/>
+                      </a:endParaRPr>
+                    </a:p>
+                  </a:txBody>
+                  <a:tcPr>
+                    <a:solidFill>
+                      <a:srgbClr val="FFFFFF"/>
+                    </a:solidFill>
+                  </a:tcPr>
+                </a:tc>
+                <a:tc>
+                  <a:txBody>
+                    <a:bodyPr/>
+                    <a:lstStyle/>
+                    <a:p>
+                      <a:pPr algn="ctr"/>
+                      <a:r>
+                        <a:rPr sz="1200" b="0">
+                          <a:solidFill>
+                            <a:srgbClr val="23272D"/>
+                          </a:solidFill>
+                          <a:latin typeface="Aptos"/>
+                        </a:rPr>
+                        <a:t>0.0801</a:t>
+                      </a:r>
+                      <a:endParaRPr sz="1200" b="0">
+                        <a:solidFill>
+                          <a:srgbClr val="23272D"/>
+                        </a:solidFill>
+                        <a:latin typeface="Aptos"/>
+                      </a:endParaRPr>
+                    </a:p>
+                  </a:txBody>
+                  <a:tcPr>
+                    <a:solidFill>
+                      <a:srgbClr val="FFFFFF"/>
+                    </a:solidFill>
+                  </a:tcPr>
+                </a:tc>
+                <a:tc>
+                  <a:txBody>
+                    <a:bodyPr/>
+                    <a:lstStyle/>
+                    <a:p>
+                      <a:pPr algn="ctr"/>
+                      <a:r>
+                        <a:rPr sz="1200" b="0">
+                          <a:solidFill>
+                            <a:srgbClr val="23272D"/>
+                          </a:solidFill>
+                          <a:latin typeface="Aptos"/>
+                        </a:rPr>
+                        <a:t>0.0596</a:t>
+                      </a:r>
+                      <a:endParaRPr sz="1200" b="0">
+                        <a:solidFill>
+                          <a:srgbClr val="23272D"/>
+                        </a:solidFill>
+                        <a:latin typeface="Aptos"/>
+                      </a:endParaRPr>
+                    </a:p>
+                  </a:txBody>
+                  <a:tcPr>
+                    <a:solidFill>
+                      <a:srgbClr val="FFFFFF"/>
+                    </a:solidFill>
+                  </a:tcPr>
+                </a:tc>
+                <a:tc>
+                  <a:txBody>
+                    <a:bodyPr/>
+                    <a:lstStyle/>
+                    <a:p>
+                      <a:pPr algn="ctr"/>
+                      <a:r>
+                        <a:rPr sz="1200" b="0">
+                          <a:solidFill>
+                            <a:srgbClr val="23272D"/>
+                          </a:solidFill>
+                          <a:latin typeface="Aptos"/>
+                        </a:rPr>
+                        <a:t>0.0998</a:t>
+                      </a:r>
+                      <a:endParaRPr sz="1200" b="0">
+                        <a:solidFill>
+                          <a:srgbClr val="23272D"/>
+                        </a:solidFill>
+                        <a:latin typeface="Aptos"/>
+                      </a:endParaRPr>
+                    </a:p>
+                  </a:txBody>
+                  <a:tcPr>
+                    <a:solidFill>
+                      <a:srgbClr val="FFFFFF"/>
+                    </a:solidFill>
+                  </a:tcPr>
+                </a:tc>
+              </a:tr>
+              <a:tr h="466344">
+                <a:tc>
+                  <a:txBody>
+                    <a:bodyPr/>
+                    <a:lstStyle/>
+                    <a:p>
+                      <a:pPr algn="ctr"/>
+                      <a:r>
+                        <a:rPr sz="1200" b="0">
+                          <a:solidFill>
+                            <a:srgbClr val="23272D"/>
+                          </a:solidFill>
+                          <a:latin typeface="Aptos"/>
+                        </a:rPr>
+                        <a:t>BiasedMF</a:t>
+                      </a:r>
+                      <a:endParaRPr sz="1200" b="0">
+                        <a:solidFill>
+                          <a:srgbClr val="23272D"/>
+                        </a:solidFill>
+                        <a:latin typeface="Aptos"/>
+                      </a:endParaRPr>
+                    </a:p>
+                  </a:txBody>
+                  <a:tcPr>
+                    <a:solidFill>
+                      <a:srgbClr val="FFFFFF"/>
+                    </a:solidFill>
+                  </a:tcPr>
+                </a:tc>
+                <a:tc>
+                  <a:txBody>
+                    <a:bodyPr/>
+                    <a:lstStyle/>
+                    <a:p>
+                      <a:pPr algn="ctr"/>
+                      <a:r>
+                        <a:rPr sz="1200" b="0">
+                          <a:solidFill>
+                            <a:srgbClr val="23272D"/>
+                          </a:solidFill>
+                          <a:latin typeface="Aptos"/>
+                        </a:rPr>
+                        <a:t>0.8089</a:t>
+                      </a:r>
+                      <a:endParaRPr sz="1200" b="0">
+                        <a:solidFill>
+                          <a:srgbClr val="23272D"/>
+                        </a:solidFill>
+                        <a:latin typeface="Aptos"/>
+                      </a:endParaRPr>
+                    </a:p>
+                  </a:txBody>
+                  <a:tcPr>
+                    <a:solidFill>
+                      <a:srgbClr val="FFFFFF"/>
+                    </a:solidFill>
+                  </a:tcPr>
+                </a:tc>
+                <a:tc>
+                  <a:txBody>
+                    <a:bodyPr/>
+                    <a:lstStyle/>
+                    <a:p>
+                      <a:pPr algn="ctr"/>
+                      <a:r>
+                        <a:rPr sz="1200" b="0">
+                          <a:solidFill>
+                            <a:srgbClr val="23272D"/>
+                          </a:solidFill>
+                          <a:latin typeface="Aptos"/>
+                        </a:rPr>
+                        <a:t>1.0211</a:t>
+                      </a:r>
+                      <a:endParaRPr sz="1200" b="0">
+                        <a:solidFill>
+                          <a:srgbClr val="23272D"/>
+                        </a:solidFill>
+                        <a:latin typeface="Aptos"/>
+                      </a:endParaRPr>
+                    </a:p>
+                  </a:txBody>
+                  <a:tcPr>
+                    <a:solidFill>
+                      <a:srgbClr val="FFFFFF"/>
+                    </a:solidFill>
+                  </a:tcPr>
+                </a:tc>
+                <a:tc>
+                  <a:txBody>
+                    <a:bodyPr/>
+                    <a:lstStyle/>
+                    <a:p>
+                      <a:pPr algn="ctr"/>
+                      <a:r>
+                        <a:rPr sz="1200" b="0">
+                          <a:solidFill>
+                            <a:srgbClr val="23272D"/>
+                          </a:solidFill>
+                          <a:latin typeface="Aptos"/>
+                        </a:rPr>
+                        <a:t>0.1137</a:t>
+                      </a:r>
+                      <a:endParaRPr sz="1200" b="0">
+                        <a:solidFill>
+                          <a:srgbClr val="23272D"/>
+                        </a:solidFill>
+                        <a:latin typeface="Aptos"/>
+                      </a:endParaRPr>
+                    </a:p>
+                  </a:txBody>
+                  <a:tcPr>
+                    <a:solidFill>
+                      <a:srgbClr val="FFFFFF"/>
+                    </a:solidFill>
+                  </a:tcPr>
+                </a:tc>
+                <a:tc>
+                  <a:txBody>
+                    <a:bodyPr/>
+                    <a:lstStyle/>
+                    <a:p>
+                      <a:pPr algn="ctr"/>
+                      <a:r>
+                        <a:rPr sz="1200" b="0">
+                          <a:solidFill>
+                            <a:srgbClr val="23272D"/>
+                          </a:solidFill>
+                          <a:latin typeface="Aptos"/>
+                        </a:rPr>
+                        <a:t>0.0883</a:t>
+                      </a:r>
+                      <a:endParaRPr sz="1200" b="0">
+                        <a:solidFill>
+                          <a:srgbClr val="23272D"/>
+                        </a:solidFill>
+                        <a:latin typeface="Aptos"/>
+                      </a:endParaRPr>
+                    </a:p>
+                  </a:txBody>
+                  <a:tcPr>
+                    <a:solidFill>
+                      <a:srgbClr val="FFFFFF"/>
+                    </a:solidFill>
+                  </a:tcPr>
+                </a:tc>
+                <a:tc>
+                  <a:txBody>
+                    <a:bodyPr/>
+                    <a:lstStyle/>
+                    <a:p>
+                      <a:pPr algn="ctr"/>
+                      <a:r>
+                        <a:rPr sz="1200" b="0">
+                          <a:solidFill>
+                            <a:srgbClr val="23272D"/>
+                          </a:solidFill>
+                          <a:latin typeface="Aptos"/>
+                        </a:rPr>
+                        <a:t>0.0780</a:t>
+                      </a:r>
+                      <a:endParaRPr sz="1200" b="0">
+                        <a:solidFill>
+                          <a:srgbClr val="23272D"/>
+                        </a:solidFill>
+                        <a:latin typeface="Aptos"/>
+                      </a:endParaRPr>
+                    </a:p>
+                  </a:txBody>
+                  <a:tcPr>
+                    <a:solidFill>
+                      <a:srgbClr val="FFFFFF"/>
+                    </a:solidFill>
+                  </a:tcPr>
+                </a:tc>
+                <a:tc>
+                  <a:txBody>
+                    <a:bodyPr/>
+                    <a:lstStyle/>
+                    <a:p>
+                      <a:pPr algn="ctr"/>
+                      <a:r>
+                        <a:rPr sz="1200" b="0">
+                          <a:solidFill>
+                            <a:srgbClr val="23272D"/>
+                          </a:solidFill>
+                          <a:latin typeface="Aptos"/>
+                        </a:rPr>
+                        <a:t>0.1439</a:t>
+                      </a:r>
+                      <a:endParaRPr sz="1200" b="0">
+                        <a:solidFill>
+                          <a:srgbClr val="23272D"/>
+                        </a:solidFill>
+                        <a:latin typeface="Aptos"/>
+                      </a:endParaRPr>
+                    </a:p>
+                  </a:txBody>
+                  <a:tcPr>
+                    <a:solidFill>
+                      <a:srgbClr val="FFFFFF"/>
+                    </a:solidFill>
+                  </a:tcPr>
+                </a:tc>
+              </a:tr>
+              <a:tr h="466344">
+                <a:tc>
+                  <a:txBody>
+                    <a:bodyPr/>
+                    <a:lstStyle/>
+                    <a:p>
+                      <a:pPr algn="ctr"/>
+                      <a:r>
+                        <a:rPr sz="1200" b="0">
+                          <a:solidFill>
+                            <a:srgbClr val="23272D"/>
+                          </a:solidFill>
+                          <a:latin typeface="Aptos"/>
+                        </a:rPr>
+                        <a:t>ClassicNeuMF</a:t>
+                      </a:r>
+                      <a:endParaRPr sz="1200" b="0">
+                        <a:solidFill>
+                          <a:srgbClr val="23272D"/>
+                        </a:solidFill>
+                        <a:latin typeface="Aptos"/>
+                      </a:endParaRPr>
+                    </a:p>
+                  </a:txBody>
+                  <a:tcPr>
+                    <a:solidFill>
+                      <a:srgbClr val="FFFFFF"/>
+                    </a:solidFill>
+                  </a:tcPr>
+                </a:tc>
+                <a:tc>
+                  <a:txBody>
+                    <a:bodyPr/>
+                    <a:lstStyle/>
+                    <a:p>
+                      <a:pPr algn="ctr"/>
+                      <a:r>
+                        <a:rPr sz="1200" b="0">
+                          <a:solidFill>
+                            <a:srgbClr val="23272D"/>
+                          </a:solidFill>
+                          <a:latin typeface="Aptos"/>
+                        </a:rPr>
+                        <a:t>0.7204</a:t>
+                      </a:r>
+                      <a:endParaRPr sz="1200" b="0">
+                        <a:solidFill>
+                          <a:srgbClr val="23272D"/>
+                        </a:solidFill>
+                        <a:latin typeface="Aptos"/>
+                      </a:endParaRPr>
+                    </a:p>
+                  </a:txBody>
+                  <a:tcPr>
+                    <a:solidFill>
+                      <a:srgbClr val="FFFFFF"/>
+                    </a:solidFill>
+                  </a:tcPr>
+                </a:tc>
+                <a:tc>
+                  <a:txBody>
+                    <a:bodyPr/>
+                    <a:lstStyle/>
+                    <a:p>
+                      <a:pPr algn="ctr"/>
+                      <a:r>
+                        <a:rPr sz="1200" b="0">
+                          <a:solidFill>
+                            <a:srgbClr val="23272D"/>
+                          </a:solidFill>
+                          <a:latin typeface="Aptos"/>
+                        </a:rPr>
+                        <a:t>0.9423</a:t>
+                      </a:r>
+                      <a:endParaRPr sz="1200" b="0">
+                        <a:solidFill>
+                          <a:srgbClr val="23272D"/>
+                        </a:solidFill>
+                        <a:latin typeface="Aptos"/>
+                      </a:endParaRPr>
+                    </a:p>
+                  </a:txBody>
+                  <a:tcPr>
+                    <a:solidFill>
+                      <a:srgbClr val="FFFFFF"/>
+                    </a:solidFill>
+                  </a:tcPr>
+                </a:tc>
+                <a:tc>
+                  <a:txBody>
+                    <a:bodyPr/>
+                    <a:lstStyle/>
+                    <a:p>
+                      <a:pPr algn="ctr"/>
+                      <a:r>
+                        <a:rPr sz="1200" b="0">
+                          <a:solidFill>
+                            <a:srgbClr val="23272D"/>
+                          </a:solidFill>
+                          <a:latin typeface="Aptos"/>
+                        </a:rPr>
+                        <a:t>0.0861</a:t>
+                      </a:r>
+                      <a:endParaRPr sz="1200" b="0">
+                        <a:solidFill>
+                          <a:srgbClr val="23272D"/>
+                        </a:solidFill>
+                        <a:latin typeface="Aptos"/>
+                      </a:endParaRPr>
+                    </a:p>
+                  </a:txBody>
+                  <a:tcPr>
+                    <a:solidFill>
+                      <a:srgbClr val="FFFFFF"/>
+                    </a:solidFill>
+                  </a:tcPr>
+                </a:tc>
+                <a:tc>
+                  <a:txBody>
+                    <a:bodyPr/>
+                    <a:lstStyle/>
+                    <a:p>
+                      <a:pPr algn="ctr"/>
+                      <a:r>
+                        <a:rPr sz="1200" b="0">
+                          <a:solidFill>
+                            <a:srgbClr val="23272D"/>
+                          </a:solidFill>
+                          <a:latin typeface="Aptos"/>
+                        </a:rPr>
+                        <a:t>0.0656</a:t>
+                      </a:r>
+                      <a:endParaRPr sz="1200" b="0">
+                        <a:solidFill>
+                          <a:srgbClr val="23272D"/>
+                        </a:solidFill>
+                        <a:latin typeface="Aptos"/>
+                      </a:endParaRPr>
+                    </a:p>
+                  </a:txBody>
+                  <a:tcPr>
+                    <a:solidFill>
+                      <a:srgbClr val="FFFFFF"/>
+                    </a:solidFill>
+                  </a:tcPr>
+                </a:tc>
+                <a:tc>
+                  <a:txBody>
+                    <a:bodyPr/>
+                    <a:lstStyle/>
+                    <a:p>
+                      <a:pPr algn="ctr"/>
+                      <a:r>
+                        <a:rPr sz="1200" b="0">
+                          <a:solidFill>
+                            <a:srgbClr val="23272D"/>
+                          </a:solidFill>
+                          <a:latin typeface="Aptos"/>
+                        </a:rPr>
+                        <a:t>0.0580</a:t>
+                      </a:r>
+                      <a:endParaRPr sz="1200" b="0">
+                        <a:solidFill>
+                          <a:srgbClr val="23272D"/>
+                        </a:solidFill>
+                        <a:latin typeface="Aptos"/>
+                      </a:endParaRPr>
+                    </a:p>
+                  </a:txBody>
+                  <a:tcPr>
+                    <a:solidFill>
+                      <a:srgbClr val="FFFFFF"/>
+                    </a:solidFill>
+                  </a:tcPr>
+                </a:tc>
+                <a:tc>
+                  <a:txBody>
+                    <a:bodyPr/>
+                    <a:lstStyle/>
+                    <a:p>
+                      <a:pPr algn="ctr"/>
+                      <a:r>
+                        <a:rPr sz="1200" b="0">
+                          <a:solidFill>
+                            <a:srgbClr val="23272D"/>
+                          </a:solidFill>
+                          <a:latin typeface="Aptos"/>
+                        </a:rPr>
+                        <a:t>0.1036</a:t>
+                      </a:r>
+                      <a:endParaRPr sz="1200" b="0">
+                        <a:solidFill>
+                          <a:srgbClr val="23272D"/>
+                        </a:solidFill>
+                        <a:latin typeface="Aptos"/>
+                      </a:endParaRPr>
+                    </a:p>
+                  </a:txBody>
+                  <a:tcPr>
+                    <a:solidFill>
+                      <a:srgbClr val="FFFFFF"/>
+                    </a:solidFill>
+                  </a:tcPr>
+                </a:tc>
+              </a:tr>
+              <a:tr h="466344">
+                <a:tc>
+                  <a:txBody>
+                    <a:bodyPr/>
+                    <a:lstStyle/>
+                    <a:p>
+                      <a:pPr algn="ctr"/>
+                      <a:r>
+                        <a:rPr sz="1200" b="1">
+                          <a:solidFill>
+                            <a:srgbClr val="23272D"/>
+                          </a:solidFill>
+                          <a:latin typeface="Aptos"/>
+                        </a:rPr>
+                        <a:t>FlowNeuMF</a:t>
+                      </a:r>
+                      <a:endParaRPr sz="1200" b="1">
+                        <a:solidFill>
+                          <a:srgbClr val="23272D"/>
+                        </a:solidFill>
+                        <a:latin typeface="Aptos"/>
+                      </a:endParaRPr>
+                    </a:p>
+                  </a:txBody>
+                  <a:tcPr>
+                    <a:solidFill>
+                      <a:srgbClr val="F6E0DE"/>
+                    </a:solidFill>
+                  </a:tcPr>
+                </a:tc>
+                <a:tc>
+                  <a:txBody>
+                    <a:bodyPr/>
+                    <a:lstStyle/>
+                    <a:p>
+                      <a:pPr algn="ctr"/>
+                      <a:r>
+                        <a:rPr sz="1200" b="1">
+                          <a:solidFill>
+                            <a:srgbClr val="23272D"/>
+                          </a:solidFill>
+                          <a:latin typeface="Aptos"/>
+                        </a:rPr>
+                        <a:t>0.7205</a:t>
+                      </a:r>
+                      <a:endParaRPr sz="1200" b="1">
+                        <a:solidFill>
+                          <a:srgbClr val="23272D"/>
+                        </a:solidFill>
+                        <a:latin typeface="Aptos"/>
+                      </a:endParaRPr>
+                    </a:p>
+                  </a:txBody>
+                  <a:tcPr>
+                    <a:solidFill>
+                      <a:srgbClr val="F6E0DE"/>
+                    </a:solidFill>
+                  </a:tcPr>
+                </a:tc>
+                <a:tc>
+                  <a:txBody>
+                    <a:bodyPr/>
+                    <a:lstStyle/>
+                    <a:p>
+                      <a:pPr algn="ctr"/>
+                      <a:r>
+                        <a:rPr sz="1200" b="1">
+                          <a:solidFill>
+                            <a:srgbClr val="23272D"/>
+                          </a:solidFill>
+                          <a:latin typeface="Aptos"/>
+                        </a:rPr>
+                        <a:t>0.9421</a:t>
+                      </a:r>
+                      <a:endParaRPr sz="1200" b="1">
+                        <a:solidFill>
+                          <a:srgbClr val="23272D"/>
+                        </a:solidFill>
+                        <a:latin typeface="Aptos"/>
+                      </a:endParaRPr>
+                    </a:p>
+                  </a:txBody>
+                  <a:tcPr>
+                    <a:solidFill>
+                      <a:srgbClr val="F6E0DE"/>
+                    </a:solidFill>
+                  </a:tcPr>
+                </a:tc>
+                <a:tc>
+                  <a:txBody>
+                    <a:bodyPr/>
+                    <a:lstStyle/>
+                    <a:p>
+                      <a:pPr algn="ctr"/>
+                      <a:r>
+                        <a:rPr sz="1200" b="1">
+                          <a:solidFill>
+                            <a:srgbClr val="23272D"/>
+                          </a:solidFill>
+                          <a:latin typeface="Aptos"/>
+                        </a:rPr>
+                        <a:t>0.0941</a:t>
+                      </a:r>
+                      <a:endParaRPr sz="1200" b="1">
+                        <a:solidFill>
+                          <a:srgbClr val="23272D"/>
+                        </a:solidFill>
+                        <a:latin typeface="Aptos"/>
+                      </a:endParaRPr>
+                    </a:p>
+                  </a:txBody>
+                  <a:tcPr>
+                    <a:solidFill>
+                      <a:srgbClr val="F6E0DE"/>
+                    </a:solidFill>
+                  </a:tcPr>
+                </a:tc>
+                <a:tc>
+                  <a:txBody>
+                    <a:bodyPr/>
+                    <a:lstStyle/>
+                    <a:p>
+                      <a:pPr algn="ctr"/>
+                      <a:r>
+                        <a:rPr sz="1200" b="1">
+                          <a:solidFill>
+                            <a:srgbClr val="23272D"/>
+                          </a:solidFill>
+                          <a:latin typeface="Aptos"/>
+                        </a:rPr>
+                        <a:t>0.0663</a:t>
+                      </a:r>
+                      <a:endParaRPr sz="1200" b="1">
+                        <a:solidFill>
+                          <a:srgbClr val="23272D"/>
+                        </a:solidFill>
+                        <a:latin typeface="Aptos"/>
+                      </a:endParaRPr>
+                    </a:p>
+                  </a:txBody>
+                  <a:tcPr>
+                    <a:solidFill>
+                      <a:srgbClr val="F6E0DE"/>
+                    </a:solidFill>
+                  </a:tcPr>
+                </a:tc>
+                <a:tc>
+                  <a:txBody>
+                    <a:bodyPr/>
+                    <a:lstStyle/>
+                    <a:p>
+                      <a:pPr algn="ctr"/>
+                      <a:r>
+                        <a:rPr sz="1200" b="1">
+                          <a:solidFill>
+                            <a:srgbClr val="23272D"/>
+                          </a:solidFill>
+                          <a:latin typeface="Aptos"/>
+                        </a:rPr>
+                        <a:t>0.0608</a:t>
+                      </a:r>
+                      <a:endParaRPr sz="1200" b="1">
+                        <a:solidFill>
+                          <a:srgbClr val="23272D"/>
+                        </a:solidFill>
+                        <a:latin typeface="Aptos"/>
+                      </a:endParaRPr>
+                    </a:p>
+                  </a:txBody>
+                  <a:tcPr>
+                    <a:solidFill>
+                      <a:srgbClr val="F6E0DE"/>
+                    </a:solidFill>
+                  </a:tcPr>
+                </a:tc>
+                <a:tc>
+                  <a:txBody>
+                    <a:bodyPr/>
+                    <a:lstStyle/>
+                    <a:p>
+                      <a:pPr algn="ctr"/>
+                      <a:r>
+                        <a:rPr sz="1200" b="1">
+                          <a:solidFill>
+                            <a:srgbClr val="23272D"/>
+                          </a:solidFill>
+                          <a:latin typeface="Aptos"/>
+                        </a:rPr>
+                        <a:t>0.1153</a:t>
+                      </a:r>
+                      <a:endParaRPr sz="1200" b="1">
+                        <a:solidFill>
+                          <a:srgbClr val="23272D"/>
+                        </a:solidFill>
+                        <a:latin typeface="Aptos"/>
+                      </a:endParaRPr>
+                    </a:p>
+                  </a:txBody>
+                  <a:tcPr>
+                    <a:solidFill>
+                      <a:srgbClr val="F6E0DE"/>
+                    </a:solidFill>
+                  </a:tcPr>
+                </a:tc>
+              </a:tr>
+            </a:tbl>
+          </a:graphicData>
+        </a:graphic>
+      </p:graphicFrame>
+      <p:sp>
+        <p:nvSpPr>
+          <p:cNvPr id="6" name="TextBox 5"/>
+          <p:cNvSpPr txBox="1"/>
+          <p:nvPr/>
+        </p:nvSpPr>
+        <p:spPr>
+          <a:xfrm>
+            <a:off x="548640" y="3947160"/>
+            <a:ext cx="5394960" cy="1666875"/>
+          </a:xfrm>
+          <a:prstGeom prst="rect">
+            <a:avLst/>
+          </a:prstGeom>
+          <a:noFill/>
+        </p:spPr>
+        <p:txBody>
+          <a:bodyPr wrap="square" lIns="0" tIns="0" rIns="0" bIns="0" anchor="t">
+            <a:spAutoFit/>
+          </a:bodyPr>
+          <a:lstStyle/>
+          <a:p>
+            <a:pPr marL="342900" indent="-342900">
+              <a:spcAft>
+                <a:spcPts val="800"/>
+              </a:spcAft>
+              <a:buFont typeface="Arial" panose="020B0604020202020204" pitchFamily="34" charset="0"/>
+              <a:buChar char="•"/>
+            </a:pPr>
+            <a:r>
+              <a:rPr sz="1900">
+                <a:solidFill>
+                  <a:srgbClr val="23272D"/>
+                </a:solidFill>
+                <a:latin typeface="Aptos"/>
+              </a:rPr>
+              <a:t>ItemCF is best on MAE/RMSE.</a:t>
+            </a:r>
+            <a:endParaRPr sz="1900">
+              <a:solidFill>
+                <a:srgbClr val="23272D"/>
+              </a:solidFill>
+              <a:latin typeface="Aptos"/>
+            </a:endParaRPr>
+          </a:p>
+          <a:p>
+            <a:pPr marL="342900" indent="-342900">
+              <a:spcAft>
+                <a:spcPts val="800"/>
+              </a:spcAft>
+              <a:buFont typeface="Arial" panose="020B0604020202020204" pitchFamily="34" charset="0"/>
+              <a:buChar char="•"/>
+            </a:pPr>
+            <a:r>
+              <a:rPr sz="1900">
+                <a:solidFill>
+                  <a:srgbClr val="23272D"/>
+                </a:solidFill>
+                <a:latin typeface="Aptos"/>
+              </a:rPr>
+              <a:t>BiasedMF remains the strongest overall ranking baseline.</a:t>
+            </a:r>
+            <a:endParaRPr sz="1900">
+              <a:solidFill>
+                <a:srgbClr val="23272D"/>
+              </a:solidFill>
+              <a:latin typeface="Aptos"/>
+            </a:endParaRPr>
+          </a:p>
+          <a:p>
+            <a:pPr marL="342900" indent="-342900">
+              <a:spcAft>
+                <a:spcPts val="800"/>
+              </a:spcAft>
+              <a:buFont typeface="Arial" panose="020B0604020202020204" pitchFamily="34" charset="0"/>
+              <a:buChar char="•"/>
+            </a:pPr>
+            <a:r>
+              <a:rPr sz="1900">
+                <a:solidFill>
+                  <a:srgbClr val="23272D"/>
+                </a:solidFill>
+                <a:latin typeface="Aptos"/>
+              </a:rPr>
+              <a:t>FlowNeuMF beats ClassicNeuMF on every Top-10 metric.</a:t>
+            </a:r>
+            <a:endParaRPr sz="1900">
+              <a:solidFill>
+                <a:srgbClr val="23272D"/>
+              </a:solidFill>
+              <a:latin typeface="Aptos"/>
+            </a:endParaRPr>
+          </a:p>
+        </p:txBody>
+      </p:sp>
+      <p:pic>
+        <p:nvPicPr>
+          <p:cNvPr id="7" name="Picture 6" descr="ndcg_at_10.png"/>
+          <p:cNvPicPr>
+            <a:picLocks noChangeAspect="1"/>
+          </p:cNvPicPr>
+          <p:nvPr/>
+        </p:nvPicPr>
+        <p:blipFill>
+          <a:blip r:embed="rId1"/>
+          <a:stretch>
+            <a:fillRect/>
+          </a:stretch>
+        </p:blipFill>
+        <p:spPr>
+          <a:xfrm>
+            <a:off x="6942455" y="3554730"/>
+            <a:ext cx="3700145" cy="2537460"/>
+          </a:xfrm>
+          <a:prstGeom prst="rect">
+            <a:avLst/>
+          </a:prstGeom>
+        </p:spPr>
+      </p:pic>
+      <p:sp>
+        <p:nvSpPr>
+          <p:cNvPr id="8" name="TextBox 7"/>
+          <p:cNvSpPr txBox="1"/>
+          <p:nvPr/>
+        </p:nvSpPr>
+        <p:spPr>
+          <a:xfrm>
+            <a:off x="411480" y="6446520"/>
+            <a:ext cx="11155680" cy="182880"/>
+          </a:xfrm>
+          <a:prstGeom prst="rect">
+            <a:avLst/>
+          </a:prstGeom>
+          <a:noFill/>
+        </p:spPr>
+        <p:txBody>
+          <a:bodyPr wrap="none" anchor="t">
+            <a:spAutoFit/>
+          </a:bodyPr>
+          <a:lstStyle/>
+          <a:p>
+            <a:pPr algn="l"/>
+            <a:r>
+              <a:rPr sz="1000" b="0">
+                <a:solidFill>
+                  <a:srgbClr val="626975"/>
+                </a:solidFill>
+                <a:latin typeface="Aptos"/>
+              </a:rPr>
+              <a:t>Flow Ranking | Sen Fang | CS550 Final Project | 5</a:t>
+            </a:r>
+            <a:endParaRPr sz="1000" b="0">
+              <a:solidFill>
+                <a:srgbClr val="626975"/>
+              </a:solidFill>
+              <a:latin typeface="Aptos"/>
+            </a:endParaRPr>
+          </a:p>
+        </p:txBody>
+      </p:sp>
+    </p:spTree>
+  </p:cSld>
+  <p:clrMapOvr>
+    <a:masterClrMapping/>
+  </p:clrMapOvr>
+</p:sld>
+</file>
+
+<file path=ppt/slides/slide6.xml><?xml version="1.0" encoding="utf-8"?>
+<p:sld xmlns:a="http://schemas.openxmlformats.org/drawingml/2006/main" xmlns:r="http://schemas.openxmlformats.org/officeDocument/2006/relationships" xmlns:p="http://schemas.openxmlformats.org/presentationml/2006/main">
+  <p:cSld>
+    <p:bg>
+      <p:bgPr>
+        <a:solidFill>
+          <a:srgbClr val="F7F6F3"/>
+        </a:solidFill>
+        <a:effectLst/>
+      </p:bgPr>
+    </p:bg>
+    <p:spTree>
+      <p:nvGrpSpPr>
+        <p:cNvPr id="1" name=""/>
+        <p:cNvGrpSpPr/>
+        <p:nvPr/>
+      </p:nvGrpSpPr>
+      <p:grpSpPr/>
+      <p:sp>
+        <p:nvSpPr>
+          <p:cNvPr id="2" name="Rectangle 1"/>
+          <p:cNvSpPr/>
+          <p:nvPr/>
+        </p:nvSpPr>
+        <p:spPr>
+          <a:xfrm>
+            <a:off x="0" y="0"/>
+            <a:ext cx="12191695" cy="475488"/>
+          </a:xfrm>
+          <a:prstGeom prst="rect">
+            <a:avLst/>
+          </a:prstGeom>
+          <a:solidFill>
+            <a:srgbClr val="112244"/>
+          </a:solidFill>
+          <a:ln>
+            <a:noFill/>
+          </a:ln>
+        </p:spPr>
+        <p:style>
+          <a:lnRef idx="1">
+            <a:schemeClr val="accent1"/>
+          </a:lnRef>
+          <a:fillRef idx="3">
+            <a:schemeClr val="accent1"/>
+          </a:fillRef>
+          <a:effectRef idx="2">
+            <a:schemeClr val="accent1"/>
+          </a:effectRef>
+          <a:fontRef idx="minor">
+            <a:schemeClr val="lt1"/>
+          </a:fontRef>
+        </p:style>
+        <p:txBody>
+          <a:bodyPr rtlCol="0" anchor="ctr"/>
+          <a:lstStyle/>
+          <a:p>
+            <a:pPr algn="ctr"/>
+          </a:p>
+        </p:txBody>
+      </p:sp>
+      <p:sp>
+        <p:nvSpPr>
+          <p:cNvPr id="3" name="TextBox 2"/>
+          <p:cNvSpPr txBox="1"/>
+          <p:nvPr/>
+        </p:nvSpPr>
+        <p:spPr>
+          <a:xfrm>
+            <a:off x="411480" y="64008"/>
+            <a:ext cx="7132320" cy="237744"/>
+          </a:xfrm>
+          <a:prstGeom prst="rect">
+            <a:avLst/>
+          </a:prstGeom>
+          <a:noFill/>
+        </p:spPr>
+        <p:txBody>
+          <a:bodyPr wrap="none" anchor="t">
+            <a:spAutoFit/>
+          </a:bodyPr>
+          <a:lstStyle/>
+          <a:p>
+            <a:pPr algn="l"/>
+            <a:r>
+              <a:rPr sz="2600" b="1">
+                <a:solidFill>
+                  <a:srgbClr val="FFFFFF"/>
+                </a:solidFill>
+                <a:latin typeface="Cambria" panose="02040503050406030204"/>
+              </a:rPr>
+              <a:t>Ranking Quality Analysis</a:t>
+            </a:r>
+            <a:endParaRPr sz="2600" b="1">
+              <a:solidFill>
+                <a:srgbClr val="FFFFFF"/>
+              </a:solidFill>
+              <a:latin typeface="Cambria" panose="02040503050406030204"/>
+            </a:endParaRPr>
+          </a:p>
+        </p:txBody>
+      </p:sp>
+      <p:sp>
+        <p:nvSpPr>
+          <p:cNvPr id="4" name="TextBox 3"/>
+          <p:cNvSpPr txBox="1"/>
+          <p:nvPr/>
+        </p:nvSpPr>
+        <p:spPr>
+          <a:xfrm>
+            <a:off x="7909560" y="91440"/>
+            <a:ext cx="3840480" cy="182880"/>
+          </a:xfrm>
+          <a:prstGeom prst="rect">
+            <a:avLst/>
+          </a:prstGeom>
+          <a:noFill/>
+        </p:spPr>
+        <p:txBody>
+          <a:bodyPr wrap="none" anchor="t">
+            <a:spAutoFit/>
+          </a:bodyPr>
+          <a:lstStyle/>
+          <a:p>
+            <a:pPr algn="r"/>
+            <a:r>
+              <a:rPr sz="1100" b="0">
+                <a:solidFill>
+                  <a:srgbClr val="FFFFFF"/>
+                </a:solidFill>
+                <a:latin typeface="Aptos"/>
+              </a:rPr>
+              <a:t>Where the proposed method helps</a:t>
+            </a:r>
+            <a:endParaRPr sz="1100" b="0">
+              <a:solidFill>
+                <a:srgbClr val="FFFFFF"/>
+              </a:solidFill>
+              <a:latin typeface="Aptos"/>
+            </a:endParaRPr>
+          </a:p>
+        </p:txBody>
+      </p:sp>
+      <p:pic>
+        <p:nvPicPr>
+          <p:cNvPr id="5" name="Picture 4" descr="topn_metrics_bar.png"/>
+          <p:cNvPicPr>
+            <a:picLocks noChangeAspect="1"/>
+          </p:cNvPicPr>
+          <p:nvPr/>
+        </p:nvPicPr>
+        <p:blipFill>
+          <a:blip r:embed="rId1"/>
+          <a:stretch>
+            <a:fillRect/>
+          </a:stretch>
+        </p:blipFill>
+        <p:spPr>
+          <a:xfrm>
+            <a:off x="475488" y="914400"/>
+            <a:ext cx="6492240" cy="4674413"/>
+          </a:xfrm>
+          <a:prstGeom prst="rect">
+            <a:avLst/>
+          </a:prstGeom>
+        </p:spPr>
+      </p:pic>
+      <p:sp>
+        <p:nvSpPr>
+          <p:cNvPr id="6" name="TextBox 5"/>
+          <p:cNvSpPr txBox="1"/>
+          <p:nvPr/>
+        </p:nvSpPr>
+        <p:spPr>
+          <a:xfrm>
+            <a:off x="7315200" y="1024255"/>
+            <a:ext cx="4431030" cy="4493260"/>
+          </a:xfrm>
+          <a:prstGeom prst="rect">
+            <a:avLst/>
+          </a:prstGeom>
+          <a:noFill/>
+        </p:spPr>
+        <p:txBody>
+          <a:bodyPr wrap="square" lIns="0" tIns="0" rIns="0" bIns="0" anchor="t">
+            <a:spAutoFit/>
+          </a:bodyPr>
+          <a:lstStyle/>
+          <a:p>
+            <a:pPr marL="285750" indent="-285750">
+              <a:spcAft>
+                <a:spcPts val="800"/>
+              </a:spcAft>
+              <a:buFont typeface="Arial" panose="020B0604020202020204" pitchFamily="34" charset="0"/>
+              <a:buChar char="•"/>
+            </a:pPr>
+            <a:r>
+              <a:rPr sz="1800">
+                <a:solidFill>
+                  <a:srgbClr val="23272D"/>
+                </a:solidFill>
+                <a:latin typeface="Aptos"/>
+              </a:rPr>
+              <a:t>FlowNeuMF is not the best model overall, but it is a stronger neural recommender than ClassicNeuMF.</a:t>
+            </a:r>
+            <a:endParaRPr sz="1800">
+              <a:solidFill>
+                <a:srgbClr val="23272D"/>
+              </a:solidFill>
+              <a:latin typeface="Aptos"/>
+            </a:endParaRPr>
+          </a:p>
+          <a:p>
+            <a:pPr marL="285750" indent="-285750">
+              <a:spcAft>
+                <a:spcPts val="800"/>
+              </a:spcAft>
+              <a:buFont typeface="Arial" panose="020B0604020202020204" pitchFamily="34" charset="0"/>
+              <a:buChar char="•"/>
+            </a:pPr>
+            <a:endParaRPr sz="1800">
+              <a:solidFill>
+                <a:srgbClr val="23272D"/>
+              </a:solidFill>
+              <a:latin typeface="Aptos"/>
+            </a:endParaRPr>
+          </a:p>
+          <a:p>
+            <a:pPr marL="285750" indent="-285750">
+              <a:spcAft>
+                <a:spcPts val="800"/>
+              </a:spcAft>
+              <a:buFont typeface="Arial" panose="020B0604020202020204" pitchFamily="34" charset="0"/>
+              <a:buChar char="•"/>
+            </a:pPr>
+            <a:r>
+              <a:rPr sz="1800">
+                <a:solidFill>
+                  <a:srgbClr val="23272D"/>
+                </a:solidFill>
+                <a:latin typeface="Aptos"/>
+              </a:rPr>
+              <a:t>The clearest gain is in NDCG@10, which is the strongest ranking-oriented evidence in the report.</a:t>
+            </a:r>
+            <a:endParaRPr sz="1800">
+              <a:solidFill>
+                <a:srgbClr val="23272D"/>
+              </a:solidFill>
+              <a:latin typeface="Aptos"/>
+            </a:endParaRPr>
+          </a:p>
+          <a:p>
+            <a:pPr marL="285750" indent="-285750">
+              <a:spcAft>
+                <a:spcPts val="800"/>
+              </a:spcAft>
+              <a:buFont typeface="Arial" panose="020B0604020202020204" pitchFamily="34" charset="0"/>
+              <a:buChar char="•"/>
+            </a:pPr>
+            <a:endParaRPr sz="1800">
+              <a:solidFill>
+                <a:srgbClr val="23272D"/>
+              </a:solidFill>
+              <a:latin typeface="Aptos"/>
+            </a:endParaRPr>
+          </a:p>
+          <a:p>
+            <a:pPr marL="285750" indent="-285750">
+              <a:spcAft>
+                <a:spcPts val="800"/>
+              </a:spcAft>
+              <a:buFont typeface="Arial" panose="020B0604020202020204" pitchFamily="34" charset="0"/>
+              <a:buChar char="•"/>
+            </a:pPr>
+            <a:r>
+              <a:rPr sz="1800">
+                <a:solidFill>
+                  <a:srgbClr val="23272D"/>
+                </a:solidFill>
+                <a:latin typeface="Aptos"/>
+              </a:rPr>
+              <a:t>ItemCF still has slightly higher Recall@10, likely because neighborhood ranking is more popularity-driven.</a:t>
+            </a:r>
+            <a:endParaRPr sz="1800">
+              <a:solidFill>
+                <a:srgbClr val="23272D"/>
+              </a:solidFill>
+              <a:latin typeface="Aptos"/>
+            </a:endParaRPr>
+          </a:p>
+          <a:p>
+            <a:pPr marL="285750" indent="-285750">
+              <a:spcAft>
+                <a:spcPts val="800"/>
+              </a:spcAft>
+              <a:buFont typeface="Arial" panose="020B0604020202020204" pitchFamily="34" charset="0"/>
+              <a:buChar char="•"/>
+            </a:pPr>
+            <a:endParaRPr sz="1800">
+              <a:solidFill>
+                <a:srgbClr val="23272D"/>
+              </a:solidFill>
+              <a:latin typeface="Aptos"/>
+            </a:endParaRPr>
+          </a:p>
+          <a:p>
+            <a:pPr marL="285750" indent="-285750">
+              <a:spcAft>
+                <a:spcPts val="800"/>
+              </a:spcAft>
+              <a:buFont typeface="Arial" panose="020B0604020202020204" pitchFamily="34" charset="0"/>
+              <a:buChar char="•"/>
+            </a:pPr>
+            <a:r>
+              <a:rPr sz="1800">
+                <a:solidFill>
+                  <a:srgbClr val="23272D"/>
+                </a:solidFill>
+                <a:latin typeface="Aptos"/>
+              </a:rPr>
+              <a:t>This makes the final claim narrower but more defensible.</a:t>
+            </a:r>
+            <a:endParaRPr sz="1800">
+              <a:solidFill>
+                <a:srgbClr val="23272D"/>
+              </a:solidFill>
+              <a:latin typeface="Aptos"/>
+            </a:endParaRPr>
+          </a:p>
+        </p:txBody>
+      </p:sp>
+      <p:sp>
+        <p:nvSpPr>
+          <p:cNvPr id="7" name="TextBox 6"/>
+          <p:cNvSpPr txBox="1"/>
+          <p:nvPr/>
+        </p:nvSpPr>
+        <p:spPr>
+          <a:xfrm>
+            <a:off x="411480" y="6446520"/>
+            <a:ext cx="11155680" cy="182880"/>
+          </a:xfrm>
+          <a:prstGeom prst="rect">
+            <a:avLst/>
+          </a:prstGeom>
+          <a:noFill/>
+        </p:spPr>
+        <p:txBody>
+          <a:bodyPr wrap="none" anchor="t">
+            <a:spAutoFit/>
+          </a:bodyPr>
+          <a:lstStyle/>
+          <a:p>
+            <a:pPr algn="l"/>
+            <a:r>
+              <a:rPr sz="1000" b="0">
+                <a:solidFill>
+                  <a:srgbClr val="626975"/>
+                </a:solidFill>
+                <a:latin typeface="Aptos"/>
+              </a:rPr>
+              <a:t>Flow Ranking | Sen Fang | CS550 Final Project | 6</a:t>
+            </a:r>
+            <a:endParaRPr sz="1000" b="0">
+              <a:solidFill>
+                <a:srgbClr val="626975"/>
+              </a:solidFill>
+              <a:latin typeface="Aptos"/>
+            </a:endParaRPr>
+          </a:p>
+        </p:txBody>
+      </p:sp>
+    </p:spTree>
+  </p:cSld>
+  <p:clrMapOvr>
+    <a:masterClrMapping/>
+  </p:clrMapOvr>
+</p:sld>
+</file>
+
+<file path=ppt/slides/slide7.xml><?xml version="1.0" encoding="utf-8"?>
+<p:sld xmlns:a="http://schemas.openxmlformats.org/drawingml/2006/main" xmlns:r="http://schemas.openxmlformats.org/officeDocument/2006/relationships" xmlns:p="http://schemas.openxmlformats.org/presentationml/2006/main">
+  <p:cSld>
+    <p:bg>
+      <p:bgPr>
+        <a:solidFill>
+          <a:srgbClr val="F7F6F3"/>
+        </a:solidFill>
+        <a:effectLst/>
+      </p:bgPr>
+    </p:bg>
+    <p:spTree>
+      <p:nvGrpSpPr>
+        <p:cNvPr id="1" name=""/>
+        <p:cNvGrpSpPr/>
+        <p:nvPr/>
+      </p:nvGrpSpPr>
+      <p:grpSpPr/>
+      <p:sp>
+        <p:nvSpPr>
+          <p:cNvPr id="2" name="Rectangle 1"/>
+          <p:cNvSpPr/>
+          <p:nvPr/>
+        </p:nvSpPr>
+        <p:spPr>
+          <a:xfrm>
+            <a:off x="0" y="0"/>
+            <a:ext cx="12191695" cy="475488"/>
+          </a:xfrm>
+          <a:prstGeom prst="rect">
+            <a:avLst/>
+          </a:prstGeom>
+          <a:solidFill>
+            <a:srgbClr val="112244"/>
+          </a:solidFill>
+          <a:ln>
+            <a:noFill/>
+          </a:ln>
+        </p:spPr>
+        <p:style>
+          <a:lnRef idx="1">
+            <a:schemeClr val="accent1"/>
+          </a:lnRef>
+          <a:fillRef idx="3">
+            <a:schemeClr val="accent1"/>
+          </a:fillRef>
+          <a:effectRef idx="2">
+            <a:schemeClr val="accent1"/>
+          </a:effectRef>
+          <a:fontRef idx="minor">
+            <a:schemeClr val="lt1"/>
+          </a:fontRef>
+        </p:style>
+        <p:txBody>
+          <a:bodyPr rtlCol="0" anchor="ctr"/>
+          <a:lstStyle/>
+          <a:p>
+            <a:pPr algn="ctr"/>
+          </a:p>
+        </p:txBody>
+      </p:sp>
+      <p:sp>
+        <p:nvSpPr>
+          <p:cNvPr id="3" name="TextBox 2"/>
+          <p:cNvSpPr txBox="1"/>
+          <p:nvPr/>
+        </p:nvSpPr>
+        <p:spPr>
+          <a:xfrm>
+            <a:off x="411480" y="64008"/>
+            <a:ext cx="7132320" cy="237744"/>
+          </a:xfrm>
+          <a:prstGeom prst="rect">
+            <a:avLst/>
+          </a:prstGeom>
+          <a:noFill/>
+        </p:spPr>
+        <p:txBody>
+          <a:bodyPr wrap="none" anchor="t">
+            <a:spAutoFit/>
+          </a:bodyPr>
+          <a:lstStyle/>
+          <a:p>
+            <a:pPr algn="l"/>
+            <a:r>
+              <a:rPr sz="2600" b="1">
+                <a:solidFill>
+                  <a:srgbClr val="FFFFFF"/>
+                </a:solidFill>
+                <a:latin typeface="Cambria" panose="02040503050406030204"/>
+              </a:rPr>
+              <a:t>Conclusion</a:t>
+            </a:r>
+            <a:endParaRPr sz="2600" b="1">
+              <a:solidFill>
+                <a:srgbClr val="FFFFFF"/>
+              </a:solidFill>
+              <a:latin typeface="Cambria" panose="02040503050406030204"/>
+            </a:endParaRPr>
+          </a:p>
+        </p:txBody>
+      </p:sp>
+      <p:sp>
+        <p:nvSpPr>
+          <p:cNvPr id="4" name="TextBox 3"/>
+          <p:cNvSpPr txBox="1"/>
+          <p:nvPr/>
+        </p:nvSpPr>
+        <p:spPr>
+          <a:xfrm>
+            <a:off x="7909560" y="91440"/>
+            <a:ext cx="3840480" cy="182880"/>
+          </a:xfrm>
+          <a:prstGeom prst="rect">
+            <a:avLst/>
+          </a:prstGeom>
+          <a:noFill/>
+        </p:spPr>
+        <p:txBody>
+          <a:bodyPr wrap="none" anchor="t">
+            <a:spAutoFit/>
+          </a:bodyPr>
+          <a:lstStyle/>
+          <a:p>
+            <a:pPr algn="r"/>
+            <a:r>
+              <a:rPr sz="1100" b="0">
+                <a:solidFill>
+                  <a:srgbClr val="FFFFFF"/>
+                </a:solidFill>
+                <a:latin typeface="Aptos"/>
+              </a:rPr>
+              <a:t>Submission-ready takeaway</a:t>
+            </a:r>
+            <a:endParaRPr sz="1100" b="0">
+              <a:solidFill>
+                <a:srgbClr val="FFFFFF"/>
+              </a:solidFill>
+              <a:latin typeface="Aptos"/>
+            </a:endParaRPr>
+          </a:p>
+        </p:txBody>
+      </p:sp>
+      <p:sp>
+        <p:nvSpPr>
+          <p:cNvPr id="5" name="TextBox 4"/>
+          <p:cNvSpPr txBox="1"/>
+          <p:nvPr/>
+        </p:nvSpPr>
+        <p:spPr>
+          <a:xfrm>
+            <a:off x="567055" y="960120"/>
+            <a:ext cx="5901055" cy="4616450"/>
+          </a:xfrm>
+          <a:prstGeom prst="rect">
+            <a:avLst/>
+          </a:prstGeom>
+          <a:noFill/>
+        </p:spPr>
+        <p:txBody>
+          <a:bodyPr wrap="square" lIns="0" tIns="0" rIns="0" bIns="0" anchor="t">
+            <a:spAutoFit/>
+          </a:bodyPr>
+          <a:lstStyle/>
+          <a:p>
+            <a:pPr marL="342900" indent="-342900">
+              <a:spcAft>
+                <a:spcPts val="800"/>
+              </a:spcAft>
+              <a:buFont typeface="Arial" panose="020B0604020202020204" pitchFamily="34" charset="0"/>
+              <a:buChar char="•"/>
+            </a:pPr>
+            <a:r>
+              <a:rPr sz="2000">
+                <a:solidFill>
+                  <a:srgbClr val="23272D"/>
+                </a:solidFill>
+                <a:latin typeface="Aptos"/>
+              </a:rPr>
+              <a:t>The evaluation pipeline is now consistent, reproducible, and visually interpretable.</a:t>
+            </a:r>
+            <a:endParaRPr sz="2000">
+              <a:solidFill>
+                <a:srgbClr val="23272D"/>
+              </a:solidFill>
+              <a:latin typeface="Aptos"/>
+            </a:endParaRPr>
+          </a:p>
+          <a:p>
+            <a:pPr marL="342900" indent="-342900">
+              <a:spcAft>
+                <a:spcPts val="800"/>
+              </a:spcAft>
+              <a:buFont typeface="Arial" panose="020B0604020202020204" pitchFamily="34" charset="0"/>
+              <a:buChar char="•"/>
+            </a:pPr>
+            <a:endParaRPr sz="2000">
+              <a:solidFill>
+                <a:srgbClr val="23272D"/>
+              </a:solidFill>
+              <a:latin typeface="Aptos"/>
+            </a:endParaRPr>
+          </a:p>
+          <a:p>
+            <a:pPr marL="342900" indent="-342900">
+              <a:spcAft>
+                <a:spcPts val="800"/>
+              </a:spcAft>
+              <a:buFont typeface="Arial" panose="020B0604020202020204" pitchFamily="34" charset="0"/>
+              <a:buChar char="•"/>
+            </a:pPr>
+            <a:r>
+              <a:rPr sz="2000">
+                <a:solidFill>
+                  <a:srgbClr val="23272D"/>
+                </a:solidFill>
+                <a:latin typeface="Aptos"/>
+              </a:rPr>
+              <a:t>FlowNeuMF improves over ClassicNeuMF on all reported ranking metrics.</a:t>
+            </a:r>
+            <a:endParaRPr sz="2000">
+              <a:solidFill>
+                <a:srgbClr val="23272D"/>
+              </a:solidFill>
+              <a:latin typeface="Aptos"/>
+            </a:endParaRPr>
+          </a:p>
+          <a:p>
+            <a:pPr marL="342900" indent="-342900">
+              <a:spcAft>
+                <a:spcPts val="800"/>
+              </a:spcAft>
+              <a:buFont typeface="Arial" panose="020B0604020202020204" pitchFamily="34" charset="0"/>
+              <a:buChar char="•"/>
+            </a:pPr>
+            <a:endParaRPr sz="2000">
+              <a:solidFill>
+                <a:srgbClr val="23272D"/>
+              </a:solidFill>
+              <a:latin typeface="Aptos"/>
+            </a:endParaRPr>
+          </a:p>
+          <a:p>
+            <a:pPr marL="342900" indent="-342900">
+              <a:spcAft>
+                <a:spcPts val="800"/>
+              </a:spcAft>
+              <a:buFont typeface="Arial" panose="020B0604020202020204" pitchFamily="34" charset="0"/>
+              <a:buChar char="•"/>
+            </a:pPr>
+            <a:r>
+              <a:rPr sz="2000">
+                <a:solidFill>
+                  <a:srgbClr val="23272D"/>
+                </a:solidFill>
+                <a:latin typeface="Aptos"/>
+              </a:rPr>
+              <a:t>The strongest baseline is still BiasedMF, so the contribution is an improved neural baseline rather than a new state of the art.</a:t>
+            </a:r>
+            <a:endParaRPr sz="2000">
+              <a:solidFill>
+                <a:srgbClr val="23272D"/>
+              </a:solidFill>
+              <a:latin typeface="Aptos"/>
+            </a:endParaRPr>
+          </a:p>
+          <a:p>
+            <a:pPr marL="342900" indent="-342900">
+              <a:spcAft>
+                <a:spcPts val="800"/>
+              </a:spcAft>
+              <a:buFont typeface="Arial" panose="020B0604020202020204" pitchFamily="34" charset="0"/>
+              <a:buChar char="•"/>
+            </a:pPr>
+            <a:endParaRPr sz="2000">
+              <a:solidFill>
+                <a:srgbClr val="23272D"/>
+              </a:solidFill>
+              <a:latin typeface="Aptos"/>
+            </a:endParaRPr>
+          </a:p>
+          <a:p>
+            <a:pPr marL="342900" indent="-342900">
+              <a:spcAft>
+                <a:spcPts val="800"/>
+              </a:spcAft>
+              <a:buFont typeface="Arial" panose="020B0604020202020204" pitchFamily="34" charset="0"/>
+              <a:buChar char="•"/>
+            </a:pPr>
+            <a:r>
+              <a:rPr sz="2000">
+                <a:solidFill>
+                  <a:srgbClr val="23272D"/>
+                </a:solidFill>
+                <a:latin typeface="Aptos"/>
+              </a:rPr>
+              <a:t>Updated deliverables now align with each other: project page, ACM paper PDF, figures, source assets, and PPT.</a:t>
+            </a:r>
+            <a:endParaRPr sz="2000">
+              <a:solidFill>
+                <a:srgbClr val="23272D"/>
+              </a:solidFill>
+              <a:latin typeface="Aptos"/>
+            </a:endParaRPr>
+          </a:p>
+        </p:txBody>
+      </p:sp>
+      <p:pic>
+        <p:nvPicPr>
+          <p:cNvPr id="6" name="Picture 5" descr="training_loss_curves.png"/>
+          <p:cNvPicPr>
+            <a:picLocks noChangeAspect="1"/>
+          </p:cNvPicPr>
+          <p:nvPr/>
+        </p:nvPicPr>
+        <p:blipFill>
+          <a:blip r:embed="rId1"/>
+          <a:stretch>
+            <a:fillRect/>
+          </a:stretch>
+        </p:blipFill>
+        <p:spPr>
+          <a:xfrm>
+            <a:off x="6746240" y="1596898"/>
+            <a:ext cx="5074920" cy="2951308"/>
+          </a:xfrm>
+          <a:prstGeom prst="rect">
+            <a:avLst/>
+          </a:prstGeom>
+        </p:spPr>
+      </p:pic>
+      <p:sp>
+        <p:nvSpPr>
+          <p:cNvPr id="7" name="TextBox 6"/>
+          <p:cNvSpPr txBox="1"/>
+          <p:nvPr/>
+        </p:nvSpPr>
+        <p:spPr>
+          <a:xfrm>
+            <a:off x="6446520" y="5669280"/>
+            <a:ext cx="4983480" cy="201168"/>
+          </a:xfrm>
+          <a:prstGeom prst="rect">
+            <a:avLst/>
+          </a:prstGeom>
+          <a:noFill/>
+        </p:spPr>
+        <p:txBody>
+          <a:bodyPr wrap="none" anchor="t">
+            <a:spAutoFit/>
+          </a:bodyPr>
+          <a:lstStyle/>
+          <a:p>
+            <a:pPr algn="ctr"/>
+            <a:r>
+              <a:rPr sz="1100" b="0">
+                <a:solidFill>
+                  <a:srgbClr val="626975"/>
+                </a:solidFill>
+                <a:latin typeface="Aptos"/>
+              </a:rPr>
+              <a:t>Training curves kept for optimization discussion and ablation context.</a:t>
+            </a:r>
+            <a:endParaRPr sz="1100" b="0">
+              <a:solidFill>
+                <a:srgbClr val="626975"/>
+              </a:solidFill>
+              <a:latin typeface="Aptos"/>
+            </a:endParaRPr>
+          </a:p>
+        </p:txBody>
+      </p:sp>
+      <p:sp>
+        <p:nvSpPr>
+          <p:cNvPr id="8" name="TextBox 7"/>
+          <p:cNvSpPr txBox="1"/>
+          <p:nvPr/>
+        </p:nvSpPr>
+        <p:spPr>
+          <a:xfrm>
+            <a:off x="411480" y="6446520"/>
+            <a:ext cx="3082925" cy="245110"/>
+          </a:xfrm>
+          <a:prstGeom prst="rect">
+            <a:avLst/>
+          </a:prstGeom>
+          <a:noFill/>
+        </p:spPr>
+        <p:txBody>
+          <a:bodyPr wrap="none" anchor="t">
+            <a:spAutoFit/>
+          </a:bodyPr>
+          <a:lstStyle/>
+          <a:p>
+            <a:pPr algn="l"/>
+            <a:r>
+              <a:rPr sz="1000" b="0">
+                <a:solidFill>
+                  <a:srgbClr val="626975"/>
+                </a:solidFill>
+                <a:latin typeface="Aptos"/>
+              </a:rPr>
+              <a:t>Flow Ranking | Sen Fang | CS550 Final Project |</a:t>
+            </a:r>
+            <a:r>
+              <a:rPr lang="en-US" sz="1000" b="0">
+                <a:solidFill>
+                  <a:srgbClr val="626975"/>
+                </a:solidFill>
+                <a:latin typeface="Aptos"/>
+              </a:rPr>
+              <a:t> 4.21</a:t>
+            </a:r>
+            <a:r>
+              <a:rPr sz="1000" b="0">
+                <a:solidFill>
+                  <a:srgbClr val="626975"/>
+                </a:solidFill>
+                <a:latin typeface="Aptos"/>
+              </a:rPr>
+              <a:t> </a:t>
+            </a:r>
+            <a:endParaRPr sz="1000" b="0">
+              <a:solidFill>
+                <a:srgbClr val="626975"/>
+              </a:solidFill>
+              <a:latin typeface="Aptos"/>
+            </a:endParaRPr>
+          </a:p>
+        </p:txBody>
+      </p:sp>
+    </p:spTree>
+  </p:cSld>
+  <p:clrMapOvr>
+    <a:masterClrMapping/>
+  </p:clrMapOvr>
+</p:sld>
+</file>
+
+<file path=ppt/tags/tag1.xml><?xml version="1.0" encoding="utf-8"?>
+<p:tagLst xmlns:p="http://schemas.openxmlformats.org/presentationml/2006/main">
+  <p:tag name="KSO_WM_DIAGRAM_VIRTUALLY_FRAME" val="{&quot;height&quot;:226.8,&quot;left&quot;:514.8,&quot;top&quot;:75.6,&quot;width&quot;:374.4}"/>
+</p:tagLst>
+</file>
+
+<file path=ppt/tags/tag10.xml><?xml version="1.0" encoding="utf-8"?>
+<p:tagLst xmlns:p="http://schemas.openxmlformats.org/presentationml/2006/main">
+  <p:tag name="KSO_WM_DIAGRAM_VIRTUALLY_FRAME" val="{&quot;height&quot;:226.8,&quot;left&quot;:514.8,&quot;top&quot;:75.6,&quot;width&quot;:374.4}"/>
+</p:tagLst>
+</file>
+
+<file path=ppt/tags/tag11.xml><?xml version="1.0" encoding="utf-8"?>
+<p:tagLst xmlns:p="http://schemas.openxmlformats.org/presentationml/2006/main">
+  <p:tag name="KSO_WM_DIAGRAM_VIRTUALLY_FRAME" val="{&quot;height&quot;:226.8,&quot;left&quot;:514.8,&quot;top&quot;:75.6,&quot;width&quot;:374.4}"/>
+</p:tagLst>
+</file>
+
+<file path=ppt/tags/tag12.xml><?xml version="1.0" encoding="utf-8"?>
+<p:tagLst xmlns:p="http://schemas.openxmlformats.org/presentationml/2006/main">
+  <p:tag name="KSO_WM_DIAGRAM_VIRTUALLY_FRAME" val="{&quot;height&quot;:226.8,&quot;left&quot;:514.8,&quot;top&quot;:75.6,&quot;width&quot;:374.4}"/>
+</p:tagLst>
+</file>
+
+<file path=ppt/tags/tag2.xml><?xml version="1.0" encoding="utf-8"?>
+<p:tagLst xmlns:p="http://schemas.openxmlformats.org/presentationml/2006/main">
+  <p:tag name="KSO_WM_DIAGRAM_VIRTUALLY_FRAME" val="{&quot;height&quot;:226.8,&quot;left&quot;:514.8,&quot;top&quot;:75.6,&quot;width&quot;:374.4}"/>
+</p:tagLst>
+</file>
+
+<file path=ppt/tags/tag3.xml><?xml version="1.0" encoding="utf-8"?>
+<p:tagLst xmlns:p="http://schemas.openxmlformats.org/presentationml/2006/main">
+  <p:tag name="KSO_WM_DIAGRAM_VIRTUALLY_FRAME" val="{&quot;height&quot;:226.8,&quot;left&quot;:514.8,&quot;top&quot;:75.6,&quot;width&quot;:374.4}"/>
+</p:tagLst>
+</file>
+
+<file path=ppt/tags/tag4.xml><?xml version="1.0" encoding="utf-8"?>
+<p:tagLst xmlns:p="http://schemas.openxmlformats.org/presentationml/2006/main">
+  <p:tag name="KSO_WM_DIAGRAM_VIRTUALLY_FRAME" val="{&quot;height&quot;:226.8,&quot;left&quot;:514.8,&quot;top&quot;:75.6,&quot;width&quot;:374.4}"/>
+</p:tagLst>
+</file>
+
+<file path=ppt/tags/tag5.xml><?xml version="1.0" encoding="utf-8"?>
+<p:tagLst xmlns:p="http://schemas.openxmlformats.org/presentationml/2006/main">
+  <p:tag name="KSO_WM_DIAGRAM_VIRTUALLY_FRAME" val="{&quot;height&quot;:226.8,&quot;left&quot;:514.8,&quot;top&quot;:75.6,&quot;width&quot;:374.4}"/>
+</p:tagLst>
+</file>
+
+<file path=ppt/tags/tag6.xml><?xml version="1.0" encoding="utf-8"?>
+<p:tagLst xmlns:p="http://schemas.openxmlformats.org/presentationml/2006/main">
+  <p:tag name="KSO_WM_DIAGRAM_VIRTUALLY_FRAME" val="{&quot;height&quot;:226.8,&quot;left&quot;:514.8,&quot;top&quot;:75.6,&quot;width&quot;:374.4}"/>
+</p:tagLst>
+</file>
+
+<file path=ppt/tags/tag7.xml><?xml version="1.0" encoding="utf-8"?>
+<p:tagLst xmlns:p="http://schemas.openxmlformats.org/presentationml/2006/main">
+  <p:tag name="KSO_WM_DIAGRAM_VIRTUALLY_FRAME" val="{&quot;height&quot;:226.8,&quot;left&quot;:514.8,&quot;top&quot;:75.6,&quot;width&quot;:374.4}"/>
+</p:tagLst>
+</file>
+
+<file path=ppt/tags/tag8.xml><?xml version="1.0" encoding="utf-8"?>
+<p:tagLst xmlns:p="http://schemas.openxmlformats.org/presentationml/2006/main">
+  <p:tag name="KSO_WM_DIAGRAM_VIRTUALLY_FRAME" val="{&quot;height&quot;:226.8,&quot;left&quot;:514.8,&quot;top&quot;:75.6,&quot;width&quot;:374.4}"/>
+</p:tagLst>
+</file>
+
+<file path=ppt/tags/tag9.xml><?xml version="1.0" encoding="utf-8"?>
+<p:tagLst xmlns:p="http://schemas.openxmlformats.org/presentationml/2006/main">
+  <p:tag name="KSO_WM_DIAGRAM_VIRTUALLY_FRAME" val="{&quot;height&quot;:226.8,&quot;left&quot;:514.8,&quot;top&quot;:75.6,&quot;width&quot;:374.4}"/>
+</p:tagLst>
 </file>
 
 <file path=ppt/theme/theme1.xml><?xml version="1.0" encoding="utf-8"?>
@@ -5279,6 +8428,10 @@
       </a:style>
     </a:lnDef>
   </a:objectDefaults>
-  <a:extraClrSchemeLst/>
+  <a:extLst>
+    <a:ext uri="{05A4C25C-085E-4340-85A3-A5531E510DB2}">
+      <thm15:themeFamily xmlns:thm15="http://schemas.microsoft.com/office/thememl/2012/main" name="Office Theme" id="{62F939B6-93AF-4DB8-9C6B-D6C7DFDC589F}" vid="{4A3C46E8-61CC-4603-A589-7422A47A8E4A}"/>
+    </a:ext>
+  </a:extLst>
 </a:theme>
 </file>
--- a/assets/flow_ranking_slides.pptx
+++ b/assets/flow_ranking_slides.pptx
@@ -3279,16 +3279,149 @@
           </a:p>
         </p:txBody>
       </p:sp>
+      <p:sp>
+        <p:nvSpPr>
+          <p:cNvPr id="7" name="TextBox 6"/>
+          <p:cNvSpPr txBox="1"/>
+          <p:nvPr/>
+        </p:nvSpPr>
+        <p:spPr>
+          <a:xfrm>
+            <a:off x="6172200" y="5897880"/>
+            <a:ext cx="5303520" cy="201168"/>
+          </a:xfrm>
+          <a:prstGeom prst="rect">
+            <a:avLst/>
+          </a:prstGeom>
+          <a:noFill/>
+        </p:spPr>
+        <p:txBody>
+          <a:bodyPr wrap="none" anchor="t">
+            <a:spAutoFit/>
+          </a:bodyPr>
+          <a:lstStyle/>
+          <a:p>
+            <a:pPr algn="ctr"/>
+            <a:r>
+              <a:rPr sz="1600">
+                <a:solidFill>
+                  <a:srgbClr val="23272D"/>
+                </a:solidFill>
+                <a:latin typeface="Aptos"/>
+              </a:rPr>
+              <a:t>Final system comparison: FlowRanking is highlighted in pink.</a:t>
+            </a:r>
+            <a:endParaRPr sz="1100" b="0">
+              <a:solidFill>
+                <a:srgbClr val="626975"/>
+              </a:solidFill>
+              <a:latin typeface="Aptos"/>
+            </a:endParaRPr>
+          </a:p>
+        </p:txBody>
+      </p:sp>
+      <p:sp>
+        <p:nvSpPr>
+          <p:cNvPr id="8" name="TextBox 7"/>
+          <p:cNvSpPr txBox="1"/>
+          <p:nvPr/>
+        </p:nvSpPr>
+        <p:spPr>
+          <a:xfrm>
+            <a:off x="502920" y="5915660"/>
+            <a:ext cx="5120640" cy="288290"/>
+          </a:xfrm>
+          <a:prstGeom prst="rect">
+            <a:avLst/>
+          </a:prstGeom>
+          <a:noFill/>
+        </p:spPr>
+        <p:txBody>
+          <a:bodyPr wrap="none" anchor="t">
+            <a:noAutofit/>
+          </a:bodyPr>
+          <a:lstStyle/>
+          <a:p>
+            <a:pPr algn="l"/>
+            <a:r>
+              <a:rPr sz="1100" b="0">
+                <a:solidFill>
+                  <a:srgbClr val="626975"/>
+                </a:solidFill>
+                <a:latin typeface="Aptos"/>
+              </a:rPr>
+              <a:t>Project page: </a:t>
+            </a:r>
+            <a:r>
+              <a:rPr lang="en-US" sz="1100" b="0">
+                <a:solidFill>
+                  <a:srgbClr val="626975"/>
+                </a:solidFill>
+                <a:latin typeface="Aptos"/>
+                <a:hlinkClick r:id="rId2" tooltip="" action="ppaction://hlinkfile"/>
+              </a:rPr>
+              <a:t>https://fangsen9000.github.io/FlowRanking/</a:t>
+            </a:r>
+            <a:endParaRPr lang="en-US" sz="1100" b="0">
+              <a:solidFill>
+                <a:srgbClr val="626975"/>
+              </a:solidFill>
+              <a:latin typeface="Aptos"/>
+            </a:endParaRPr>
+          </a:p>
+        </p:txBody>
+      </p:sp>
+      <p:sp>
+        <p:nvSpPr>
+          <p:cNvPr id="9" name="TextBox 8"/>
+          <p:cNvSpPr txBox="1"/>
+          <p:nvPr/>
+        </p:nvSpPr>
+        <p:spPr>
+          <a:xfrm>
+            <a:off x="411480" y="6446520"/>
+            <a:ext cx="11155680" cy="182880"/>
+          </a:xfrm>
+          <a:prstGeom prst="rect">
+            <a:avLst/>
+          </a:prstGeom>
+          <a:noFill/>
+        </p:spPr>
+        <p:txBody>
+          <a:bodyPr wrap="none" anchor="t">
+            <a:spAutoFit/>
+          </a:bodyPr>
+          <a:lstStyle/>
+          <a:p>
+            <a:pPr algn="l"/>
+            <a:r>
+              <a:rPr sz="1000" b="0">
+                <a:solidFill>
+                  <a:srgbClr val="626975"/>
+                </a:solidFill>
+                <a:latin typeface="Aptos"/>
+              </a:rPr>
+              <a:t>Flow Ranking | Sen Fang | CS550 Final Project | 1</a:t>
+            </a:r>
+            <a:endParaRPr sz="1000" b="0">
+              <a:solidFill>
+                <a:srgbClr val="626975"/>
+              </a:solidFill>
+              <a:latin typeface="Aptos"/>
+            </a:endParaRPr>
+          </a:p>
+        </p:txBody>
+      </p:sp>
       <p:pic>
         <p:nvPicPr>
-          <p:cNvPr id="6" name="Picture 5" descr="topn_metrics_bar.png"/>
+          <p:cNvPr id="10" name="Picture 9" descr="topn_metrics_bar.png"/>
           <p:cNvPicPr>
             <a:picLocks noChangeAspect="1"/>
           </p:cNvPicPr>
           <p:nvPr/>
         </p:nvPicPr>
         <p:blipFill>
-          <a:blip r:embed="rId1"/>
+          <a:blip r:embed="rId4"/>
           <a:stretch>
             <a:fillRect/>
           </a:stretch>
@@ -3303,139 +3436,6 @@
           </a:prstGeom>
         </p:spPr>
       </p:pic>
-      <p:sp>
-        <p:nvSpPr>
-          <p:cNvPr id="7" name="TextBox 6"/>
-          <p:cNvSpPr txBox="1"/>
-          <p:nvPr/>
-        </p:nvSpPr>
-        <p:spPr>
-          <a:xfrm>
-            <a:off x="6172200" y="5897880"/>
-            <a:ext cx="5303520" cy="201168"/>
-          </a:xfrm>
-          <a:prstGeom prst="rect">
-            <a:avLst/>
-          </a:prstGeom>
-          <a:noFill/>
-        </p:spPr>
-        <p:txBody>
-          <a:bodyPr wrap="none" anchor="t">
-            <a:spAutoFit/>
-          </a:bodyPr>
-          <a:lstStyle/>
-          <a:p>
-            <a:pPr algn="ctr"/>
-            <a:r>
-              <a:rPr sz="1100" b="0">
-                <a:solidFill>
-                  <a:srgbClr val="626975"/>
-                </a:solidFill>
-                <a:latin typeface="Aptos"/>
-              </a:rPr>
-              <a:t>Final Top-10 comparison after fixing the evaluation mismatch.</a:t>
-            </a:r>
-            <a:endParaRPr sz="1100" b="0">
-              <a:solidFill>
-                <a:srgbClr val="626975"/>
-              </a:solidFill>
-              <a:latin typeface="Aptos"/>
-            </a:endParaRPr>
-          </a:p>
-        </p:txBody>
-      </p:sp>
-      <p:sp>
-        <p:nvSpPr>
-          <p:cNvPr id="8" name="TextBox 7"/>
-          <p:cNvSpPr txBox="1"/>
-          <p:nvPr/>
-        </p:nvSpPr>
-        <p:spPr>
-          <a:xfrm>
-            <a:off x="502920" y="5915660"/>
-            <a:ext cx="5120640" cy="288290"/>
-          </a:xfrm>
-          <a:prstGeom prst="rect">
-            <a:avLst/>
-          </a:prstGeom>
-          <a:noFill/>
-        </p:spPr>
-        <p:txBody>
-          <a:bodyPr wrap="none" anchor="t">
-            <a:noAutofit/>
-          </a:bodyPr>
-          <a:lstStyle/>
-          <a:p>
-            <a:pPr algn="l"/>
-            <a:r>
-              <a:rPr sz="1100" b="0">
-                <a:solidFill>
-                  <a:srgbClr val="626975"/>
-                </a:solidFill>
-                <a:latin typeface="Aptos"/>
-              </a:rPr>
-              <a:t>Project page: </a:t>
-            </a:r>
-            <a:r>
-              <a:rPr lang="en-US" sz="1100" b="0">
-                <a:solidFill>
-                  <a:srgbClr val="626975"/>
-                </a:solidFill>
-                <a:latin typeface="Aptos"/>
-                <a:hlinkClick r:id="rId2" tooltip="" action="ppaction://hlinkfile"/>
-              </a:rPr>
-              <a:t>https://fangsen9000.github.io/FlowRanking/</a:t>
-            </a:r>
-            <a:endParaRPr lang="en-US" sz="1100" b="0">
-              <a:solidFill>
-                <a:srgbClr val="626975"/>
-              </a:solidFill>
-              <a:latin typeface="Aptos"/>
-            </a:endParaRPr>
-          </a:p>
-        </p:txBody>
-      </p:sp>
-      <p:sp>
-        <p:nvSpPr>
-          <p:cNvPr id="9" name="TextBox 8"/>
-          <p:cNvSpPr txBox="1"/>
-          <p:nvPr/>
-        </p:nvSpPr>
-        <p:spPr>
-          <a:xfrm>
-            <a:off x="411480" y="6446520"/>
-            <a:ext cx="11155680" cy="182880"/>
-          </a:xfrm>
-          <a:prstGeom prst="rect">
-            <a:avLst/>
-          </a:prstGeom>
-          <a:noFill/>
-        </p:spPr>
-        <p:txBody>
-          <a:bodyPr wrap="none" anchor="t">
-            <a:spAutoFit/>
-          </a:bodyPr>
-          <a:lstStyle/>
-          <a:p>
-            <a:pPr algn="l"/>
-            <a:r>
-              <a:rPr sz="1000" b="0">
-                <a:solidFill>
-                  <a:srgbClr val="626975"/>
-                </a:solidFill>
-                <a:latin typeface="Aptos"/>
-              </a:rPr>
-              <a:t>Flow Ranking | Sen Fang | CS550 Final Project | 1</a:t>
-            </a:r>
-            <a:endParaRPr sz="1000" b="0">
-              <a:solidFill>
-                <a:srgbClr val="626975"/>
-              </a:solidFill>
-              <a:latin typeface="Aptos"/>
-            </a:endParaRPr>
-          </a:p>
-        </p:txBody>
-      </p:sp>
     </p:spTree>
   </p:cSld>
   <p:clrMapOvr>
@@ -3611,26 +3611,17 @@
           <a:p>
             <a:pPr>
               <a:spcAft>
-                <a:spcPts val="800"/>
+                <a:spcPts val="600"/>
               </a:spcAft>
             </a:pPr>
             <a:r>
-              <a:rPr sz="2000" b="1">
+              <a:rPr sz="1900">
                 <a:solidFill>
                   <a:srgbClr val="23272D"/>
                 </a:solidFill>
                 <a:latin typeface="Aptos"/>
               </a:rPr>
-              <a:t>Goal:</a:t>
-            </a:r>
-            <a:r>
-              <a:rPr sz="2000">
-                <a:solidFill>
-                  <a:srgbClr val="23272D"/>
-                </a:solidFill>
-                <a:latin typeface="Aptos"/>
-              </a:rPr>
-              <a:t> test whether flow-style regularization improves a neural recommender under a fair comparison.</a:t>
+              <a:t>Goal: build a final recommender that performs best on the required rating and Top-10 tasks.</a:t>
             </a:r>
             <a:endParaRPr sz="2000">
               <a:solidFill>
@@ -3642,134 +3633,50 @@
           <a:p>
             <a:pPr>
               <a:spcAft>
-                <a:spcPts val="800"/>
+                <a:spcPts val="600"/>
               </a:spcAft>
             </a:pPr>
-            <a:endParaRPr sz="2000">
-              <a:solidFill>
-                <a:srgbClr val="23272D"/>
-              </a:solidFill>
-              <a:latin typeface="Aptos"/>
-            </a:endParaRPr>
+            <a:r>
+              <a:rPr sz="1900">
+                <a:solidFill>
+                  <a:srgbClr val="23272D"/>
+                </a:solidFill>
+                <a:latin typeface="Aptos"/>
+              </a:rPr>
+              <a:t>Dataset: MovieLens small with explicit ratings and per-user 80/20 holdout.</a:t>
+            </a:r>
           </a:p>
           <a:p>
             <a:pPr>
               <a:spcAft>
-                <a:spcPts val="800"/>
+                <a:spcPts val="600"/>
               </a:spcAft>
             </a:pPr>
             <a:r>
-              <a:rPr sz="2000" b="1">
+              <a:rPr sz="1900">
                 <a:solidFill>
                   <a:srgbClr val="23272D"/>
                 </a:solidFill>
                 <a:latin typeface="Aptos"/>
               </a:rPr>
-              <a:t>Dataset:</a:t>
-            </a:r>
-            <a:r>
-              <a:rPr sz="2000">
+              <a:t>Tasks: rating prediction and Top-10 recommendation.</a:t>
+            </a:r>
+          </a:p>
+          <a:p>
+            <a:pPr>
+              <a:spcAft>
+                <a:spcPts val="600"/>
+              </a:spcAft>
+            </a:pPr>
+            <a:r>
+              <a:rPr sz="1900">
                 <a:solidFill>
                   <a:srgbClr val="23272D"/>
                 </a:solidFill>
                 <a:latin typeface="Aptos"/>
               </a:rPr>
-              <a:t> MovieLens small with explicit ratings and per-user 80/20 holdout.</a:t>
-            </a:r>
-            <a:endParaRPr sz="2000">
-              <a:solidFill>
-                <a:srgbClr val="23272D"/>
-              </a:solidFill>
-              <a:latin typeface="Aptos"/>
-            </a:endParaRPr>
-          </a:p>
-          <a:p>
-            <a:pPr>
-              <a:spcAft>
-                <a:spcPts val="800"/>
-              </a:spcAft>
-            </a:pPr>
-            <a:endParaRPr sz="2000">
-              <a:solidFill>
-                <a:srgbClr val="23272D"/>
-              </a:solidFill>
-              <a:latin typeface="Aptos"/>
-            </a:endParaRPr>
-          </a:p>
-          <a:p>
-            <a:pPr>
-              <a:spcAft>
-                <a:spcPts val="800"/>
-              </a:spcAft>
-            </a:pPr>
-            <a:r>
-              <a:rPr sz="2000" b="1">
-                <a:solidFill>
-                  <a:srgbClr val="23272D"/>
-                </a:solidFill>
-                <a:latin typeface="Aptos"/>
-              </a:rPr>
-              <a:t>Tasks:</a:t>
-            </a:r>
-            <a:r>
-              <a:rPr sz="2000">
-                <a:solidFill>
-                  <a:srgbClr val="23272D"/>
-                </a:solidFill>
-                <a:latin typeface="Aptos"/>
-              </a:rPr>
-              <a:t> rating prediction and Top-10 recommendation.</a:t>
-            </a:r>
-            <a:endParaRPr sz="2000">
-              <a:solidFill>
-                <a:srgbClr val="23272D"/>
-              </a:solidFill>
-              <a:latin typeface="Aptos"/>
-            </a:endParaRPr>
-          </a:p>
-          <a:p>
-            <a:pPr>
-              <a:spcAft>
-                <a:spcPts val="800"/>
-              </a:spcAft>
-            </a:pPr>
-            <a:endParaRPr sz="2000">
-              <a:solidFill>
-                <a:srgbClr val="23272D"/>
-              </a:solidFill>
-              <a:latin typeface="Aptos"/>
-            </a:endParaRPr>
-          </a:p>
-          <a:p>
-            <a:pPr>
-              <a:spcAft>
-                <a:spcPts val="800"/>
-              </a:spcAft>
-            </a:pPr>
-            <a:r>
-              <a:rPr sz="2000" b="1">
-                <a:solidFill>
-                  <a:srgbClr val="23272D"/>
-                </a:solidFill>
-                <a:latin typeface="Aptos"/>
-              </a:rPr>
-              <a:t>Metrics:</a:t>
-            </a:r>
-            <a:r>
-              <a:rPr sz="2000">
-                <a:solidFill>
-                  <a:srgbClr val="23272D"/>
-                </a:solidFill>
-                <a:latin typeface="Aptos"/>
-              </a:rPr>
-              <a:t> MAE, RMSE, Precision@10, Recall@10, F-measure@10, and NDCG@10.</a:t>
-            </a:r>
-            <a:endParaRPr sz="2000">
-              <a:solidFill>
-                <a:srgbClr val="23272D"/>
-              </a:solidFill>
-              <a:latin typeface="Aptos"/>
-            </a:endParaRPr>
+              <a:t>Metrics: MAE, RMSE, Precision@10, Recall@10, F-measure@10, and NDCG@10.</a:t>
+            </a:r>
           </a:p>
         </p:txBody>
       </p:sp>
@@ -4345,16 +4252,57 @@
           </a:p>
         </p:txBody>
       </p:sp>
+      <p:sp>
+        <p:nvSpPr>
+          <p:cNvPr id="19" name="TextBox 18"/>
+          <p:cNvSpPr txBox="1"/>
+          <p:nvPr/>
+        </p:nvSpPr>
+        <p:spPr>
+          <a:xfrm>
+            <a:off x="411480" y="6446520"/>
+            <a:ext cx="11155680" cy="182880"/>
+          </a:xfrm>
+          <a:prstGeom prst="rect">
+            <a:avLst/>
+          </a:prstGeom>
+          <a:noFill/>
+        </p:spPr>
+        <p:txBody>
+          <a:bodyPr wrap="none" anchor="t">
+            <a:spAutoFit/>
+          </a:bodyPr>
+          <a:lstStyle/>
+          <a:p>
+            <a:pPr algn="l"/>
+            <a:r>
+              <a:rPr sz="1000" b="0">
+                <a:solidFill>
+                  <a:srgbClr val="626975"/>
+                </a:solidFill>
+                <a:latin typeface="Aptos"/>
+              </a:rPr>
+              <a:t>Flow Ranking | Sen Fang | CS550 Final Project | 2</a:t>
+            </a:r>
+            <a:endParaRPr sz="1000" b="0">
+              <a:solidFill>
+                <a:srgbClr val="626975"/>
+              </a:solidFill>
+              <a:latin typeface="Aptos"/>
+            </a:endParaRPr>
+          </a:p>
+        </p:txBody>
+      </p:sp>
       <p:pic>
         <p:nvPicPr>
-          <p:cNvPr id="18" name="Picture 17" descr="rating_metrics_bar.png"/>
+          <p:cNvPr id="20" name="Picture 19" descr="rating_metrics_bar.png"/>
           <p:cNvPicPr>
             <a:picLocks noChangeAspect="1"/>
           </p:cNvPicPr>
           <p:nvPr/>
         </p:nvPicPr>
         <p:blipFill>
-          <a:blip r:embed="rId13"/>
+          <a:blip r:embed="rId15"/>
           <a:stretch>
             <a:fillRect/>
           </a:stretch>
@@ -4369,47 +4317,6 @@
           </a:prstGeom>
         </p:spPr>
       </p:pic>
-      <p:sp>
-        <p:nvSpPr>
-          <p:cNvPr id="19" name="TextBox 18"/>
-          <p:cNvSpPr txBox="1"/>
-          <p:nvPr/>
-        </p:nvSpPr>
-        <p:spPr>
-          <a:xfrm>
-            <a:off x="411480" y="6446520"/>
-            <a:ext cx="11155680" cy="182880"/>
-          </a:xfrm>
-          <a:prstGeom prst="rect">
-            <a:avLst/>
-          </a:prstGeom>
-          <a:noFill/>
-        </p:spPr>
-        <p:txBody>
-          <a:bodyPr wrap="none" anchor="t">
-            <a:spAutoFit/>
-          </a:bodyPr>
-          <a:lstStyle/>
-          <a:p>
-            <a:pPr algn="l"/>
-            <a:r>
-              <a:rPr sz="1000" b="0">
-                <a:solidFill>
-                  <a:srgbClr val="626975"/>
-                </a:solidFill>
-                <a:latin typeface="Aptos"/>
-              </a:rPr>
-              <a:t>Flow Ranking | Sen Fang | CS550 Final Project | 2</a:t>
-            </a:r>
-            <a:endParaRPr sz="1000" b="0">
-              <a:solidFill>
-                <a:srgbClr val="626975"/>
-              </a:solidFill>
-              <a:latin typeface="Aptos"/>
-            </a:endParaRPr>
-          </a:p>
-        </p:txBody>
-      </p:sp>
     </p:spTree>
   </p:cSld>
   <p:clrMapOvr>
@@ -4503,13 +4410,13 @@
           <a:p>
             <a:pPr algn="l"/>
             <a:r>
-              <a:rPr sz="2600" b="1">
-                <a:solidFill>
-                  <a:srgbClr val="FFFFFF"/>
-                </a:solidFill>
-                <a:latin typeface="Cambria" panose="02040503050406030204"/>
+              <a:rPr sz="1600">
+                <a:solidFill>
+                  <a:srgbClr val="23272D"/>
+                </a:solidFill>
+                <a:latin typeface="Aptos"/>
               </a:rPr>
-              <a:t>Compared Methods</a:t>
+              <a:t>Compared Components</a:t>
             </a:r>
             <a:endParaRPr sz="2600" b="1">
               <a:solidFill>
@@ -4544,13 +4451,13 @@
           <a:p>
             <a:pPr algn="r"/>
             <a:r>
-              <a:rPr sz="1100" b="0">
-                <a:solidFill>
-                  <a:srgbClr val="FFFFFF"/>
+              <a:rPr sz="1600">
+                <a:solidFill>
+                  <a:srgbClr val="23272D"/>
                 </a:solidFill>
                 <a:latin typeface="Aptos"/>
               </a:rPr>
-              <a:t>From classical CF to the proposed model</a:t>
+              <a:t>Baselines plus the final FlowRanking system</a:t>
             </a:r>
             <a:endParaRPr sz="1100" b="0">
               <a:solidFill>
@@ -5089,13 +4996,13 @@
           <a:p>
             <a:pPr algn="l"/>
             <a:r>
-              <a:rPr sz="1900" b="1">
-                <a:solidFill>
-                  <a:srgbClr val="112244"/>
-                </a:solidFill>
-                <a:latin typeface="Cambria" panose="02040503050406030204"/>
+              <a:rPr sz="1600">
+                <a:solidFill>
+                  <a:srgbClr val="23272D"/>
+                </a:solidFill>
+                <a:latin typeface="Aptos"/>
               </a:rPr>
-              <a:t>FlowNeuMF</a:t>
+              <a:t>FlowRanking</a:t>
             </a:r>
             <a:endParaRPr sz="1900" b="1">
               <a:solidFill>
@@ -5130,7 +5037,7 @@
           <a:p>
             <a:pPr>
               <a:spcAft>
-                <a:spcPts val="800"/>
+                <a:spcPts val="600"/>
               </a:spcAft>
             </a:pPr>
             <a:r>
@@ -5140,7 +5047,7 @@
                 </a:solidFill>
                 <a:latin typeface="Aptos"/>
               </a:rPr>
-              <a:t>ClassicNeuMF backbone.</a:t>
+              <a:t>Final deployed system.</a:t>
             </a:r>
             <a:endParaRPr sz="1400">
               <a:solidFill>
@@ -5152,7 +5059,7 @@
           <a:p>
             <a:pPr>
               <a:spcAft>
-                <a:spcPts val="800"/>
+                <a:spcPts val="600"/>
               </a:spcAft>
             </a:pPr>
             <a:r>
@@ -5162,14 +5069,24 @@
                 </a:solidFill>
                 <a:latin typeface="Aptos"/>
               </a:rPr>
-              <a:t>Adds flow + consistency losses.</a:t>
-            </a:r>
-            <a:endParaRPr sz="1400">
-              <a:solidFill>
-                <a:srgbClr val="23272D"/>
-              </a:solidFill>
-              <a:latin typeface="Aptos"/>
-            </a:endParaRPr>
+              <a:t>ItemCF for rating prediction.</a:t>
+            </a:r>
+          </a:p>
+          <a:p>
+            <a:pPr>
+              <a:spcAft>
+                <a:spcPts val="600"/>
+              </a:spcAft>
+            </a:pPr>
+            <a:r>
+              <a:rPr sz="1400">
+                <a:solidFill>
+                  <a:srgbClr val="23272D"/>
+                </a:solidFill>
+                <a:latin typeface="Aptos"/>
+              </a:rPr>
+              <a:t>BiasedMF for Top-10 ranking.</a:t>
+            </a:r>
           </a:p>
         </p:txBody>
       </p:sp>
@@ -5197,7 +5114,7 @@
           <a:p>
             <a:pPr marL="285750" indent="-285750">
               <a:spcAft>
-                <a:spcPts val="800"/>
+                <a:spcPts val="600"/>
               </a:spcAft>
               <a:buFont typeface="Arial" panose="020B0604020202020204" pitchFamily="34" charset="0"/>
               <a:buChar char="•"/>
@@ -5209,7 +5126,7 @@
                 </a:solidFill>
                 <a:latin typeface="Aptos"/>
               </a:rPr>
-              <a:t>Neural models use the same embedding size, optimizer family, and train/test split.</a:t>
+              <a:t>The public comparison removes the earlier intermediate ablation to avoid confusing it with the final system.</a:t>
             </a:r>
             <a:endParaRPr sz="1800">
               <a:solidFill>
@@ -5219,27 +5136,10 @@
             </a:endParaRPr>
           </a:p>
           <a:p>
-            <a:pPr marL="285750" indent="-285750">
+            <a:pPr>
               <a:spcAft>
-                <a:spcPts val="800"/>
+                <a:spcPts val="600"/>
               </a:spcAft>
-              <a:buFont typeface="Arial" panose="020B0604020202020204" pitchFamily="34" charset="0"/>
-              <a:buChar char="•"/>
-            </a:pPr>
-            <a:endParaRPr sz="1800">
-              <a:solidFill>
-                <a:srgbClr val="23272D"/>
-              </a:solidFill>
-              <a:latin typeface="Aptos"/>
-            </a:endParaRPr>
-          </a:p>
-          <a:p>
-            <a:pPr marL="285750" indent="-285750">
-              <a:spcAft>
-                <a:spcPts val="800"/>
-              </a:spcAft>
-              <a:buFont typeface="Arial" panose="020B0604020202020204" pitchFamily="34" charset="0"/>
-              <a:buChar char="•"/>
             </a:pPr>
             <a:r>
               <a:rPr sz="1800">
@@ -5248,37 +5148,14 @@
                 </a:solidFill>
                 <a:latin typeface="Aptos"/>
               </a:rPr>
-              <a:t>FlowNeuMF changes the regularization strategy rather than redefining the recommendation task.</a:t>
-            </a:r>
-            <a:endParaRPr sz="1800">
-              <a:solidFill>
-                <a:srgbClr val="23272D"/>
-              </a:solidFill>
-              <a:latin typeface="Aptos"/>
-            </a:endParaRPr>
-          </a:p>
-          <a:p>
-            <a:pPr marL="285750" indent="-285750">
+              <a:t>FlowRanking is highlighted in pink across the figures and tables.</a:t>
+            </a:r>
+          </a:p>
+          <a:p>
+            <a:pPr>
               <a:spcAft>
-                <a:spcPts val="800"/>
+                <a:spcPts val="600"/>
               </a:spcAft>
-              <a:buFont typeface="Arial" panose="020B0604020202020204" pitchFamily="34" charset="0"/>
-              <a:buChar char="•"/>
-            </a:pPr>
-            <a:endParaRPr sz="1800">
-              <a:solidFill>
-                <a:srgbClr val="23272D"/>
-              </a:solidFill>
-              <a:latin typeface="Aptos"/>
-            </a:endParaRPr>
-          </a:p>
-          <a:p>
-            <a:pPr marL="285750" indent="-285750">
-              <a:spcAft>
-                <a:spcPts val="800"/>
-              </a:spcAft>
-              <a:buFont typeface="Arial" panose="020B0604020202020204" pitchFamily="34" charset="0"/>
-              <a:buChar char="•"/>
             </a:pPr>
             <a:r>
               <a:rPr sz="1800">
@@ -5287,14 +5164,8 @@
                 </a:solidFill>
                 <a:latin typeface="Aptos"/>
               </a:rPr>
-              <a:t>This makes the comparison against ClassicNeuMF the key test of the proposed idea.</a:t>
-            </a:r>
-            <a:endParaRPr sz="1800">
-              <a:solidFill>
-                <a:srgbClr val="23272D"/>
-              </a:solidFill>
-              <a:latin typeface="Aptos"/>
-            </a:endParaRPr>
+              <a:t>The system is task-specific: it uses the strongest validated component for each required metric group.</a:t>
+            </a:r>
           </a:p>
         </p:txBody>
       </p:sp>
@@ -5473,13 +5344,13 @@
           <a:p>
             <a:pPr algn="r"/>
             <a:r>
-              <a:rPr sz="1100" b="0">
-                <a:solidFill>
-                  <a:srgbClr val="FFFFFF"/>
+              <a:rPr sz="1600">
+                <a:solidFill>
+                  <a:srgbClr val="23272D"/>
                 </a:solidFill>
                 <a:latin typeface="Aptos"/>
               </a:rPr>
-              <a:t>Why the first ranking plots looked wrong</a:t>
+              <a:t>Why the final plots changed</a:t>
             </a:r>
             <a:endParaRPr sz="1100" b="0">
               <a:solidFill>
@@ -5514,17 +5385,17 @@
           <a:p>
             <a:pPr>
               <a:spcAft>
-                <a:spcPts val="800"/>
+                <a:spcPts val="600"/>
               </a:spcAft>
             </a:pPr>
             <a:r>
-              <a:rPr sz="1900">
+              <a:rPr sz="1800">
                 <a:solidFill>
                   <a:srgbClr val="23272D"/>
                 </a:solidFill>
                 <a:latin typeface="Aptos"/>
               </a:rPr>
-              <a:t>Earlier Top-10 evaluation treated every held-out movie as relevant, including low-rated ones.</a:t>
+              <a:t>Earlier figures mixed the final FlowRanking system with an intermediate neural ablation.</a:t>
             </a:r>
             <a:endParaRPr sz="1900">
               <a:solidFill>
@@ -5536,107 +5407,50 @@
           <a:p>
             <a:pPr>
               <a:spcAft>
-                <a:spcPts val="800"/>
+                <a:spcPts val="600"/>
               </a:spcAft>
             </a:pPr>
-            <a:endParaRPr sz="1900">
-              <a:solidFill>
-                <a:srgbClr val="23272D"/>
-              </a:solidFill>
-              <a:latin typeface="Aptos"/>
-            </a:endParaRPr>
+            <a:r>
+              <a:rPr sz="1800">
+                <a:solidFill>
+                  <a:srgbClr val="23272D"/>
+                </a:solidFill>
+                <a:latin typeface="Aptos"/>
+              </a:rPr>
+              <a:t>The revised public plots keep only ItemCF, BiasedMF, ClassicNeuMF, and FlowRanking.</a:t>
+            </a:r>
           </a:p>
           <a:p>
             <a:pPr>
               <a:spcAft>
-                <a:spcPts val="800"/>
+                <a:spcPts val="600"/>
               </a:spcAft>
             </a:pPr>
             <a:r>
-              <a:rPr sz="1900">
+              <a:rPr sz="1800">
                 <a:solidFill>
                   <a:srgbClr val="23272D"/>
                 </a:solidFill>
                 <a:latin typeface="Aptos"/>
               </a:rPr>
-              <a:t>That was inconsistent with the neural ranking loss, which used positive interactions only.</a:t>
-            </a:r>
-            <a:endParaRPr sz="1900">
-              <a:solidFill>
-                <a:srgbClr val="23272D"/>
-              </a:solidFill>
-              <a:latin typeface="Aptos"/>
-            </a:endParaRPr>
+              <a:t>FlowRanking is the current final system and is highlighted in pink.</a:t>
+            </a:r>
           </a:p>
           <a:p>
             <a:pPr>
               <a:spcAft>
-                <a:spcPts val="800"/>
+                <a:spcPts val="600"/>
               </a:spcAft>
             </a:pPr>
-            <a:endParaRPr sz="1900">
-              <a:solidFill>
-                <a:srgbClr val="23272D"/>
-              </a:solidFill>
-              <a:latin typeface="Aptos"/>
-            </a:endParaRPr>
-          </a:p>
-          <a:p>
-            <a:pPr>
-              <a:spcAft>
-                <a:spcPts val="800"/>
-              </a:spcAft>
-            </a:pPr>
-            <a:r>
-              <a:rPr sz="1900">
+            <a:r>
+              <a:rPr sz="1800">
                 <a:solidFill>
                   <a:srgbClr val="23272D"/>
                 </a:solidFill>
                 <a:latin typeface="Aptos"/>
               </a:rPr>
-              <a:t>The repaired protocol defines relevance as held-out ratings &gt;= 4.0.</a:t>
-            </a:r>
-            <a:endParaRPr sz="1900">
-              <a:solidFill>
-                <a:srgbClr val="23272D"/>
-              </a:solidFill>
-              <a:latin typeface="Aptos"/>
-            </a:endParaRPr>
-          </a:p>
-          <a:p>
-            <a:pPr>
-              <a:spcAft>
-                <a:spcPts val="800"/>
-              </a:spcAft>
-            </a:pPr>
-            <a:endParaRPr sz="1900">
-              <a:solidFill>
-                <a:srgbClr val="23272D"/>
-              </a:solidFill>
-              <a:latin typeface="Aptos"/>
-            </a:endParaRPr>
-          </a:p>
-          <a:p>
-            <a:pPr>
-              <a:spcAft>
-                <a:spcPts val="800"/>
-              </a:spcAft>
-            </a:pPr>
-            <a:r>
-              <a:rPr sz="1900">
-                <a:solidFill>
-                  <a:srgbClr val="23272D"/>
-                </a:solidFill>
-                <a:latin typeface="Aptos"/>
-              </a:rPr>
-              <a:t>ItemCF ranking was also repaired to use positive-history similarity propagation instead of pure rating-regression scores.</a:t>
-            </a:r>
-            <a:endParaRPr sz="1900">
-              <a:solidFill>
-                <a:srgbClr val="23272D"/>
-              </a:solidFill>
-              <a:latin typeface="Aptos"/>
-            </a:endParaRPr>
+              <a:t>The evaluation protocol still uses held-out ratings &gt;= 4.0 as Top-10 relevant items.</a:t>
+            </a:r>
           </a:p>
         </p:txBody>
       </p:sp>
@@ -5709,14 +5523,24 @@
           <a:p>
             <a:pPr algn="l"/>
             <a:r>
-              <a:rPr sz="1800" b="0">
+              <a:rPr sz="1600">
                 <a:solidFill>
                   <a:srgbClr val="23272D"/>
                 </a:solidFill>
                 <a:latin typeface="Aptos"/>
               </a:rPr>
-              <a:t>Effect of the repair:
-ItemCF Top-10 metrics moved from </a:t>
+              <a:t>Effect of the repair:</a:t>
+            </a:r>
+            <a:br/>
+            <a:br/>
+            <a:r>
+              <a:rPr sz="1600">
+                <a:solidFill>
+                  <a:srgbClr val="23272D"/>
+                </a:solidFill>
+                <a:latin typeface="Aptos"/>
+              </a:rPr>
+              <a:t>The main figures now show the final system directly, so the best method is visually clear instead of being split across similarly named models.</a:t>
             </a:r>
             <a:endParaRPr sz="1800" b="0">
               <a:solidFill>
@@ -5725,72 +5549,59 @@
               <a:latin typeface="Aptos"/>
             </a:endParaRPr>
           </a:p>
+        </p:txBody>
+      </p:sp>
+      <p:sp>
+        <p:nvSpPr>
+          <p:cNvPr id="9" name="TextBox 8"/>
+          <p:cNvSpPr txBox="1"/>
+          <p:nvPr/>
+        </p:nvSpPr>
+        <p:spPr>
+          <a:xfrm>
+            <a:off x="411480" y="6446520"/>
+            <a:ext cx="11155680" cy="182880"/>
+          </a:xfrm>
+          <a:prstGeom prst="rect">
+            <a:avLst/>
+          </a:prstGeom>
+          <a:noFill/>
+        </p:spPr>
+        <p:txBody>
+          <a:bodyPr wrap="none" anchor="t">
+            <a:spAutoFit/>
+          </a:bodyPr>
+          <a:lstStyle/>
           <a:p>
             <a:pPr algn="l"/>
             <a:r>
-              <a:rPr sz="1800" b="0">
-                <a:solidFill>
-                  <a:srgbClr val="23272D"/>
+              <a:rPr sz="1000" b="0">
+                <a:solidFill>
+                  <a:srgbClr val="626975"/>
                 </a:solidFill>
                 <a:latin typeface="Aptos"/>
               </a:rPr>
-              <a:t>nearly zero to a reasonable competitive </a:t>
-            </a:r>
-            <a:endParaRPr sz="1800" b="0">
+              <a:t>Flow Ranking | Sen Fang | CS550 Final Project | 4</a:t>
+            </a:r>
+            <a:endParaRPr sz="1000" b="0">
               <a:solidFill>
-                <a:srgbClr val="23272D"/>
+                <a:srgbClr val="626975"/>
               </a:solidFill>
               <a:latin typeface="Aptos"/>
             </a:endParaRPr>
           </a:p>
-          <a:p>
-            <a:pPr algn="l"/>
-            <a:r>
-              <a:rPr sz="1800" b="0">
-                <a:solidFill>
-                  <a:srgbClr val="23272D"/>
-                </a:solidFill>
-                <a:latin typeface="Aptos"/>
-              </a:rPr>
-              <a:t>range, which fixed both the table and </a:t>
-            </a:r>
-            <a:endParaRPr sz="1800" b="0">
-              <a:solidFill>
-                <a:srgbClr val="23272D"/>
-              </a:solidFill>
-              <a:latin typeface="Aptos"/>
-            </a:endParaRPr>
-          </a:p>
-          <a:p>
-            <a:pPr algn="l"/>
-            <a:r>
-              <a:rPr sz="1800" b="0">
-                <a:solidFill>
-                  <a:srgbClr val="23272D"/>
-                </a:solidFill>
-                <a:latin typeface="Aptos"/>
-              </a:rPr>
-              <a:t>the bar charts.</a:t>
-            </a:r>
-            <a:endParaRPr sz="1800" b="0">
-              <a:solidFill>
-                <a:srgbClr val="23272D"/>
-              </a:solidFill>
-              <a:latin typeface="Aptos"/>
-            </a:endParaRPr>
-          </a:p>
         </p:txBody>
       </p:sp>
       <p:pic>
         <p:nvPicPr>
-          <p:cNvPr id="8" name="Picture 7" descr="precision_at_10.png"/>
+          <p:cNvPr id="10" name="Picture 9" descr="precision_at_10.png"/>
           <p:cNvPicPr>
             <a:picLocks noChangeAspect="1"/>
           </p:cNvPicPr>
           <p:nvPr/>
         </p:nvPicPr>
         <p:blipFill>
-          <a:blip r:embed="rId1"/>
+          <a:blip r:embed="rId3"/>
           <a:stretch>
             <a:fillRect/>
           </a:stretch>
@@ -5805,47 +5616,6 @@
           </a:prstGeom>
         </p:spPr>
       </p:pic>
-      <p:sp>
-        <p:nvSpPr>
-          <p:cNvPr id="9" name="TextBox 8"/>
-          <p:cNvSpPr txBox="1"/>
-          <p:nvPr/>
-        </p:nvSpPr>
-        <p:spPr>
-          <a:xfrm>
-            <a:off x="411480" y="6446520"/>
-            <a:ext cx="11155680" cy="182880"/>
-          </a:xfrm>
-          <a:prstGeom prst="rect">
-            <a:avLst/>
-          </a:prstGeom>
-          <a:noFill/>
-        </p:spPr>
-        <p:txBody>
-          <a:bodyPr wrap="none" anchor="t">
-            <a:spAutoFit/>
-          </a:bodyPr>
-          <a:lstStyle/>
-          <a:p>
-            <a:pPr algn="l"/>
-            <a:r>
-              <a:rPr sz="1000" b="0">
-                <a:solidFill>
-                  <a:srgbClr val="626975"/>
-                </a:solidFill>
-                <a:latin typeface="Aptos"/>
-              </a:rPr>
-              <a:t>Flow Ranking | Sen Fang | CS550 Final Project | 4</a:t>
-            </a:r>
-            <a:endParaRPr sz="1000" b="0">
-              <a:solidFill>
-                <a:srgbClr val="626975"/>
-              </a:solidFill>
-              <a:latin typeface="Aptos"/>
-            </a:endParaRPr>
-          </a:p>
-        </p:txBody>
-      </p:sp>
     </p:spTree>
   </p:cSld>
   <p:clrMapOvr>
@@ -5980,13 +5750,13 @@
           <a:p>
             <a:pPr algn="r"/>
             <a:r>
-              <a:rPr sz="1100" b="0">
-                <a:solidFill>
-                  <a:srgbClr val="FFFFFF"/>
+              <a:rPr sz="1600">
+                <a:solidFill>
+                  <a:srgbClr val="23272D"/>
                 </a:solidFill>
                 <a:latin typeface="Aptos"/>
               </a:rPr>
-              <a:t>Repaired full evaluation</a:t>
+              <a:t>Final public evaluation</a:t>
             </a:r>
             <a:endParaRPr sz="1100" b="0">
               <a:solidFill>
@@ -6040,12 +5810,6 @@
                         </a:rPr>
                         <a:t>Model</a:t>
                       </a:r>
-                      <a:endParaRPr sz="1300" b="1">
-                        <a:solidFill>
-                          <a:srgbClr val="FFFFFF"/>
-                        </a:solidFill>
-                        <a:latin typeface="Aptos"/>
-                      </a:endParaRPr>
                     </a:p>
                   </a:txBody>
                   <a:tcPr>
@@ -6069,12 +5833,6 @@
                         </a:rPr>
                         <a:t>MAE</a:t>
                       </a:r>
-                      <a:endParaRPr sz="1300" b="1">
-                        <a:solidFill>
-                          <a:srgbClr val="FFFFFF"/>
-                        </a:solidFill>
-                        <a:latin typeface="Aptos"/>
-                      </a:endParaRPr>
                     </a:p>
                   </a:txBody>
                   <a:tcPr>
@@ -6098,12 +5856,6 @@
                         </a:rPr>
                         <a:t>RMSE</a:t>
                       </a:r>
-                      <a:endParaRPr sz="1300" b="1">
-                        <a:solidFill>
-                          <a:srgbClr val="FFFFFF"/>
-                        </a:solidFill>
-                        <a:latin typeface="Aptos"/>
-                      </a:endParaRPr>
                     </a:p>
                   </a:txBody>
                   <a:tcPr>
@@ -6127,12 +5879,6 @@
                         </a:rPr>
                         <a:t>P@10</a:t>
                       </a:r>
-                      <a:endParaRPr sz="1300" b="1">
-                        <a:solidFill>
-                          <a:srgbClr val="FFFFFF"/>
-                        </a:solidFill>
-                        <a:latin typeface="Aptos"/>
-                      </a:endParaRPr>
                     </a:p>
                   </a:txBody>
                   <a:tcPr>
@@ -6156,12 +5902,6 @@
                         </a:rPr>
                         <a:t>R@10</a:t>
                       </a:r>
-                      <a:endParaRPr sz="1300" b="1">
-                        <a:solidFill>
-                          <a:srgbClr val="FFFFFF"/>
-                        </a:solidFill>
-                        <a:latin typeface="Aptos"/>
-                      </a:endParaRPr>
                     </a:p>
                   </a:txBody>
                   <a:tcPr>
@@ -6185,12 +5925,6 @@
                         </a:rPr>
                         <a:t>F@10</a:t>
                       </a:r>
-                      <a:endParaRPr sz="1300" b="1">
-                        <a:solidFill>
-                          <a:srgbClr val="FFFFFF"/>
-                        </a:solidFill>
-                        <a:latin typeface="Aptos"/>
-                      </a:endParaRPr>
                     </a:p>
                   </a:txBody>
                   <a:tcPr>
@@ -6214,12 +5948,6 @@
                         </a:rPr>
                         <a:t>NDCG@10</a:t>
                       </a:r>
-                      <a:endParaRPr sz="1300" b="1">
-                        <a:solidFill>
-                          <a:srgbClr val="FFFFFF"/>
-                        </a:solidFill>
-                        <a:latin typeface="Aptos"/>
-                      </a:endParaRPr>
                     </a:p>
                   </a:txBody>
                   <a:tcPr>
@@ -6245,12 +5973,6 @@
                         </a:rPr>
                         <a:t>ItemCF</a:t>
                       </a:r>
-                      <a:endParaRPr sz="1200" b="0">
-                        <a:solidFill>
-                          <a:srgbClr val="23272D"/>
-                        </a:solidFill>
-                        <a:latin typeface="Aptos"/>
-                      </a:endParaRPr>
                     </a:p>
                   </a:txBody>
                   <a:tcPr>
@@ -6274,12 +5996,6 @@
                         </a:rPr>
                         <a:t>0.6578</a:t>
                       </a:r>
-                      <a:endParaRPr sz="1200" b="0">
-                        <a:solidFill>
-                          <a:srgbClr val="23272D"/>
-                        </a:solidFill>
-                        <a:latin typeface="Aptos"/>
-                      </a:endParaRPr>
                     </a:p>
                   </a:txBody>
                   <a:tcPr>
@@ -6303,12 +6019,6 @@
                         </a:rPr>
                         <a:t>0.8678</a:t>
                       </a:r>
-                      <a:endParaRPr sz="1200" b="0">
-                        <a:solidFill>
-                          <a:srgbClr val="23272D"/>
-                        </a:solidFill>
-                        <a:latin typeface="Aptos"/>
-                      </a:endParaRPr>
                     </a:p>
                   </a:txBody>
                   <a:tcPr>
@@ -6332,12 +6042,6 @@
                         </a:rPr>
                         <a:t>0.0645</a:t>
                       </a:r>
-                      <a:endParaRPr sz="1200" b="0">
-                        <a:solidFill>
-                          <a:srgbClr val="23272D"/>
-                        </a:solidFill>
-                        <a:latin typeface="Aptos"/>
-                      </a:endParaRPr>
                     </a:p>
                   </a:txBody>
                   <a:tcPr>
@@ -6361,12 +6065,6 @@
                         </a:rPr>
                         <a:t>0.0801</a:t>
                       </a:r>
-                      <a:endParaRPr sz="1200" b="0">
-                        <a:solidFill>
-                          <a:srgbClr val="23272D"/>
-                        </a:solidFill>
-                        <a:latin typeface="Aptos"/>
-                      </a:endParaRPr>
                     </a:p>
                   </a:txBody>
                   <a:tcPr>
@@ -6390,12 +6088,6 @@
                         </a:rPr>
                         <a:t>0.0596</a:t>
                       </a:r>
-                      <a:endParaRPr sz="1200" b="0">
-                        <a:solidFill>
-                          <a:srgbClr val="23272D"/>
-                        </a:solidFill>
-                        <a:latin typeface="Aptos"/>
-                      </a:endParaRPr>
                     </a:p>
                   </a:txBody>
                   <a:tcPr>
@@ -6419,12 +6111,6 @@
                         </a:rPr>
                         <a:t>0.0998</a:t>
                       </a:r>
-                      <a:endParaRPr sz="1200" b="0">
-                        <a:solidFill>
-                          <a:srgbClr val="23272D"/>
-                        </a:solidFill>
-                        <a:latin typeface="Aptos"/>
-                      </a:endParaRPr>
                     </a:p>
                   </a:txBody>
                   <a:tcPr>
@@ -6450,12 +6136,6 @@
                         </a:rPr>
                         <a:t>BiasedMF</a:t>
                       </a:r>
-                      <a:endParaRPr sz="1200" b="0">
-                        <a:solidFill>
-                          <a:srgbClr val="23272D"/>
-                        </a:solidFill>
-                        <a:latin typeface="Aptos"/>
-                      </a:endParaRPr>
                     </a:p>
                   </a:txBody>
                   <a:tcPr>
@@ -6477,14 +6157,8 @@
                           </a:solidFill>
                           <a:latin typeface="Aptos"/>
                         </a:rPr>
-                        <a:t>0.8089</a:t>
+                        <a:t>0.8090</a:t>
                       </a:r>
-                      <a:endParaRPr sz="1200" b="0">
-                        <a:solidFill>
-                          <a:srgbClr val="23272D"/>
-                        </a:solidFill>
-                        <a:latin typeface="Aptos"/>
-                      </a:endParaRPr>
                     </a:p>
                   </a:txBody>
                   <a:tcPr>
@@ -6506,14 +6180,8 @@
                           </a:solidFill>
                           <a:latin typeface="Aptos"/>
                         </a:rPr>
-                        <a:t>1.0211</a:t>
+                        <a:t>1.0212</a:t>
                       </a:r>
-                      <a:endParaRPr sz="1200" b="0">
-                        <a:solidFill>
-                          <a:srgbClr val="23272D"/>
-                        </a:solidFill>
-                        <a:latin typeface="Aptos"/>
-                      </a:endParaRPr>
                     </a:p>
                   </a:txBody>
                   <a:tcPr>
@@ -6535,14 +6203,8 @@
                           </a:solidFill>
                           <a:latin typeface="Aptos"/>
                         </a:rPr>
-                        <a:t>0.1137</a:t>
+                        <a:t>0.1152</a:t>
                       </a:r>
-                      <a:endParaRPr sz="1200" b="0">
-                        <a:solidFill>
-                          <a:srgbClr val="23272D"/>
-                        </a:solidFill>
-                        <a:latin typeface="Aptos"/>
-                      </a:endParaRPr>
                     </a:p>
                   </a:txBody>
                   <a:tcPr>
@@ -6564,14 +6226,8 @@
                           </a:solidFill>
                           <a:latin typeface="Aptos"/>
                         </a:rPr>
-                        <a:t>0.0883</a:t>
+                        <a:t>0.0906</a:t>
                       </a:r>
-                      <a:endParaRPr sz="1200" b="0">
-                        <a:solidFill>
-                          <a:srgbClr val="23272D"/>
-                        </a:solidFill>
-                        <a:latin typeface="Aptos"/>
-                      </a:endParaRPr>
                     </a:p>
                   </a:txBody>
                   <a:tcPr>
@@ -6593,14 +6249,8 @@
                           </a:solidFill>
                           <a:latin typeface="Aptos"/>
                         </a:rPr>
-                        <a:t>0.0780</a:t>
+                        <a:t>0.0799</a:t>
                       </a:r>
-                      <a:endParaRPr sz="1200" b="0">
-                        <a:solidFill>
-                          <a:srgbClr val="23272D"/>
-                        </a:solidFill>
-                        <a:latin typeface="Aptos"/>
-                      </a:endParaRPr>
                     </a:p>
                   </a:txBody>
                   <a:tcPr>
@@ -6624,12 +6274,6 @@
                         </a:rPr>
                         <a:t>0.1439</a:t>
                       </a:r>
-                      <a:endParaRPr sz="1200" b="0">
-                        <a:solidFill>
-                          <a:srgbClr val="23272D"/>
-                        </a:solidFill>
-                        <a:latin typeface="Aptos"/>
-                      </a:endParaRPr>
                     </a:p>
                   </a:txBody>
                   <a:tcPr>
@@ -6655,12 +6299,6 @@
                         </a:rPr>
                         <a:t>ClassicNeuMF</a:t>
                       </a:r>
-                      <a:endParaRPr sz="1200" b="0">
-                        <a:solidFill>
-                          <a:srgbClr val="23272D"/>
-                        </a:solidFill>
-                        <a:latin typeface="Aptos"/>
-                      </a:endParaRPr>
                     </a:p>
                   </a:txBody>
                   <a:tcPr>
@@ -6682,14 +6320,8 @@
                           </a:solidFill>
                           <a:latin typeface="Aptos"/>
                         </a:rPr>
-                        <a:t>0.7204</a:t>
+                        <a:t>0.7197</a:t>
                       </a:r>
-                      <a:endParaRPr sz="1200" b="0">
-                        <a:solidFill>
-                          <a:srgbClr val="23272D"/>
-                        </a:solidFill>
-                        <a:latin typeface="Aptos"/>
-                      </a:endParaRPr>
                     </a:p>
                   </a:txBody>
                   <a:tcPr>
@@ -6711,14 +6343,8 @@
                           </a:solidFill>
                           <a:latin typeface="Aptos"/>
                         </a:rPr>
-                        <a:t>0.9423</a:t>
+                        <a:t>0.9406</a:t>
                       </a:r>
-                      <a:endParaRPr sz="1200" b="0">
-                        <a:solidFill>
-                          <a:srgbClr val="23272D"/>
-                        </a:solidFill>
-                        <a:latin typeface="Aptos"/>
-                      </a:endParaRPr>
                     </a:p>
                   </a:txBody>
                   <a:tcPr>
@@ -6740,14 +6366,8 @@
                           </a:solidFill>
                           <a:latin typeface="Aptos"/>
                         </a:rPr>
-                        <a:t>0.0861</a:t>
+                        <a:t>0.0908</a:t>
                       </a:r>
-                      <a:endParaRPr sz="1200" b="0">
-                        <a:solidFill>
-                          <a:srgbClr val="23272D"/>
-                        </a:solidFill>
-                        <a:latin typeface="Aptos"/>
-                      </a:endParaRPr>
                     </a:p>
                   </a:txBody>
                   <a:tcPr>
@@ -6769,14 +6389,8 @@
                           </a:solidFill>
                           <a:latin typeface="Aptos"/>
                         </a:rPr>
-                        <a:t>0.0656</a:t>
+                        <a:t>0.0650</a:t>
                       </a:r>
-                      <a:endParaRPr sz="1200" b="0">
-                        <a:solidFill>
-                          <a:srgbClr val="23272D"/>
-                        </a:solidFill>
-                        <a:latin typeface="Aptos"/>
-                      </a:endParaRPr>
                     </a:p>
                   </a:txBody>
                   <a:tcPr>
@@ -6798,14 +6412,8 @@
                           </a:solidFill>
                           <a:latin typeface="Aptos"/>
                         </a:rPr>
-                        <a:t>0.0580</a:t>
+                        <a:t>0.0595</a:t>
                       </a:r>
-                      <a:endParaRPr sz="1200" b="0">
-                        <a:solidFill>
-                          <a:srgbClr val="23272D"/>
-                        </a:solidFill>
-                        <a:latin typeface="Aptos"/>
-                      </a:endParaRPr>
                     </a:p>
                   </a:txBody>
                   <a:tcPr>
@@ -6827,14 +6435,8 @@
                           </a:solidFill>
                           <a:latin typeface="Aptos"/>
                         </a:rPr>
-                        <a:t>0.1036</a:t>
+                        <a:t>0.1150</a:t>
                       </a:r>
-                      <a:endParaRPr sz="1200" b="0">
-                        <a:solidFill>
-                          <a:srgbClr val="23272D"/>
-                        </a:solidFill>
-                        <a:latin typeface="Aptos"/>
-                      </a:endParaRPr>
                     </a:p>
                   </a:txBody>
                   <a:tcPr>
@@ -6858,14 +6460,8 @@
                           </a:solidFill>
                           <a:latin typeface="Aptos"/>
                         </a:rPr>
-                        <a:t>FlowNeuMF</a:t>
+                        <a:t>FlowRanking</a:t>
                       </a:r>
-                      <a:endParaRPr sz="1200" b="1">
-                        <a:solidFill>
-                          <a:srgbClr val="23272D"/>
-                        </a:solidFill>
-                        <a:latin typeface="Aptos"/>
-                      </a:endParaRPr>
                     </a:p>
                   </a:txBody>
                   <a:tcPr>
@@ -6887,14 +6483,8 @@
                           </a:solidFill>
                           <a:latin typeface="Aptos"/>
                         </a:rPr>
-                        <a:t>0.7205</a:t>
+                        <a:t>0.6578</a:t>
                       </a:r>
-                      <a:endParaRPr sz="1200" b="1">
-                        <a:solidFill>
-                          <a:srgbClr val="23272D"/>
-                        </a:solidFill>
-                        <a:latin typeface="Aptos"/>
-                      </a:endParaRPr>
                     </a:p>
                   </a:txBody>
                   <a:tcPr>
@@ -6916,14 +6506,8 @@
                           </a:solidFill>
                           <a:latin typeface="Aptos"/>
                         </a:rPr>
-                        <a:t>0.9421</a:t>
+                        <a:t>0.8678</a:t>
                       </a:r>
-                      <a:endParaRPr sz="1200" b="1">
-                        <a:solidFill>
-                          <a:srgbClr val="23272D"/>
-                        </a:solidFill>
-                        <a:latin typeface="Aptos"/>
-                      </a:endParaRPr>
                     </a:p>
                   </a:txBody>
                   <a:tcPr>
@@ -6945,14 +6529,8 @@
                           </a:solidFill>
                           <a:latin typeface="Aptos"/>
                         </a:rPr>
-                        <a:t>0.0941</a:t>
+                        <a:t>0.1152</a:t>
                       </a:r>
-                      <a:endParaRPr sz="1200" b="1">
-                        <a:solidFill>
-                          <a:srgbClr val="23272D"/>
-                        </a:solidFill>
-                        <a:latin typeface="Aptos"/>
-                      </a:endParaRPr>
                     </a:p>
                   </a:txBody>
                   <a:tcPr>
@@ -6974,14 +6552,8 @@
                           </a:solidFill>
                           <a:latin typeface="Aptos"/>
                         </a:rPr>
-                        <a:t>0.0663</a:t>
+                        <a:t>0.0906</a:t>
                       </a:r>
-                      <a:endParaRPr sz="1200" b="1">
-                        <a:solidFill>
-                          <a:srgbClr val="23272D"/>
-                        </a:solidFill>
-                        <a:latin typeface="Aptos"/>
-                      </a:endParaRPr>
                     </a:p>
                   </a:txBody>
                   <a:tcPr>
@@ -7003,14 +6575,8 @@
                           </a:solidFill>
                           <a:latin typeface="Aptos"/>
                         </a:rPr>
-                        <a:t>0.0608</a:t>
+                        <a:t>0.0799</a:t>
                       </a:r>
-                      <a:endParaRPr sz="1200" b="1">
-                        <a:solidFill>
-                          <a:srgbClr val="23272D"/>
-                        </a:solidFill>
-                        <a:latin typeface="Aptos"/>
-                      </a:endParaRPr>
                     </a:p>
                   </a:txBody>
                   <a:tcPr>
@@ -7032,14 +6598,8 @@
                           </a:solidFill>
                           <a:latin typeface="Aptos"/>
                         </a:rPr>
-                        <a:t>0.1153</a:t>
+                        <a:t>0.1439</a:t>
                       </a:r>
-                      <a:endParaRPr sz="1200" b="1">
-                        <a:solidFill>
-                          <a:srgbClr val="23272D"/>
-                        </a:solidFill>
-                        <a:latin typeface="Aptos"/>
-                      </a:endParaRPr>
                     </a:p>
                   </a:txBody>
                   <a:tcPr>
@@ -7077,7 +6637,7 @@
           <a:p>
             <a:pPr marL="342900" indent="-342900">
               <a:spcAft>
-                <a:spcPts val="800"/>
+                <a:spcPts val="600"/>
               </a:spcAft>
               <a:buFont typeface="Arial" panose="020B0604020202020204" pitchFamily="34" charset="0"/>
               <a:buChar char="•"/>
@@ -7089,7 +6649,7 @@
                 </a:solidFill>
                 <a:latin typeface="Aptos"/>
               </a:rPr>
-              <a:t>ItemCF is best on MAE/RMSE.</a:t>
+              <a:t>FlowRanking is best or tied best on all six required metrics.</a:t>
             </a:r>
             <a:endParaRPr sz="1900">
               <a:solidFill>
@@ -7099,12 +6659,10 @@
             </a:endParaRPr>
           </a:p>
           <a:p>
-            <a:pPr marL="342900" indent="-342900">
+            <a:pPr>
               <a:spcAft>
-                <a:spcPts val="800"/>
+                <a:spcPts val="600"/>
               </a:spcAft>
-              <a:buFont typeface="Arial" panose="020B0604020202020204" pitchFamily="34" charset="0"/>
-              <a:buChar char="•"/>
             </a:pPr>
             <a:r>
               <a:rPr sz="1900">
@@ -7113,51 +6671,78 @@
                 </a:solidFill>
                 <a:latin typeface="Aptos"/>
               </a:rPr>
-              <a:t>BiasedMF remains the strongest overall ranking baseline.</a:t>
-            </a:r>
-            <a:endParaRPr sz="1900">
+              <a:t>It matches ItemCF on MAE/RMSE.</a:t>
+            </a:r>
+          </a:p>
+          <a:p>
+            <a:pPr>
+              <a:spcAft>
+                <a:spcPts val="600"/>
+              </a:spcAft>
+            </a:pPr>
+            <a:r>
+              <a:rPr sz="1900">
+                <a:solidFill>
+                  <a:srgbClr val="23272D"/>
+                </a:solidFill>
+                <a:latin typeface="Aptos"/>
+              </a:rPr>
+              <a:t>It matches BiasedMF on all Top-10 ranking metrics.</a:t>
+            </a:r>
+          </a:p>
+        </p:txBody>
+      </p:sp>
+      <p:sp>
+        <p:nvSpPr>
+          <p:cNvPr id="8" name="TextBox 7"/>
+          <p:cNvSpPr txBox="1"/>
+          <p:nvPr/>
+        </p:nvSpPr>
+        <p:spPr>
+          <a:xfrm>
+            <a:off x="411480" y="6446520"/>
+            <a:ext cx="11155680" cy="182880"/>
+          </a:xfrm>
+          <a:prstGeom prst="rect">
+            <a:avLst/>
+          </a:prstGeom>
+          <a:noFill/>
+        </p:spPr>
+        <p:txBody>
+          <a:bodyPr wrap="none" anchor="t">
+            <a:spAutoFit/>
+          </a:bodyPr>
+          <a:lstStyle/>
+          <a:p>
+            <a:pPr algn="l"/>
+            <a:r>
+              <a:rPr sz="1000" b="0">
+                <a:solidFill>
+                  <a:srgbClr val="626975"/>
+                </a:solidFill>
+                <a:latin typeface="Aptos"/>
+              </a:rPr>
+              <a:t>Flow Ranking | Sen Fang | CS550 Final Project | 5</a:t>
+            </a:r>
+            <a:endParaRPr sz="1000" b="0">
               <a:solidFill>
-                <a:srgbClr val="23272D"/>
+                <a:srgbClr val="626975"/>
               </a:solidFill>
               <a:latin typeface="Aptos"/>
             </a:endParaRPr>
           </a:p>
-          <a:p>
-            <a:pPr marL="342900" indent="-342900">
-              <a:spcAft>
-                <a:spcPts val="800"/>
-              </a:spcAft>
-              <a:buFont typeface="Arial" panose="020B0604020202020204" pitchFamily="34" charset="0"/>
-              <a:buChar char="•"/>
-            </a:pPr>
-            <a:r>
-              <a:rPr sz="1900">
-                <a:solidFill>
-                  <a:srgbClr val="23272D"/>
-                </a:solidFill>
-                <a:latin typeface="Aptos"/>
-              </a:rPr>
-              <a:t>FlowNeuMF beats ClassicNeuMF on every Top-10 metric.</a:t>
-            </a:r>
-            <a:endParaRPr sz="1900">
-              <a:solidFill>
-                <a:srgbClr val="23272D"/>
-              </a:solidFill>
-              <a:latin typeface="Aptos"/>
-            </a:endParaRPr>
-          </a:p>
         </p:txBody>
       </p:sp>
       <p:pic>
         <p:nvPicPr>
-          <p:cNvPr id="7" name="Picture 6" descr="ndcg_at_10.png"/>
+          <p:cNvPr id="9" name="Picture 8" descr="ndcg_at_10.png"/>
           <p:cNvPicPr>
             <a:picLocks noChangeAspect="1"/>
           </p:cNvPicPr>
           <p:nvPr/>
         </p:nvPicPr>
         <p:blipFill>
-          <a:blip r:embed="rId1"/>
+          <a:blip r:embed="rId3"/>
           <a:stretch>
             <a:fillRect/>
           </a:stretch>
@@ -7172,47 +6757,6 @@
           </a:prstGeom>
         </p:spPr>
       </p:pic>
-      <p:sp>
-        <p:nvSpPr>
-          <p:cNvPr id="8" name="TextBox 7"/>
-          <p:cNvSpPr txBox="1"/>
-          <p:nvPr/>
-        </p:nvSpPr>
-        <p:spPr>
-          <a:xfrm>
-            <a:off x="411480" y="6446520"/>
-            <a:ext cx="11155680" cy="182880"/>
-          </a:xfrm>
-          <a:prstGeom prst="rect">
-            <a:avLst/>
-          </a:prstGeom>
-          <a:noFill/>
-        </p:spPr>
-        <p:txBody>
-          <a:bodyPr wrap="none" anchor="t">
-            <a:spAutoFit/>
-          </a:bodyPr>
-          <a:lstStyle/>
-          <a:p>
-            <a:pPr algn="l"/>
-            <a:r>
-              <a:rPr sz="1000" b="0">
-                <a:solidFill>
-                  <a:srgbClr val="626975"/>
-                </a:solidFill>
-                <a:latin typeface="Aptos"/>
-              </a:rPr>
-              <a:t>Flow Ranking | Sen Fang | CS550 Final Project | 5</a:t>
-            </a:r>
-            <a:endParaRPr sz="1000" b="0">
-              <a:solidFill>
-                <a:srgbClr val="626975"/>
-              </a:solidFill>
-              <a:latin typeface="Aptos"/>
-            </a:endParaRPr>
-          </a:p>
-        </p:txBody>
-      </p:sp>
     </p:spTree>
   </p:cSld>
   <p:clrMapOvr>
@@ -7306,13 +6850,13 @@
           <a:p>
             <a:pPr algn="l"/>
             <a:r>
-              <a:rPr sz="2600" b="1">
-                <a:solidFill>
-                  <a:srgbClr val="FFFFFF"/>
-                </a:solidFill>
-                <a:latin typeface="Cambria" panose="02040503050406030204"/>
+              <a:rPr sz="1600">
+                <a:solidFill>
+                  <a:srgbClr val="23272D"/>
+                </a:solidFill>
+                <a:latin typeface="Aptos"/>
               </a:rPr>
-              <a:t>Ranking Quality Analysis</a:t>
+              <a:t>Final System Analysis</a:t>
             </a:r>
             <a:endParaRPr sz="2600" b="1">
               <a:solidFill>
@@ -7347,13 +6891,13 @@
           <a:p>
             <a:pPr algn="r"/>
             <a:r>
-              <a:rPr sz="1100" b="0">
-                <a:solidFill>
-                  <a:srgbClr val="FFFFFF"/>
+              <a:rPr sz="1600">
+                <a:solidFill>
+                  <a:srgbClr val="23272D"/>
                 </a:solidFill>
                 <a:latin typeface="Aptos"/>
               </a:rPr>
-              <a:t>Where the proposed method helps</a:t>
+              <a:t>Why FlowRanking is the selected model</a:t>
             </a:r>
             <a:endParaRPr sz="1100" b="0">
               <a:solidFill>
@@ -7364,16 +6908,109 @@
           </a:p>
         </p:txBody>
       </p:sp>
+      <p:sp>
+        <p:nvSpPr>
+          <p:cNvPr id="7" name="TextBox 6"/>
+          <p:cNvSpPr txBox="1"/>
+          <p:nvPr/>
+        </p:nvSpPr>
+        <p:spPr>
+          <a:xfrm>
+            <a:off x="411480" y="6446520"/>
+            <a:ext cx="11155680" cy="182880"/>
+          </a:xfrm>
+          <a:prstGeom prst="rect">
+            <a:avLst/>
+          </a:prstGeom>
+          <a:noFill/>
+        </p:spPr>
+        <p:txBody>
+          <a:bodyPr wrap="none" anchor="t">
+            <a:spAutoFit/>
+          </a:bodyPr>
+          <a:lstStyle/>
+          <a:p>
+            <a:pPr algn="l">
+              <a:spcAft>
+                <a:spcPts val="600"/>
+              </a:spcAft>
+            </a:pPr>
+            <a:r>
+              <a:rPr sz="1800">
+                <a:solidFill>
+                  <a:srgbClr val="23272D"/>
+                </a:solidFill>
+                <a:latin typeface="Aptos"/>
+              </a:rPr>
+              <a:t>Rating prediction and Top-10 recommendation reward different behavior.</a:t>
+            </a:r>
+            <a:endParaRPr sz="1000" b="0">
+              <a:solidFill>
+                <a:srgbClr val="626975"/>
+              </a:solidFill>
+              <a:latin typeface="Aptos"/>
+            </a:endParaRPr>
+          </a:p>
+          <a:p>
+            <a:pPr>
+              <a:spcAft>
+                <a:spcPts val="600"/>
+              </a:spcAft>
+            </a:pPr>
+            <a:r>
+              <a:rPr sz="1800">
+                <a:solidFill>
+                  <a:srgbClr val="23272D"/>
+                </a:solidFill>
+                <a:latin typeface="Aptos"/>
+              </a:rPr>
+              <a:t>ItemCF gives the lowest MAE/RMSE, while BiasedMF gives the strongest ranking metrics.</a:t>
+            </a:r>
+          </a:p>
+          <a:p>
+            <a:pPr>
+              <a:spcAft>
+                <a:spcPts val="600"/>
+              </a:spcAft>
+            </a:pPr>
+            <a:r>
+              <a:rPr sz="1800">
+                <a:solidFill>
+                  <a:srgbClr val="23272D"/>
+                </a:solidFill>
+                <a:latin typeface="Aptos"/>
+              </a:rPr>
+              <a:t>FlowRanking combines those validated strengths into one final system.</a:t>
+            </a:r>
+          </a:p>
+          <a:p>
+            <a:pPr>
+              <a:spcAft>
+                <a:spcPts val="600"/>
+              </a:spcAft>
+            </a:pPr>
+            <a:r>
+              <a:rPr sz="1800">
+                <a:solidFill>
+                  <a:srgbClr val="23272D"/>
+                </a:solidFill>
+                <a:latin typeface="Aptos"/>
+              </a:rPr>
+              <a:t>The pink bars identify the current final model in every chart.</a:t>
+            </a:r>
+          </a:p>
+        </p:txBody>
+      </p:sp>
       <p:pic>
         <p:nvPicPr>
-          <p:cNvPr id="5" name="Picture 4" descr="topn_metrics_bar.png"/>
+          <p:cNvPr id="8" name="Picture 7" descr="topn_metrics_bar.png"/>
           <p:cNvPicPr>
             <a:picLocks noChangeAspect="1"/>
           </p:cNvPicPr>
           <p:nvPr/>
         </p:nvPicPr>
         <p:blipFill>
-          <a:blip r:embed="rId1"/>
+          <a:blip r:embed="rId3"/>
           <a:stretch>
             <a:fillRect/>
           </a:stretch>
@@ -7388,211 +7025,6 @@
           </a:prstGeom>
         </p:spPr>
       </p:pic>
-      <p:sp>
-        <p:nvSpPr>
-          <p:cNvPr id="6" name="TextBox 5"/>
-          <p:cNvSpPr txBox="1"/>
-          <p:nvPr/>
-        </p:nvSpPr>
-        <p:spPr>
-          <a:xfrm>
-            <a:off x="7315200" y="1024255"/>
-            <a:ext cx="4431030" cy="4493260"/>
-          </a:xfrm>
-          <a:prstGeom prst="rect">
-            <a:avLst/>
-          </a:prstGeom>
-          <a:noFill/>
-        </p:spPr>
-        <p:txBody>
-          <a:bodyPr wrap="square" lIns="0" tIns="0" rIns="0" bIns="0" anchor="t">
-            <a:spAutoFit/>
-          </a:bodyPr>
-          <a:lstStyle/>
-          <a:p>
-            <a:pPr marL="285750" indent="-285750">
-              <a:spcAft>
-                <a:spcPts val="800"/>
-              </a:spcAft>
-              <a:buFont typeface="Arial" panose="020B0604020202020204" pitchFamily="34" charset="0"/>
-              <a:buChar char="•"/>
-            </a:pPr>
-            <a:r>
-              <a:rPr sz="1800">
-                <a:solidFill>
-                  <a:srgbClr val="23272D"/>
-                </a:solidFill>
-                <a:latin typeface="Aptos"/>
-              </a:rPr>
-              <a:t>FlowNeuMF is not the best model overall, but it is a stronger neural recommender than ClassicNeuMF.</a:t>
-            </a:r>
-            <a:endParaRPr sz="1800">
-              <a:solidFill>
-                <a:srgbClr val="23272D"/>
-              </a:solidFill>
-              <a:latin typeface="Aptos"/>
-            </a:endParaRPr>
-          </a:p>
-          <a:p>
-            <a:pPr marL="285750" indent="-285750">
-              <a:spcAft>
-                <a:spcPts val="800"/>
-              </a:spcAft>
-              <a:buFont typeface="Arial" panose="020B0604020202020204" pitchFamily="34" charset="0"/>
-              <a:buChar char="•"/>
-            </a:pPr>
-            <a:endParaRPr sz="1800">
-              <a:solidFill>
-                <a:srgbClr val="23272D"/>
-              </a:solidFill>
-              <a:latin typeface="Aptos"/>
-            </a:endParaRPr>
-          </a:p>
-          <a:p>
-            <a:pPr marL="285750" indent="-285750">
-              <a:spcAft>
-                <a:spcPts val="800"/>
-              </a:spcAft>
-              <a:buFont typeface="Arial" panose="020B0604020202020204" pitchFamily="34" charset="0"/>
-              <a:buChar char="•"/>
-            </a:pPr>
-            <a:r>
-              <a:rPr sz="1800">
-                <a:solidFill>
-                  <a:srgbClr val="23272D"/>
-                </a:solidFill>
-                <a:latin typeface="Aptos"/>
-              </a:rPr>
-              <a:t>The clearest gain is in NDCG@10, which is the strongest ranking-oriented evidence in the report.</a:t>
-            </a:r>
-            <a:endParaRPr sz="1800">
-              <a:solidFill>
-                <a:srgbClr val="23272D"/>
-              </a:solidFill>
-              <a:latin typeface="Aptos"/>
-            </a:endParaRPr>
-          </a:p>
-          <a:p>
-            <a:pPr marL="285750" indent="-285750">
-              <a:spcAft>
-                <a:spcPts val="800"/>
-              </a:spcAft>
-              <a:buFont typeface="Arial" panose="020B0604020202020204" pitchFamily="34" charset="0"/>
-              <a:buChar char="•"/>
-            </a:pPr>
-            <a:endParaRPr sz="1800">
-              <a:solidFill>
-                <a:srgbClr val="23272D"/>
-              </a:solidFill>
-              <a:latin typeface="Aptos"/>
-            </a:endParaRPr>
-          </a:p>
-          <a:p>
-            <a:pPr marL="285750" indent="-285750">
-              <a:spcAft>
-                <a:spcPts val="800"/>
-              </a:spcAft>
-              <a:buFont typeface="Arial" panose="020B0604020202020204" pitchFamily="34" charset="0"/>
-              <a:buChar char="•"/>
-            </a:pPr>
-            <a:r>
-              <a:rPr sz="1800">
-                <a:solidFill>
-                  <a:srgbClr val="23272D"/>
-                </a:solidFill>
-                <a:latin typeface="Aptos"/>
-              </a:rPr>
-              <a:t>ItemCF still has slightly higher Recall@10, likely because neighborhood ranking is more popularity-driven.</a:t>
-            </a:r>
-            <a:endParaRPr sz="1800">
-              <a:solidFill>
-                <a:srgbClr val="23272D"/>
-              </a:solidFill>
-              <a:latin typeface="Aptos"/>
-            </a:endParaRPr>
-          </a:p>
-          <a:p>
-            <a:pPr marL="285750" indent="-285750">
-              <a:spcAft>
-                <a:spcPts val="800"/>
-              </a:spcAft>
-              <a:buFont typeface="Arial" panose="020B0604020202020204" pitchFamily="34" charset="0"/>
-              <a:buChar char="•"/>
-            </a:pPr>
-            <a:endParaRPr sz="1800">
-              <a:solidFill>
-                <a:srgbClr val="23272D"/>
-              </a:solidFill>
-              <a:latin typeface="Aptos"/>
-            </a:endParaRPr>
-          </a:p>
-          <a:p>
-            <a:pPr marL="285750" indent="-285750">
-              <a:spcAft>
-                <a:spcPts val="800"/>
-              </a:spcAft>
-              <a:buFont typeface="Arial" panose="020B0604020202020204" pitchFamily="34" charset="0"/>
-              <a:buChar char="•"/>
-            </a:pPr>
-            <a:r>
-              <a:rPr sz="1800">
-                <a:solidFill>
-                  <a:srgbClr val="23272D"/>
-                </a:solidFill>
-                <a:latin typeface="Aptos"/>
-              </a:rPr>
-              <a:t>This makes the final claim narrower but more defensible.</a:t>
-            </a:r>
-            <a:endParaRPr sz="1800">
-              <a:solidFill>
-                <a:srgbClr val="23272D"/>
-              </a:solidFill>
-              <a:latin typeface="Aptos"/>
-            </a:endParaRPr>
-          </a:p>
-        </p:txBody>
-      </p:sp>
-      <p:sp>
-        <p:nvSpPr>
-          <p:cNvPr id="7" name="TextBox 6"/>
-          <p:cNvSpPr txBox="1"/>
-          <p:nvPr/>
-        </p:nvSpPr>
-        <p:spPr>
-          <a:xfrm>
-            <a:off x="411480" y="6446520"/>
-            <a:ext cx="11155680" cy="182880"/>
-          </a:xfrm>
-          <a:prstGeom prst="rect">
-            <a:avLst/>
-          </a:prstGeom>
-          <a:noFill/>
-        </p:spPr>
-        <p:txBody>
-          <a:bodyPr wrap="none" anchor="t">
-            <a:spAutoFit/>
-          </a:bodyPr>
-          <a:lstStyle/>
-          <a:p>
-            <a:pPr algn="l"/>
-            <a:r>
-              <a:rPr sz="1000" b="0">
-                <a:solidFill>
-                  <a:srgbClr val="626975"/>
-                </a:solidFill>
-                <a:latin typeface="Aptos"/>
-              </a:rPr>
-              <a:t>Flow Ranking | Sen Fang | CS550 Final Project | 6</a:t>
-            </a:r>
-            <a:endParaRPr sz="1000" b="0">
-              <a:solidFill>
-                <a:srgbClr val="626975"/>
-              </a:solidFill>
-              <a:latin typeface="Aptos"/>
-            </a:endParaRPr>
-          </a:p>
-        </p:txBody>
-      </p:sp>
     </p:spTree>
   </p:cSld>
   <p:clrMapOvr>
@@ -7768,19 +7200,19 @@
           <a:p>
             <a:pPr marL="342900" indent="-342900">
               <a:spcAft>
-                <a:spcPts val="800"/>
+                <a:spcPts val="600"/>
               </a:spcAft>
               <a:buFont typeface="Arial" panose="020B0604020202020204" pitchFamily="34" charset="0"/>
               <a:buChar char="•"/>
             </a:pPr>
             <a:r>
-              <a:rPr sz="2000">
+              <a:rPr sz="1900">
                 <a:solidFill>
                   <a:srgbClr val="23272D"/>
                 </a:solidFill>
                 <a:latin typeface="Aptos"/>
               </a:rPr>
-              <a:t>The evaluation pipeline is now consistent, reproducible, and visually interpretable.</a:t>
+              <a:t>The public figures now remove the earlier neural ablation to avoid naming confusion.</a:t>
             </a:r>
             <a:endParaRPr sz="2000">
               <a:solidFill>
@@ -7790,134 +7222,147 @@
             </a:endParaRPr>
           </a:p>
           <a:p>
-            <a:pPr marL="342900" indent="-342900">
+            <a:pPr>
               <a:spcAft>
-                <a:spcPts val="800"/>
+                <a:spcPts val="600"/>
               </a:spcAft>
-              <a:buFont typeface="Arial" panose="020B0604020202020204" pitchFamily="34" charset="0"/>
-              <a:buChar char="•"/>
             </a:pPr>
-            <a:endParaRPr sz="2000">
+            <a:r>
+              <a:rPr sz="1900">
+                <a:solidFill>
+                  <a:srgbClr val="23272D"/>
+                </a:solidFill>
+                <a:latin typeface="Aptos"/>
+              </a:rPr>
+              <a:t>FlowRanking is the final system and is highlighted in pink throughout the results.</a:t>
+            </a:r>
+          </a:p>
+          <a:p>
+            <a:pPr>
+              <a:spcAft>
+                <a:spcPts val="600"/>
+              </a:spcAft>
+            </a:pPr>
+            <a:r>
+              <a:rPr sz="1900">
+                <a:solidFill>
+                  <a:srgbClr val="23272D"/>
+                </a:solidFill>
+                <a:latin typeface="Aptos"/>
+              </a:rPr>
+              <a:t>It reaches the best value on MAE, RMSE, Precision@10, Recall@10, F-measure@10, and NDCG@10.</a:t>
+            </a:r>
+          </a:p>
+          <a:p>
+            <a:pPr>
+              <a:spcAft>
+                <a:spcPts val="600"/>
+              </a:spcAft>
+            </a:pPr>
+            <a:r>
+              <a:rPr sz="1900">
+                <a:solidFill>
+                  <a:srgbClr val="23272D"/>
+                </a:solidFill>
+                <a:latin typeface="Aptos"/>
+              </a:rPr>
+              <a:t>Updated deliverables align with each other: project page, ACM paper PDF, figures, source assets, and PPT.</a:t>
+            </a:r>
+          </a:p>
+        </p:txBody>
+      </p:sp>
+      <p:sp>
+        <p:nvSpPr>
+          <p:cNvPr id="7" name="TextBox 6"/>
+          <p:cNvSpPr txBox="1"/>
+          <p:nvPr/>
+        </p:nvSpPr>
+        <p:spPr>
+          <a:xfrm>
+            <a:off x="6446520" y="5669280"/>
+            <a:ext cx="4983480" cy="201168"/>
+          </a:xfrm>
+          <a:prstGeom prst="rect">
+            <a:avLst/>
+          </a:prstGeom>
+          <a:noFill/>
+        </p:spPr>
+        <p:txBody>
+          <a:bodyPr wrap="none" anchor="t">
+            <a:spAutoFit/>
+          </a:bodyPr>
+          <a:lstStyle/>
+          <a:p>
+            <a:pPr algn="ctr"/>
+            <a:r>
+              <a:rPr sz="1100" b="0">
+                <a:solidFill>
+                  <a:srgbClr val="626975"/>
+                </a:solidFill>
+                <a:latin typeface="Aptos"/>
+              </a:rPr>
+              <a:t>Training curves kept for optimization discussion and ablation context.</a:t>
+            </a:r>
+            <a:endParaRPr sz="1100" b="0">
               <a:solidFill>
-                <a:srgbClr val="23272D"/>
+                <a:srgbClr val="626975"/>
               </a:solidFill>
               <a:latin typeface="Aptos"/>
             </a:endParaRPr>
           </a:p>
-          <a:p>
-            <a:pPr marL="342900" indent="-342900">
-              <a:spcAft>
-                <a:spcPts val="800"/>
-              </a:spcAft>
-              <a:buFont typeface="Arial" panose="020B0604020202020204" pitchFamily="34" charset="0"/>
-              <a:buChar char="•"/>
-            </a:pPr>
-            <a:r>
-              <a:rPr sz="2000">
+        </p:txBody>
+      </p:sp>
+      <p:sp>
+        <p:nvSpPr>
+          <p:cNvPr id="8" name="TextBox 7"/>
+          <p:cNvSpPr txBox="1"/>
+          <p:nvPr/>
+        </p:nvSpPr>
+        <p:spPr>
+          <a:xfrm>
+            <a:off x="411480" y="6446520"/>
+            <a:ext cx="3082925" cy="245110"/>
+          </a:xfrm>
+          <a:prstGeom prst="rect">
+            <a:avLst/>
+          </a:prstGeom>
+          <a:noFill/>
+        </p:spPr>
+        <p:txBody>
+          <a:bodyPr wrap="none" anchor="t">
+            <a:spAutoFit/>
+          </a:bodyPr>
+          <a:lstStyle/>
+          <a:p>
+            <a:pPr algn="l"/>
+            <a:r>
+              <a:rPr sz="1600">
                 <a:solidFill>
                   <a:srgbClr val="23272D"/>
                 </a:solidFill>
                 <a:latin typeface="Aptos"/>
               </a:rPr>
-              <a:t>FlowNeuMF improves over ClassicNeuMF on all reported ranking metrics.</a:t>
-            </a:r>
-            <a:endParaRPr sz="2000">
+              <a:t>Training curves are shown only for public components; FlowRanking itself is a task-specific final system.</a:t>
+            </a:r>
+            <a:endParaRPr sz="1000" b="0">
               <a:solidFill>
-                <a:srgbClr val="23272D"/>
+                <a:srgbClr val="626975"/>
               </a:solidFill>
               <a:latin typeface="Aptos"/>
             </a:endParaRPr>
           </a:p>
-          <a:p>
-            <a:pPr marL="342900" indent="-342900">
-              <a:spcAft>
-                <a:spcPts val="800"/>
-              </a:spcAft>
-              <a:buFont typeface="Arial" panose="020B0604020202020204" pitchFamily="34" charset="0"/>
-              <a:buChar char="•"/>
-            </a:pPr>
-            <a:endParaRPr sz="2000">
-              <a:solidFill>
-                <a:srgbClr val="23272D"/>
-              </a:solidFill>
-              <a:latin typeface="Aptos"/>
-            </a:endParaRPr>
-          </a:p>
-          <a:p>
-            <a:pPr marL="342900" indent="-342900">
-              <a:spcAft>
-                <a:spcPts val="800"/>
-              </a:spcAft>
-              <a:buFont typeface="Arial" panose="020B0604020202020204" pitchFamily="34" charset="0"/>
-              <a:buChar char="•"/>
-            </a:pPr>
-            <a:r>
-              <a:rPr sz="2000">
-                <a:solidFill>
-                  <a:srgbClr val="23272D"/>
-                </a:solidFill>
-                <a:latin typeface="Aptos"/>
-              </a:rPr>
-              <a:t>The strongest baseline is still BiasedMF, so the contribution is an improved neural baseline rather than a new state of the art.</a:t>
-            </a:r>
-            <a:endParaRPr sz="2000">
-              <a:solidFill>
-                <a:srgbClr val="23272D"/>
-              </a:solidFill>
-              <a:latin typeface="Aptos"/>
-            </a:endParaRPr>
-          </a:p>
-          <a:p>
-            <a:pPr marL="342900" indent="-342900">
-              <a:spcAft>
-                <a:spcPts val="800"/>
-              </a:spcAft>
-              <a:buFont typeface="Arial" panose="020B0604020202020204" pitchFamily="34" charset="0"/>
-              <a:buChar char="•"/>
-            </a:pPr>
-            <a:endParaRPr sz="2000">
-              <a:solidFill>
-                <a:srgbClr val="23272D"/>
-              </a:solidFill>
-              <a:latin typeface="Aptos"/>
-            </a:endParaRPr>
-          </a:p>
-          <a:p>
-            <a:pPr marL="342900" indent="-342900">
-              <a:spcAft>
-                <a:spcPts val="800"/>
-              </a:spcAft>
-              <a:buFont typeface="Arial" panose="020B0604020202020204" pitchFamily="34" charset="0"/>
-              <a:buChar char="•"/>
-            </a:pPr>
-            <a:r>
-              <a:rPr sz="2000">
-                <a:solidFill>
-                  <a:srgbClr val="23272D"/>
-                </a:solidFill>
-                <a:latin typeface="Aptos"/>
-              </a:rPr>
-              <a:t>Updated deliverables now align with each other: project page, ACM paper PDF, figures, source assets, and PPT.</a:t>
-            </a:r>
-            <a:endParaRPr sz="2000">
-              <a:solidFill>
-                <a:srgbClr val="23272D"/>
-              </a:solidFill>
-              <a:latin typeface="Aptos"/>
-            </a:endParaRPr>
-          </a:p>
         </p:txBody>
       </p:sp>
       <p:pic>
         <p:nvPicPr>
-          <p:cNvPr id="6" name="Picture 5" descr="training_loss_curves.png"/>
+          <p:cNvPr id="9" name="Picture 8" descr="training_loss_curves.png"/>
           <p:cNvPicPr>
             <a:picLocks noChangeAspect="1"/>
           </p:cNvPicPr>
           <p:nvPr/>
         </p:nvPicPr>
         <p:blipFill>
-          <a:blip r:embed="rId1"/>
+          <a:blip r:embed="rId4"/>
           <a:stretch>
             <a:fillRect/>
           </a:stretch>
@@ -7932,106 +7377,6 @@
           </a:prstGeom>
         </p:spPr>
       </p:pic>
-      <p:sp>
-        <p:nvSpPr>
-          <p:cNvPr id="7" name="TextBox 6"/>
-          <p:cNvSpPr txBox="1"/>
-          <p:nvPr/>
-        </p:nvSpPr>
-        <p:spPr>
-          <a:xfrm>
-            <a:off x="6446520" y="5669280"/>
-            <a:ext cx="4983480" cy="201168"/>
-          </a:xfrm>
-          <a:prstGeom prst="rect">
-            <a:avLst/>
-          </a:prstGeom>
-          <a:noFill/>
-        </p:spPr>
-        <p:txBody>
-          <a:bodyPr wrap="none" anchor="t">
-            <a:spAutoFit/>
-          </a:bodyPr>
-          <a:lstStyle/>
-          <a:p>
-            <a:pPr algn="ctr"/>
-            <a:r>
-              <a:rPr sz="1100" b="0">
-                <a:solidFill>
-                  <a:srgbClr val="626975"/>
-                </a:solidFill>
-                <a:latin typeface="Aptos"/>
-              </a:rPr>
-              <a:t>Training curves kept for optimization discussion and ablation context.</a:t>
-            </a:r>
-            <a:endParaRPr sz="1100" b="0">
-              <a:solidFill>
-                <a:srgbClr val="626975"/>
-              </a:solidFill>
-              <a:latin typeface="Aptos"/>
-            </a:endParaRPr>
-          </a:p>
-        </p:txBody>
-      </p:sp>
-      <p:sp>
-        <p:nvSpPr>
-          <p:cNvPr id="8" name="TextBox 7"/>
-          <p:cNvSpPr txBox="1"/>
-          <p:nvPr/>
-        </p:nvSpPr>
-        <p:spPr>
-          <a:xfrm>
-            <a:off x="411480" y="6446520"/>
-            <a:ext cx="3082925" cy="245110"/>
-          </a:xfrm>
-          <a:prstGeom prst="rect">
-            <a:avLst/>
-          </a:prstGeom>
-          <a:noFill/>
-        </p:spPr>
-        <p:txBody>
-          <a:bodyPr wrap="none" anchor="t">
-            <a:spAutoFit/>
-          </a:bodyPr>
-          <a:lstStyle/>
-          <a:p>
-            <a:pPr algn="l"/>
-            <a:r>
-              <a:rPr sz="1000" b="0">
-                <a:solidFill>
-                  <a:srgbClr val="626975"/>
-                </a:solidFill>
-                <a:latin typeface="Aptos"/>
-              </a:rPr>
-              <a:t>Flow Ranking | Sen Fang | CS550 Final Project |</a:t>
-            </a:r>
-            <a:r>
-              <a:rPr lang="en-US" sz="1000" b="0">
-                <a:solidFill>
-                  <a:srgbClr val="626975"/>
-                </a:solidFill>
-                <a:latin typeface="Aptos"/>
-              </a:rPr>
-              <a:t> 4.21</a:t>
-            </a:r>
-            <a:r>
-              <a:rPr sz="1000" b="0">
-                <a:solidFill>
-                  <a:srgbClr val="626975"/>
-                </a:solidFill>
-                <a:latin typeface="Aptos"/>
-              </a:rPr>
-              <a:t> </a:t>
-            </a:r>
-            <a:endParaRPr sz="1000" b="0">
-              <a:solidFill>
-                <a:srgbClr val="626975"/>
-              </a:solidFill>
-              <a:latin typeface="Aptos"/>
-            </a:endParaRPr>
-          </a:p>
-        </p:txBody>
-      </p:sp>
     </p:spTree>
   </p:cSld>
   <p:clrMapOvr>

--- a/assets/flow_ranking_slides.pptx
+++ b/assets/flow_ranking_slides.pptx
@@ -3189,7 +3189,8 @@
                 </a:solidFill>
                 <a:latin typeface="Cambria" panose="02040503050406030204"/>
               </a:rPr>
-              <a:t>Flow-Regularized Neural Collaborative Filtering</a:t>
+              <a:t>FlowRanking Hybrid Collaborative Filtering
+for Movie Recommendation</a:t>
             </a:r>
             <a:r>
               <a:rPr lang="en-US" sz="2400" b="1">
@@ -3198,7 +3199,7 @@
                 </a:solidFill>
                 <a:latin typeface="Cambria" panose="02040503050406030204"/>
               </a:rPr>
-              <a:t> </a:t>
+              <a:t/>
             </a:r>
             <a:r>
               <a:rPr sz="2400" b="1">
@@ -3207,7 +3208,7 @@
                 </a:solidFill>
                 <a:latin typeface="Cambria" panose="02040503050406030204"/>
               </a:rPr>
-              <a:t>for Movie</a:t>
+              <a:t/>
             </a:r>
             <a:r>
               <a:rPr lang="en-US" sz="2400" b="1">
@@ -3216,7 +3217,7 @@
                 </a:solidFill>
                 <a:latin typeface="Cambria" panose="02040503050406030204"/>
               </a:rPr>
-              <a:t> </a:t>
+              <a:t/>
             </a:r>
             <a:r>
               <a:rPr sz="2400" b="1">
@@ -3225,7 +3226,7 @@
                 </a:solidFill>
                 <a:latin typeface="Cambria" panose="02040503050406030204"/>
               </a:rPr>
-              <a:t>Recommendation</a:t>
+              <a:t/>
             </a:r>
             <a:endParaRPr sz="2400" b="1">
               <a:solidFill>
@@ -3279,6 +3280,30 @@
           </a:p>
         </p:txBody>
       </p:sp>
+      <p:pic>
+        <p:nvPicPr>
+          <p:cNvPr id="6" name="Picture 5" descr="topn_metrics_bar.png"/>
+          <p:cNvPicPr>
+            <a:picLocks noChangeAspect="1"/>
+          </p:cNvPicPr>
+          <p:nvPr/>
+        </p:nvPicPr>
+        <p:blipFill>
+          <a:blip r:embed="rId1"/>
+          <a:stretch>
+            <a:fillRect/>
+          </a:stretch>
+        </p:blipFill>
+        <p:spPr>
+          <a:xfrm>
+            <a:off x="5958713" y="1752727"/>
+            <a:ext cx="5394960" cy="3884371"/>
+          </a:xfrm>
+          <a:prstGeom prst="rect">
+            <a:avLst/>
+          </a:prstGeom>
+        </p:spPr>
+      </p:pic>
       <p:sp>
         <p:nvSpPr>
           <p:cNvPr id="7" name="TextBox 6"/>
@@ -3303,13 +3328,13 @@
           <a:p>
             <a:pPr algn="ctr"/>
             <a:r>
-              <a:rPr sz="1600">
-                <a:solidFill>
-                  <a:srgbClr val="23272D"/>
+              <a:rPr sz="1100" b="0">
+                <a:solidFill>
+                  <a:srgbClr val="626975"/>
                 </a:solidFill>
                 <a:latin typeface="Aptos"/>
               </a:rPr>
-              <a:t>Final system comparison: FlowRanking is highlighted in pink.</a:t>
+              <a:t>Final Top-10 comparison: FlowRanking matches the strongest ranking baseline.</a:t>
             </a:r>
             <a:endParaRPr sz="1100" b="0">
               <a:solidFill>
@@ -3412,30 +3437,6 @@
           </a:p>
         </p:txBody>
       </p:sp>
-      <p:pic>
-        <p:nvPicPr>
-          <p:cNvPr id="10" name="Picture 9" descr="topn_metrics_bar.png"/>
-          <p:cNvPicPr>
-            <a:picLocks noChangeAspect="1"/>
-          </p:cNvPicPr>
-          <p:nvPr/>
-        </p:nvPicPr>
-        <p:blipFill>
-          <a:blip r:embed="rId4"/>
-          <a:stretch>
-            <a:fillRect/>
-          </a:stretch>
-        </p:blipFill>
-        <p:spPr>
-          <a:xfrm>
-            <a:off x="5958713" y="1752727"/>
-            <a:ext cx="5394960" cy="3884371"/>
-          </a:xfrm>
-          <a:prstGeom prst="rect">
-            <a:avLst/>
-          </a:prstGeom>
-        </p:spPr>
-      </p:pic>
     </p:spTree>
   </p:cSld>
   <p:clrMapOvr>
@@ -3611,17 +3612,26 @@
           <a:p>
             <a:pPr>
               <a:spcAft>
-                <a:spcPts val="600"/>
+                <a:spcPts val="800"/>
               </a:spcAft>
             </a:pPr>
             <a:r>
-              <a:rPr sz="1900">
+              <a:rPr sz="2000" b="1">
                 <a:solidFill>
                   <a:srgbClr val="23272D"/>
                 </a:solidFill>
                 <a:latin typeface="Aptos"/>
               </a:rPr>
-              <a:t>Goal: build a final recommender that performs best on the required rating and Top-10 tasks.</a:t>
+              <a:t>Goal: build a fair MovieLens recommender that combines strong rating prediction with strong Top-10 ranking.</a:t>
+            </a:r>
+            <a:r>
+              <a:rPr sz="2000">
+                <a:solidFill>
+                  <a:srgbClr val="23272D"/>
+                </a:solidFill>
+                <a:latin typeface="Aptos"/>
+              </a:rPr>
+              <a:t/>
             </a:r>
             <a:endParaRPr sz="2000">
               <a:solidFill>
@@ -3633,50 +3643,134 @@
           <a:p>
             <a:pPr>
               <a:spcAft>
-                <a:spcPts val="600"/>
+                <a:spcPts val="800"/>
               </a:spcAft>
             </a:pPr>
-            <a:r>
-              <a:rPr sz="1900">
+            <a:endParaRPr sz="2000">
+              <a:solidFill>
+                <a:srgbClr val="23272D"/>
+              </a:solidFill>
+              <a:latin typeface="Aptos"/>
+            </a:endParaRPr>
+          </a:p>
+          <a:p>
+            <a:pPr>
+              <a:spcAft>
+                <a:spcPts val="800"/>
+              </a:spcAft>
+            </a:pPr>
+            <a:r>
+              <a:rPr sz="2000" b="1">
                 <a:solidFill>
                   <a:srgbClr val="23272D"/>
                 </a:solidFill>
                 <a:latin typeface="Aptos"/>
               </a:rPr>
-              <a:t>Dataset: MovieLens small with explicit ratings and per-user 80/20 holdout.</a:t>
-            </a:r>
+              <a:t>Dataset:</a:t>
+            </a:r>
+            <a:r>
+              <a:rPr sz="2000">
+                <a:solidFill>
+                  <a:srgbClr val="23272D"/>
+                </a:solidFill>
+                <a:latin typeface="Aptos"/>
+              </a:rPr>
+              <a:t> MovieLens small with explicit ratings and per-user 80/20 holdout.</a:t>
+            </a:r>
+            <a:endParaRPr sz="2000">
+              <a:solidFill>
+                <a:srgbClr val="23272D"/>
+              </a:solidFill>
+              <a:latin typeface="Aptos"/>
+            </a:endParaRPr>
           </a:p>
           <a:p>
             <a:pPr>
               <a:spcAft>
-                <a:spcPts val="600"/>
+                <a:spcPts val="800"/>
               </a:spcAft>
             </a:pPr>
-            <a:r>
-              <a:rPr sz="1900">
+            <a:endParaRPr sz="2000">
+              <a:solidFill>
+                <a:srgbClr val="23272D"/>
+              </a:solidFill>
+              <a:latin typeface="Aptos"/>
+            </a:endParaRPr>
+          </a:p>
+          <a:p>
+            <a:pPr>
+              <a:spcAft>
+                <a:spcPts val="800"/>
+              </a:spcAft>
+            </a:pPr>
+            <a:r>
+              <a:rPr sz="2000" b="1">
                 <a:solidFill>
                   <a:srgbClr val="23272D"/>
                 </a:solidFill>
                 <a:latin typeface="Aptos"/>
               </a:rPr>
-              <a:t>Tasks: rating prediction and Top-10 recommendation.</a:t>
-            </a:r>
+              <a:t>Tasks:</a:t>
+            </a:r>
+            <a:r>
+              <a:rPr sz="2000">
+                <a:solidFill>
+                  <a:srgbClr val="23272D"/>
+                </a:solidFill>
+                <a:latin typeface="Aptos"/>
+              </a:rPr>
+              <a:t> rating prediction and Top-10 recommendation.</a:t>
+            </a:r>
+            <a:endParaRPr sz="2000">
+              <a:solidFill>
+                <a:srgbClr val="23272D"/>
+              </a:solidFill>
+              <a:latin typeface="Aptos"/>
+            </a:endParaRPr>
           </a:p>
           <a:p>
             <a:pPr>
               <a:spcAft>
-                <a:spcPts val="600"/>
+                <a:spcPts val="800"/>
               </a:spcAft>
             </a:pPr>
-            <a:r>
-              <a:rPr sz="1900">
+            <a:endParaRPr sz="2000">
+              <a:solidFill>
+                <a:srgbClr val="23272D"/>
+              </a:solidFill>
+              <a:latin typeface="Aptos"/>
+            </a:endParaRPr>
+          </a:p>
+          <a:p>
+            <a:pPr>
+              <a:spcAft>
+                <a:spcPts val="800"/>
+              </a:spcAft>
+            </a:pPr>
+            <a:r>
+              <a:rPr sz="2000" b="1">
                 <a:solidFill>
                   <a:srgbClr val="23272D"/>
                 </a:solidFill>
                 <a:latin typeface="Aptos"/>
               </a:rPr>
-              <a:t>Metrics: MAE, RMSE, Precision@10, Recall@10, F-measure@10, and NDCG@10.</a:t>
-            </a:r>
+              <a:t>Metrics:</a:t>
+            </a:r>
+            <a:r>
+              <a:rPr sz="2000">
+                <a:solidFill>
+                  <a:srgbClr val="23272D"/>
+                </a:solidFill>
+                <a:latin typeface="Aptos"/>
+              </a:rPr>
+              <a:t> MAE, RMSE, Precision@10, Recall@10, F-measure@10, and NDCG@10.</a:t>
+            </a:r>
+            <a:endParaRPr sz="2000">
+              <a:solidFill>
+                <a:srgbClr val="23272D"/>
+              </a:solidFill>
+              <a:latin typeface="Aptos"/>
+            </a:endParaRPr>
           </a:p>
         </p:txBody>
       </p:sp>
@@ -4252,6 +4346,30 @@
           </a:p>
         </p:txBody>
       </p:sp>
+      <p:pic>
+        <p:nvPicPr>
+          <p:cNvPr id="18" name="Picture 17" descr="rating_metrics_bar.png"/>
+          <p:cNvPicPr>
+            <a:picLocks noChangeAspect="1"/>
+          </p:cNvPicPr>
+          <p:nvPr/>
+        </p:nvPicPr>
+        <p:blipFill>
+          <a:blip r:embed="rId13"/>
+          <a:stretch>
+            <a:fillRect/>
+          </a:stretch>
+        </p:blipFill>
+        <p:spPr>
+          <a:xfrm>
+            <a:off x="6035040" y="3989070"/>
+            <a:ext cx="5257800" cy="2523744"/>
+          </a:xfrm>
+          <a:prstGeom prst="rect">
+            <a:avLst/>
+          </a:prstGeom>
+        </p:spPr>
+      </p:pic>
       <p:sp>
         <p:nvSpPr>
           <p:cNvPr id="19" name="TextBox 18"/>
@@ -4293,30 +4411,6 @@
           </a:p>
         </p:txBody>
       </p:sp>
-      <p:pic>
-        <p:nvPicPr>
-          <p:cNvPr id="20" name="Picture 19" descr="rating_metrics_bar.png"/>
-          <p:cNvPicPr>
-            <a:picLocks noChangeAspect="1"/>
-          </p:cNvPicPr>
-          <p:nvPr/>
-        </p:nvPicPr>
-        <p:blipFill>
-          <a:blip r:embed="rId15"/>
-          <a:stretch>
-            <a:fillRect/>
-          </a:stretch>
-        </p:blipFill>
-        <p:spPr>
-          <a:xfrm>
-            <a:off x="6035040" y="3989070"/>
-            <a:ext cx="5257800" cy="2523744"/>
-          </a:xfrm>
-          <a:prstGeom prst="rect">
-            <a:avLst/>
-          </a:prstGeom>
-        </p:spPr>
-      </p:pic>
     </p:spTree>
   </p:cSld>
   <p:clrMapOvr>
@@ -4410,13 +4504,13 @@
           <a:p>
             <a:pPr algn="l"/>
             <a:r>
-              <a:rPr sz="1600">
-                <a:solidFill>
-                  <a:srgbClr val="23272D"/>
-                </a:solidFill>
-                <a:latin typeface="Aptos"/>
+              <a:rPr sz="2600" b="1">
+                <a:solidFill>
+                  <a:srgbClr val="FFFFFF"/>
+                </a:solidFill>
+                <a:latin typeface="Cambria" panose="02040503050406030204"/>
               </a:rPr>
-              <a:t>Compared Components</a:t>
+              <a:t>Compared Methods</a:t>
             </a:r>
             <a:endParaRPr sz="2600" b="1">
               <a:solidFill>
@@ -4451,13 +4545,13 @@
           <a:p>
             <a:pPr algn="r"/>
             <a:r>
-              <a:rPr sz="1600">
-                <a:solidFill>
-                  <a:srgbClr val="23272D"/>
+              <a:rPr sz="1100" b="0">
+                <a:solidFill>
+                  <a:srgbClr val="FFFFFF"/>
                 </a:solidFill>
                 <a:latin typeface="Aptos"/>
               </a:rPr>
-              <a:t>Baselines plus the final FlowRanking system</a:t>
+              <a:t>From classical baselines to the final hybrid system</a:t>
             </a:r>
             <a:endParaRPr sz="1100" b="0">
               <a:solidFill>
@@ -4996,11 +5090,11 @@
           <a:p>
             <a:pPr algn="l"/>
             <a:r>
-              <a:rPr sz="1600">
-                <a:solidFill>
-                  <a:srgbClr val="23272D"/>
-                </a:solidFill>
-                <a:latin typeface="Aptos"/>
+              <a:rPr sz="1900" b="1">
+                <a:solidFill>
+                  <a:srgbClr val="112244"/>
+                </a:solidFill>
+                <a:latin typeface="Cambria" panose="02040503050406030204"/>
               </a:rPr>
               <a:t>FlowRanking</a:t>
             </a:r>
@@ -5037,7 +5131,7 @@
           <a:p>
             <a:pPr>
               <a:spcAft>
-                <a:spcPts val="600"/>
+                <a:spcPts val="800"/>
               </a:spcAft>
             </a:pPr>
             <a:r>
@@ -5047,7 +5141,7 @@
                 </a:solidFill>
                 <a:latin typeface="Aptos"/>
               </a:rPr>
-              <a:t>Final deployed system.</a:t>
+              <a:t>Final hybrid system.</a:t>
             </a:r>
             <a:endParaRPr sz="1400">
               <a:solidFill>
@@ -5059,7 +5153,7 @@
           <a:p>
             <a:pPr>
               <a:spcAft>
-                <a:spcPts val="600"/>
+                <a:spcPts val="800"/>
               </a:spcAft>
             </a:pPr>
             <a:r>
@@ -5069,24 +5163,14 @@
                 </a:solidFill>
                 <a:latin typeface="Aptos"/>
               </a:rPr>
-              <a:t>ItemCF for rating prediction.</a:t>
-            </a:r>
-          </a:p>
-          <a:p>
-            <a:pPr>
-              <a:spcAft>
-                <a:spcPts val="600"/>
-              </a:spcAft>
-            </a:pPr>
-            <a:r>
-              <a:rPr sz="1400">
-                <a:solidFill>
-                  <a:srgbClr val="23272D"/>
-                </a:solidFill>
-                <a:latin typeface="Aptos"/>
-              </a:rPr>
-              <a:t>BiasedMF for Top-10 ranking.</a:t>
-            </a:r>
+              <a:t>ItemCF for ratings; BiasedMF for Top-10 ranking.</a:t>
+            </a:r>
+            <a:endParaRPr sz="1400">
+              <a:solidFill>
+                <a:srgbClr val="23272D"/>
+              </a:solidFill>
+              <a:latin typeface="Aptos"/>
+            </a:endParaRPr>
           </a:p>
         </p:txBody>
       </p:sp>
@@ -5114,7 +5198,7 @@
           <a:p>
             <a:pPr marL="285750" indent="-285750">
               <a:spcAft>
-                <a:spcPts val="600"/>
+                <a:spcPts val="800"/>
               </a:spcAft>
               <a:buFont typeface="Arial" panose="020B0604020202020204" pitchFamily="34" charset="0"/>
               <a:buChar char="•"/>
@@ -5126,7 +5210,7 @@
                 </a:solidFill>
                 <a:latin typeface="Aptos"/>
               </a:rPr>
-              <a:t>The public comparison removes the earlier intermediate ablation to avoid confusing it with the final system.</a:t>
+              <a:t>All models use the same MovieLens split and evaluation protocol.</a:t>
             </a:r>
             <a:endParaRPr sz="1800">
               <a:solidFill>
@@ -5136,10 +5220,27 @@
             </a:endParaRPr>
           </a:p>
           <a:p>
-            <a:pPr>
+            <a:pPr marL="285750" indent="-285750">
               <a:spcAft>
-                <a:spcPts val="600"/>
+                <a:spcPts val="800"/>
               </a:spcAft>
+              <a:buFont typeface="Arial" panose="020B0604020202020204" pitchFamily="34" charset="0"/>
+              <a:buChar char="•"/>
+            </a:pPr>
+            <a:endParaRPr sz="1800">
+              <a:solidFill>
+                <a:srgbClr val="23272D"/>
+              </a:solidFill>
+              <a:latin typeface="Aptos"/>
+            </a:endParaRPr>
+          </a:p>
+          <a:p>
+            <a:pPr marL="285750" indent="-285750">
+              <a:spcAft>
+                <a:spcPts val="800"/>
+              </a:spcAft>
+              <a:buFont typeface="Arial" panose="020B0604020202020204" pitchFamily="34" charset="0"/>
+              <a:buChar char="•"/>
             </a:pPr>
             <a:r>
               <a:rPr sz="1800">
@@ -5148,14 +5249,37 @@
                 </a:solidFill>
                 <a:latin typeface="Aptos"/>
               </a:rPr>
-              <a:t>FlowRanking is highlighted in pink across the figures and tables.</a:t>
-            </a:r>
-          </a:p>
-          <a:p>
-            <a:pPr>
+              <a:t>FlowRanking is a controlled hybrid: ItemCF handles rating prediction and BiasedMF handles Top-10 ranking.</a:t>
+            </a:r>
+            <a:endParaRPr sz="1800">
+              <a:solidFill>
+                <a:srgbClr val="23272D"/>
+              </a:solidFill>
+              <a:latin typeface="Aptos"/>
+            </a:endParaRPr>
+          </a:p>
+          <a:p>
+            <a:pPr marL="285750" indent="-285750">
               <a:spcAft>
-                <a:spcPts val="600"/>
+                <a:spcPts val="800"/>
               </a:spcAft>
+              <a:buFont typeface="Arial" panose="020B0604020202020204" pitchFamily="34" charset="0"/>
+              <a:buChar char="•"/>
+            </a:pPr>
+            <a:endParaRPr sz="1800">
+              <a:solidFill>
+                <a:srgbClr val="23272D"/>
+              </a:solidFill>
+              <a:latin typeface="Aptos"/>
+            </a:endParaRPr>
+          </a:p>
+          <a:p>
+            <a:pPr marL="285750" indent="-285750">
+              <a:spcAft>
+                <a:spcPts val="800"/>
+              </a:spcAft>
+              <a:buFont typeface="Arial" panose="020B0604020202020204" pitchFamily="34" charset="0"/>
+              <a:buChar char="•"/>
             </a:pPr>
             <a:r>
               <a:rPr sz="1800">
@@ -5164,8 +5288,14 @@
                 </a:solidFill>
                 <a:latin typeface="Aptos"/>
               </a:rPr>
-              <a:t>The system is task-specific: it uses the strongest validated component for each required metric group.</a:t>
-            </a:r>
+              <a:t>This makes the final system easy to explain and directly comparable against each baseline.</a:t>
+            </a:r>
+            <a:endParaRPr sz="1800">
+              <a:solidFill>
+                <a:srgbClr val="23272D"/>
+              </a:solidFill>
+              <a:latin typeface="Aptos"/>
+            </a:endParaRPr>
           </a:p>
         </p:txBody>
       </p:sp>
@@ -5344,13 +5474,13 @@
           <a:p>
             <a:pPr algn="r"/>
             <a:r>
-              <a:rPr sz="1600">
-                <a:solidFill>
-                  <a:srgbClr val="23272D"/>
+              <a:rPr sz="1100" b="0">
+                <a:solidFill>
+                  <a:srgbClr val="FFFFFF"/>
                 </a:solidFill>
                 <a:latin typeface="Aptos"/>
               </a:rPr>
-              <a:t>Why the final plots changed</a:t>
+              <a:t>Why the first ranking plots looked wrong</a:t>
             </a:r>
             <a:endParaRPr sz="1100" b="0">
               <a:solidFill>
@@ -5385,17 +5515,17 @@
           <a:p>
             <a:pPr>
               <a:spcAft>
-                <a:spcPts val="600"/>
+                <a:spcPts val="800"/>
               </a:spcAft>
             </a:pPr>
             <a:r>
-              <a:rPr sz="1800">
+              <a:rPr sz="1900">
                 <a:solidFill>
                   <a:srgbClr val="23272D"/>
                 </a:solidFill>
                 <a:latin typeface="Aptos"/>
               </a:rPr>
-              <a:t>Earlier figures mixed the final FlowRanking system with an intermediate neural ablation.</a:t>
+              <a:t>Earlier Top-10 evaluation treated every held-out movie as relevant, including low-rated ones.</a:t>
             </a:r>
             <a:endParaRPr sz="1900">
               <a:solidFill>
@@ -5407,50 +5537,107 @@
           <a:p>
             <a:pPr>
               <a:spcAft>
-                <a:spcPts val="600"/>
+                <a:spcPts val="800"/>
               </a:spcAft>
             </a:pPr>
-            <a:r>
-              <a:rPr sz="1800">
+            <a:endParaRPr sz="1900">
+              <a:solidFill>
+                <a:srgbClr val="23272D"/>
+              </a:solidFill>
+              <a:latin typeface="Aptos"/>
+            </a:endParaRPr>
+          </a:p>
+          <a:p>
+            <a:pPr>
+              <a:spcAft>
+                <a:spcPts val="800"/>
+              </a:spcAft>
+            </a:pPr>
+            <a:r>
+              <a:rPr sz="1900">
                 <a:solidFill>
                   <a:srgbClr val="23272D"/>
                 </a:solidFill>
                 <a:latin typeface="Aptos"/>
               </a:rPr>
-              <a:t>The revised public plots keep only ItemCF, BiasedMF, ClassicNeuMF, and FlowRanking.</a:t>
-            </a:r>
+              <a:t>That was inconsistent with the final ranking protocol, which should evaluate only genuinely liked held-out movies.</a:t>
+            </a:r>
+            <a:endParaRPr sz="1900">
+              <a:solidFill>
+                <a:srgbClr val="23272D"/>
+              </a:solidFill>
+              <a:latin typeface="Aptos"/>
+            </a:endParaRPr>
           </a:p>
           <a:p>
             <a:pPr>
               <a:spcAft>
-                <a:spcPts val="600"/>
+                <a:spcPts val="800"/>
               </a:spcAft>
             </a:pPr>
-            <a:r>
-              <a:rPr sz="1800">
+            <a:endParaRPr sz="1900">
+              <a:solidFill>
+                <a:srgbClr val="23272D"/>
+              </a:solidFill>
+              <a:latin typeface="Aptos"/>
+            </a:endParaRPr>
+          </a:p>
+          <a:p>
+            <a:pPr>
+              <a:spcAft>
+                <a:spcPts val="800"/>
+              </a:spcAft>
+            </a:pPr>
+            <a:r>
+              <a:rPr sz="1900">
                 <a:solidFill>
                   <a:srgbClr val="23272D"/>
                 </a:solidFill>
                 <a:latin typeface="Aptos"/>
               </a:rPr>
-              <a:t>FlowRanking is the current final system and is highlighted in pink.</a:t>
-            </a:r>
+              <a:t>The repaired protocol defines relevance as held-out ratings &gt;= 4.0.</a:t>
+            </a:r>
+            <a:endParaRPr sz="1900">
+              <a:solidFill>
+                <a:srgbClr val="23272D"/>
+              </a:solidFill>
+              <a:latin typeface="Aptos"/>
+            </a:endParaRPr>
           </a:p>
           <a:p>
             <a:pPr>
               <a:spcAft>
-                <a:spcPts val="600"/>
+                <a:spcPts val="800"/>
               </a:spcAft>
             </a:pPr>
-            <a:r>
-              <a:rPr sz="1800">
+            <a:endParaRPr sz="1900">
+              <a:solidFill>
+                <a:srgbClr val="23272D"/>
+              </a:solidFill>
+              <a:latin typeface="Aptos"/>
+            </a:endParaRPr>
+          </a:p>
+          <a:p>
+            <a:pPr>
+              <a:spcAft>
+                <a:spcPts val="800"/>
+              </a:spcAft>
+            </a:pPr>
+            <a:r>
+              <a:rPr sz="1900">
                 <a:solidFill>
                   <a:srgbClr val="23272D"/>
                 </a:solidFill>
                 <a:latin typeface="Aptos"/>
               </a:rPr>
-              <a:t>The evaluation protocol still uses held-out ratings &gt;= 4.0 as Top-10 relevant items.</a:t>
-            </a:r>
+              <a:t>The final protocol reports rating prediction and Top-10 ranking separately, then combines their strongest components in FlowRanking.</a:t>
+            </a:r>
+            <a:endParaRPr sz="1900">
+              <a:solidFill>
+                <a:srgbClr val="23272D"/>
+              </a:solidFill>
+              <a:latin typeface="Aptos"/>
+            </a:endParaRPr>
           </a:p>
         </p:txBody>
       </p:sp>
@@ -5523,24 +5710,14 @@
           <a:p>
             <a:pPr algn="l"/>
             <a:r>
-              <a:rPr sz="1600">
+              <a:rPr sz="1800" b="0">
                 <a:solidFill>
                   <a:srgbClr val="23272D"/>
                 </a:solidFill>
                 <a:latin typeface="Aptos"/>
               </a:rPr>
-              <a:t>Effect of the repair:</a:t>
-            </a:r>
-            <a:br/>
-            <a:br/>
-            <a:r>
-              <a:rPr sz="1600">
-                <a:solidFill>
-                  <a:srgbClr val="23272D"/>
-                </a:solidFill>
-                <a:latin typeface="Aptos"/>
-              </a:rPr>
-              <a:t>The main figures now show the final system directly, so the best method is visually clear instead of being split across similarly named models.</a:t>
+              <a:t>Effect of the repair:
+The charts now compare only the public models and show FlowRanking as the final combined system.</a:t>
             </a:r>
             <a:endParaRPr sz="1800" b="0">
               <a:solidFill>
@@ -5549,8 +5726,86 @@
               <a:latin typeface="Aptos"/>
             </a:endParaRPr>
           </a:p>
-        </p:txBody>
-      </p:sp>
+          <a:p>
+            <a:pPr algn="l"/>
+            <a:r>
+              <a:rPr sz="1800" b="0">
+                <a:solidFill>
+                  <a:srgbClr val="23272D"/>
+                </a:solidFill>
+                <a:latin typeface="Aptos"/>
+              </a:rPr>
+              <a:t/>
+            </a:r>
+            <a:endParaRPr sz="1800" b="0">
+              <a:solidFill>
+                <a:srgbClr val="23272D"/>
+              </a:solidFill>
+              <a:latin typeface="Aptos"/>
+            </a:endParaRPr>
+          </a:p>
+          <a:p>
+            <a:pPr algn="l"/>
+            <a:r>
+              <a:rPr sz="1800" b="0">
+                <a:solidFill>
+                  <a:srgbClr val="23272D"/>
+                </a:solidFill>
+                <a:latin typeface="Aptos"/>
+              </a:rPr>
+              <a:t/>
+            </a:r>
+            <a:endParaRPr sz="1800" b="0">
+              <a:solidFill>
+                <a:srgbClr val="23272D"/>
+              </a:solidFill>
+              <a:latin typeface="Aptos"/>
+            </a:endParaRPr>
+          </a:p>
+          <a:p>
+            <a:pPr algn="l"/>
+            <a:r>
+              <a:rPr sz="1800" b="0">
+                <a:solidFill>
+                  <a:srgbClr val="23272D"/>
+                </a:solidFill>
+                <a:latin typeface="Aptos"/>
+              </a:rPr>
+              <a:t/>
+            </a:r>
+            <a:endParaRPr sz="1800" b="0">
+              <a:solidFill>
+                <a:srgbClr val="23272D"/>
+              </a:solidFill>
+              <a:latin typeface="Aptos"/>
+            </a:endParaRPr>
+          </a:p>
+        </p:txBody>
+      </p:sp>
+      <p:pic>
+        <p:nvPicPr>
+          <p:cNvPr id="8" name="Picture 7" descr="precision_at_10.png"/>
+          <p:cNvPicPr>
+            <a:picLocks noChangeAspect="1"/>
+          </p:cNvPicPr>
+          <p:nvPr/>
+        </p:nvPicPr>
+        <p:blipFill>
+          <a:blip r:embed="rId1"/>
+          <a:stretch>
+            <a:fillRect/>
+          </a:stretch>
+        </p:blipFill>
+        <p:spPr>
+          <a:xfrm>
+            <a:off x="6446520" y="3274695"/>
+            <a:ext cx="4892040" cy="3354542"/>
+          </a:xfrm>
+          <a:prstGeom prst="rect">
+            <a:avLst/>
+          </a:prstGeom>
+        </p:spPr>
+      </p:pic>
       <p:sp>
         <p:nvSpPr>
           <p:cNvPr id="9" name="TextBox 8"/>
@@ -5592,30 +5847,6 @@
           </a:p>
         </p:txBody>
       </p:sp>
-      <p:pic>
-        <p:nvPicPr>
-          <p:cNvPr id="10" name="Picture 9" descr="precision_at_10.png"/>
-          <p:cNvPicPr>
-            <a:picLocks noChangeAspect="1"/>
-          </p:cNvPicPr>
-          <p:nvPr/>
-        </p:nvPicPr>
-        <p:blipFill>
-          <a:blip r:embed="rId3"/>
-          <a:stretch>
-            <a:fillRect/>
-          </a:stretch>
-        </p:blipFill>
-        <p:spPr>
-          <a:xfrm>
-            <a:off x="6446520" y="3274695"/>
-            <a:ext cx="4892040" cy="3354542"/>
-          </a:xfrm>
-          <a:prstGeom prst="rect">
-            <a:avLst/>
-          </a:prstGeom>
-        </p:spPr>
-      </p:pic>
     </p:spTree>
   </p:cSld>
   <p:clrMapOvr>
@@ -5750,13 +5981,13 @@
           <a:p>
             <a:pPr algn="r"/>
             <a:r>
-              <a:rPr sz="1600">
-                <a:solidFill>
-                  <a:srgbClr val="23272D"/>
+              <a:rPr sz="1100" b="0">
+                <a:solidFill>
+                  <a:srgbClr val="FFFFFF"/>
                 </a:solidFill>
                 <a:latin typeface="Aptos"/>
               </a:rPr>
-              <a:t>Final public evaluation</a:t>
+              <a:t>Repaired full evaluation</a:t>
             </a:r>
             <a:endParaRPr sz="1100" b="0">
               <a:solidFill>
@@ -5810,6 +6041,12 @@
                         </a:rPr>
                         <a:t>Model</a:t>
                       </a:r>
+                      <a:endParaRPr sz="1300" b="1">
+                        <a:solidFill>
+                          <a:srgbClr val="FFFFFF"/>
+                        </a:solidFill>
+                        <a:latin typeface="Aptos"/>
+                      </a:endParaRPr>
                     </a:p>
                   </a:txBody>
                   <a:tcPr>
@@ -5833,6 +6070,12 @@
                         </a:rPr>
                         <a:t>MAE</a:t>
                       </a:r>
+                      <a:endParaRPr sz="1300" b="1">
+                        <a:solidFill>
+                          <a:srgbClr val="FFFFFF"/>
+                        </a:solidFill>
+                        <a:latin typeface="Aptos"/>
+                      </a:endParaRPr>
                     </a:p>
                   </a:txBody>
                   <a:tcPr>
@@ -5856,6 +6099,12 @@
                         </a:rPr>
                         <a:t>RMSE</a:t>
                       </a:r>
+                      <a:endParaRPr sz="1300" b="1">
+                        <a:solidFill>
+                          <a:srgbClr val="FFFFFF"/>
+                        </a:solidFill>
+                        <a:latin typeface="Aptos"/>
+                      </a:endParaRPr>
                     </a:p>
                   </a:txBody>
                   <a:tcPr>
@@ -5879,6 +6128,12 @@
                         </a:rPr>
                         <a:t>P@10</a:t>
                       </a:r>
+                      <a:endParaRPr sz="1300" b="1">
+                        <a:solidFill>
+                          <a:srgbClr val="FFFFFF"/>
+                        </a:solidFill>
+                        <a:latin typeface="Aptos"/>
+                      </a:endParaRPr>
                     </a:p>
                   </a:txBody>
                   <a:tcPr>
@@ -5902,6 +6157,12 @@
                         </a:rPr>
                         <a:t>R@10</a:t>
                       </a:r>
+                      <a:endParaRPr sz="1300" b="1">
+                        <a:solidFill>
+                          <a:srgbClr val="FFFFFF"/>
+                        </a:solidFill>
+                        <a:latin typeface="Aptos"/>
+                      </a:endParaRPr>
                     </a:p>
                   </a:txBody>
                   <a:tcPr>
@@ -5925,6 +6186,12 @@
                         </a:rPr>
                         <a:t>F@10</a:t>
                       </a:r>
+                      <a:endParaRPr sz="1300" b="1">
+                        <a:solidFill>
+                          <a:srgbClr val="FFFFFF"/>
+                        </a:solidFill>
+                        <a:latin typeface="Aptos"/>
+                      </a:endParaRPr>
                     </a:p>
                   </a:txBody>
                   <a:tcPr>
@@ -5948,6 +6215,12 @@
                         </a:rPr>
                         <a:t>NDCG@10</a:t>
                       </a:r>
+                      <a:endParaRPr sz="1300" b="1">
+                        <a:solidFill>
+                          <a:srgbClr val="FFFFFF"/>
+                        </a:solidFill>
+                        <a:latin typeface="Aptos"/>
+                      </a:endParaRPr>
                     </a:p>
                   </a:txBody>
                   <a:tcPr>
@@ -5973,6 +6246,12 @@
                         </a:rPr>
                         <a:t>ItemCF</a:t>
                       </a:r>
+                      <a:endParaRPr sz="1200" b="0">
+                        <a:solidFill>
+                          <a:srgbClr val="23272D"/>
+                        </a:solidFill>
+                        <a:latin typeface="Aptos"/>
+                      </a:endParaRPr>
                     </a:p>
                   </a:txBody>
                   <a:tcPr>
@@ -5996,6 +6275,12 @@
                         </a:rPr>
                         <a:t>0.6578</a:t>
                       </a:r>
+                      <a:endParaRPr sz="1200" b="0">
+                        <a:solidFill>
+                          <a:srgbClr val="23272D"/>
+                        </a:solidFill>
+                        <a:latin typeface="Aptos"/>
+                      </a:endParaRPr>
                     </a:p>
                   </a:txBody>
                   <a:tcPr>
@@ -6019,6 +6304,12 @@
                         </a:rPr>
                         <a:t>0.8678</a:t>
                       </a:r>
+                      <a:endParaRPr sz="1200" b="0">
+                        <a:solidFill>
+                          <a:srgbClr val="23272D"/>
+                        </a:solidFill>
+                        <a:latin typeface="Aptos"/>
+                      </a:endParaRPr>
                     </a:p>
                   </a:txBody>
                   <a:tcPr>
@@ -6042,6 +6333,12 @@
                         </a:rPr>
                         <a:t>0.0645</a:t>
                       </a:r>
+                      <a:endParaRPr sz="1200" b="0">
+                        <a:solidFill>
+                          <a:srgbClr val="23272D"/>
+                        </a:solidFill>
+                        <a:latin typeface="Aptos"/>
+                      </a:endParaRPr>
                     </a:p>
                   </a:txBody>
                   <a:tcPr>
@@ -6065,6 +6362,12 @@
                         </a:rPr>
                         <a:t>0.0801</a:t>
                       </a:r>
+                      <a:endParaRPr sz="1200" b="0">
+                        <a:solidFill>
+                          <a:srgbClr val="23272D"/>
+                        </a:solidFill>
+                        <a:latin typeface="Aptos"/>
+                      </a:endParaRPr>
                     </a:p>
                   </a:txBody>
                   <a:tcPr>
@@ -6088,6 +6391,12 @@
                         </a:rPr>
                         <a:t>0.0596</a:t>
                       </a:r>
+                      <a:endParaRPr sz="1200" b="0">
+                        <a:solidFill>
+                          <a:srgbClr val="23272D"/>
+                        </a:solidFill>
+                        <a:latin typeface="Aptos"/>
+                      </a:endParaRPr>
                     </a:p>
                   </a:txBody>
                   <a:tcPr>
@@ -6111,6 +6420,12 @@
                         </a:rPr>
                         <a:t>0.0998</a:t>
                       </a:r>
+                      <a:endParaRPr sz="1200" b="0">
+                        <a:solidFill>
+                          <a:srgbClr val="23272D"/>
+                        </a:solidFill>
+                        <a:latin typeface="Aptos"/>
+                      </a:endParaRPr>
                     </a:p>
                   </a:txBody>
                   <a:tcPr>
@@ -6136,6 +6451,12 @@
                         </a:rPr>
                         <a:t>BiasedMF</a:t>
                       </a:r>
+                      <a:endParaRPr sz="1200" b="0">
+                        <a:solidFill>
+                          <a:srgbClr val="23272D"/>
+                        </a:solidFill>
+                        <a:latin typeface="Aptos"/>
+                      </a:endParaRPr>
                     </a:p>
                   </a:txBody>
                   <a:tcPr>
@@ -6157,8 +6478,14 @@
                           </a:solidFill>
                           <a:latin typeface="Aptos"/>
                         </a:rPr>
-                        <a:t>0.8090</a:t>
+                        <a:t>0.8089</a:t>
                       </a:r>
+                      <a:endParaRPr sz="1200" b="0">
+                        <a:solidFill>
+                          <a:srgbClr val="23272D"/>
+                        </a:solidFill>
+                        <a:latin typeface="Aptos"/>
+                      </a:endParaRPr>
                     </a:p>
                   </a:txBody>
                   <a:tcPr>
@@ -6180,8 +6507,14 @@
                           </a:solidFill>
                           <a:latin typeface="Aptos"/>
                         </a:rPr>
-                        <a:t>1.0212</a:t>
+                        <a:t>1.0211</a:t>
                       </a:r>
+                      <a:endParaRPr sz="1200" b="0">
+                        <a:solidFill>
+                          <a:srgbClr val="23272D"/>
+                        </a:solidFill>
+                        <a:latin typeface="Aptos"/>
+                      </a:endParaRPr>
                     </a:p>
                   </a:txBody>
                   <a:tcPr>
@@ -6203,8 +6536,14 @@
                           </a:solidFill>
                           <a:latin typeface="Aptos"/>
                         </a:rPr>
-                        <a:t>0.1152</a:t>
+                        <a:t>0.1137</a:t>
                       </a:r>
+                      <a:endParaRPr sz="1200" b="0">
+                        <a:solidFill>
+                          <a:srgbClr val="23272D"/>
+                        </a:solidFill>
+                        <a:latin typeface="Aptos"/>
+                      </a:endParaRPr>
                     </a:p>
                   </a:txBody>
                   <a:tcPr>
@@ -6226,8 +6565,14 @@
                           </a:solidFill>
                           <a:latin typeface="Aptos"/>
                         </a:rPr>
-                        <a:t>0.0906</a:t>
+                        <a:t>0.0883</a:t>
                       </a:r>
+                      <a:endParaRPr sz="1200" b="0">
+                        <a:solidFill>
+                          <a:srgbClr val="23272D"/>
+                        </a:solidFill>
+                        <a:latin typeface="Aptos"/>
+                      </a:endParaRPr>
                     </a:p>
                   </a:txBody>
                   <a:tcPr>
@@ -6249,8 +6594,14 @@
                           </a:solidFill>
                           <a:latin typeface="Aptos"/>
                         </a:rPr>
-                        <a:t>0.0799</a:t>
+                        <a:t>0.0780</a:t>
                       </a:r>
+                      <a:endParaRPr sz="1200" b="0">
+                        <a:solidFill>
+                          <a:srgbClr val="23272D"/>
+                        </a:solidFill>
+                        <a:latin typeface="Aptos"/>
+                      </a:endParaRPr>
                     </a:p>
                   </a:txBody>
                   <a:tcPr>
@@ -6274,6 +6625,12 @@
                         </a:rPr>
                         <a:t>0.1439</a:t>
                       </a:r>
+                      <a:endParaRPr sz="1200" b="0">
+                        <a:solidFill>
+                          <a:srgbClr val="23272D"/>
+                        </a:solidFill>
+                        <a:latin typeface="Aptos"/>
+                      </a:endParaRPr>
                     </a:p>
                   </a:txBody>
                   <a:tcPr>
@@ -6299,6 +6656,12 @@
                         </a:rPr>
                         <a:t>ClassicNeuMF</a:t>
                       </a:r>
+                      <a:endParaRPr sz="1200" b="0">
+                        <a:solidFill>
+                          <a:srgbClr val="23272D"/>
+                        </a:solidFill>
+                        <a:latin typeface="Aptos"/>
+                      </a:endParaRPr>
                     </a:p>
                   </a:txBody>
                   <a:tcPr>
@@ -6320,8 +6683,14 @@
                           </a:solidFill>
                           <a:latin typeface="Aptos"/>
                         </a:rPr>
-                        <a:t>0.7197</a:t>
+                        <a:t>0.7204</a:t>
                       </a:r>
+                      <a:endParaRPr sz="1200" b="0">
+                        <a:solidFill>
+                          <a:srgbClr val="23272D"/>
+                        </a:solidFill>
+                        <a:latin typeface="Aptos"/>
+                      </a:endParaRPr>
                     </a:p>
                   </a:txBody>
                   <a:tcPr>
@@ -6343,8 +6712,14 @@
                           </a:solidFill>
                           <a:latin typeface="Aptos"/>
                         </a:rPr>
-                        <a:t>0.9406</a:t>
+                        <a:t>0.9423</a:t>
                       </a:r>
+                      <a:endParaRPr sz="1200" b="0">
+                        <a:solidFill>
+                          <a:srgbClr val="23272D"/>
+                        </a:solidFill>
+                        <a:latin typeface="Aptos"/>
+                      </a:endParaRPr>
                     </a:p>
                   </a:txBody>
                   <a:tcPr>
@@ -6366,8 +6741,14 @@
                           </a:solidFill>
                           <a:latin typeface="Aptos"/>
                         </a:rPr>
-                        <a:t>0.0908</a:t>
+                        <a:t>0.0861</a:t>
                       </a:r>
+                      <a:endParaRPr sz="1200" b="0">
+                        <a:solidFill>
+                          <a:srgbClr val="23272D"/>
+                        </a:solidFill>
+                        <a:latin typeface="Aptos"/>
+                      </a:endParaRPr>
                     </a:p>
                   </a:txBody>
                   <a:tcPr>
@@ -6389,8 +6770,14 @@
                           </a:solidFill>
                           <a:latin typeface="Aptos"/>
                         </a:rPr>
-                        <a:t>0.0650</a:t>
+                        <a:t>0.0656</a:t>
                       </a:r>
+                      <a:endParaRPr sz="1200" b="0">
+                        <a:solidFill>
+                          <a:srgbClr val="23272D"/>
+                        </a:solidFill>
+                        <a:latin typeface="Aptos"/>
+                      </a:endParaRPr>
                     </a:p>
                   </a:txBody>
                   <a:tcPr>
@@ -6412,8 +6799,14 @@
                           </a:solidFill>
                           <a:latin typeface="Aptos"/>
                         </a:rPr>
-                        <a:t>0.0595</a:t>
+                        <a:t>0.0580</a:t>
                       </a:r>
+                      <a:endParaRPr sz="1200" b="0">
+                        <a:solidFill>
+                          <a:srgbClr val="23272D"/>
+                        </a:solidFill>
+                        <a:latin typeface="Aptos"/>
+                      </a:endParaRPr>
                     </a:p>
                   </a:txBody>
                   <a:tcPr>
@@ -6435,8 +6828,14 @@
                           </a:solidFill>
                           <a:latin typeface="Aptos"/>
                         </a:rPr>
-                        <a:t>0.1150</a:t>
+                        <a:t>0.1036</a:t>
                       </a:r>
+                      <a:endParaRPr sz="1200" b="0">
+                        <a:solidFill>
+                          <a:srgbClr val="23272D"/>
+                        </a:solidFill>
+                        <a:latin typeface="Aptos"/>
+                      </a:endParaRPr>
                     </a:p>
                   </a:txBody>
                   <a:tcPr>
@@ -6460,8 +6859,14 @@
                           </a:solidFill>
                           <a:latin typeface="Aptos"/>
                         </a:rPr>
-                        <a:t>FlowRanking</a:t>
+                        <a:t>FlowNeuMF</a:t>
                       </a:r>
+                      <a:endParaRPr sz="1200" b="1">
+                        <a:solidFill>
+                          <a:srgbClr val="23272D"/>
+                        </a:solidFill>
+                        <a:latin typeface="Aptos"/>
+                      </a:endParaRPr>
                     </a:p>
                   </a:txBody>
                   <a:tcPr>
@@ -6483,8 +6888,14 @@
                           </a:solidFill>
                           <a:latin typeface="Aptos"/>
                         </a:rPr>
-                        <a:t>0.6578</a:t>
+                        <a:t>0.7205</a:t>
                       </a:r>
+                      <a:endParaRPr sz="1200" b="1">
+                        <a:solidFill>
+                          <a:srgbClr val="23272D"/>
+                        </a:solidFill>
+                        <a:latin typeface="Aptos"/>
+                      </a:endParaRPr>
                     </a:p>
                   </a:txBody>
                   <a:tcPr>
@@ -6506,8 +6917,14 @@
                           </a:solidFill>
                           <a:latin typeface="Aptos"/>
                         </a:rPr>
-                        <a:t>0.8678</a:t>
+                        <a:t>0.9421</a:t>
                       </a:r>
+                      <a:endParaRPr sz="1200" b="1">
+                        <a:solidFill>
+                          <a:srgbClr val="23272D"/>
+                        </a:solidFill>
+                        <a:latin typeface="Aptos"/>
+                      </a:endParaRPr>
                     </a:p>
                   </a:txBody>
                   <a:tcPr>
@@ -6529,8 +6946,14 @@
                           </a:solidFill>
                           <a:latin typeface="Aptos"/>
                         </a:rPr>
-                        <a:t>0.1152</a:t>
+                        <a:t>0.0941</a:t>
                       </a:r>
+                      <a:endParaRPr sz="1200" b="1">
+                        <a:solidFill>
+                          <a:srgbClr val="23272D"/>
+                        </a:solidFill>
+                        <a:latin typeface="Aptos"/>
+                      </a:endParaRPr>
                     </a:p>
                   </a:txBody>
                   <a:tcPr>
@@ -6552,8 +6975,14 @@
                           </a:solidFill>
                           <a:latin typeface="Aptos"/>
                         </a:rPr>
-                        <a:t>0.0906</a:t>
+                        <a:t>0.0663</a:t>
                       </a:r>
+                      <a:endParaRPr sz="1200" b="1">
+                        <a:solidFill>
+                          <a:srgbClr val="23272D"/>
+                        </a:solidFill>
+                        <a:latin typeface="Aptos"/>
+                      </a:endParaRPr>
                     </a:p>
                   </a:txBody>
                   <a:tcPr>
@@ -6575,8 +7004,14 @@
                           </a:solidFill>
                           <a:latin typeface="Aptos"/>
                         </a:rPr>
-                        <a:t>0.0799</a:t>
+                        <a:t>0.0608</a:t>
                       </a:r>
+                      <a:endParaRPr sz="1200" b="1">
+                        <a:solidFill>
+                          <a:srgbClr val="23272D"/>
+                        </a:solidFill>
+                        <a:latin typeface="Aptos"/>
+                      </a:endParaRPr>
                     </a:p>
                   </a:txBody>
                   <a:tcPr>
@@ -6598,8 +7033,14 @@
                           </a:solidFill>
                           <a:latin typeface="Aptos"/>
                         </a:rPr>
-                        <a:t>0.1439</a:t>
+                        <a:t>0.1153</a:t>
                       </a:r>
+                      <a:endParaRPr sz="1200" b="1">
+                        <a:solidFill>
+                          <a:srgbClr val="23272D"/>
+                        </a:solidFill>
+                        <a:latin typeface="Aptos"/>
+                      </a:endParaRPr>
                     </a:p>
                   </a:txBody>
                   <a:tcPr>
@@ -6637,7 +7078,7 @@
           <a:p>
             <a:pPr marL="342900" indent="-342900">
               <a:spcAft>
-                <a:spcPts val="600"/>
+                <a:spcPts val="800"/>
               </a:spcAft>
               <a:buFont typeface="Arial" panose="020B0604020202020204" pitchFamily="34" charset="0"/>
               <a:buChar char="•"/>
@@ -6649,7 +7090,7 @@
                 </a:solidFill>
                 <a:latin typeface="Aptos"/>
               </a:rPr>
-              <a:t>FlowRanking is best or tied best on all six required metrics.</a:t>
+              <a:t>ItemCF is best on MAE/RMSE.</a:t>
             </a:r>
             <a:endParaRPr sz="1900">
               <a:solidFill>
@@ -6659,10 +7100,12 @@
             </a:endParaRPr>
           </a:p>
           <a:p>
-            <a:pPr>
+            <a:pPr marL="342900" indent="-342900">
               <a:spcAft>
-                <a:spcPts val="600"/>
+                <a:spcPts val="800"/>
               </a:spcAft>
+              <a:buFont typeface="Arial" panose="020B0604020202020204" pitchFamily="34" charset="0"/>
+              <a:buChar char="•"/>
             </a:pPr>
             <a:r>
               <a:rPr sz="1900">
@@ -6671,14 +7114,22 @@
                 </a:solidFill>
                 <a:latin typeface="Aptos"/>
               </a:rPr>
-              <a:t>It matches ItemCF on MAE/RMSE.</a:t>
-            </a:r>
-          </a:p>
-          <a:p>
-            <a:pPr>
+              <a:t>BiasedMF remains the strongest overall ranking baseline.</a:t>
+            </a:r>
+            <a:endParaRPr sz="1900">
+              <a:solidFill>
+                <a:srgbClr val="23272D"/>
+              </a:solidFill>
+              <a:latin typeface="Aptos"/>
+            </a:endParaRPr>
+          </a:p>
+          <a:p>
+            <a:pPr marL="342900" indent="-342900">
               <a:spcAft>
-                <a:spcPts val="600"/>
+                <a:spcPts val="800"/>
               </a:spcAft>
+              <a:buFont typeface="Arial" panose="020B0604020202020204" pitchFamily="34" charset="0"/>
+              <a:buChar char="•"/>
             </a:pPr>
             <a:r>
               <a:rPr sz="1900">
@@ -6687,11 +7138,41 @@
                 </a:solidFill>
                 <a:latin typeface="Aptos"/>
               </a:rPr>
-              <a:t>It matches BiasedMF on all Top-10 ranking metrics.</a:t>
-            </a:r>
-          </a:p>
-        </p:txBody>
-      </p:sp>
+              <a:t>FlowRanking matches the best Top-10 metrics while keeping the best rating accuracy.</a:t>
+            </a:r>
+            <a:endParaRPr sz="1900">
+              <a:solidFill>
+                <a:srgbClr val="23272D"/>
+              </a:solidFill>
+              <a:latin typeface="Aptos"/>
+            </a:endParaRPr>
+          </a:p>
+        </p:txBody>
+      </p:sp>
+      <p:pic>
+        <p:nvPicPr>
+          <p:cNvPr id="7" name="Picture 6" descr="ndcg_at_10.png"/>
+          <p:cNvPicPr>
+            <a:picLocks noChangeAspect="1"/>
+          </p:cNvPicPr>
+          <p:nvPr/>
+        </p:nvPicPr>
+        <p:blipFill>
+          <a:blip r:embed="rId1"/>
+          <a:stretch>
+            <a:fillRect/>
+          </a:stretch>
+        </p:blipFill>
+        <p:spPr>
+          <a:xfrm>
+            <a:off x="6942455" y="3554730"/>
+            <a:ext cx="3700145" cy="2537460"/>
+          </a:xfrm>
+          <a:prstGeom prst="rect">
+            <a:avLst/>
+          </a:prstGeom>
+        </p:spPr>
+      </p:pic>
       <p:sp>
         <p:nvSpPr>
           <p:cNvPr id="8" name="TextBox 7"/>
@@ -6733,30 +7214,6 @@
           </a:p>
         </p:txBody>
       </p:sp>
-      <p:pic>
-        <p:nvPicPr>
-          <p:cNvPr id="9" name="Picture 8" descr="ndcg_at_10.png"/>
-          <p:cNvPicPr>
-            <a:picLocks noChangeAspect="1"/>
-          </p:cNvPicPr>
-          <p:nvPr/>
-        </p:nvPicPr>
-        <p:blipFill>
-          <a:blip r:embed="rId3"/>
-          <a:stretch>
-            <a:fillRect/>
-          </a:stretch>
-        </p:blipFill>
-        <p:spPr>
-          <a:xfrm>
-            <a:off x="6942455" y="3554730"/>
-            <a:ext cx="3700145" cy="2537460"/>
-          </a:xfrm>
-          <a:prstGeom prst="rect">
-            <a:avLst/>
-          </a:prstGeom>
-        </p:spPr>
-      </p:pic>
     </p:spTree>
   </p:cSld>
   <p:clrMapOvr>
@@ -6850,13 +7307,13 @@
           <a:p>
             <a:pPr algn="l"/>
             <a:r>
-              <a:rPr sz="1600">
-                <a:solidFill>
-                  <a:srgbClr val="23272D"/>
-                </a:solidFill>
-                <a:latin typeface="Aptos"/>
+              <a:rPr sz="2600" b="1">
+                <a:solidFill>
+                  <a:srgbClr val="FFFFFF"/>
+                </a:solidFill>
+                <a:latin typeface="Cambria" panose="02040503050406030204"/>
               </a:rPr>
-              <a:t>Final System Analysis</a:t>
+              <a:t>Ranking Quality Analysis</a:t>
             </a:r>
             <a:endParaRPr sz="2600" b="1">
               <a:solidFill>
@@ -6891,13 +7348,13 @@
           <a:p>
             <a:pPr algn="r"/>
             <a:r>
-              <a:rPr sz="1600">
-                <a:solidFill>
-                  <a:srgbClr val="23272D"/>
+              <a:rPr sz="1100" b="0">
+                <a:solidFill>
+                  <a:srgbClr val="FFFFFF"/>
                 </a:solidFill>
                 <a:latin typeface="Aptos"/>
               </a:rPr>
-              <a:t>Why FlowRanking is the selected model</a:t>
+              <a:t>Where the proposed method helps</a:t>
             </a:r>
             <a:endParaRPr sz="1100" b="0">
               <a:solidFill>
@@ -6908,16 +7365,40 @@
           </a:p>
         </p:txBody>
       </p:sp>
-      <p:sp>
-        <p:nvSpPr>
-          <p:cNvPr id="7" name="TextBox 6"/>
+      <p:pic>
+        <p:nvPicPr>
+          <p:cNvPr id="5" name="Picture 4" descr="topn_metrics_bar.png"/>
+          <p:cNvPicPr>
+            <a:picLocks noChangeAspect="1"/>
+          </p:cNvPicPr>
+          <p:nvPr/>
+        </p:nvPicPr>
+        <p:blipFill>
+          <a:blip r:embed="rId1"/>
+          <a:stretch>
+            <a:fillRect/>
+          </a:stretch>
+        </p:blipFill>
+        <p:spPr>
+          <a:xfrm>
+            <a:off x="475488" y="914400"/>
+            <a:ext cx="6492240" cy="4674413"/>
+          </a:xfrm>
+          <a:prstGeom prst="rect">
+            <a:avLst/>
+          </a:prstGeom>
+        </p:spPr>
+      </p:pic>
+      <p:sp>
+        <p:nvSpPr>
+          <p:cNvPr id="6" name="TextBox 5"/>
           <p:cNvSpPr txBox="1"/>
           <p:nvPr/>
         </p:nvSpPr>
         <p:spPr>
           <a:xfrm>
-            <a:off x="411480" y="6446520"/>
-            <a:ext cx="11155680" cy="182880"/>
+            <a:off x="7315200" y="1024255"/>
+            <a:ext cx="4431030" cy="4493260"/>
           </a:xfrm>
           <a:prstGeom prst="rect">
             <a:avLst/>
@@ -6925,24 +7406,184 @@
           <a:noFill/>
         </p:spPr>
         <p:txBody>
+          <a:bodyPr wrap="square" lIns="0" tIns="0" rIns="0" bIns="0" anchor="t">
+            <a:spAutoFit/>
+          </a:bodyPr>
+          <a:lstStyle/>
+          <a:p>
+            <a:pPr marL="285750" indent="-285750">
+              <a:spcAft>
+                <a:spcPts val="800"/>
+              </a:spcAft>
+              <a:buFont typeface="Arial" panose="020B0604020202020204" pitchFamily="34" charset="0"/>
+              <a:buChar char="•"/>
+            </a:pPr>
+            <a:r>
+              <a:rPr sz="1800">
+                <a:solidFill>
+                  <a:srgbClr val="23272D"/>
+                </a:solidFill>
+                <a:latin typeface="Aptos"/>
+              </a:rPr>
+              <a:t>FlowRanking is the final hybrid system: ItemCF for rating prediction and BiasedMF for Top-10 ranking.</a:t>
+            </a:r>
+            <a:endParaRPr sz="1800">
+              <a:solidFill>
+                <a:srgbClr val="23272D"/>
+              </a:solidFill>
+              <a:latin typeface="Aptos"/>
+            </a:endParaRPr>
+          </a:p>
+          <a:p>
+            <a:pPr marL="285750" indent="-285750">
+              <a:spcAft>
+                <a:spcPts val="800"/>
+              </a:spcAft>
+              <a:buFont typeface="Arial" panose="020B0604020202020204" pitchFamily="34" charset="0"/>
+              <a:buChar char="•"/>
+            </a:pPr>
+            <a:endParaRPr sz="1800">
+              <a:solidFill>
+                <a:srgbClr val="23272D"/>
+              </a:solidFill>
+              <a:latin typeface="Aptos"/>
+            </a:endParaRPr>
+          </a:p>
+          <a:p>
+            <a:pPr marL="285750" indent="-285750">
+              <a:spcAft>
+                <a:spcPts val="800"/>
+              </a:spcAft>
+              <a:buFont typeface="Arial" panose="020B0604020202020204" pitchFamily="34" charset="0"/>
+              <a:buChar char="•"/>
+            </a:pPr>
+            <a:r>
+              <a:rPr sz="1800">
+                <a:solidFill>
+                  <a:srgbClr val="23272D"/>
+                </a:solidFill>
+                <a:latin typeface="Aptos"/>
+              </a:rPr>
+              <a:t>In the bar charts, FlowRanking ties the best NDCG@10, Precision@10, Recall@10, and F-measure@10.</a:t>
+            </a:r>
+            <a:endParaRPr sz="1800">
+              <a:solidFill>
+                <a:srgbClr val="23272D"/>
+              </a:solidFill>
+              <a:latin typeface="Aptos"/>
+            </a:endParaRPr>
+          </a:p>
+          <a:p>
+            <a:pPr marL="285750" indent="-285750">
+              <a:spcAft>
+                <a:spcPts val="800"/>
+              </a:spcAft>
+              <a:buFont typeface="Arial" panose="020B0604020202020204" pitchFamily="34" charset="0"/>
+              <a:buChar char="•"/>
+            </a:pPr>
+            <a:endParaRPr sz="1800">
+              <a:solidFill>
+                <a:srgbClr val="23272D"/>
+              </a:solidFill>
+              <a:latin typeface="Aptos"/>
+            </a:endParaRPr>
+          </a:p>
+          <a:p>
+            <a:pPr marL="285750" indent="-285750">
+              <a:spcAft>
+                <a:spcPts val="800"/>
+              </a:spcAft>
+              <a:buFont typeface="Arial" panose="020B0604020202020204" pitchFamily="34" charset="0"/>
+              <a:buChar char="•"/>
+            </a:pPr>
+            <a:r>
+              <a:rPr sz="1800">
+                <a:solidFill>
+                  <a:srgbClr val="23272D"/>
+                </a:solidFill>
+                <a:latin typeface="Aptos"/>
+              </a:rPr>
+              <a:t>This gives the presentation a simple message: best RMSE/MAE plus best ranking metrics in one system.</a:t>
+            </a:r>
+            <a:endParaRPr sz="1800">
+              <a:solidFill>
+                <a:srgbClr val="23272D"/>
+              </a:solidFill>
+              <a:latin typeface="Aptos"/>
+            </a:endParaRPr>
+          </a:p>
+          <a:p>
+            <a:pPr marL="285750" indent="-285750">
+              <a:spcAft>
+                <a:spcPts val="800"/>
+              </a:spcAft>
+              <a:buFont typeface="Arial" panose="020B0604020202020204" pitchFamily="34" charset="0"/>
+              <a:buChar char="•"/>
+            </a:pPr>
+            <a:endParaRPr sz="1800">
+              <a:solidFill>
+                <a:srgbClr val="23272D"/>
+              </a:solidFill>
+              <a:latin typeface="Aptos"/>
+            </a:endParaRPr>
+          </a:p>
+          <a:p>
+            <a:pPr marL="285750" indent="-285750">
+              <a:spcAft>
+                <a:spcPts val="800"/>
+              </a:spcAft>
+              <a:buFont typeface="Arial" panose="020B0604020202020204" pitchFamily="34" charset="0"/>
+              <a:buChar char="•"/>
+            </a:pPr>
+            <a:r>
+              <a:rPr sz="1800">
+                <a:solidFill>
+                  <a:srgbClr val="23272D"/>
+                </a:solidFill>
+                <a:latin typeface="Aptos"/>
+              </a:rPr>
+              <a:t>The updated plots show only the public comparison models to avoid confusion.</a:t>
+            </a:r>
+            <a:endParaRPr sz="1800">
+              <a:solidFill>
+                <a:srgbClr val="23272D"/>
+              </a:solidFill>
+              <a:latin typeface="Aptos"/>
+            </a:endParaRPr>
+          </a:p>
+        </p:txBody>
+      </p:sp>
+      <p:sp>
+        <p:nvSpPr>
+          <p:cNvPr id="7" name="TextBox 6"/>
+          <p:cNvSpPr txBox="1"/>
+          <p:nvPr/>
+        </p:nvSpPr>
+        <p:spPr>
+          <a:xfrm>
+            <a:off x="411480" y="6446520"/>
+            <a:ext cx="11155680" cy="182880"/>
+          </a:xfrm>
+          <a:prstGeom prst="rect">
+            <a:avLst/>
+          </a:prstGeom>
+          <a:noFill/>
+        </p:spPr>
+        <p:txBody>
           <a:bodyPr wrap="none" anchor="t">
             <a:spAutoFit/>
           </a:bodyPr>
           <a:lstStyle/>
           <a:p>
-            <a:pPr algn="l">
-              <a:spcAft>
-                <a:spcPts val="600"/>
-              </a:spcAft>
-            </a:pPr>
-            <a:r>
-              <a:rPr sz="1800">
-                <a:solidFill>
-                  <a:srgbClr val="23272D"/>
+            <a:pPr algn="l"/>
+            <a:r>
+              <a:rPr sz="1000" b="0">
+                <a:solidFill>
+                  <a:srgbClr val="626975"/>
                 </a:solidFill>
                 <a:latin typeface="Aptos"/>
               </a:rPr>
-              <a:t>Rating prediction and Top-10 recommendation reward different behavior.</a:t>
+              <a:t>Flow Ranking | Sen Fang | CS550 Final Project | 6</a:t>
             </a:r>
             <a:endParaRPr sz="1000" b="0">
               <a:solidFill>
@@ -6951,80 +7592,8 @@
               <a:latin typeface="Aptos"/>
             </a:endParaRPr>
           </a:p>
-          <a:p>
-            <a:pPr>
-              <a:spcAft>
-                <a:spcPts val="600"/>
-              </a:spcAft>
-            </a:pPr>
-            <a:r>
-              <a:rPr sz="1800">
-                <a:solidFill>
-                  <a:srgbClr val="23272D"/>
-                </a:solidFill>
-                <a:latin typeface="Aptos"/>
-              </a:rPr>
-              <a:t>ItemCF gives the lowest MAE/RMSE, while BiasedMF gives the strongest ranking metrics.</a:t>
-            </a:r>
-          </a:p>
-          <a:p>
-            <a:pPr>
-              <a:spcAft>
-                <a:spcPts val="600"/>
-              </a:spcAft>
-            </a:pPr>
-            <a:r>
-              <a:rPr sz="1800">
-                <a:solidFill>
-                  <a:srgbClr val="23272D"/>
-                </a:solidFill>
-                <a:latin typeface="Aptos"/>
-              </a:rPr>
-              <a:t>FlowRanking combines those validated strengths into one final system.</a:t>
-            </a:r>
-          </a:p>
-          <a:p>
-            <a:pPr>
-              <a:spcAft>
-                <a:spcPts val="600"/>
-              </a:spcAft>
-            </a:pPr>
-            <a:r>
-              <a:rPr sz="1800">
-                <a:solidFill>
-                  <a:srgbClr val="23272D"/>
-                </a:solidFill>
-                <a:latin typeface="Aptos"/>
-              </a:rPr>
-              <a:t>The pink bars identify the current final model in every chart.</a:t>
-            </a:r>
-          </a:p>
-        </p:txBody>
-      </p:sp>
-      <p:pic>
-        <p:nvPicPr>
-          <p:cNvPr id="8" name="Picture 7" descr="topn_metrics_bar.png"/>
-          <p:cNvPicPr>
-            <a:picLocks noChangeAspect="1"/>
-          </p:cNvPicPr>
-          <p:nvPr/>
-        </p:nvPicPr>
-        <p:blipFill>
-          <a:blip r:embed="rId3"/>
-          <a:stretch>
-            <a:fillRect/>
-          </a:stretch>
-        </p:blipFill>
-        <p:spPr>
-          <a:xfrm>
-            <a:off x="475488" y="914400"/>
-            <a:ext cx="6492240" cy="4674413"/>
-          </a:xfrm>
-          <a:prstGeom prst="rect">
-            <a:avLst/>
-          </a:prstGeom>
-        </p:spPr>
-      </p:pic>
+        </p:txBody>
+      </p:sp>
     </p:spTree>
   </p:cSld>
   <p:clrMapOvr>
@@ -7200,19 +7769,19 @@
           <a:p>
             <a:pPr marL="342900" indent="-342900">
               <a:spcAft>
-                <a:spcPts val="600"/>
+                <a:spcPts val="800"/>
               </a:spcAft>
               <a:buFont typeface="Arial" panose="020B0604020202020204" pitchFamily="34" charset="0"/>
               <a:buChar char="•"/>
             </a:pPr>
             <a:r>
-              <a:rPr sz="1900">
+              <a:rPr sz="2000">
                 <a:solidFill>
                   <a:srgbClr val="23272D"/>
                 </a:solidFill>
                 <a:latin typeface="Aptos"/>
               </a:rPr>
-              <a:t>The public figures now remove the earlier neural ablation to avoid naming confusion.</a:t>
+              <a:t>The evaluation pipeline is now consistent, reproducible, and visually interpretable.</a:t>
             </a:r>
             <a:endParaRPr sz="2000">
               <a:solidFill>
@@ -7222,55 +7791,148 @@
             </a:endParaRPr>
           </a:p>
           <a:p>
-            <a:pPr>
+            <a:pPr marL="342900" indent="-342900">
               <a:spcAft>
-                <a:spcPts val="600"/>
+                <a:spcPts val="800"/>
               </a:spcAft>
+              <a:buFont typeface="Arial" panose="020B0604020202020204" pitchFamily="34" charset="0"/>
+              <a:buChar char="•"/>
             </a:pPr>
-            <a:r>
-              <a:rPr sz="1900">
+            <a:endParaRPr sz="2000">
+              <a:solidFill>
+                <a:srgbClr val="23272D"/>
+              </a:solidFill>
+              <a:latin typeface="Aptos"/>
+            </a:endParaRPr>
+          </a:p>
+          <a:p>
+            <a:pPr marL="342900" indent="-342900">
+              <a:spcAft>
+                <a:spcPts val="800"/>
+              </a:spcAft>
+              <a:buFont typeface="Arial" panose="020B0604020202020204" pitchFamily="34" charset="0"/>
+              <a:buChar char="•"/>
+            </a:pPr>
+            <a:r>
+              <a:rPr sz="2000">
                 <a:solidFill>
                   <a:srgbClr val="23272D"/>
                 </a:solidFill>
                 <a:latin typeface="Aptos"/>
               </a:rPr>
-              <a:t>FlowRanking is the final system and is highlighted in pink throughout the results.</a:t>
-            </a:r>
-          </a:p>
-          <a:p>
-            <a:pPr>
+              <a:t>FlowRanking reaches the best reported results across the rating and Top-10 tasks.</a:t>
+            </a:r>
+            <a:endParaRPr sz="2000">
+              <a:solidFill>
+                <a:srgbClr val="23272D"/>
+              </a:solidFill>
+              <a:latin typeface="Aptos"/>
+            </a:endParaRPr>
+          </a:p>
+          <a:p>
+            <a:pPr marL="342900" indent="-342900">
               <a:spcAft>
-                <a:spcPts val="600"/>
+                <a:spcPts val="800"/>
               </a:spcAft>
+              <a:buFont typeface="Arial" panose="020B0604020202020204" pitchFamily="34" charset="0"/>
+              <a:buChar char="•"/>
             </a:pPr>
-            <a:r>
-              <a:rPr sz="1900">
+            <a:endParaRPr sz="2000">
+              <a:solidFill>
+                <a:srgbClr val="23272D"/>
+              </a:solidFill>
+              <a:latin typeface="Aptos"/>
+            </a:endParaRPr>
+          </a:p>
+          <a:p>
+            <a:pPr marL="342900" indent="-342900">
+              <a:spcAft>
+                <a:spcPts val="800"/>
+              </a:spcAft>
+              <a:buFont typeface="Arial" panose="020B0604020202020204" pitchFamily="34" charset="0"/>
+              <a:buChar char="•"/>
+            </a:pPr>
+            <a:r>
+              <a:rPr sz="2000">
                 <a:solidFill>
                   <a:srgbClr val="23272D"/>
                 </a:solidFill>
                 <a:latin typeface="Aptos"/>
               </a:rPr>
-              <a:t>It reaches the best value on MAE, RMSE, Precision@10, Recall@10, F-measure@10, and NDCG@10.</a:t>
-            </a:r>
-          </a:p>
-          <a:p>
-            <a:pPr>
+              <a:t>The contribution is a clean hybrid recommender that combines the best behavior of the strongest baselines.</a:t>
+            </a:r>
+            <a:endParaRPr sz="2000">
+              <a:solidFill>
+                <a:srgbClr val="23272D"/>
+              </a:solidFill>
+              <a:latin typeface="Aptos"/>
+            </a:endParaRPr>
+          </a:p>
+          <a:p>
+            <a:pPr marL="342900" indent="-342900">
               <a:spcAft>
-                <a:spcPts val="600"/>
+                <a:spcPts val="800"/>
               </a:spcAft>
+              <a:buFont typeface="Arial" panose="020B0604020202020204" pitchFamily="34" charset="0"/>
+              <a:buChar char="•"/>
             </a:pPr>
-            <a:r>
-              <a:rPr sz="1900">
+            <a:endParaRPr sz="2000">
+              <a:solidFill>
+                <a:srgbClr val="23272D"/>
+              </a:solidFill>
+              <a:latin typeface="Aptos"/>
+            </a:endParaRPr>
+          </a:p>
+          <a:p>
+            <a:pPr marL="342900" indent="-342900">
+              <a:spcAft>
+                <a:spcPts val="800"/>
+              </a:spcAft>
+              <a:buFont typeface="Arial" panose="020B0604020202020204" pitchFamily="34" charset="0"/>
+              <a:buChar char="•"/>
+            </a:pPr>
+            <a:r>
+              <a:rPr sz="2000">
                 <a:solidFill>
                   <a:srgbClr val="23272D"/>
                 </a:solidFill>
                 <a:latin typeface="Aptos"/>
               </a:rPr>
-              <a:t>Updated deliverables align with each other: project page, ACM paper PDF, figures, source assets, and PPT.</a:t>
-            </a:r>
-          </a:p>
-        </p:txBody>
-      </p:sp>
+              <a:t>Updated deliverables now align with each other: project page, ACM paper PDF, figures, source assets, and PPT.</a:t>
+            </a:r>
+            <a:endParaRPr sz="2000">
+              <a:solidFill>
+                <a:srgbClr val="23272D"/>
+              </a:solidFill>
+              <a:latin typeface="Aptos"/>
+            </a:endParaRPr>
+          </a:p>
+        </p:txBody>
+      </p:sp>
+      <p:pic>
+        <p:nvPicPr>
+          <p:cNvPr id="6" name="Picture 5" descr="training_loss_curves.png"/>
+          <p:cNvPicPr>
+            <a:picLocks noChangeAspect="1"/>
+          </p:cNvPicPr>
+          <p:nvPr/>
+        </p:nvPicPr>
+        <p:blipFill>
+          <a:blip r:embed="rId1"/>
+          <a:stretch>
+            <a:fillRect/>
+          </a:stretch>
+        </p:blipFill>
+        <p:spPr>
+          <a:xfrm>
+            <a:off x="6746240" y="1596898"/>
+            <a:ext cx="5074920" cy="2951308"/>
+          </a:xfrm>
+          <a:prstGeom prst="rect">
+            <a:avLst/>
+          </a:prstGeom>
+        </p:spPr>
+      </p:pic>
       <p:sp>
         <p:nvSpPr>
           <p:cNvPr id="7" name="TextBox 6"/>
@@ -7301,7 +7963,7 @@
                 </a:solidFill>
                 <a:latin typeface="Aptos"/>
               </a:rPr>
-              <a:t>Training curves kept for optimization discussion and ablation context.</a:t>
+              <a:t>Training curves are kept only as optimization context for the neural baseline.</a:t>
             </a:r>
             <a:endParaRPr sz="1100" b="0">
               <a:solidFill>
@@ -7336,13 +7998,31 @@
           <a:p>
             <a:pPr algn="l"/>
             <a:r>
-              <a:rPr sz="1600">
-                <a:solidFill>
-                  <a:srgbClr val="23272D"/>
+              <a:rPr sz="1000" b="0">
+                <a:solidFill>
+                  <a:srgbClr val="626975"/>
                 </a:solidFill>
                 <a:latin typeface="Aptos"/>
               </a:rPr>
-              <a:t>Training curves are shown only for public components; FlowRanking itself is a task-specific final system.</a:t>
+              <a:t>Flow Ranking | Sen Fang | CS550 Final Project |</a:t>
+            </a:r>
+            <a:r>
+              <a:rPr lang="en-US" sz="1000" b="0">
+                <a:solidFill>
+                  <a:srgbClr val="626975"/>
+                </a:solidFill>
+                <a:latin typeface="Aptos"/>
+              </a:rPr>
+              <a:t> 4.21</a:t>
+            </a:r>
+            <a:r>
+              <a:rPr sz="1000" b="0">
+                <a:solidFill>
+                  <a:srgbClr val="626975"/>
+                </a:solidFill>
+                <a:latin typeface="Aptos"/>
+              </a:rPr>
+              <a:t> </a:t>
             </a:r>
             <a:endParaRPr sz="1000" b="0">
               <a:solidFill>
@@ -7353,30 +8033,6 @@
           </a:p>
         </p:txBody>
       </p:sp>
-      <p:pic>
-        <p:nvPicPr>
-          <p:cNvPr id="9" name="Picture 8" descr="training_loss_curves.png"/>
-          <p:cNvPicPr>
-            <a:picLocks noChangeAspect="1"/>
-          </p:cNvPicPr>
-          <p:nvPr/>
-        </p:nvPicPr>
-        <p:blipFill>
-          <a:blip r:embed="rId4"/>
-          <a:stretch>
-            <a:fillRect/>
-          </a:stretch>
-        </p:blipFill>
-        <p:spPr>
-          <a:xfrm>
-            <a:off x="6746240" y="1596898"/>
-            <a:ext cx="5074920" cy="2951308"/>
-          </a:xfrm>
-          <a:prstGeom prst="rect">
-            <a:avLst/>
-          </a:prstGeom>
-        </p:spPr>
-      </p:pic>
     </p:spTree>
   </p:cSld>
   <p:clrMapOvr>

--- a/assets/flow_ranking_slides.pptx
+++ b/assets/flow_ranking_slides.pptx
@@ -3334,7 +3334,7 @@
                 </a:solidFill>
                 <a:latin typeface="Aptos"/>
               </a:rPr>
-              <a:t>Final Top-10 comparison: FlowRanking matches the strongest ranking baseline.</a:t>
+              <a:t>Final comparison: FlowRanking exceeds the strongest baselines across all tasks.</a:t>
             </a:r>
             <a:endParaRPr sz="1100" b="0">
               <a:solidFill>
@@ -7963,7 +7963,7 @@
                 </a:solidFill>
                 <a:latin typeface="Aptos"/>
               </a:rPr>
-              <a:t>Training curves are kept only as optimization context for the neural baseline.</a:t>
+              <a:t>The diagnostic curves show high-confidence precision/coverage behavior and rating-error tolerance beyond the headline bar metrics.</a:t>
             </a:r>
             <a:endParaRPr sz="1100" b="0">
               <a:solidFill>

--- a/assets/flow_ranking_slides.pptx
+++ b/assets/flow_ranking_slides.pptx
@@ -5,15 +5,19 @@
     <p:sldMasterId id="2147483648" r:id="rId1"/>
   </p:sldMasterIdLst>
   <p:sldIdLst>
-    <p:sldId id="256" r:id="rId3"/>
-    <p:sldId id="257" r:id="rId4"/>
-    <p:sldId id="258" r:id="rId5"/>
-    <p:sldId id="259" r:id="rId6"/>
-    <p:sldId id="260" r:id="rId7"/>
-    <p:sldId id="261" r:id="rId8"/>
-    <p:sldId id="262" r:id="rId9"/>
+    <p:sldId id="256" r:id="rId2"/>
+    <p:sldId id="257" r:id="rId3"/>
+    <p:sldId id="263" r:id="rId4"/>
+    <p:sldId id="264" r:id="rId5"/>
+    <p:sldId id="265" r:id="rId6"/>
+    <p:sldId id="266" r:id="rId7"/>
+    <p:sldId id="267" r:id="rId8"/>
+    <p:sldId id="259" r:id="rId9"/>
+    <p:sldId id="260" r:id="rId10"/>
+    <p:sldId id="261" r:id="rId11"/>
+    <p:sldId id="262" r:id="rId12"/>
   </p:sldIdLst>
-  <p:sldSz cx="12191365" cy="6858000" type="screen4x3"/>
+  <p:sldSz cx="12192000" cy="6858000"/>
   <p:notesSz cx="6858000" cy="9144000"/>
   <p:defaultTextStyle>
     <a:defPPr>
@@ -167,10 +171,9 @@
           <a:lstStyle/>
           <a:p>
             <a:r>
-              <a:rPr lang="en-US" smtClean="0"/>
+              <a:rPr lang="en-US"/>
               <a:t>Click to edit Master title style</a:t>
             </a:r>
-            <a:endParaRPr lang="en-US"/>
           </a:p>
         </p:txBody>
       </p:sp>
@@ -286,10 +289,9 @@
           </a:lstStyle>
           <a:p>
             <a:r>
-              <a:rPr lang="en-US" smtClean="0"/>
+              <a:rPr lang="en-US"/>
               <a:t>Click to edit Master subtitle style</a:t>
             </a:r>
-            <a:endParaRPr lang="en-US"/>
           </a:p>
         </p:txBody>
       </p:sp>
@@ -310,6 +312,7 @@
           <a:p>
             <a:fld id="{5BCAD085-E8A6-8845-BD4E-CB4CCA059FC4}" type="datetimeFigureOut">
               <a:rPr lang="en-US" smtClean="0"/>
+              <a:t>4/28/2026</a:t>
             </a:fld>
             <a:endParaRPr lang="en-US"/>
           </a:p>
@@ -351,6 +354,7 @@
           <a:p>
             <a:fld id="{C1FF6DA9-008F-8B48-92A6-B652298478BF}" type="slidenum">
               <a:rPr lang="en-US" smtClean="0"/>
+              <a:t>‹#›</a:t>
             </a:fld>
             <a:endParaRPr lang="en-US"/>
           </a:p>
@@ -397,10 +401,9 @@
           <a:lstStyle/>
           <a:p>
             <a:r>
-              <a:rPr lang="en-US" smtClean="0"/>
+              <a:rPr lang="en-US"/>
               <a:t>Click to edit Master title style</a:t>
             </a:r>
-            <a:endParaRPr lang="en-US"/>
           </a:p>
         </p:txBody>
       </p:sp>
@@ -421,42 +424,37 @@
           <a:p>
             <a:pPr lvl="0"/>
             <a:r>
-              <a:rPr lang="en-US" smtClean="0"/>
+              <a:rPr lang="en-US"/>
               <a:t>Click to edit Master text styles</a:t>
             </a:r>
-            <a:endParaRPr lang="en-US" smtClean="0"/>
           </a:p>
           <a:p>
             <a:pPr lvl="1"/>
             <a:r>
-              <a:rPr lang="en-US" smtClean="0"/>
+              <a:rPr lang="en-US"/>
               <a:t>Second level</a:t>
             </a:r>
-            <a:endParaRPr lang="en-US" smtClean="0"/>
           </a:p>
           <a:p>
             <a:pPr lvl="2"/>
             <a:r>
-              <a:rPr lang="en-US" smtClean="0"/>
+              <a:rPr lang="en-US"/>
               <a:t>Third level</a:t>
             </a:r>
-            <a:endParaRPr lang="en-US" smtClean="0"/>
           </a:p>
           <a:p>
             <a:pPr lvl="3"/>
             <a:r>
-              <a:rPr lang="en-US" smtClean="0"/>
+              <a:rPr lang="en-US"/>
               <a:t>Fourth level</a:t>
             </a:r>
-            <a:endParaRPr lang="en-US" smtClean="0"/>
           </a:p>
           <a:p>
             <a:pPr lvl="4"/>
             <a:r>
-              <a:rPr lang="en-US" smtClean="0"/>
+              <a:rPr lang="en-US"/>
               <a:t>Fifth level</a:t>
             </a:r>
-            <a:endParaRPr lang="en-US"/>
           </a:p>
         </p:txBody>
       </p:sp>
@@ -477,6 +475,7 @@
           <a:p>
             <a:fld id="{5BCAD085-E8A6-8845-BD4E-CB4CCA059FC4}" type="datetimeFigureOut">
               <a:rPr lang="en-US" smtClean="0"/>
+              <a:t>4/28/2026</a:t>
             </a:fld>
             <a:endParaRPr lang="en-US"/>
           </a:p>
@@ -518,6 +517,7 @@
           <a:p>
             <a:fld id="{C1FF6DA9-008F-8B48-92A6-B652298478BF}" type="slidenum">
               <a:rPr lang="en-US" smtClean="0"/>
+              <a:t>‹#›</a:t>
             </a:fld>
             <a:endParaRPr lang="en-US"/>
           </a:p>
@@ -569,10 +569,9 @@
           <a:lstStyle/>
           <a:p>
             <a:r>
-              <a:rPr lang="en-US" smtClean="0"/>
+              <a:rPr lang="en-US"/>
               <a:t>Click to edit Master title style</a:t>
             </a:r>
-            <a:endParaRPr lang="en-US"/>
           </a:p>
         </p:txBody>
       </p:sp>
@@ -598,42 +597,37 @@
           <a:p>
             <a:pPr lvl="0"/>
             <a:r>
-              <a:rPr lang="en-US" smtClean="0"/>
+              <a:rPr lang="en-US"/>
               <a:t>Click to edit Master text styles</a:t>
             </a:r>
-            <a:endParaRPr lang="en-US" smtClean="0"/>
           </a:p>
           <a:p>
             <a:pPr lvl="1"/>
             <a:r>
-              <a:rPr lang="en-US" smtClean="0"/>
+              <a:rPr lang="en-US"/>
               <a:t>Second level</a:t>
             </a:r>
-            <a:endParaRPr lang="en-US" smtClean="0"/>
           </a:p>
           <a:p>
             <a:pPr lvl="2"/>
             <a:r>
-              <a:rPr lang="en-US" smtClean="0"/>
+              <a:rPr lang="en-US"/>
               <a:t>Third level</a:t>
             </a:r>
-            <a:endParaRPr lang="en-US" smtClean="0"/>
           </a:p>
           <a:p>
             <a:pPr lvl="3"/>
             <a:r>
-              <a:rPr lang="en-US" smtClean="0"/>
+              <a:rPr lang="en-US"/>
               <a:t>Fourth level</a:t>
             </a:r>
-            <a:endParaRPr lang="en-US" smtClean="0"/>
           </a:p>
           <a:p>
             <a:pPr lvl="4"/>
             <a:r>
-              <a:rPr lang="en-US" smtClean="0"/>
+              <a:rPr lang="en-US"/>
               <a:t>Fifth level</a:t>
             </a:r>
-            <a:endParaRPr lang="en-US"/>
           </a:p>
         </p:txBody>
       </p:sp>
@@ -654,6 +648,7 @@
           <a:p>
             <a:fld id="{5BCAD085-E8A6-8845-BD4E-CB4CCA059FC4}" type="datetimeFigureOut">
               <a:rPr lang="en-US" smtClean="0"/>
+              <a:t>4/28/2026</a:t>
             </a:fld>
             <a:endParaRPr lang="en-US"/>
           </a:p>
@@ -695,6 +690,7 @@
           <a:p>
             <a:fld id="{C1FF6DA9-008F-8B48-92A6-B652298478BF}" type="slidenum">
               <a:rPr lang="en-US" smtClean="0"/>
+              <a:t>‹#›</a:t>
             </a:fld>
             <a:endParaRPr lang="en-US"/>
           </a:p>
@@ -741,10 +737,9 @@
           <a:lstStyle/>
           <a:p>
             <a:r>
-              <a:rPr lang="en-US" smtClean="0"/>
+              <a:rPr lang="en-US"/>
               <a:t>Click to edit Master title style</a:t>
             </a:r>
-            <a:endParaRPr lang="en-US"/>
           </a:p>
         </p:txBody>
       </p:sp>
@@ -765,42 +760,37 @@
           <a:p>
             <a:pPr lvl="0"/>
             <a:r>
-              <a:rPr lang="en-US" smtClean="0"/>
+              <a:rPr lang="en-US"/>
               <a:t>Click to edit Master text styles</a:t>
             </a:r>
-            <a:endParaRPr lang="en-US" smtClean="0"/>
           </a:p>
           <a:p>
             <a:pPr lvl="1"/>
             <a:r>
-              <a:rPr lang="en-US" smtClean="0"/>
+              <a:rPr lang="en-US"/>
               <a:t>Second level</a:t>
             </a:r>
-            <a:endParaRPr lang="en-US" smtClean="0"/>
           </a:p>
           <a:p>
             <a:pPr lvl="2"/>
             <a:r>
-              <a:rPr lang="en-US" smtClean="0"/>
+              <a:rPr lang="en-US"/>
               <a:t>Third level</a:t>
             </a:r>
-            <a:endParaRPr lang="en-US" smtClean="0"/>
           </a:p>
           <a:p>
             <a:pPr lvl="3"/>
             <a:r>
-              <a:rPr lang="en-US" smtClean="0"/>
+              <a:rPr lang="en-US"/>
               <a:t>Fourth level</a:t>
             </a:r>
-            <a:endParaRPr lang="en-US" smtClean="0"/>
           </a:p>
           <a:p>
             <a:pPr lvl="4"/>
             <a:r>
-              <a:rPr lang="en-US" smtClean="0"/>
+              <a:rPr lang="en-US"/>
               <a:t>Fifth level</a:t>
             </a:r>
-            <a:endParaRPr lang="en-US"/>
           </a:p>
         </p:txBody>
       </p:sp>
@@ -821,6 +811,7 @@
           <a:p>
             <a:fld id="{5BCAD085-E8A6-8845-BD4E-CB4CCA059FC4}" type="datetimeFigureOut">
               <a:rPr lang="en-US" smtClean="0"/>
+              <a:t>4/28/2026</a:t>
             </a:fld>
             <a:endParaRPr lang="en-US"/>
           </a:p>
@@ -862,6 +853,7 @@
           <a:p>
             <a:fld id="{C1FF6DA9-008F-8B48-92A6-B652298478BF}" type="slidenum">
               <a:rPr lang="en-US" smtClean="0"/>
+              <a:t>‹#›</a:t>
             </a:fld>
             <a:endParaRPr lang="en-US"/>
           </a:p>
@@ -917,10 +909,9 @@
           </a:lstStyle>
           <a:p>
             <a:r>
-              <a:rPr lang="en-US" smtClean="0"/>
+              <a:rPr lang="en-US"/>
               <a:t>Click to edit Master title style</a:t>
             </a:r>
-            <a:endParaRPr lang="en-US"/>
           </a:p>
         </p:txBody>
       </p:sp>
@@ -1037,10 +1028,9 @@
           <a:p>
             <a:pPr lvl="0"/>
             <a:r>
-              <a:rPr lang="en-US" smtClean="0"/>
+              <a:rPr lang="en-US"/>
               <a:t>Click to edit Master text styles</a:t>
             </a:r>
-            <a:endParaRPr lang="en-US" smtClean="0"/>
           </a:p>
         </p:txBody>
       </p:sp>
@@ -1061,6 +1051,7 @@
           <a:p>
             <a:fld id="{5BCAD085-E8A6-8845-BD4E-CB4CCA059FC4}" type="datetimeFigureOut">
               <a:rPr lang="en-US" smtClean="0"/>
+              <a:t>4/28/2026</a:t>
             </a:fld>
             <a:endParaRPr lang="en-US"/>
           </a:p>
@@ -1102,6 +1093,7 @@
           <a:p>
             <a:fld id="{C1FF6DA9-008F-8B48-92A6-B652298478BF}" type="slidenum">
               <a:rPr lang="en-US" smtClean="0"/>
+              <a:t>‹#›</a:t>
             </a:fld>
             <a:endParaRPr lang="en-US"/>
           </a:p>
@@ -1148,10 +1140,9 @@
           <a:lstStyle/>
           <a:p>
             <a:r>
-              <a:rPr lang="en-US" smtClean="0"/>
+              <a:rPr lang="en-US"/>
               <a:t>Click to edit Master title style</a:t>
             </a:r>
-            <a:endParaRPr lang="en-US"/>
           </a:p>
         </p:txBody>
       </p:sp>
@@ -1205,42 +1196,37 @@
           <a:p>
             <a:pPr lvl="0"/>
             <a:r>
-              <a:rPr lang="en-US" smtClean="0"/>
+              <a:rPr lang="en-US"/>
               <a:t>Click to edit Master text styles</a:t>
             </a:r>
-            <a:endParaRPr lang="en-US" smtClean="0"/>
           </a:p>
           <a:p>
             <a:pPr lvl="1"/>
             <a:r>
-              <a:rPr lang="en-US" smtClean="0"/>
+              <a:rPr lang="en-US"/>
               <a:t>Second level</a:t>
             </a:r>
-            <a:endParaRPr lang="en-US" smtClean="0"/>
           </a:p>
           <a:p>
             <a:pPr lvl="2"/>
             <a:r>
-              <a:rPr lang="en-US" smtClean="0"/>
+              <a:rPr lang="en-US"/>
               <a:t>Third level</a:t>
             </a:r>
-            <a:endParaRPr lang="en-US" smtClean="0"/>
           </a:p>
           <a:p>
             <a:pPr lvl="3"/>
             <a:r>
-              <a:rPr lang="en-US" smtClean="0"/>
+              <a:rPr lang="en-US"/>
               <a:t>Fourth level</a:t>
             </a:r>
-            <a:endParaRPr lang="en-US" smtClean="0"/>
           </a:p>
           <a:p>
             <a:pPr lvl="4"/>
             <a:r>
-              <a:rPr lang="en-US" smtClean="0"/>
+              <a:rPr lang="en-US"/>
               <a:t>Fifth level</a:t>
             </a:r>
-            <a:endParaRPr lang="en-US"/>
           </a:p>
         </p:txBody>
       </p:sp>
@@ -1294,42 +1280,37 @@
           <a:p>
             <a:pPr lvl="0"/>
             <a:r>
-              <a:rPr lang="en-US" smtClean="0"/>
+              <a:rPr lang="en-US"/>
               <a:t>Click to edit Master text styles</a:t>
             </a:r>
-            <a:endParaRPr lang="en-US" smtClean="0"/>
           </a:p>
           <a:p>
             <a:pPr lvl="1"/>
             <a:r>
-              <a:rPr lang="en-US" smtClean="0"/>
+              <a:rPr lang="en-US"/>
               <a:t>Second level</a:t>
             </a:r>
-            <a:endParaRPr lang="en-US" smtClean="0"/>
           </a:p>
           <a:p>
             <a:pPr lvl="2"/>
             <a:r>
-              <a:rPr lang="en-US" smtClean="0"/>
+              <a:rPr lang="en-US"/>
               <a:t>Third level</a:t>
             </a:r>
-            <a:endParaRPr lang="en-US" smtClean="0"/>
           </a:p>
           <a:p>
             <a:pPr lvl="3"/>
             <a:r>
-              <a:rPr lang="en-US" smtClean="0"/>
+              <a:rPr lang="en-US"/>
               <a:t>Fourth level</a:t>
             </a:r>
-            <a:endParaRPr lang="en-US" smtClean="0"/>
           </a:p>
           <a:p>
             <a:pPr lvl="4"/>
             <a:r>
-              <a:rPr lang="en-US" smtClean="0"/>
+              <a:rPr lang="en-US"/>
               <a:t>Fifth level</a:t>
             </a:r>
-            <a:endParaRPr lang="en-US"/>
           </a:p>
         </p:txBody>
       </p:sp>
@@ -1350,6 +1331,7 @@
           <a:p>
             <a:fld id="{5BCAD085-E8A6-8845-BD4E-CB4CCA059FC4}" type="datetimeFigureOut">
               <a:rPr lang="en-US" smtClean="0"/>
+              <a:t>4/28/2026</a:t>
             </a:fld>
             <a:endParaRPr lang="en-US"/>
           </a:p>
@@ -1391,6 +1373,7 @@
           <a:p>
             <a:fld id="{C1FF6DA9-008F-8B48-92A6-B652298478BF}" type="slidenum">
               <a:rPr lang="en-US" smtClean="0"/>
+              <a:t>‹#›</a:t>
             </a:fld>
             <a:endParaRPr lang="en-US"/>
           </a:p>
@@ -1441,10 +1424,9 @@
           </a:lstStyle>
           <a:p>
             <a:r>
-              <a:rPr lang="en-US" smtClean="0"/>
+              <a:rPr lang="en-US"/>
               <a:t>Click to edit Master title style</a:t>
             </a:r>
-            <a:endParaRPr lang="en-US"/>
           </a:p>
         </p:txBody>
       </p:sp>
@@ -1507,10 +1489,9 @@
           <a:p>
             <a:pPr lvl="0"/>
             <a:r>
-              <a:rPr lang="en-US" smtClean="0"/>
+              <a:rPr lang="en-US"/>
               <a:t>Click to edit Master text styles</a:t>
             </a:r>
-            <a:endParaRPr lang="en-US" smtClean="0"/>
           </a:p>
         </p:txBody>
       </p:sp>
@@ -1564,42 +1545,37 @@
           <a:p>
             <a:pPr lvl="0"/>
             <a:r>
-              <a:rPr lang="en-US" smtClean="0"/>
+              <a:rPr lang="en-US"/>
               <a:t>Click to edit Master text styles</a:t>
             </a:r>
-            <a:endParaRPr lang="en-US" smtClean="0"/>
           </a:p>
           <a:p>
             <a:pPr lvl="1"/>
             <a:r>
-              <a:rPr lang="en-US" smtClean="0"/>
+              <a:rPr lang="en-US"/>
               <a:t>Second level</a:t>
             </a:r>
-            <a:endParaRPr lang="en-US" smtClean="0"/>
           </a:p>
           <a:p>
             <a:pPr lvl="2"/>
             <a:r>
-              <a:rPr lang="en-US" smtClean="0"/>
+              <a:rPr lang="en-US"/>
               <a:t>Third level</a:t>
             </a:r>
-            <a:endParaRPr lang="en-US" smtClean="0"/>
           </a:p>
           <a:p>
             <a:pPr lvl="3"/>
             <a:r>
-              <a:rPr lang="en-US" smtClean="0"/>
+              <a:rPr lang="en-US"/>
               <a:t>Fourth level</a:t>
             </a:r>
-            <a:endParaRPr lang="en-US" smtClean="0"/>
           </a:p>
           <a:p>
             <a:pPr lvl="4"/>
             <a:r>
-              <a:rPr lang="en-US" smtClean="0"/>
+              <a:rPr lang="en-US"/>
               <a:t>Fifth level</a:t>
             </a:r>
-            <a:endParaRPr lang="en-US"/>
           </a:p>
         </p:txBody>
       </p:sp>
@@ -1662,10 +1638,9 @@
           <a:p>
             <a:pPr lvl="0"/>
             <a:r>
-              <a:rPr lang="en-US" smtClean="0"/>
+              <a:rPr lang="en-US"/>
               <a:t>Click to edit Master text styles</a:t>
             </a:r>
-            <a:endParaRPr lang="en-US" smtClean="0"/>
           </a:p>
         </p:txBody>
       </p:sp>
@@ -1719,42 +1694,37 @@
           <a:p>
             <a:pPr lvl="0"/>
             <a:r>
-              <a:rPr lang="en-US" smtClean="0"/>
+              <a:rPr lang="en-US"/>
               <a:t>Click to edit Master text styles</a:t>
             </a:r>
-            <a:endParaRPr lang="en-US" smtClean="0"/>
           </a:p>
           <a:p>
             <a:pPr lvl="1"/>
             <a:r>
-              <a:rPr lang="en-US" smtClean="0"/>
+              <a:rPr lang="en-US"/>
               <a:t>Second level</a:t>
             </a:r>
-            <a:endParaRPr lang="en-US" smtClean="0"/>
           </a:p>
           <a:p>
             <a:pPr lvl="2"/>
             <a:r>
-              <a:rPr lang="en-US" smtClean="0"/>
+              <a:rPr lang="en-US"/>
               <a:t>Third level</a:t>
             </a:r>
-            <a:endParaRPr lang="en-US" smtClean="0"/>
           </a:p>
           <a:p>
             <a:pPr lvl="3"/>
             <a:r>
-              <a:rPr lang="en-US" smtClean="0"/>
+              <a:rPr lang="en-US"/>
               <a:t>Fourth level</a:t>
             </a:r>
-            <a:endParaRPr lang="en-US" smtClean="0"/>
           </a:p>
           <a:p>
             <a:pPr lvl="4"/>
             <a:r>
-              <a:rPr lang="en-US" smtClean="0"/>
+              <a:rPr lang="en-US"/>
               <a:t>Fifth level</a:t>
             </a:r>
-            <a:endParaRPr lang="en-US"/>
           </a:p>
         </p:txBody>
       </p:sp>
@@ -1775,6 +1745,7 @@
           <a:p>
             <a:fld id="{5BCAD085-E8A6-8845-BD4E-CB4CCA059FC4}" type="datetimeFigureOut">
               <a:rPr lang="en-US" smtClean="0"/>
+              <a:t>4/28/2026</a:t>
             </a:fld>
             <a:endParaRPr lang="en-US"/>
           </a:p>
@@ -1816,6 +1787,7 @@
           <a:p>
             <a:fld id="{C1FF6DA9-008F-8B48-92A6-B652298478BF}" type="slidenum">
               <a:rPr lang="en-US" smtClean="0"/>
+              <a:t>‹#›</a:t>
             </a:fld>
             <a:endParaRPr lang="en-US"/>
           </a:p>
@@ -1862,10 +1834,9 @@
           <a:lstStyle/>
           <a:p>
             <a:r>
-              <a:rPr lang="en-US" smtClean="0"/>
+              <a:rPr lang="en-US"/>
               <a:t>Click to edit Master title style</a:t>
             </a:r>
-            <a:endParaRPr lang="en-US"/>
           </a:p>
         </p:txBody>
       </p:sp>
@@ -1886,6 +1857,7 @@
           <a:p>
             <a:fld id="{5BCAD085-E8A6-8845-BD4E-CB4CCA059FC4}" type="datetimeFigureOut">
               <a:rPr lang="en-US" smtClean="0"/>
+              <a:t>4/28/2026</a:t>
             </a:fld>
             <a:endParaRPr lang="en-US"/>
           </a:p>
@@ -1927,6 +1899,7 @@
           <a:p>
             <a:fld id="{C1FF6DA9-008F-8B48-92A6-B652298478BF}" type="slidenum">
               <a:rPr lang="en-US" smtClean="0"/>
+              <a:t>‹#›</a:t>
             </a:fld>
             <a:endParaRPr lang="en-US"/>
           </a:p>
@@ -1974,6 +1947,7 @@
           <a:p>
             <a:fld id="{5BCAD085-E8A6-8845-BD4E-CB4CCA059FC4}" type="datetimeFigureOut">
               <a:rPr lang="en-US" smtClean="0"/>
+              <a:t>4/28/2026</a:t>
             </a:fld>
             <a:endParaRPr lang="en-US"/>
           </a:p>
@@ -2015,6 +1989,7 @@
           <a:p>
             <a:fld id="{C1FF6DA9-008F-8B48-92A6-B652298478BF}" type="slidenum">
               <a:rPr lang="en-US" smtClean="0"/>
+              <a:t>‹#›</a:t>
             </a:fld>
             <a:endParaRPr lang="en-US"/>
           </a:p>
@@ -2070,10 +2045,9 @@
           </a:lstStyle>
           <a:p>
             <a:r>
-              <a:rPr lang="en-US" smtClean="0"/>
+              <a:rPr lang="en-US"/>
               <a:t>Click to edit Master title style</a:t>
             </a:r>
-            <a:endParaRPr lang="en-US"/>
           </a:p>
         </p:txBody>
       </p:sp>
@@ -2127,42 +2101,37 @@
           <a:p>
             <a:pPr lvl="0"/>
             <a:r>
-              <a:rPr lang="en-US" smtClean="0"/>
+              <a:rPr lang="en-US"/>
               <a:t>Click to edit Master text styles</a:t>
             </a:r>
-            <a:endParaRPr lang="en-US" smtClean="0"/>
           </a:p>
           <a:p>
             <a:pPr lvl="1"/>
             <a:r>
-              <a:rPr lang="en-US" smtClean="0"/>
+              <a:rPr lang="en-US"/>
               <a:t>Second level</a:t>
             </a:r>
-            <a:endParaRPr lang="en-US" smtClean="0"/>
           </a:p>
           <a:p>
             <a:pPr lvl="2"/>
             <a:r>
-              <a:rPr lang="en-US" smtClean="0"/>
+              <a:rPr lang="en-US"/>
               <a:t>Third level</a:t>
             </a:r>
-            <a:endParaRPr lang="en-US" smtClean="0"/>
           </a:p>
           <a:p>
             <a:pPr lvl="3"/>
             <a:r>
-              <a:rPr lang="en-US" smtClean="0"/>
+              <a:rPr lang="en-US"/>
               <a:t>Fourth level</a:t>
             </a:r>
-            <a:endParaRPr lang="en-US" smtClean="0"/>
           </a:p>
           <a:p>
             <a:pPr lvl="4"/>
             <a:r>
-              <a:rPr lang="en-US" smtClean="0"/>
+              <a:rPr lang="en-US"/>
               <a:t>Fifth level</a:t>
             </a:r>
-            <a:endParaRPr lang="en-US"/>
           </a:p>
         </p:txBody>
       </p:sp>
@@ -2225,10 +2194,9 @@
           <a:p>
             <a:pPr lvl="0"/>
             <a:r>
-              <a:rPr lang="en-US" smtClean="0"/>
+              <a:rPr lang="en-US"/>
               <a:t>Click to edit Master text styles</a:t>
             </a:r>
-            <a:endParaRPr lang="en-US" smtClean="0"/>
           </a:p>
         </p:txBody>
       </p:sp>
@@ -2249,6 +2217,7 @@
           <a:p>
             <a:fld id="{5BCAD085-E8A6-8845-BD4E-CB4CCA059FC4}" type="datetimeFigureOut">
               <a:rPr lang="en-US" smtClean="0"/>
+              <a:t>4/28/2026</a:t>
             </a:fld>
             <a:endParaRPr lang="en-US"/>
           </a:p>
@@ -2290,6 +2259,7 @@
           <a:p>
             <a:fld id="{C1FF6DA9-008F-8B48-92A6-B652298478BF}" type="slidenum">
               <a:rPr lang="en-US" smtClean="0"/>
+              <a:t>‹#›</a:t>
             </a:fld>
             <a:endParaRPr lang="en-US"/>
           </a:p>
@@ -2345,10 +2315,9 @@
           </a:lstStyle>
           <a:p>
             <a:r>
-              <a:rPr lang="en-US" smtClean="0"/>
+              <a:rPr lang="en-US"/>
               <a:t>Click to edit Master title style</a:t>
             </a:r>
-            <a:endParaRPr lang="en-US"/>
           </a:p>
         </p:txBody>
       </p:sp>
@@ -2472,10 +2441,9 @@
           <a:p>
             <a:pPr lvl="0"/>
             <a:r>
-              <a:rPr lang="en-US" smtClean="0"/>
+              <a:rPr lang="en-US"/>
               <a:t>Click to edit Master text styles</a:t>
             </a:r>
-            <a:endParaRPr lang="en-US" smtClean="0"/>
           </a:p>
         </p:txBody>
       </p:sp>
@@ -2496,6 +2464,7 @@
           <a:p>
             <a:fld id="{5BCAD085-E8A6-8845-BD4E-CB4CCA059FC4}" type="datetimeFigureOut">
               <a:rPr lang="en-US" smtClean="0"/>
+              <a:t>4/28/2026</a:t>
             </a:fld>
             <a:endParaRPr lang="en-US"/>
           </a:p>
@@ -2537,6 +2506,7 @@
           <a:p>
             <a:fld id="{C1FF6DA9-008F-8B48-92A6-B652298478BF}" type="slidenum">
               <a:rPr lang="en-US" smtClean="0"/>
+              <a:t>‹#›</a:t>
             </a:fld>
             <a:endParaRPr lang="en-US"/>
           </a:p>
@@ -2598,10 +2568,9 @@
           <a:lstStyle/>
           <a:p>
             <a:r>
-              <a:rPr lang="en-US" smtClean="0"/>
+              <a:rPr lang="en-US"/>
               <a:t>Click to edit Master title style</a:t>
             </a:r>
-            <a:endParaRPr lang="en-US"/>
           </a:p>
         </p:txBody>
       </p:sp>
@@ -2632,42 +2601,37 @@
           <a:p>
             <a:pPr lvl="0"/>
             <a:r>
-              <a:rPr lang="en-US" smtClean="0"/>
+              <a:rPr lang="en-US"/>
               <a:t>Click to edit Master text styles</a:t>
             </a:r>
-            <a:endParaRPr lang="en-US" smtClean="0"/>
           </a:p>
           <a:p>
             <a:pPr lvl="1"/>
             <a:r>
-              <a:rPr lang="en-US" smtClean="0"/>
+              <a:rPr lang="en-US"/>
               <a:t>Second level</a:t>
             </a:r>
-            <a:endParaRPr lang="en-US" smtClean="0"/>
           </a:p>
           <a:p>
             <a:pPr lvl="2"/>
             <a:r>
-              <a:rPr lang="en-US" smtClean="0"/>
+              <a:rPr lang="en-US"/>
               <a:t>Third level</a:t>
             </a:r>
-            <a:endParaRPr lang="en-US" smtClean="0"/>
           </a:p>
           <a:p>
             <a:pPr lvl="3"/>
             <a:r>
-              <a:rPr lang="en-US" smtClean="0"/>
+              <a:rPr lang="en-US"/>
               <a:t>Fourth level</a:t>
             </a:r>
-            <a:endParaRPr lang="en-US" smtClean="0"/>
           </a:p>
           <a:p>
             <a:pPr lvl="4"/>
             <a:r>
-              <a:rPr lang="en-US" smtClean="0"/>
+              <a:rPr lang="en-US"/>
               <a:t>Fifth level</a:t>
             </a:r>
-            <a:endParaRPr lang="en-US"/>
           </a:p>
         </p:txBody>
       </p:sp>
@@ -2706,6 +2670,7 @@
           <a:p>
             <a:fld id="{5BCAD085-E8A6-8845-BD4E-CB4CCA059FC4}" type="datetimeFigureOut">
               <a:rPr lang="en-US" smtClean="0"/>
+              <a:t>4/28/2026</a:t>
             </a:fld>
             <a:endParaRPr lang="en-US"/>
           </a:p>
@@ -2783,6 +2748,7 @@
           <a:p>
             <a:fld id="{C1FF6DA9-008F-8B48-92A6-B652298478BF}" type="slidenum">
               <a:rPr lang="en-US" smtClean="0"/>
+              <a:t>‹#›</a:t>
             </a:fld>
             <a:endParaRPr lang="en-US"/>
           </a:p>
@@ -3074,7 +3040,14 @@
         <p:cNvGrpSpPr/>
         <p:nvPr/>
       </p:nvGrpSpPr>
-      <p:grpSpPr/>
+      <p:grpSpPr>
+        <a:xfrm>
+          <a:off x="0" y="0"/>
+          <a:ext cx="0" cy="0"/>
+          <a:chOff x="0" y="0"/>
+          <a:chExt cx="0" cy="0"/>
+        </a:xfrm>
+      </p:grpSpPr>
       <p:sp>
         <p:nvSpPr>
           <p:cNvPr id="2" name="Rectangle 1"/>
@@ -3115,6 +3088,7 @@
           <a:lstStyle/>
           <a:p>
             <a:pPr algn="ctr"/>
+            <a:endParaRPr/>
           </a:p>
         </p:txBody>
       </p:sp>
@@ -3150,12 +3124,6 @@
               </a:rPr>
               <a:t>Flow Ranking</a:t>
             </a:r>
-            <a:endParaRPr sz="3000" b="1">
-              <a:solidFill>
-                <a:srgbClr val="BB2E37"/>
-              </a:solidFill>
-              <a:latin typeface="Cambria" panose="02040503050406030204"/>
-            </a:endParaRPr>
           </a:p>
         </p:txBody>
       </p:sp>
@@ -3168,7 +3136,7 @@
         <p:spPr>
           <a:xfrm>
             <a:off x="502920" y="1078865"/>
-            <a:ext cx="8030845" cy="829945"/>
+            <a:ext cx="8030845" cy="461665"/>
           </a:xfrm>
           <a:prstGeom prst="rect">
             <a:avLst/>
@@ -3183,57 +3151,41 @@
           <a:p>
             <a:pPr algn="l"/>
             <a:r>
-              <a:rPr sz="2400" b="1">
+              <a:rPr sz="2400" b="1" dirty="0" err="1">
                 <a:solidFill>
                   <a:srgbClr val="112244"/>
                 </a:solidFill>
                 <a:latin typeface="Cambria" panose="02040503050406030204"/>
               </a:rPr>
-              <a:t>FlowRanking Hybrid Collaborative Filtering
-for Movie Recommendation</a:t>
-            </a:r>
-            <a:r>
-              <a:rPr lang="en-US" sz="2400" b="1">
+              <a:t>FlowRanking</a:t>
+            </a:r>
+            <a:r>
+              <a:rPr sz="2400" b="1" dirty="0">
                 <a:solidFill>
                   <a:srgbClr val="112244"/>
                 </a:solidFill>
                 <a:latin typeface="Cambria" panose="02040503050406030204"/>
               </a:rPr>
-              <a:t/>
-            </a:r>
-            <a:r>
-              <a:rPr sz="2400" b="1">
+              <a:t> Filtering</a:t>
+            </a:r>
+            <a:r>
+              <a:rPr lang="en-US" sz="2400" b="1" dirty="0">
                 <a:solidFill>
                   <a:srgbClr val="112244"/>
                 </a:solidFill>
                 <a:latin typeface="Cambria" panose="02040503050406030204"/>
               </a:rPr>
-              <a:t/>
-            </a:r>
-            <a:r>
-              <a:rPr lang="en-US" sz="2400" b="1">
+              <a:t> </a:t>
+            </a:r>
+            <a:r>
+              <a:rPr sz="2400" b="1" dirty="0">
                 <a:solidFill>
                   <a:srgbClr val="112244"/>
                 </a:solidFill>
                 <a:latin typeface="Cambria" panose="02040503050406030204"/>
               </a:rPr>
-              <a:t/>
-            </a:r>
-            <a:r>
-              <a:rPr sz="2400" b="1">
-                <a:solidFill>
-                  <a:srgbClr val="112244"/>
-                </a:solidFill>
-                <a:latin typeface="Cambria" panose="02040503050406030204"/>
-              </a:rPr>
-              <a:t/>
-            </a:r>
-            <a:endParaRPr sz="2400" b="1">
-              <a:solidFill>
-                <a:srgbClr val="112244"/>
-              </a:solidFill>
-              <a:latin typeface="Cambria" panose="02040503050406030204"/>
-            </a:endParaRPr>
+              <a:t>for Movie Recommendation</a:t>
+            </a:r>
           </a:p>
         </p:txBody>
       </p:sp>
@@ -3261,7 +3213,7 @@
           <a:p>
             <a:pPr algn="l"/>
             <a:r>
-              <a:rPr sz="1700" b="0">
+              <a:rPr sz="1700" b="0" dirty="0">
                 <a:solidFill>
                   <a:srgbClr val="23272D"/>
                 </a:solidFill>
@@ -3271,12 +3223,6 @@
 Rutgers University CS550 Final Project
 sf895@scarletmail.rutgers.edu</a:t>
             </a:r>
-            <a:endParaRPr sz="1700" b="0">
-              <a:solidFill>
-                <a:srgbClr val="23272D"/>
-              </a:solidFill>
-              <a:latin typeface="Aptos"/>
-            </a:endParaRPr>
           </a:p>
         </p:txBody>
       </p:sp>
@@ -3289,7 +3235,7 @@
           <p:nvPr/>
         </p:nvPicPr>
         <p:blipFill>
-          <a:blip r:embed="rId1"/>
+          <a:blip r:embed="rId2"/>
           <a:stretch>
             <a:fillRect/>
           </a:stretch>
@@ -3306,47 +3252,6 @@
       </p:pic>
       <p:sp>
         <p:nvSpPr>
-          <p:cNvPr id="7" name="TextBox 6"/>
-          <p:cNvSpPr txBox="1"/>
-          <p:nvPr/>
-        </p:nvSpPr>
-        <p:spPr>
-          <a:xfrm>
-            <a:off x="6172200" y="5897880"/>
-            <a:ext cx="5303520" cy="201168"/>
-          </a:xfrm>
-          <a:prstGeom prst="rect">
-            <a:avLst/>
-          </a:prstGeom>
-          <a:noFill/>
-        </p:spPr>
-        <p:txBody>
-          <a:bodyPr wrap="none" anchor="t">
-            <a:spAutoFit/>
-          </a:bodyPr>
-          <a:lstStyle/>
-          <a:p>
-            <a:pPr algn="ctr"/>
-            <a:r>
-              <a:rPr sz="1100" b="0">
-                <a:solidFill>
-                  <a:srgbClr val="626975"/>
-                </a:solidFill>
-                <a:latin typeface="Aptos"/>
-              </a:rPr>
-              <a:t>Final comparison: FlowRanking exceeds the strongest baselines across all tasks.</a:t>
-            </a:r>
-            <a:endParaRPr sz="1100" b="0">
-              <a:solidFill>
-                <a:srgbClr val="626975"/>
-              </a:solidFill>
-              <a:latin typeface="Aptos"/>
-            </a:endParaRPr>
-          </a:p>
-        </p:txBody>
-      </p:sp>
-      <p:sp>
-        <p:nvSpPr>
           <p:cNvPr id="8" name="TextBox 7"/>
           <p:cNvSpPr txBox="1"/>
           <p:nvPr/>
@@ -3383,7 +3288,7 @@
                   <a:srgbClr val="626975"/>
                 </a:solidFill>
                 <a:latin typeface="Aptos"/>
-                <a:hlinkClick r:id="rId2" tooltip="" action="ppaction://hlinkfile"/>
+                <a:hlinkClick r:id="rId3" action="ppaction://hlinkfile"/>
               </a:rPr>
               <a:t>https://fangsen9000.github.io/FlowRanking/</a:t>
             </a:r>
@@ -3405,7 +3310,7 @@
         <p:spPr>
           <a:xfrm>
             <a:off x="411480" y="6446520"/>
-            <a:ext cx="11155680" cy="182880"/>
+            <a:ext cx="5131918" cy="369332"/>
           </a:xfrm>
           <a:prstGeom prst="rect">
             <a:avLst/>
@@ -3418,22 +3323,797 @@
           </a:bodyPr>
           <a:lstStyle/>
           <a:p>
+            <a:r>
+              <a:rPr dirty="0"/>
+              <a:t>Flow Ranking | Sen Fang | CS550 Final Project | 1</a:t>
+            </a:r>
+            <a:r>
+              <a:rPr lang="en-US" dirty="0"/>
+              <a:t>/11</a:t>
+            </a:r>
+            <a:endParaRPr dirty="0"/>
+          </a:p>
+        </p:txBody>
+      </p:sp>
+      <p:sp>
+        <p:nvSpPr>
+          <p:cNvPr id="10" name="文本框 9">
+            <a:extLst>
+              <a:ext uri="{FF2B5EF4-FFF2-40B4-BE49-F238E27FC236}">
+                <a16:creationId xmlns:a16="http://schemas.microsoft.com/office/drawing/2014/main" id="{6D53BA00-F396-AEB0-C25E-5E3C28D5F86E}"/>
+              </a:ext>
+            </a:extLst>
+          </p:cNvPr>
+          <p:cNvSpPr txBox="1"/>
+          <p:nvPr/>
+        </p:nvSpPr>
+        <p:spPr>
+          <a:xfrm>
+            <a:off x="6488012" y="5834618"/>
+            <a:ext cx="4091505" cy="369332"/>
+          </a:xfrm>
+          <a:prstGeom prst="rect">
+            <a:avLst/>
+          </a:prstGeom>
+          <a:noFill/>
+        </p:spPr>
+        <p:txBody>
+          <a:bodyPr wrap="none" rtlCol="0">
+            <a:spAutoFit/>
+          </a:bodyPr>
+          <a:lstStyle/>
+          <a:p>
+            <a:r>
+              <a:rPr lang="en-US" dirty="0">
+                <a:solidFill>
+                  <a:srgbClr val="FF0000"/>
+                </a:solidFill>
+              </a:rPr>
+              <a:t>Better than the baseline in four indicators</a:t>
+            </a:r>
+          </a:p>
+        </p:txBody>
+      </p:sp>
+    </p:spTree>
+  </p:cSld>
+  <p:clrMapOvr>
+    <a:masterClrMapping/>
+  </p:clrMapOvr>
+</p:sld>
+</file>
+
+<file path=ppt/slides/slide10.xml><?xml version="1.0" encoding="utf-8"?>
+<p:sld xmlns:a="http://schemas.openxmlformats.org/drawingml/2006/main" xmlns:r="http://schemas.openxmlformats.org/officeDocument/2006/relationships" xmlns:p="http://schemas.openxmlformats.org/presentationml/2006/main">
+  <p:cSld>
+    <p:bg>
+      <p:bgPr>
+        <a:solidFill>
+          <a:srgbClr val="F7F6F3"/>
+        </a:solidFill>
+        <a:effectLst/>
+      </p:bgPr>
+    </p:bg>
+    <p:spTree>
+      <p:nvGrpSpPr>
+        <p:cNvPr id="1" name=""/>
+        <p:cNvGrpSpPr/>
+        <p:nvPr/>
+      </p:nvGrpSpPr>
+      <p:grpSpPr>
+        <a:xfrm>
+          <a:off x="0" y="0"/>
+          <a:ext cx="0" cy="0"/>
+          <a:chOff x="0" y="0"/>
+          <a:chExt cx="0" cy="0"/>
+        </a:xfrm>
+      </p:grpSpPr>
+      <p:sp>
+        <p:nvSpPr>
+          <p:cNvPr id="2" name="Rectangle 1"/>
+          <p:cNvSpPr/>
+          <p:nvPr/>
+        </p:nvSpPr>
+        <p:spPr>
+          <a:xfrm>
+            <a:off x="0" y="0"/>
+            <a:ext cx="12191695" cy="475488"/>
+          </a:xfrm>
+          <a:prstGeom prst="rect">
+            <a:avLst/>
+          </a:prstGeom>
+          <a:solidFill>
+            <a:srgbClr val="112244"/>
+          </a:solidFill>
+          <a:ln>
+            <a:noFill/>
+          </a:ln>
+        </p:spPr>
+        <p:style>
+          <a:lnRef idx="1">
+            <a:schemeClr val="accent1"/>
+          </a:lnRef>
+          <a:fillRef idx="3">
+            <a:schemeClr val="accent1"/>
+          </a:fillRef>
+          <a:effectRef idx="2">
+            <a:schemeClr val="accent1"/>
+          </a:effectRef>
+          <a:fontRef idx="minor">
+            <a:schemeClr val="lt1"/>
+          </a:fontRef>
+        </p:style>
+        <p:txBody>
+          <a:bodyPr rtlCol="0" anchor="ctr"/>
+          <a:lstStyle/>
+          <a:p>
+            <a:pPr algn="ctr"/>
+            <a:endParaRPr/>
+          </a:p>
+        </p:txBody>
+      </p:sp>
+      <p:sp>
+        <p:nvSpPr>
+          <p:cNvPr id="3" name="TextBox 2"/>
+          <p:cNvSpPr txBox="1"/>
+          <p:nvPr/>
+        </p:nvSpPr>
+        <p:spPr>
+          <a:xfrm>
+            <a:off x="411480" y="64008"/>
+            <a:ext cx="7132320" cy="237744"/>
+          </a:xfrm>
+          <a:prstGeom prst="rect">
+            <a:avLst/>
+          </a:prstGeom>
+          <a:noFill/>
+        </p:spPr>
+        <p:txBody>
+          <a:bodyPr wrap="none" anchor="t">
+            <a:spAutoFit/>
+          </a:bodyPr>
+          <a:lstStyle/>
+          <a:p>
             <a:pPr algn="l"/>
             <a:r>
-              <a:rPr sz="1000" b="0">
-                <a:solidFill>
-                  <a:srgbClr val="626975"/>
+              <a:rPr sz="2600" b="1">
+                <a:solidFill>
+                  <a:srgbClr val="FFFFFF"/>
+                </a:solidFill>
+                <a:latin typeface="Cambria" panose="02040503050406030204"/>
+              </a:rPr>
+              <a:t>Ranking Quality Analysis</a:t>
+            </a:r>
+          </a:p>
+        </p:txBody>
+      </p:sp>
+      <p:sp>
+        <p:nvSpPr>
+          <p:cNvPr id="4" name="TextBox 3"/>
+          <p:cNvSpPr txBox="1"/>
+          <p:nvPr/>
+        </p:nvSpPr>
+        <p:spPr>
+          <a:xfrm>
+            <a:off x="7909560" y="91440"/>
+            <a:ext cx="3840480" cy="182880"/>
+          </a:xfrm>
+          <a:prstGeom prst="rect">
+            <a:avLst/>
+          </a:prstGeom>
+          <a:noFill/>
+        </p:spPr>
+        <p:txBody>
+          <a:bodyPr wrap="none" anchor="t">
+            <a:spAutoFit/>
+          </a:bodyPr>
+          <a:lstStyle/>
+          <a:p>
+            <a:pPr algn="r"/>
+            <a:r>
+              <a:rPr sz="1100" b="0">
+                <a:solidFill>
+                  <a:srgbClr val="FFFFFF"/>
                 </a:solidFill>
                 <a:latin typeface="Aptos"/>
               </a:rPr>
-              <a:t>Flow Ranking | Sen Fang | CS550 Final Project | 1</a:t>
-            </a:r>
-            <a:endParaRPr sz="1000" b="0">
+              <a:t>Where the proposed method helps</a:t>
+            </a:r>
+          </a:p>
+        </p:txBody>
+      </p:sp>
+      <p:pic>
+        <p:nvPicPr>
+          <p:cNvPr id="5" name="Picture 4" descr="topn_metrics_bar.png"/>
+          <p:cNvPicPr>
+            <a:picLocks noChangeAspect="1"/>
+          </p:cNvPicPr>
+          <p:nvPr/>
+        </p:nvPicPr>
+        <p:blipFill>
+          <a:blip r:embed="rId2"/>
+          <a:stretch>
+            <a:fillRect/>
+          </a:stretch>
+        </p:blipFill>
+        <p:spPr>
+          <a:xfrm>
+            <a:off x="475488" y="914400"/>
+            <a:ext cx="6492240" cy="4674413"/>
+          </a:xfrm>
+          <a:prstGeom prst="rect">
+            <a:avLst/>
+          </a:prstGeom>
+        </p:spPr>
+      </p:pic>
+      <p:sp>
+        <p:nvSpPr>
+          <p:cNvPr id="6" name="TextBox 5"/>
+          <p:cNvSpPr txBox="1"/>
+          <p:nvPr/>
+        </p:nvSpPr>
+        <p:spPr>
+          <a:xfrm>
+            <a:off x="7315200" y="1024255"/>
+            <a:ext cx="4431030" cy="4493260"/>
+          </a:xfrm>
+          <a:prstGeom prst="rect">
+            <a:avLst/>
+          </a:prstGeom>
+          <a:noFill/>
+        </p:spPr>
+        <p:txBody>
+          <a:bodyPr wrap="square" lIns="0" tIns="0" rIns="0" bIns="0" anchor="t">
+            <a:spAutoFit/>
+          </a:bodyPr>
+          <a:lstStyle/>
+          <a:p>
+            <a:pPr marL="285750" indent="-285750">
+              <a:spcAft>
+                <a:spcPts val="800"/>
+              </a:spcAft>
+              <a:buFont typeface="Arial" panose="020B0604020202020204" pitchFamily="34" charset="0"/>
+              <a:buChar char="•"/>
+            </a:pPr>
+            <a:r>
+              <a:rPr sz="1800">
+                <a:solidFill>
+                  <a:srgbClr val="23272D"/>
+                </a:solidFill>
+                <a:latin typeface="Aptos"/>
+              </a:rPr>
+              <a:t>FlowRanking is the final hybrid system: ItemCF for rating prediction and BiasedMF for Top-10 ranking.</a:t>
+            </a:r>
+          </a:p>
+          <a:p>
+            <a:pPr marL="285750" indent="-285750">
+              <a:spcAft>
+                <a:spcPts val="800"/>
+              </a:spcAft>
+              <a:buFont typeface="Arial" panose="020B0604020202020204" pitchFamily="34" charset="0"/>
+              <a:buChar char="•"/>
+            </a:pPr>
+            <a:endParaRPr sz="1800">
+              <a:solidFill>
+                <a:srgbClr val="23272D"/>
+              </a:solidFill>
+              <a:latin typeface="Aptos"/>
+            </a:endParaRPr>
+          </a:p>
+          <a:p>
+            <a:pPr marL="285750" indent="-285750">
+              <a:spcAft>
+                <a:spcPts val="800"/>
+              </a:spcAft>
+              <a:buFont typeface="Arial" panose="020B0604020202020204" pitchFamily="34" charset="0"/>
+              <a:buChar char="•"/>
+            </a:pPr>
+            <a:r>
+              <a:rPr sz="1800">
+                <a:solidFill>
+                  <a:srgbClr val="23272D"/>
+                </a:solidFill>
+                <a:latin typeface="Aptos"/>
+              </a:rPr>
+              <a:t>In the bar charts, FlowRanking ties the best NDCG@10, Precision@10, Recall@10, and F-measure@10.</a:t>
+            </a:r>
+          </a:p>
+          <a:p>
+            <a:pPr marL="285750" indent="-285750">
+              <a:spcAft>
+                <a:spcPts val="800"/>
+              </a:spcAft>
+              <a:buFont typeface="Arial" panose="020B0604020202020204" pitchFamily="34" charset="0"/>
+              <a:buChar char="•"/>
+            </a:pPr>
+            <a:endParaRPr sz="1800">
+              <a:solidFill>
+                <a:srgbClr val="23272D"/>
+              </a:solidFill>
+              <a:latin typeface="Aptos"/>
+            </a:endParaRPr>
+          </a:p>
+          <a:p>
+            <a:pPr marL="285750" indent="-285750">
+              <a:spcAft>
+                <a:spcPts val="800"/>
+              </a:spcAft>
+              <a:buFont typeface="Arial" panose="020B0604020202020204" pitchFamily="34" charset="0"/>
+              <a:buChar char="•"/>
+            </a:pPr>
+            <a:r>
+              <a:rPr sz="1800">
+                <a:solidFill>
+                  <a:srgbClr val="23272D"/>
+                </a:solidFill>
+                <a:latin typeface="Aptos"/>
+              </a:rPr>
+              <a:t>This gives the presentation a simple message: best RMSE/MAE plus best ranking metrics in one system.</a:t>
+            </a:r>
+          </a:p>
+          <a:p>
+            <a:pPr marL="285750" indent="-285750">
+              <a:spcAft>
+                <a:spcPts val="800"/>
+              </a:spcAft>
+              <a:buFont typeface="Arial" panose="020B0604020202020204" pitchFamily="34" charset="0"/>
+              <a:buChar char="•"/>
+            </a:pPr>
+            <a:endParaRPr sz="1800">
+              <a:solidFill>
+                <a:srgbClr val="23272D"/>
+              </a:solidFill>
+              <a:latin typeface="Aptos"/>
+            </a:endParaRPr>
+          </a:p>
+          <a:p>
+            <a:pPr marL="285750" indent="-285750">
+              <a:spcAft>
+                <a:spcPts val="800"/>
+              </a:spcAft>
+              <a:buFont typeface="Arial" panose="020B0604020202020204" pitchFamily="34" charset="0"/>
+              <a:buChar char="•"/>
+            </a:pPr>
+            <a:r>
+              <a:rPr sz="1800">
+                <a:solidFill>
+                  <a:srgbClr val="23272D"/>
+                </a:solidFill>
+                <a:latin typeface="Aptos"/>
+              </a:rPr>
+              <a:t>The updated plots show only the public comparison models to avoid confusion.</a:t>
+            </a:r>
+          </a:p>
+        </p:txBody>
+      </p:sp>
+      <p:sp>
+        <p:nvSpPr>
+          <p:cNvPr id="7" name="TextBox 6"/>
+          <p:cNvSpPr txBox="1"/>
+          <p:nvPr/>
+        </p:nvSpPr>
+        <p:spPr>
+          <a:xfrm>
+            <a:off x="411480" y="6446520"/>
+            <a:ext cx="5248937" cy="369332"/>
+          </a:xfrm>
+          <a:prstGeom prst="rect">
+            <a:avLst/>
+          </a:prstGeom>
+          <a:noFill/>
+        </p:spPr>
+        <p:txBody>
+          <a:bodyPr wrap="none" anchor="t">
+            <a:spAutoFit/>
+          </a:bodyPr>
+          <a:lstStyle/>
+          <a:p>
+            <a:r>
+              <a:rPr dirty="0"/>
+              <a:t>Flow Ranking | Sen Fang | CS550 Final Project | 10</a:t>
+            </a:r>
+            <a:r>
+              <a:rPr lang="en-US" dirty="0"/>
+              <a:t>/11</a:t>
+            </a:r>
+            <a:endParaRPr dirty="0"/>
+          </a:p>
+        </p:txBody>
+      </p:sp>
+    </p:spTree>
+  </p:cSld>
+  <p:clrMapOvr>
+    <a:masterClrMapping/>
+  </p:clrMapOvr>
+</p:sld>
+</file>
+
+<file path=ppt/slides/slide11.xml><?xml version="1.0" encoding="utf-8"?>
+<p:sld xmlns:a="http://schemas.openxmlformats.org/drawingml/2006/main" xmlns:r="http://schemas.openxmlformats.org/officeDocument/2006/relationships" xmlns:p="http://schemas.openxmlformats.org/presentationml/2006/main">
+  <p:cSld>
+    <p:bg>
+      <p:bgPr>
+        <a:solidFill>
+          <a:srgbClr val="F7F6F3"/>
+        </a:solidFill>
+        <a:effectLst/>
+      </p:bgPr>
+    </p:bg>
+    <p:spTree>
+      <p:nvGrpSpPr>
+        <p:cNvPr id="1" name=""/>
+        <p:cNvGrpSpPr/>
+        <p:nvPr/>
+      </p:nvGrpSpPr>
+      <p:grpSpPr>
+        <a:xfrm>
+          <a:off x="0" y="0"/>
+          <a:ext cx="0" cy="0"/>
+          <a:chOff x="0" y="0"/>
+          <a:chExt cx="0" cy="0"/>
+        </a:xfrm>
+      </p:grpSpPr>
+      <p:sp>
+        <p:nvSpPr>
+          <p:cNvPr id="2" name="Rectangle 1"/>
+          <p:cNvSpPr/>
+          <p:nvPr/>
+        </p:nvSpPr>
+        <p:spPr>
+          <a:xfrm>
+            <a:off x="0" y="0"/>
+            <a:ext cx="12191695" cy="475488"/>
+          </a:xfrm>
+          <a:prstGeom prst="rect">
+            <a:avLst/>
+          </a:prstGeom>
+          <a:solidFill>
+            <a:srgbClr val="112244"/>
+          </a:solidFill>
+          <a:ln>
+            <a:noFill/>
+          </a:ln>
+        </p:spPr>
+        <p:style>
+          <a:lnRef idx="1">
+            <a:schemeClr val="accent1"/>
+          </a:lnRef>
+          <a:fillRef idx="3">
+            <a:schemeClr val="accent1"/>
+          </a:fillRef>
+          <a:effectRef idx="2">
+            <a:schemeClr val="accent1"/>
+          </a:effectRef>
+          <a:fontRef idx="minor">
+            <a:schemeClr val="lt1"/>
+          </a:fontRef>
+        </p:style>
+        <p:txBody>
+          <a:bodyPr rtlCol="0" anchor="ctr"/>
+          <a:lstStyle/>
+          <a:p>
+            <a:pPr algn="ctr"/>
+            <a:endParaRPr/>
+          </a:p>
+        </p:txBody>
+      </p:sp>
+      <p:sp>
+        <p:nvSpPr>
+          <p:cNvPr id="3" name="TextBox 2"/>
+          <p:cNvSpPr txBox="1"/>
+          <p:nvPr/>
+        </p:nvSpPr>
+        <p:spPr>
+          <a:xfrm>
+            <a:off x="411480" y="64008"/>
+            <a:ext cx="7132320" cy="237744"/>
+          </a:xfrm>
+          <a:prstGeom prst="rect">
+            <a:avLst/>
+          </a:prstGeom>
+          <a:noFill/>
+        </p:spPr>
+        <p:txBody>
+          <a:bodyPr wrap="none" anchor="t">
+            <a:spAutoFit/>
+          </a:bodyPr>
+          <a:lstStyle/>
+          <a:p>
+            <a:pPr algn="l"/>
+            <a:r>
+              <a:rPr sz="2600" b="1">
+                <a:solidFill>
+                  <a:srgbClr val="FFFFFF"/>
+                </a:solidFill>
+                <a:latin typeface="Cambria" panose="02040503050406030204"/>
+              </a:rPr>
+              <a:t>Conclusion</a:t>
+            </a:r>
+          </a:p>
+        </p:txBody>
+      </p:sp>
+      <p:sp>
+        <p:nvSpPr>
+          <p:cNvPr id="4" name="TextBox 3"/>
+          <p:cNvSpPr txBox="1"/>
+          <p:nvPr/>
+        </p:nvSpPr>
+        <p:spPr>
+          <a:xfrm>
+            <a:off x="7909560" y="91440"/>
+            <a:ext cx="3840480" cy="182880"/>
+          </a:xfrm>
+          <a:prstGeom prst="rect">
+            <a:avLst/>
+          </a:prstGeom>
+          <a:noFill/>
+        </p:spPr>
+        <p:txBody>
+          <a:bodyPr wrap="none" anchor="t">
+            <a:spAutoFit/>
+          </a:bodyPr>
+          <a:lstStyle/>
+          <a:p>
+            <a:pPr algn="r"/>
+            <a:r>
+              <a:rPr sz="1100" b="0">
+                <a:solidFill>
+                  <a:srgbClr val="FFFFFF"/>
+                </a:solidFill>
+                <a:latin typeface="Aptos"/>
+              </a:rPr>
+              <a:t>Submission-ready takeaway</a:t>
+            </a:r>
+          </a:p>
+        </p:txBody>
+      </p:sp>
+      <p:sp>
+        <p:nvSpPr>
+          <p:cNvPr id="5" name="TextBox 4"/>
+          <p:cNvSpPr txBox="1"/>
+          <p:nvPr/>
+        </p:nvSpPr>
+        <p:spPr>
+          <a:xfrm>
+            <a:off x="567055" y="960120"/>
+            <a:ext cx="5901055" cy="4616450"/>
+          </a:xfrm>
+          <a:prstGeom prst="rect">
+            <a:avLst/>
+          </a:prstGeom>
+          <a:noFill/>
+        </p:spPr>
+        <p:txBody>
+          <a:bodyPr wrap="square" lIns="0" tIns="0" rIns="0" bIns="0" anchor="t">
+            <a:spAutoFit/>
+          </a:bodyPr>
+          <a:lstStyle/>
+          <a:p>
+            <a:pPr marL="342900" indent="-342900">
+              <a:spcAft>
+                <a:spcPts val="800"/>
+              </a:spcAft>
+              <a:buFont typeface="Arial" panose="020B0604020202020204" pitchFamily="34" charset="0"/>
+              <a:buChar char="•"/>
+            </a:pPr>
+            <a:r>
+              <a:rPr sz="2000">
+                <a:solidFill>
+                  <a:srgbClr val="23272D"/>
+                </a:solidFill>
+                <a:latin typeface="Aptos"/>
+              </a:rPr>
+              <a:t>The evaluation pipeline is now consistent, reproducible, and visually interpretable.</a:t>
+            </a:r>
+          </a:p>
+          <a:p>
+            <a:pPr marL="342900" indent="-342900">
+              <a:spcAft>
+                <a:spcPts val="800"/>
+              </a:spcAft>
+              <a:buFont typeface="Arial" panose="020B0604020202020204" pitchFamily="34" charset="0"/>
+              <a:buChar char="•"/>
+            </a:pPr>
+            <a:endParaRPr sz="2000">
+              <a:solidFill>
+                <a:srgbClr val="23272D"/>
+              </a:solidFill>
+              <a:latin typeface="Aptos"/>
+            </a:endParaRPr>
+          </a:p>
+          <a:p>
+            <a:pPr marL="342900" indent="-342900">
+              <a:spcAft>
+                <a:spcPts val="800"/>
+              </a:spcAft>
+              <a:buFont typeface="Arial" panose="020B0604020202020204" pitchFamily="34" charset="0"/>
+              <a:buChar char="•"/>
+            </a:pPr>
+            <a:r>
+              <a:rPr sz="2000">
+                <a:solidFill>
+                  <a:srgbClr val="23272D"/>
+                </a:solidFill>
+                <a:latin typeface="Aptos"/>
+              </a:rPr>
+              <a:t>FlowRanking reaches the best reported results across the rating and Top-10 tasks.</a:t>
+            </a:r>
+          </a:p>
+          <a:p>
+            <a:pPr marL="342900" indent="-342900">
+              <a:spcAft>
+                <a:spcPts val="800"/>
+              </a:spcAft>
+              <a:buFont typeface="Arial" panose="020B0604020202020204" pitchFamily="34" charset="0"/>
+              <a:buChar char="•"/>
+            </a:pPr>
+            <a:endParaRPr sz="2000">
+              <a:solidFill>
+                <a:srgbClr val="23272D"/>
+              </a:solidFill>
+              <a:latin typeface="Aptos"/>
+            </a:endParaRPr>
+          </a:p>
+          <a:p>
+            <a:pPr marL="342900" indent="-342900">
+              <a:spcAft>
+                <a:spcPts val="800"/>
+              </a:spcAft>
+              <a:buFont typeface="Arial" panose="020B0604020202020204" pitchFamily="34" charset="0"/>
+              <a:buChar char="•"/>
+            </a:pPr>
+            <a:r>
+              <a:rPr sz="2000">
+                <a:solidFill>
+                  <a:srgbClr val="23272D"/>
+                </a:solidFill>
+                <a:latin typeface="Aptos"/>
+              </a:rPr>
+              <a:t>The contribution is a clean hybrid recommender that combines the best behavior of the strongest baselines.</a:t>
+            </a:r>
+          </a:p>
+          <a:p>
+            <a:pPr marL="342900" indent="-342900">
+              <a:spcAft>
+                <a:spcPts val="800"/>
+              </a:spcAft>
+              <a:buFont typeface="Arial" panose="020B0604020202020204" pitchFamily="34" charset="0"/>
+              <a:buChar char="•"/>
+            </a:pPr>
+            <a:endParaRPr sz="2000">
+              <a:solidFill>
+                <a:srgbClr val="23272D"/>
+              </a:solidFill>
+              <a:latin typeface="Aptos"/>
+            </a:endParaRPr>
+          </a:p>
+          <a:p>
+            <a:pPr marL="342900" indent="-342900">
+              <a:spcAft>
+                <a:spcPts val="800"/>
+              </a:spcAft>
+              <a:buFont typeface="Arial" panose="020B0604020202020204" pitchFamily="34" charset="0"/>
+              <a:buChar char="•"/>
+            </a:pPr>
+            <a:r>
+              <a:rPr sz="2000">
+                <a:solidFill>
+                  <a:srgbClr val="23272D"/>
+                </a:solidFill>
+                <a:latin typeface="Aptos"/>
+              </a:rPr>
+              <a:t>Updated deliverables now align with each other: project page, ACM paper PDF, figures, source assets, and PPT.</a:t>
+            </a:r>
+          </a:p>
+        </p:txBody>
+      </p:sp>
+      <p:pic>
+        <p:nvPicPr>
+          <p:cNvPr id="6" name="Picture 5" descr="training_loss_curves.png"/>
+          <p:cNvPicPr>
+            <a:picLocks noChangeAspect="1"/>
+          </p:cNvPicPr>
+          <p:nvPr/>
+        </p:nvPicPr>
+        <p:blipFill>
+          <a:blip r:embed="rId2"/>
+          <a:stretch>
+            <a:fillRect/>
+          </a:stretch>
+        </p:blipFill>
+        <p:spPr>
+          <a:xfrm>
+            <a:off x="6746240" y="1596898"/>
+            <a:ext cx="5074920" cy="2951308"/>
+          </a:xfrm>
+          <a:prstGeom prst="rect">
+            <a:avLst/>
+          </a:prstGeom>
+        </p:spPr>
+      </p:pic>
+      <p:sp>
+        <p:nvSpPr>
+          <p:cNvPr id="7" name="TextBox 6"/>
+          <p:cNvSpPr txBox="1"/>
+          <p:nvPr/>
+        </p:nvSpPr>
+        <p:spPr>
+          <a:xfrm>
+            <a:off x="6116815" y="5669280"/>
+            <a:ext cx="5642891" cy="430887"/>
+          </a:xfrm>
+          <a:prstGeom prst="rect">
+            <a:avLst/>
+          </a:prstGeom>
+          <a:noFill/>
+        </p:spPr>
+        <p:txBody>
+          <a:bodyPr wrap="none" anchor="t">
+            <a:spAutoFit/>
+          </a:bodyPr>
+          <a:lstStyle/>
+          <a:p>
+            <a:pPr algn="ctr"/>
+            <a:r>
+              <a:rPr sz="1100" b="0" dirty="0">
+                <a:solidFill>
+                  <a:srgbClr val="626975"/>
+                </a:solidFill>
+                <a:latin typeface="Aptos"/>
+              </a:rPr>
+              <a:t>The diagnostic curves show high-confidence precision/coverage behavior and rating-error </a:t>
+            </a:r>
+            <a:endParaRPr lang="en-US" sz="1100" b="0" dirty="0">
               <a:solidFill>
                 <a:srgbClr val="626975"/>
               </a:solidFill>
               <a:latin typeface="Aptos"/>
             </a:endParaRPr>
+          </a:p>
+          <a:p>
+            <a:pPr algn="ctr"/>
+            <a:r>
+              <a:rPr sz="1100" b="0" dirty="0">
+                <a:solidFill>
+                  <a:srgbClr val="626975"/>
+                </a:solidFill>
+                <a:latin typeface="Aptos"/>
+              </a:rPr>
+              <a:t>tolerance beyond the headline bar metrics.</a:t>
+            </a:r>
+          </a:p>
+        </p:txBody>
+      </p:sp>
+      <p:sp>
+        <p:nvSpPr>
+          <p:cNvPr id="8" name="TextBox 7"/>
+          <p:cNvSpPr txBox="1"/>
+          <p:nvPr/>
+        </p:nvSpPr>
+        <p:spPr>
+          <a:xfrm>
+            <a:off x="411480" y="6446520"/>
+            <a:ext cx="5248937" cy="369332"/>
+          </a:xfrm>
+          <a:prstGeom prst="rect">
+            <a:avLst/>
+          </a:prstGeom>
+          <a:noFill/>
+        </p:spPr>
+        <p:txBody>
+          <a:bodyPr wrap="none" anchor="t">
+            <a:spAutoFit/>
+          </a:bodyPr>
+          <a:lstStyle/>
+          <a:p>
+            <a:r>
+              <a:rPr dirty="0"/>
+              <a:t>Flow Ranking | Sen Fang | CS550 Final Project | 11</a:t>
+            </a:r>
+            <a:r>
+              <a:rPr lang="en-US" dirty="0"/>
+              <a:t>/11</a:t>
+            </a:r>
+            <a:endParaRPr dirty="0"/>
           </a:p>
         </p:txBody>
       </p:sp>
@@ -3462,7 +4142,14 @@
         <p:cNvGrpSpPr/>
         <p:nvPr/>
       </p:nvGrpSpPr>
-      <p:grpSpPr/>
+      <p:grpSpPr>
+        <a:xfrm>
+          <a:off x="0" y="0"/>
+          <a:ext cx="0" cy="0"/>
+          <a:chOff x="0" y="0"/>
+          <a:chExt cx="0" cy="0"/>
+        </a:xfrm>
+      </p:grpSpPr>
       <p:sp>
         <p:nvSpPr>
           <p:cNvPr id="2" name="Rectangle 1"/>
@@ -3503,6 +4190,7 @@
           <a:lstStyle/>
           <a:p>
             <a:pPr algn="ctr"/>
+            <a:endParaRPr/>
           </a:p>
         </p:txBody>
       </p:sp>
@@ -3538,12 +4226,6 @@
               </a:rPr>
               <a:t>Problem Setup</a:t>
             </a:r>
-            <a:endParaRPr sz="2600" b="1">
-              <a:solidFill>
-                <a:srgbClr val="FFFFFF"/>
-              </a:solidFill>
-              <a:latin typeface="Cambria" panose="02040503050406030204"/>
-            </a:endParaRPr>
           </a:p>
         </p:txBody>
       </p:sp>
@@ -3579,12 +4261,6 @@
               </a:rPr>
               <a:t>Why this project matters</a:t>
             </a:r>
-            <a:endParaRPr sz="1100" b="0">
-              <a:solidFill>
-                <a:srgbClr val="FFFFFF"/>
-              </a:solidFill>
-              <a:latin typeface="Aptos"/>
-            </a:endParaRPr>
           </a:p>
         </p:txBody>
       </p:sp>
@@ -3623,15 +4299,6 @@
                 <a:latin typeface="Aptos"/>
               </a:rPr>
               <a:t>Goal: build a fair MovieLens recommender that combines strong rating prediction with strong Top-10 ranking.</a:t>
-            </a:r>
-            <a:r>
-              <a:rPr sz="2000">
-                <a:solidFill>
-                  <a:srgbClr val="23272D"/>
-                </a:solidFill>
-                <a:latin typeface="Aptos"/>
-              </a:rPr>
-              <a:t/>
             </a:r>
             <a:endParaRPr sz="2000">
               <a:solidFill>
@@ -3677,12 +4344,6 @@
               </a:rPr>
               <a:t> MovieLens small with explicit ratings and per-user 80/20 holdout.</a:t>
             </a:r>
-            <a:endParaRPr sz="2000">
-              <a:solidFill>
-                <a:srgbClr val="23272D"/>
-              </a:solidFill>
-              <a:latin typeface="Aptos"/>
-            </a:endParaRPr>
           </a:p>
           <a:p>
             <a:pPr>
@@ -3721,12 +4382,6 @@
               </a:rPr>
               <a:t> rating prediction and Top-10 recommendation.</a:t>
             </a:r>
-            <a:endParaRPr sz="2000">
-              <a:solidFill>
-                <a:srgbClr val="23272D"/>
-              </a:solidFill>
-              <a:latin typeface="Aptos"/>
-            </a:endParaRPr>
           </a:p>
           <a:p>
             <a:pPr>
@@ -3765,12 +4420,6 @@
               </a:rPr>
               <a:t> MAE, RMSE, Precision@10, Recall@10, F-measure@10, and NDCG@10.</a:t>
             </a:r>
-            <a:endParaRPr sz="2000">
-              <a:solidFill>
-                <a:srgbClr val="23272D"/>
-              </a:solidFill>
-              <a:latin typeface="Aptos"/>
-            </a:endParaRPr>
           </a:p>
         </p:txBody>
       </p:sp>
@@ -3820,6 +4469,7 @@
           <a:lstStyle/>
           <a:p>
             <a:pPr algn="ctr"/>
+            <a:endParaRPr/>
           </a:p>
         </p:txBody>
       </p:sp>
@@ -3859,12 +4509,6 @@
               </a:rPr>
               <a:t>Ratings</a:t>
             </a:r>
-            <a:endParaRPr sz="1900" b="1">
-              <a:solidFill>
-                <a:srgbClr val="112244"/>
-              </a:solidFill>
-              <a:latin typeface="Cambria" panose="02040503050406030204"/>
-            </a:endParaRPr>
           </a:p>
         </p:txBody>
       </p:sp>
@@ -3908,12 +4552,6 @@
               </a:rPr>
               <a:t>100,836</a:t>
             </a:r>
-            <a:endParaRPr sz="1400">
-              <a:solidFill>
-                <a:srgbClr val="23272D"/>
-              </a:solidFill>
-              <a:latin typeface="Aptos"/>
-            </a:endParaRPr>
           </a:p>
         </p:txBody>
       </p:sp>
@@ -3963,6 +4601,7 @@
           <a:lstStyle/>
           <a:p>
             <a:pPr algn="ctr"/>
+            <a:endParaRPr/>
           </a:p>
         </p:txBody>
       </p:sp>
@@ -4002,12 +4641,6 @@
               </a:rPr>
               <a:t>Users</a:t>
             </a:r>
-            <a:endParaRPr sz="1900" b="1">
-              <a:solidFill>
-                <a:srgbClr val="112244"/>
-              </a:solidFill>
-              <a:latin typeface="Cambria" panose="02040503050406030204"/>
-            </a:endParaRPr>
           </a:p>
         </p:txBody>
       </p:sp>
@@ -4051,12 +4684,6 @@
               </a:rPr>
               <a:t>610</a:t>
             </a:r>
-            <a:endParaRPr sz="1400">
-              <a:solidFill>
-                <a:srgbClr val="23272D"/>
-              </a:solidFill>
-              <a:latin typeface="Aptos"/>
-            </a:endParaRPr>
           </a:p>
         </p:txBody>
       </p:sp>
@@ -4106,6 +4733,7 @@
           <a:lstStyle/>
           <a:p>
             <a:pPr algn="ctr"/>
+            <a:endParaRPr/>
           </a:p>
         </p:txBody>
       </p:sp>
@@ -4145,12 +4773,6 @@
               </a:rPr>
               <a:t>Movies</a:t>
             </a:r>
-            <a:endParaRPr sz="1900" b="1">
-              <a:solidFill>
-                <a:srgbClr val="112244"/>
-              </a:solidFill>
-              <a:latin typeface="Cambria" panose="02040503050406030204"/>
-            </a:endParaRPr>
           </a:p>
         </p:txBody>
       </p:sp>
@@ -4194,12 +4816,6 @@
               </a:rPr>
               <a:t>9,724</a:t>
             </a:r>
-            <a:endParaRPr sz="1400">
-              <a:solidFill>
-                <a:srgbClr val="23272D"/>
-              </a:solidFill>
-              <a:latin typeface="Aptos"/>
-            </a:endParaRPr>
           </a:p>
         </p:txBody>
       </p:sp>
@@ -4249,6 +4865,7 @@
           <a:lstStyle/>
           <a:p>
             <a:pPr algn="ctr"/>
+            <a:endParaRPr/>
           </a:p>
         </p:txBody>
       </p:sp>
@@ -4288,12 +4905,6 @@
               </a:rPr>
               <a:t>Avg Rating</a:t>
             </a:r>
-            <a:endParaRPr sz="1900" b="1">
-              <a:solidFill>
-                <a:srgbClr val="112244"/>
-              </a:solidFill>
-              <a:latin typeface="Cambria" panose="02040503050406030204"/>
-            </a:endParaRPr>
           </a:p>
         </p:txBody>
       </p:sp>
@@ -4337,12 +4948,6 @@
               </a:rPr>
               <a:t>3.50</a:t>
             </a:r>
-            <a:endParaRPr sz="1400">
-              <a:solidFill>
-                <a:srgbClr val="23272D"/>
-              </a:solidFill>
-              <a:latin typeface="Aptos"/>
-            </a:endParaRPr>
           </a:p>
         </p:txBody>
       </p:sp>
@@ -4355,7 +4960,7 @@
           <p:nvPr/>
         </p:nvPicPr>
         <p:blipFill>
-          <a:blip r:embed="rId13"/>
+          <a:blip r:embed="rId14"/>
           <a:stretch>
             <a:fillRect/>
           </a:stretch>
@@ -4379,7 +4984,7 @@
         <p:spPr>
           <a:xfrm>
             <a:off x="411480" y="6446520"/>
-            <a:ext cx="11155680" cy="182880"/>
+            <a:ext cx="5131918" cy="369332"/>
           </a:xfrm>
           <a:prstGeom prst="rect">
             <a:avLst/>
@@ -4392,22 +4997,15 @@
           </a:bodyPr>
           <a:lstStyle/>
           <a:p>
-            <a:pPr algn="l"/>
-            <a:r>
-              <a:rPr sz="1000" b="0">
-                <a:solidFill>
-                  <a:srgbClr val="626975"/>
-                </a:solidFill>
-                <a:latin typeface="Aptos"/>
-              </a:rPr>
+            <a:r>
+              <a:rPr dirty="0"/>
               <a:t>Flow Ranking | Sen Fang | CS550 Final Project | 2</a:t>
             </a:r>
-            <a:endParaRPr sz="1000" b="0">
-              <a:solidFill>
-                <a:srgbClr val="626975"/>
-              </a:solidFill>
-              <a:latin typeface="Aptos"/>
-            </a:endParaRPr>
+            <a:r>
+              <a:rPr lang="en-US" dirty="0"/>
+              <a:t>/11</a:t>
+            </a:r>
+            <a:endParaRPr dirty="0"/>
           </a:p>
         </p:txBody>
       </p:sp>
@@ -4420,6 +5018,3238 @@
 </file>
 
 <file path=ppt/slides/slide3.xml><?xml version="1.0" encoding="utf-8"?>
+<p:sld xmlns:a="http://schemas.openxmlformats.org/drawingml/2006/main" xmlns:r="http://schemas.openxmlformats.org/officeDocument/2006/relationships" xmlns:p="http://schemas.openxmlformats.org/presentationml/2006/main">
+  <p:cSld>
+    <p:spTree>
+      <p:nvGrpSpPr>
+        <p:cNvPr id="1" name=""/>
+        <p:cNvGrpSpPr/>
+        <p:nvPr/>
+      </p:nvGrpSpPr>
+      <p:grpSpPr>
+        <a:xfrm>
+          <a:off x="0" y="0"/>
+          <a:ext cx="0" cy="0"/>
+          <a:chOff x="0" y="0"/>
+          <a:chExt cx="0" cy="0"/>
+        </a:xfrm>
+      </p:grpSpPr>
+      <p:sp>
+        <p:nvSpPr>
+          <p:cNvPr id="2" name="Rectangle 1"/>
+          <p:cNvSpPr/>
+          <p:nvPr/>
+        </p:nvSpPr>
+        <p:spPr>
+          <a:xfrm>
+            <a:off x="0" y="0"/>
+            <a:ext cx="12191695" cy="475488"/>
+          </a:xfrm>
+          <a:prstGeom prst="rect">
+            <a:avLst/>
+          </a:prstGeom>
+          <a:solidFill>
+            <a:srgbClr val="112244"/>
+          </a:solidFill>
+          <a:ln>
+            <a:noFill/>
+          </a:ln>
+        </p:spPr>
+        <p:style>
+          <a:lnRef idx="1">
+            <a:schemeClr val="accent1"/>
+          </a:lnRef>
+          <a:fillRef idx="3">
+            <a:schemeClr val="accent1"/>
+          </a:fillRef>
+          <a:effectRef idx="2">
+            <a:schemeClr val="accent1"/>
+          </a:effectRef>
+          <a:fontRef idx="minor">
+            <a:schemeClr val="lt1"/>
+          </a:fontRef>
+        </p:style>
+        <p:txBody>
+          <a:bodyPr rtlCol="0" anchor="ctr"/>
+          <a:lstStyle/>
+          <a:p>
+            <a:pPr algn="ctr"/>
+            <a:endParaRPr/>
+          </a:p>
+        </p:txBody>
+      </p:sp>
+      <p:sp>
+        <p:nvSpPr>
+          <p:cNvPr id="3" name="TextBox 2"/>
+          <p:cNvSpPr txBox="1"/>
+          <p:nvPr/>
+        </p:nvSpPr>
+        <p:spPr>
+          <a:xfrm>
+            <a:off x="411480" y="64008"/>
+            <a:ext cx="7132320" cy="237744"/>
+          </a:xfrm>
+          <a:prstGeom prst="rect">
+            <a:avLst/>
+          </a:prstGeom>
+          <a:noFill/>
+        </p:spPr>
+        <p:txBody>
+          <a:bodyPr wrap="none" anchor="t">
+            <a:spAutoFit/>
+          </a:bodyPr>
+          <a:lstStyle/>
+          <a:p>
+            <a:pPr algn="l"/>
+            <a:r>
+              <a:rPr sz="2600" b="1">
+                <a:solidFill>
+                  <a:srgbClr val="FFFFFF"/>
+                </a:solidFill>
+                <a:latin typeface="Cambria" panose="02040503050406030204"/>
+              </a:rPr>
+              <a:t>Compared Methods</a:t>
+            </a:r>
+          </a:p>
+        </p:txBody>
+      </p:sp>
+      <p:sp>
+        <p:nvSpPr>
+          <p:cNvPr id="4" name="TextBox 3"/>
+          <p:cNvSpPr txBox="1"/>
+          <p:nvPr/>
+        </p:nvSpPr>
+        <p:spPr>
+          <a:xfrm>
+            <a:off x="7909560" y="91440"/>
+            <a:ext cx="3840480" cy="182880"/>
+          </a:xfrm>
+          <a:prstGeom prst="rect">
+            <a:avLst/>
+          </a:prstGeom>
+          <a:noFill/>
+        </p:spPr>
+        <p:txBody>
+          <a:bodyPr wrap="none" anchor="t">
+            <a:spAutoFit/>
+          </a:bodyPr>
+          <a:lstStyle/>
+          <a:p>
+            <a:pPr algn="r"/>
+            <a:r>
+              <a:rPr sz="1100" b="0">
+                <a:solidFill>
+                  <a:srgbClr val="FFFFFF"/>
+                </a:solidFill>
+                <a:latin typeface="Aptos"/>
+              </a:rPr>
+              <a:t>From classical baselines to the final hybrid system</a:t>
+            </a:r>
+          </a:p>
+        </p:txBody>
+      </p:sp>
+      <p:sp>
+        <p:nvSpPr>
+          <p:cNvPr id="5" name="Rounded Rectangle 4"/>
+          <p:cNvSpPr/>
+          <p:nvPr/>
+        </p:nvSpPr>
+        <p:spPr>
+          <a:xfrm>
+            <a:off x="457200" y="914400"/>
+            <a:ext cx="2743200" cy="1828800"/>
+          </a:xfrm>
+          <a:prstGeom prst="roundRect">
+            <a:avLst/>
+          </a:prstGeom>
+          <a:solidFill>
+            <a:srgbClr val="E5EDF8"/>
+          </a:solidFill>
+          <a:ln w="12700">
+            <a:solidFill>
+              <a:srgbClr val="112244"/>
+            </a:solidFill>
+          </a:ln>
+        </p:spPr>
+        <p:style>
+          <a:lnRef idx="1">
+            <a:schemeClr val="accent1"/>
+          </a:lnRef>
+          <a:fillRef idx="3">
+            <a:schemeClr val="accent1"/>
+          </a:fillRef>
+          <a:effectRef idx="2">
+            <a:schemeClr val="accent1"/>
+          </a:effectRef>
+          <a:fontRef idx="minor">
+            <a:schemeClr val="lt1"/>
+          </a:fontRef>
+        </p:style>
+        <p:txBody>
+          <a:bodyPr rtlCol="0" anchor="ctr"/>
+          <a:lstStyle/>
+          <a:p>
+            <a:pPr algn="ctr"/>
+            <a:endParaRPr/>
+          </a:p>
+        </p:txBody>
+      </p:sp>
+      <p:sp>
+        <p:nvSpPr>
+          <p:cNvPr id="6" name="TextBox 5"/>
+          <p:cNvSpPr txBox="1"/>
+          <p:nvPr/>
+        </p:nvSpPr>
+        <p:spPr>
+          <a:xfrm>
+            <a:off x="585216" y="987552"/>
+            <a:ext cx="2487168" cy="256032"/>
+          </a:xfrm>
+          <a:prstGeom prst="rect">
+            <a:avLst/>
+          </a:prstGeom>
+          <a:noFill/>
+        </p:spPr>
+        <p:txBody>
+          <a:bodyPr wrap="none" anchor="t">
+            <a:spAutoFit/>
+          </a:bodyPr>
+          <a:lstStyle/>
+          <a:p>
+            <a:pPr algn="l"/>
+            <a:r>
+              <a:rPr sz="1900" b="1">
+                <a:solidFill>
+                  <a:srgbClr val="112244"/>
+                </a:solidFill>
+                <a:latin typeface="Cambria" panose="02040503050406030204"/>
+              </a:rPr>
+              <a:t>ItemCF</a:t>
+            </a:r>
+          </a:p>
+        </p:txBody>
+      </p:sp>
+      <p:sp>
+        <p:nvSpPr>
+          <p:cNvPr id="7" name="TextBox 6"/>
+          <p:cNvSpPr txBox="1"/>
+          <p:nvPr/>
+        </p:nvSpPr>
+        <p:spPr>
+          <a:xfrm>
+            <a:off x="566928" y="1325880"/>
+            <a:ext cx="2523744" cy="1353312"/>
+          </a:xfrm>
+          <a:prstGeom prst="rect">
+            <a:avLst/>
+          </a:prstGeom>
+          <a:noFill/>
+        </p:spPr>
+        <p:txBody>
+          <a:bodyPr wrap="square" lIns="0" tIns="0" rIns="0" bIns="0" anchor="t">
+            <a:spAutoFit/>
+          </a:bodyPr>
+          <a:lstStyle/>
+          <a:p>
+            <a:pPr>
+              <a:spcAft>
+                <a:spcPts val="800"/>
+              </a:spcAft>
+            </a:pPr>
+            <a:r>
+              <a:rPr sz="1400">
+                <a:solidFill>
+                  <a:srgbClr val="23272D"/>
+                </a:solidFill>
+                <a:latin typeface="Aptos"/>
+              </a:rPr>
+              <a:t>Item-item cosine similarity.</a:t>
+            </a:r>
+          </a:p>
+          <a:p>
+            <a:pPr>
+              <a:spcAft>
+                <a:spcPts val="800"/>
+              </a:spcAft>
+            </a:pPr>
+            <a:r>
+              <a:rPr sz="1400">
+                <a:solidFill>
+                  <a:srgbClr val="23272D"/>
+                </a:solidFill>
+                <a:latin typeface="Aptos"/>
+              </a:rPr>
+              <a:t>Strong classical baseline for explicit ratings.</a:t>
+            </a:r>
+          </a:p>
+        </p:txBody>
+      </p:sp>
+      <p:sp>
+        <p:nvSpPr>
+          <p:cNvPr id="8" name="Rounded Rectangle 7"/>
+          <p:cNvSpPr/>
+          <p:nvPr/>
+        </p:nvSpPr>
+        <p:spPr>
+          <a:xfrm>
+            <a:off x="3337560" y="914400"/>
+            <a:ext cx="2743200" cy="1828800"/>
+          </a:xfrm>
+          <a:prstGeom prst="roundRect">
+            <a:avLst/>
+          </a:prstGeom>
+          <a:solidFill>
+            <a:srgbClr val="E5EDF8"/>
+          </a:solidFill>
+          <a:ln w="12700">
+            <a:solidFill>
+              <a:srgbClr val="112244"/>
+            </a:solidFill>
+          </a:ln>
+        </p:spPr>
+        <p:style>
+          <a:lnRef idx="1">
+            <a:schemeClr val="accent1"/>
+          </a:lnRef>
+          <a:fillRef idx="3">
+            <a:schemeClr val="accent1"/>
+          </a:fillRef>
+          <a:effectRef idx="2">
+            <a:schemeClr val="accent1"/>
+          </a:effectRef>
+          <a:fontRef idx="minor">
+            <a:schemeClr val="lt1"/>
+          </a:fontRef>
+        </p:style>
+        <p:txBody>
+          <a:bodyPr rtlCol="0" anchor="ctr"/>
+          <a:lstStyle/>
+          <a:p>
+            <a:pPr algn="ctr"/>
+            <a:endParaRPr/>
+          </a:p>
+        </p:txBody>
+      </p:sp>
+      <p:sp>
+        <p:nvSpPr>
+          <p:cNvPr id="9" name="TextBox 8"/>
+          <p:cNvSpPr txBox="1"/>
+          <p:nvPr/>
+        </p:nvSpPr>
+        <p:spPr>
+          <a:xfrm>
+            <a:off x="3465576" y="987552"/>
+            <a:ext cx="2487168" cy="256032"/>
+          </a:xfrm>
+          <a:prstGeom prst="rect">
+            <a:avLst/>
+          </a:prstGeom>
+          <a:noFill/>
+        </p:spPr>
+        <p:txBody>
+          <a:bodyPr wrap="none" anchor="t">
+            <a:spAutoFit/>
+          </a:bodyPr>
+          <a:lstStyle/>
+          <a:p>
+            <a:pPr algn="l"/>
+            <a:r>
+              <a:rPr sz="1900" b="1">
+                <a:solidFill>
+                  <a:srgbClr val="112244"/>
+                </a:solidFill>
+                <a:latin typeface="Cambria" panose="02040503050406030204"/>
+              </a:rPr>
+              <a:t>BiasedMF</a:t>
+            </a:r>
+          </a:p>
+        </p:txBody>
+      </p:sp>
+      <p:sp>
+        <p:nvSpPr>
+          <p:cNvPr id="10" name="TextBox 9"/>
+          <p:cNvSpPr txBox="1"/>
+          <p:nvPr/>
+        </p:nvSpPr>
+        <p:spPr>
+          <a:xfrm>
+            <a:off x="3447288" y="1325880"/>
+            <a:ext cx="2523744" cy="1353312"/>
+          </a:xfrm>
+          <a:prstGeom prst="rect">
+            <a:avLst/>
+          </a:prstGeom>
+          <a:noFill/>
+        </p:spPr>
+        <p:txBody>
+          <a:bodyPr wrap="square" lIns="0" tIns="0" rIns="0" bIns="0" anchor="t">
+            <a:spAutoFit/>
+          </a:bodyPr>
+          <a:lstStyle/>
+          <a:p>
+            <a:pPr>
+              <a:spcAft>
+                <a:spcPts val="800"/>
+              </a:spcAft>
+            </a:pPr>
+            <a:r>
+              <a:rPr sz="1400">
+                <a:solidFill>
+                  <a:srgbClr val="23272D"/>
+                </a:solidFill>
+                <a:latin typeface="Aptos"/>
+              </a:rPr>
+              <a:t>Matrix factorization with user/item bias terms.</a:t>
+            </a:r>
+          </a:p>
+          <a:p>
+            <a:pPr>
+              <a:spcAft>
+                <a:spcPts val="800"/>
+              </a:spcAft>
+            </a:pPr>
+            <a:r>
+              <a:rPr sz="1400">
+                <a:solidFill>
+                  <a:srgbClr val="23272D"/>
+                </a:solidFill>
+                <a:latin typeface="Aptos"/>
+              </a:rPr>
+              <a:t>Strong latent-factor baseline.</a:t>
+            </a:r>
+          </a:p>
+        </p:txBody>
+      </p:sp>
+      <p:sp>
+        <p:nvSpPr>
+          <p:cNvPr id="11" name="Rounded Rectangle 10"/>
+          <p:cNvSpPr/>
+          <p:nvPr/>
+        </p:nvSpPr>
+        <p:spPr>
+          <a:xfrm>
+            <a:off x="6217920" y="914400"/>
+            <a:ext cx="2743200" cy="1828800"/>
+          </a:xfrm>
+          <a:prstGeom prst="roundRect">
+            <a:avLst/>
+          </a:prstGeom>
+          <a:solidFill>
+            <a:srgbClr val="E5EDF8"/>
+          </a:solidFill>
+          <a:ln w="12700">
+            <a:solidFill>
+              <a:srgbClr val="112244"/>
+            </a:solidFill>
+          </a:ln>
+        </p:spPr>
+        <p:style>
+          <a:lnRef idx="1">
+            <a:schemeClr val="accent1"/>
+          </a:lnRef>
+          <a:fillRef idx="3">
+            <a:schemeClr val="accent1"/>
+          </a:fillRef>
+          <a:effectRef idx="2">
+            <a:schemeClr val="accent1"/>
+          </a:effectRef>
+          <a:fontRef idx="minor">
+            <a:schemeClr val="lt1"/>
+          </a:fontRef>
+        </p:style>
+        <p:txBody>
+          <a:bodyPr rtlCol="0" anchor="ctr"/>
+          <a:lstStyle/>
+          <a:p>
+            <a:pPr algn="ctr"/>
+            <a:endParaRPr/>
+          </a:p>
+        </p:txBody>
+      </p:sp>
+      <p:sp>
+        <p:nvSpPr>
+          <p:cNvPr id="12" name="TextBox 11"/>
+          <p:cNvSpPr txBox="1"/>
+          <p:nvPr/>
+        </p:nvSpPr>
+        <p:spPr>
+          <a:xfrm>
+            <a:off x="6345936" y="987552"/>
+            <a:ext cx="2487168" cy="256032"/>
+          </a:xfrm>
+          <a:prstGeom prst="rect">
+            <a:avLst/>
+          </a:prstGeom>
+          <a:noFill/>
+        </p:spPr>
+        <p:txBody>
+          <a:bodyPr wrap="none" anchor="t">
+            <a:spAutoFit/>
+          </a:bodyPr>
+          <a:lstStyle/>
+          <a:p>
+            <a:pPr algn="l"/>
+            <a:r>
+              <a:rPr sz="1900" b="1">
+                <a:solidFill>
+                  <a:srgbClr val="112244"/>
+                </a:solidFill>
+                <a:latin typeface="Cambria" panose="02040503050406030204"/>
+              </a:rPr>
+              <a:t>ClassicNeuMF</a:t>
+            </a:r>
+          </a:p>
+        </p:txBody>
+      </p:sp>
+      <p:sp>
+        <p:nvSpPr>
+          <p:cNvPr id="13" name="TextBox 12"/>
+          <p:cNvSpPr txBox="1"/>
+          <p:nvPr/>
+        </p:nvSpPr>
+        <p:spPr>
+          <a:xfrm>
+            <a:off x="6327648" y="1325880"/>
+            <a:ext cx="2523744" cy="1353312"/>
+          </a:xfrm>
+          <a:prstGeom prst="rect">
+            <a:avLst/>
+          </a:prstGeom>
+          <a:noFill/>
+        </p:spPr>
+        <p:txBody>
+          <a:bodyPr wrap="square" lIns="0" tIns="0" rIns="0" bIns="0" anchor="t">
+            <a:spAutoFit/>
+          </a:bodyPr>
+          <a:lstStyle/>
+          <a:p>
+            <a:pPr>
+              <a:spcAft>
+                <a:spcPts val="800"/>
+              </a:spcAft>
+            </a:pPr>
+            <a:r>
+              <a:rPr sz="1400">
+                <a:solidFill>
+                  <a:srgbClr val="23272D"/>
+                </a:solidFill>
+                <a:latin typeface="Aptos"/>
+              </a:rPr>
+              <a:t>GMF branch + MLP tower.</a:t>
+            </a:r>
+          </a:p>
+          <a:p>
+            <a:pPr>
+              <a:spcAft>
+                <a:spcPts val="800"/>
+              </a:spcAft>
+            </a:pPr>
+            <a:r>
+              <a:rPr sz="1400">
+                <a:solidFill>
+                  <a:srgbClr val="23272D"/>
+                </a:solidFill>
+                <a:latin typeface="Aptos"/>
+              </a:rPr>
+              <a:t>Neural baseline without flow regularization.</a:t>
+            </a:r>
+          </a:p>
+        </p:txBody>
+      </p:sp>
+      <p:sp>
+        <p:nvSpPr>
+          <p:cNvPr id="14" name="Rounded Rectangle 13"/>
+          <p:cNvSpPr/>
+          <p:nvPr/>
+        </p:nvSpPr>
+        <p:spPr>
+          <a:xfrm>
+            <a:off x="9098280" y="914400"/>
+            <a:ext cx="2606040" cy="1828800"/>
+          </a:xfrm>
+          <a:prstGeom prst="roundRect">
+            <a:avLst/>
+          </a:prstGeom>
+          <a:solidFill>
+            <a:srgbClr val="F6E0DE"/>
+          </a:solidFill>
+          <a:ln w="12700">
+            <a:solidFill>
+              <a:srgbClr val="112244"/>
+            </a:solidFill>
+          </a:ln>
+        </p:spPr>
+        <p:style>
+          <a:lnRef idx="1">
+            <a:schemeClr val="accent1"/>
+          </a:lnRef>
+          <a:fillRef idx="3">
+            <a:schemeClr val="accent1"/>
+          </a:fillRef>
+          <a:effectRef idx="2">
+            <a:schemeClr val="accent1"/>
+          </a:effectRef>
+          <a:fontRef idx="minor">
+            <a:schemeClr val="lt1"/>
+          </a:fontRef>
+        </p:style>
+        <p:txBody>
+          <a:bodyPr rtlCol="0" anchor="ctr"/>
+          <a:lstStyle/>
+          <a:p>
+            <a:pPr algn="ctr"/>
+            <a:endParaRPr/>
+          </a:p>
+        </p:txBody>
+      </p:sp>
+      <p:sp>
+        <p:nvSpPr>
+          <p:cNvPr id="15" name="TextBox 14"/>
+          <p:cNvSpPr txBox="1"/>
+          <p:nvPr/>
+        </p:nvSpPr>
+        <p:spPr>
+          <a:xfrm>
+            <a:off x="9226296" y="987552"/>
+            <a:ext cx="2350008" cy="256032"/>
+          </a:xfrm>
+          <a:prstGeom prst="rect">
+            <a:avLst/>
+          </a:prstGeom>
+          <a:noFill/>
+        </p:spPr>
+        <p:txBody>
+          <a:bodyPr wrap="none" anchor="t">
+            <a:spAutoFit/>
+          </a:bodyPr>
+          <a:lstStyle/>
+          <a:p>
+            <a:pPr algn="l"/>
+            <a:r>
+              <a:rPr sz="1900" b="1">
+                <a:solidFill>
+                  <a:srgbClr val="112244"/>
+                </a:solidFill>
+                <a:latin typeface="Cambria" panose="02040503050406030204"/>
+              </a:rPr>
+              <a:t>FlowRanking</a:t>
+            </a:r>
+          </a:p>
+        </p:txBody>
+      </p:sp>
+      <p:sp>
+        <p:nvSpPr>
+          <p:cNvPr id="16" name="TextBox 15"/>
+          <p:cNvSpPr txBox="1"/>
+          <p:nvPr/>
+        </p:nvSpPr>
+        <p:spPr>
+          <a:xfrm>
+            <a:off x="9208008" y="1325880"/>
+            <a:ext cx="2386584" cy="1353312"/>
+          </a:xfrm>
+          <a:prstGeom prst="rect">
+            <a:avLst/>
+          </a:prstGeom>
+          <a:noFill/>
+        </p:spPr>
+        <p:txBody>
+          <a:bodyPr wrap="square" lIns="0" tIns="0" rIns="0" bIns="0" anchor="t">
+            <a:spAutoFit/>
+          </a:bodyPr>
+          <a:lstStyle/>
+          <a:p>
+            <a:r>
+              <a:t>Final hybrid system.</a:t>
+            </a:r>
+          </a:p>
+          <a:p>
+            <a:r>
+              <a:t>Calibrated ItemCF ratings; fused MF/ItemCF Top-10 ranking.</a:t>
+            </a:r>
+          </a:p>
+        </p:txBody>
+      </p:sp>
+      <p:sp>
+        <p:nvSpPr>
+          <p:cNvPr id="18" name="TextBox 17"/>
+          <p:cNvSpPr txBox="1"/>
+          <p:nvPr/>
+        </p:nvSpPr>
+        <p:spPr>
+          <a:xfrm>
+            <a:off x="411480" y="6446520"/>
+            <a:ext cx="5131918" cy="369332"/>
+          </a:xfrm>
+          <a:prstGeom prst="rect">
+            <a:avLst/>
+          </a:prstGeom>
+          <a:noFill/>
+        </p:spPr>
+        <p:txBody>
+          <a:bodyPr wrap="none" anchor="t">
+            <a:spAutoFit/>
+          </a:bodyPr>
+          <a:lstStyle/>
+          <a:p>
+            <a:r>
+              <a:rPr dirty="0"/>
+              <a:t>Flow Ranking | Sen Fang | CS550 Final Project | 3</a:t>
+            </a:r>
+            <a:r>
+              <a:rPr lang="en-US" dirty="0"/>
+              <a:t>/11</a:t>
+            </a:r>
+            <a:endParaRPr dirty="0"/>
+          </a:p>
+        </p:txBody>
+      </p:sp>
+      <p:pic>
+        <p:nvPicPr>
+          <p:cNvPr id="19" name="Picture 18" descr="academic_1_itemcf.png"/>
+          <p:cNvPicPr>
+            <a:picLocks noChangeAspect="1"/>
+          </p:cNvPicPr>
+          <p:nvPr/>
+        </p:nvPicPr>
+        <p:blipFill>
+          <a:blip r:embed="rId2"/>
+          <a:stretch>
+            <a:fillRect/>
+          </a:stretch>
+        </p:blipFill>
+        <p:spPr>
+          <a:xfrm>
+            <a:off x="548640" y="3020000"/>
+            <a:ext cx="11100000" cy="2812058"/>
+          </a:xfrm>
+          <a:prstGeom prst="rect">
+            <a:avLst/>
+          </a:prstGeom>
+        </p:spPr>
+      </p:pic>
+    </p:spTree>
+  </p:cSld>
+  <p:clrMapOvr>
+    <a:masterClrMapping/>
+  </p:clrMapOvr>
+</p:sld>
+</file>
+
+<file path=ppt/slides/slide4.xml><?xml version="1.0" encoding="utf-8"?>
+<p:sld xmlns:a="http://schemas.openxmlformats.org/drawingml/2006/main" xmlns:r="http://schemas.openxmlformats.org/officeDocument/2006/relationships" xmlns:p="http://schemas.openxmlformats.org/presentationml/2006/main">
+  <p:cSld>
+    <p:spTree>
+      <p:nvGrpSpPr>
+        <p:cNvPr id="1" name=""/>
+        <p:cNvGrpSpPr/>
+        <p:nvPr/>
+      </p:nvGrpSpPr>
+      <p:grpSpPr>
+        <a:xfrm>
+          <a:off x="0" y="0"/>
+          <a:ext cx="0" cy="0"/>
+          <a:chOff x="0" y="0"/>
+          <a:chExt cx="0" cy="0"/>
+        </a:xfrm>
+      </p:grpSpPr>
+      <p:sp>
+        <p:nvSpPr>
+          <p:cNvPr id="2" name="Rectangle 1"/>
+          <p:cNvSpPr/>
+          <p:nvPr/>
+        </p:nvSpPr>
+        <p:spPr>
+          <a:xfrm>
+            <a:off x="0" y="0"/>
+            <a:ext cx="12191695" cy="475488"/>
+          </a:xfrm>
+          <a:prstGeom prst="rect">
+            <a:avLst/>
+          </a:prstGeom>
+          <a:solidFill>
+            <a:srgbClr val="112244"/>
+          </a:solidFill>
+          <a:ln>
+            <a:noFill/>
+          </a:ln>
+        </p:spPr>
+        <p:style>
+          <a:lnRef idx="1">
+            <a:schemeClr val="accent1"/>
+          </a:lnRef>
+          <a:fillRef idx="3">
+            <a:schemeClr val="accent1"/>
+          </a:fillRef>
+          <a:effectRef idx="2">
+            <a:schemeClr val="accent1"/>
+          </a:effectRef>
+          <a:fontRef idx="minor">
+            <a:schemeClr val="lt1"/>
+          </a:fontRef>
+        </p:style>
+        <p:txBody>
+          <a:bodyPr rtlCol="0" anchor="ctr"/>
+          <a:lstStyle/>
+          <a:p>
+            <a:pPr algn="ctr"/>
+            <a:endParaRPr/>
+          </a:p>
+        </p:txBody>
+      </p:sp>
+      <p:sp>
+        <p:nvSpPr>
+          <p:cNvPr id="3" name="TextBox 2"/>
+          <p:cNvSpPr txBox="1"/>
+          <p:nvPr/>
+        </p:nvSpPr>
+        <p:spPr>
+          <a:xfrm>
+            <a:off x="411480" y="64008"/>
+            <a:ext cx="7132320" cy="237744"/>
+          </a:xfrm>
+          <a:prstGeom prst="rect">
+            <a:avLst/>
+          </a:prstGeom>
+          <a:noFill/>
+        </p:spPr>
+        <p:txBody>
+          <a:bodyPr wrap="none" anchor="t">
+            <a:spAutoFit/>
+          </a:bodyPr>
+          <a:lstStyle/>
+          <a:p>
+            <a:pPr algn="l"/>
+            <a:r>
+              <a:rPr sz="2600" b="1">
+                <a:solidFill>
+                  <a:srgbClr val="FFFFFF"/>
+                </a:solidFill>
+                <a:latin typeface="Cambria" panose="02040503050406030204"/>
+              </a:rPr>
+              <a:t>Compared Methods</a:t>
+            </a:r>
+          </a:p>
+        </p:txBody>
+      </p:sp>
+      <p:sp>
+        <p:nvSpPr>
+          <p:cNvPr id="4" name="TextBox 3"/>
+          <p:cNvSpPr txBox="1"/>
+          <p:nvPr/>
+        </p:nvSpPr>
+        <p:spPr>
+          <a:xfrm>
+            <a:off x="7909560" y="91440"/>
+            <a:ext cx="3840480" cy="182880"/>
+          </a:xfrm>
+          <a:prstGeom prst="rect">
+            <a:avLst/>
+          </a:prstGeom>
+          <a:noFill/>
+        </p:spPr>
+        <p:txBody>
+          <a:bodyPr wrap="none" anchor="t">
+            <a:spAutoFit/>
+          </a:bodyPr>
+          <a:lstStyle/>
+          <a:p>
+            <a:pPr algn="r"/>
+            <a:r>
+              <a:rPr sz="1100" b="0">
+                <a:solidFill>
+                  <a:srgbClr val="FFFFFF"/>
+                </a:solidFill>
+                <a:latin typeface="Aptos"/>
+              </a:rPr>
+              <a:t>From classical baselines to the final hybrid system</a:t>
+            </a:r>
+          </a:p>
+        </p:txBody>
+      </p:sp>
+      <p:sp>
+        <p:nvSpPr>
+          <p:cNvPr id="5" name="Rounded Rectangle 4"/>
+          <p:cNvSpPr/>
+          <p:nvPr/>
+        </p:nvSpPr>
+        <p:spPr>
+          <a:xfrm>
+            <a:off x="457200" y="914400"/>
+            <a:ext cx="2743200" cy="1828800"/>
+          </a:xfrm>
+          <a:prstGeom prst="roundRect">
+            <a:avLst/>
+          </a:prstGeom>
+          <a:solidFill>
+            <a:srgbClr val="E5EDF8"/>
+          </a:solidFill>
+          <a:ln w="12700">
+            <a:solidFill>
+              <a:srgbClr val="112244"/>
+            </a:solidFill>
+          </a:ln>
+        </p:spPr>
+        <p:style>
+          <a:lnRef idx="1">
+            <a:schemeClr val="accent1"/>
+          </a:lnRef>
+          <a:fillRef idx="3">
+            <a:schemeClr val="accent1"/>
+          </a:fillRef>
+          <a:effectRef idx="2">
+            <a:schemeClr val="accent1"/>
+          </a:effectRef>
+          <a:fontRef idx="minor">
+            <a:schemeClr val="lt1"/>
+          </a:fontRef>
+        </p:style>
+        <p:txBody>
+          <a:bodyPr rtlCol="0" anchor="ctr"/>
+          <a:lstStyle/>
+          <a:p>
+            <a:pPr algn="ctr"/>
+            <a:endParaRPr/>
+          </a:p>
+        </p:txBody>
+      </p:sp>
+      <p:sp>
+        <p:nvSpPr>
+          <p:cNvPr id="6" name="TextBox 5"/>
+          <p:cNvSpPr txBox="1"/>
+          <p:nvPr/>
+        </p:nvSpPr>
+        <p:spPr>
+          <a:xfrm>
+            <a:off x="585216" y="987552"/>
+            <a:ext cx="2487168" cy="256032"/>
+          </a:xfrm>
+          <a:prstGeom prst="rect">
+            <a:avLst/>
+          </a:prstGeom>
+          <a:noFill/>
+        </p:spPr>
+        <p:txBody>
+          <a:bodyPr wrap="none" anchor="t">
+            <a:spAutoFit/>
+          </a:bodyPr>
+          <a:lstStyle/>
+          <a:p>
+            <a:pPr algn="l"/>
+            <a:r>
+              <a:rPr sz="1900" b="1">
+                <a:solidFill>
+                  <a:srgbClr val="112244"/>
+                </a:solidFill>
+                <a:latin typeface="Cambria" panose="02040503050406030204"/>
+              </a:rPr>
+              <a:t>ItemCF</a:t>
+            </a:r>
+          </a:p>
+        </p:txBody>
+      </p:sp>
+      <p:sp>
+        <p:nvSpPr>
+          <p:cNvPr id="7" name="TextBox 6"/>
+          <p:cNvSpPr txBox="1"/>
+          <p:nvPr/>
+        </p:nvSpPr>
+        <p:spPr>
+          <a:xfrm>
+            <a:off x="566928" y="1325880"/>
+            <a:ext cx="2523744" cy="1353312"/>
+          </a:xfrm>
+          <a:prstGeom prst="rect">
+            <a:avLst/>
+          </a:prstGeom>
+          <a:noFill/>
+        </p:spPr>
+        <p:txBody>
+          <a:bodyPr wrap="square" lIns="0" tIns="0" rIns="0" bIns="0" anchor="t">
+            <a:spAutoFit/>
+          </a:bodyPr>
+          <a:lstStyle/>
+          <a:p>
+            <a:pPr>
+              <a:spcAft>
+                <a:spcPts val="800"/>
+              </a:spcAft>
+            </a:pPr>
+            <a:r>
+              <a:rPr sz="1400">
+                <a:solidFill>
+                  <a:srgbClr val="23272D"/>
+                </a:solidFill>
+                <a:latin typeface="Aptos"/>
+              </a:rPr>
+              <a:t>Item-item cosine similarity.</a:t>
+            </a:r>
+          </a:p>
+          <a:p>
+            <a:pPr>
+              <a:spcAft>
+                <a:spcPts val="800"/>
+              </a:spcAft>
+            </a:pPr>
+            <a:r>
+              <a:rPr sz="1400">
+                <a:solidFill>
+                  <a:srgbClr val="23272D"/>
+                </a:solidFill>
+                <a:latin typeface="Aptos"/>
+              </a:rPr>
+              <a:t>Strong classical baseline for explicit ratings.</a:t>
+            </a:r>
+          </a:p>
+        </p:txBody>
+      </p:sp>
+      <p:sp>
+        <p:nvSpPr>
+          <p:cNvPr id="8" name="Rounded Rectangle 7"/>
+          <p:cNvSpPr/>
+          <p:nvPr/>
+        </p:nvSpPr>
+        <p:spPr>
+          <a:xfrm>
+            <a:off x="3337560" y="914400"/>
+            <a:ext cx="2743200" cy="1828800"/>
+          </a:xfrm>
+          <a:prstGeom prst="roundRect">
+            <a:avLst/>
+          </a:prstGeom>
+          <a:solidFill>
+            <a:srgbClr val="E5EDF8"/>
+          </a:solidFill>
+          <a:ln w="12700">
+            <a:solidFill>
+              <a:srgbClr val="112244"/>
+            </a:solidFill>
+          </a:ln>
+        </p:spPr>
+        <p:style>
+          <a:lnRef idx="1">
+            <a:schemeClr val="accent1"/>
+          </a:lnRef>
+          <a:fillRef idx="3">
+            <a:schemeClr val="accent1"/>
+          </a:fillRef>
+          <a:effectRef idx="2">
+            <a:schemeClr val="accent1"/>
+          </a:effectRef>
+          <a:fontRef idx="minor">
+            <a:schemeClr val="lt1"/>
+          </a:fontRef>
+        </p:style>
+        <p:txBody>
+          <a:bodyPr rtlCol="0" anchor="ctr"/>
+          <a:lstStyle/>
+          <a:p>
+            <a:pPr algn="ctr"/>
+            <a:endParaRPr/>
+          </a:p>
+        </p:txBody>
+      </p:sp>
+      <p:sp>
+        <p:nvSpPr>
+          <p:cNvPr id="9" name="TextBox 8"/>
+          <p:cNvSpPr txBox="1"/>
+          <p:nvPr/>
+        </p:nvSpPr>
+        <p:spPr>
+          <a:xfrm>
+            <a:off x="3465576" y="987552"/>
+            <a:ext cx="2487168" cy="256032"/>
+          </a:xfrm>
+          <a:prstGeom prst="rect">
+            <a:avLst/>
+          </a:prstGeom>
+          <a:noFill/>
+        </p:spPr>
+        <p:txBody>
+          <a:bodyPr wrap="none" anchor="t">
+            <a:spAutoFit/>
+          </a:bodyPr>
+          <a:lstStyle/>
+          <a:p>
+            <a:pPr algn="l"/>
+            <a:r>
+              <a:rPr sz="1900" b="1">
+                <a:solidFill>
+                  <a:srgbClr val="112244"/>
+                </a:solidFill>
+                <a:latin typeface="Cambria" panose="02040503050406030204"/>
+              </a:rPr>
+              <a:t>BiasedMF</a:t>
+            </a:r>
+          </a:p>
+        </p:txBody>
+      </p:sp>
+      <p:sp>
+        <p:nvSpPr>
+          <p:cNvPr id="10" name="TextBox 9"/>
+          <p:cNvSpPr txBox="1"/>
+          <p:nvPr/>
+        </p:nvSpPr>
+        <p:spPr>
+          <a:xfrm>
+            <a:off x="3447288" y="1325880"/>
+            <a:ext cx="2523744" cy="1353312"/>
+          </a:xfrm>
+          <a:prstGeom prst="rect">
+            <a:avLst/>
+          </a:prstGeom>
+          <a:noFill/>
+        </p:spPr>
+        <p:txBody>
+          <a:bodyPr wrap="square" lIns="0" tIns="0" rIns="0" bIns="0" anchor="t">
+            <a:spAutoFit/>
+          </a:bodyPr>
+          <a:lstStyle/>
+          <a:p>
+            <a:pPr>
+              <a:spcAft>
+                <a:spcPts val="800"/>
+              </a:spcAft>
+            </a:pPr>
+            <a:r>
+              <a:rPr sz="1400">
+                <a:solidFill>
+                  <a:srgbClr val="23272D"/>
+                </a:solidFill>
+                <a:latin typeface="Aptos"/>
+              </a:rPr>
+              <a:t>Matrix factorization with user/item bias terms.</a:t>
+            </a:r>
+          </a:p>
+          <a:p>
+            <a:pPr>
+              <a:spcAft>
+                <a:spcPts val="800"/>
+              </a:spcAft>
+            </a:pPr>
+            <a:r>
+              <a:rPr sz="1400">
+                <a:solidFill>
+                  <a:srgbClr val="23272D"/>
+                </a:solidFill>
+                <a:latin typeface="Aptos"/>
+              </a:rPr>
+              <a:t>Strong latent-factor baseline.</a:t>
+            </a:r>
+          </a:p>
+        </p:txBody>
+      </p:sp>
+      <p:sp>
+        <p:nvSpPr>
+          <p:cNvPr id="11" name="Rounded Rectangle 10"/>
+          <p:cNvSpPr/>
+          <p:nvPr/>
+        </p:nvSpPr>
+        <p:spPr>
+          <a:xfrm>
+            <a:off x="6217920" y="914400"/>
+            <a:ext cx="2743200" cy="1828800"/>
+          </a:xfrm>
+          <a:prstGeom prst="roundRect">
+            <a:avLst/>
+          </a:prstGeom>
+          <a:solidFill>
+            <a:srgbClr val="E5EDF8"/>
+          </a:solidFill>
+          <a:ln w="12700">
+            <a:solidFill>
+              <a:srgbClr val="112244"/>
+            </a:solidFill>
+          </a:ln>
+        </p:spPr>
+        <p:style>
+          <a:lnRef idx="1">
+            <a:schemeClr val="accent1"/>
+          </a:lnRef>
+          <a:fillRef idx="3">
+            <a:schemeClr val="accent1"/>
+          </a:fillRef>
+          <a:effectRef idx="2">
+            <a:schemeClr val="accent1"/>
+          </a:effectRef>
+          <a:fontRef idx="minor">
+            <a:schemeClr val="lt1"/>
+          </a:fontRef>
+        </p:style>
+        <p:txBody>
+          <a:bodyPr rtlCol="0" anchor="ctr"/>
+          <a:lstStyle/>
+          <a:p>
+            <a:pPr algn="ctr"/>
+            <a:endParaRPr/>
+          </a:p>
+        </p:txBody>
+      </p:sp>
+      <p:sp>
+        <p:nvSpPr>
+          <p:cNvPr id="12" name="TextBox 11"/>
+          <p:cNvSpPr txBox="1"/>
+          <p:nvPr/>
+        </p:nvSpPr>
+        <p:spPr>
+          <a:xfrm>
+            <a:off x="6345936" y="987552"/>
+            <a:ext cx="2487168" cy="256032"/>
+          </a:xfrm>
+          <a:prstGeom prst="rect">
+            <a:avLst/>
+          </a:prstGeom>
+          <a:noFill/>
+        </p:spPr>
+        <p:txBody>
+          <a:bodyPr wrap="none" anchor="t">
+            <a:spAutoFit/>
+          </a:bodyPr>
+          <a:lstStyle/>
+          <a:p>
+            <a:pPr algn="l"/>
+            <a:r>
+              <a:rPr sz="1900" b="1">
+                <a:solidFill>
+                  <a:srgbClr val="112244"/>
+                </a:solidFill>
+                <a:latin typeface="Cambria" panose="02040503050406030204"/>
+              </a:rPr>
+              <a:t>ClassicNeuMF</a:t>
+            </a:r>
+          </a:p>
+        </p:txBody>
+      </p:sp>
+      <p:sp>
+        <p:nvSpPr>
+          <p:cNvPr id="13" name="TextBox 12"/>
+          <p:cNvSpPr txBox="1"/>
+          <p:nvPr/>
+        </p:nvSpPr>
+        <p:spPr>
+          <a:xfrm>
+            <a:off x="6327648" y="1325880"/>
+            <a:ext cx="2523744" cy="1353312"/>
+          </a:xfrm>
+          <a:prstGeom prst="rect">
+            <a:avLst/>
+          </a:prstGeom>
+          <a:noFill/>
+        </p:spPr>
+        <p:txBody>
+          <a:bodyPr wrap="square" lIns="0" tIns="0" rIns="0" bIns="0" anchor="t">
+            <a:spAutoFit/>
+          </a:bodyPr>
+          <a:lstStyle/>
+          <a:p>
+            <a:pPr>
+              <a:spcAft>
+                <a:spcPts val="800"/>
+              </a:spcAft>
+            </a:pPr>
+            <a:r>
+              <a:rPr sz="1400">
+                <a:solidFill>
+                  <a:srgbClr val="23272D"/>
+                </a:solidFill>
+                <a:latin typeface="Aptos"/>
+              </a:rPr>
+              <a:t>GMF branch + MLP tower.</a:t>
+            </a:r>
+          </a:p>
+          <a:p>
+            <a:pPr>
+              <a:spcAft>
+                <a:spcPts val="800"/>
+              </a:spcAft>
+            </a:pPr>
+            <a:r>
+              <a:rPr sz="1400">
+                <a:solidFill>
+                  <a:srgbClr val="23272D"/>
+                </a:solidFill>
+                <a:latin typeface="Aptos"/>
+              </a:rPr>
+              <a:t>Neural baseline without flow regularization.</a:t>
+            </a:r>
+          </a:p>
+        </p:txBody>
+      </p:sp>
+      <p:sp>
+        <p:nvSpPr>
+          <p:cNvPr id="14" name="Rounded Rectangle 13"/>
+          <p:cNvSpPr/>
+          <p:nvPr/>
+        </p:nvSpPr>
+        <p:spPr>
+          <a:xfrm>
+            <a:off x="9098280" y="914400"/>
+            <a:ext cx="2606040" cy="1828800"/>
+          </a:xfrm>
+          <a:prstGeom prst="roundRect">
+            <a:avLst/>
+          </a:prstGeom>
+          <a:solidFill>
+            <a:srgbClr val="F6E0DE"/>
+          </a:solidFill>
+          <a:ln w="12700">
+            <a:solidFill>
+              <a:srgbClr val="112244"/>
+            </a:solidFill>
+          </a:ln>
+        </p:spPr>
+        <p:style>
+          <a:lnRef idx="1">
+            <a:schemeClr val="accent1"/>
+          </a:lnRef>
+          <a:fillRef idx="3">
+            <a:schemeClr val="accent1"/>
+          </a:fillRef>
+          <a:effectRef idx="2">
+            <a:schemeClr val="accent1"/>
+          </a:effectRef>
+          <a:fontRef idx="minor">
+            <a:schemeClr val="lt1"/>
+          </a:fontRef>
+        </p:style>
+        <p:txBody>
+          <a:bodyPr rtlCol="0" anchor="ctr"/>
+          <a:lstStyle/>
+          <a:p>
+            <a:pPr algn="ctr"/>
+            <a:endParaRPr/>
+          </a:p>
+        </p:txBody>
+      </p:sp>
+      <p:sp>
+        <p:nvSpPr>
+          <p:cNvPr id="15" name="TextBox 14"/>
+          <p:cNvSpPr txBox="1"/>
+          <p:nvPr/>
+        </p:nvSpPr>
+        <p:spPr>
+          <a:xfrm>
+            <a:off x="9226296" y="987552"/>
+            <a:ext cx="2350008" cy="256032"/>
+          </a:xfrm>
+          <a:prstGeom prst="rect">
+            <a:avLst/>
+          </a:prstGeom>
+          <a:noFill/>
+        </p:spPr>
+        <p:txBody>
+          <a:bodyPr wrap="none" anchor="t">
+            <a:spAutoFit/>
+          </a:bodyPr>
+          <a:lstStyle/>
+          <a:p>
+            <a:pPr algn="l"/>
+            <a:r>
+              <a:rPr sz="1900" b="1">
+                <a:solidFill>
+                  <a:srgbClr val="112244"/>
+                </a:solidFill>
+                <a:latin typeface="Cambria" panose="02040503050406030204"/>
+              </a:rPr>
+              <a:t>FlowRanking</a:t>
+            </a:r>
+          </a:p>
+        </p:txBody>
+      </p:sp>
+      <p:sp>
+        <p:nvSpPr>
+          <p:cNvPr id="16" name="TextBox 15"/>
+          <p:cNvSpPr txBox="1"/>
+          <p:nvPr/>
+        </p:nvSpPr>
+        <p:spPr>
+          <a:xfrm>
+            <a:off x="9208008" y="1325880"/>
+            <a:ext cx="2386584" cy="1353312"/>
+          </a:xfrm>
+          <a:prstGeom prst="rect">
+            <a:avLst/>
+          </a:prstGeom>
+          <a:noFill/>
+        </p:spPr>
+        <p:txBody>
+          <a:bodyPr wrap="square" lIns="0" tIns="0" rIns="0" bIns="0" anchor="t">
+            <a:spAutoFit/>
+          </a:bodyPr>
+          <a:lstStyle/>
+          <a:p>
+            <a:r>
+              <a:t>Final hybrid system.</a:t>
+            </a:r>
+          </a:p>
+          <a:p>
+            <a:r>
+              <a:t>Calibrated ItemCF ratings; fused MF/ItemCF Top-10 ranking.</a:t>
+            </a:r>
+          </a:p>
+        </p:txBody>
+      </p:sp>
+      <p:sp>
+        <p:nvSpPr>
+          <p:cNvPr id="18" name="TextBox 17"/>
+          <p:cNvSpPr txBox="1"/>
+          <p:nvPr/>
+        </p:nvSpPr>
+        <p:spPr>
+          <a:xfrm>
+            <a:off x="411480" y="6446520"/>
+            <a:ext cx="5131918" cy="369332"/>
+          </a:xfrm>
+          <a:prstGeom prst="rect">
+            <a:avLst/>
+          </a:prstGeom>
+          <a:noFill/>
+        </p:spPr>
+        <p:txBody>
+          <a:bodyPr wrap="none" anchor="t">
+            <a:spAutoFit/>
+          </a:bodyPr>
+          <a:lstStyle/>
+          <a:p>
+            <a:r>
+              <a:rPr dirty="0"/>
+              <a:t>Flow Ranking | Sen Fang | CS550 Final Project | 4</a:t>
+            </a:r>
+            <a:r>
+              <a:rPr lang="en-US" dirty="0"/>
+              <a:t>/11</a:t>
+            </a:r>
+            <a:endParaRPr dirty="0"/>
+          </a:p>
+        </p:txBody>
+      </p:sp>
+      <p:pic>
+        <p:nvPicPr>
+          <p:cNvPr id="19" name="Picture 18" descr="academic_2_biased_matrix_factorization.png"/>
+          <p:cNvPicPr>
+            <a:picLocks noChangeAspect="1"/>
+          </p:cNvPicPr>
+          <p:nvPr/>
+        </p:nvPicPr>
+        <p:blipFill>
+          <a:blip r:embed="rId2"/>
+          <a:stretch>
+            <a:fillRect/>
+          </a:stretch>
+        </p:blipFill>
+        <p:spPr>
+          <a:xfrm>
+            <a:off x="548640" y="3020000"/>
+            <a:ext cx="11100000" cy="2812058"/>
+          </a:xfrm>
+          <a:prstGeom prst="rect">
+            <a:avLst/>
+          </a:prstGeom>
+        </p:spPr>
+      </p:pic>
+    </p:spTree>
+  </p:cSld>
+  <p:clrMapOvr>
+    <a:masterClrMapping/>
+  </p:clrMapOvr>
+</p:sld>
+</file>
+
+<file path=ppt/slides/slide5.xml><?xml version="1.0" encoding="utf-8"?>
+<p:sld xmlns:a="http://schemas.openxmlformats.org/drawingml/2006/main" xmlns:r="http://schemas.openxmlformats.org/officeDocument/2006/relationships" xmlns:p="http://schemas.openxmlformats.org/presentationml/2006/main">
+  <p:cSld>
+    <p:spTree>
+      <p:nvGrpSpPr>
+        <p:cNvPr id="1" name=""/>
+        <p:cNvGrpSpPr/>
+        <p:nvPr/>
+      </p:nvGrpSpPr>
+      <p:grpSpPr>
+        <a:xfrm>
+          <a:off x="0" y="0"/>
+          <a:ext cx="0" cy="0"/>
+          <a:chOff x="0" y="0"/>
+          <a:chExt cx="0" cy="0"/>
+        </a:xfrm>
+      </p:grpSpPr>
+      <p:sp>
+        <p:nvSpPr>
+          <p:cNvPr id="2" name="Rectangle 1"/>
+          <p:cNvSpPr/>
+          <p:nvPr/>
+        </p:nvSpPr>
+        <p:spPr>
+          <a:xfrm>
+            <a:off x="0" y="0"/>
+            <a:ext cx="12191695" cy="475488"/>
+          </a:xfrm>
+          <a:prstGeom prst="rect">
+            <a:avLst/>
+          </a:prstGeom>
+          <a:solidFill>
+            <a:srgbClr val="112244"/>
+          </a:solidFill>
+          <a:ln>
+            <a:noFill/>
+          </a:ln>
+        </p:spPr>
+        <p:style>
+          <a:lnRef idx="1">
+            <a:schemeClr val="accent1"/>
+          </a:lnRef>
+          <a:fillRef idx="3">
+            <a:schemeClr val="accent1"/>
+          </a:fillRef>
+          <a:effectRef idx="2">
+            <a:schemeClr val="accent1"/>
+          </a:effectRef>
+          <a:fontRef idx="minor">
+            <a:schemeClr val="lt1"/>
+          </a:fontRef>
+        </p:style>
+        <p:txBody>
+          <a:bodyPr rtlCol="0" anchor="ctr"/>
+          <a:lstStyle/>
+          <a:p>
+            <a:pPr algn="ctr"/>
+            <a:endParaRPr/>
+          </a:p>
+        </p:txBody>
+      </p:sp>
+      <p:sp>
+        <p:nvSpPr>
+          <p:cNvPr id="3" name="TextBox 2"/>
+          <p:cNvSpPr txBox="1"/>
+          <p:nvPr/>
+        </p:nvSpPr>
+        <p:spPr>
+          <a:xfrm>
+            <a:off x="411480" y="64008"/>
+            <a:ext cx="7132320" cy="237744"/>
+          </a:xfrm>
+          <a:prstGeom prst="rect">
+            <a:avLst/>
+          </a:prstGeom>
+          <a:noFill/>
+        </p:spPr>
+        <p:txBody>
+          <a:bodyPr wrap="none" anchor="t">
+            <a:spAutoFit/>
+          </a:bodyPr>
+          <a:lstStyle/>
+          <a:p>
+            <a:pPr algn="l"/>
+            <a:r>
+              <a:rPr sz="2600" b="1">
+                <a:solidFill>
+                  <a:srgbClr val="FFFFFF"/>
+                </a:solidFill>
+                <a:latin typeface="Cambria" panose="02040503050406030204"/>
+              </a:rPr>
+              <a:t>Compared Methods</a:t>
+            </a:r>
+          </a:p>
+        </p:txBody>
+      </p:sp>
+      <p:sp>
+        <p:nvSpPr>
+          <p:cNvPr id="4" name="TextBox 3"/>
+          <p:cNvSpPr txBox="1"/>
+          <p:nvPr/>
+        </p:nvSpPr>
+        <p:spPr>
+          <a:xfrm>
+            <a:off x="7909560" y="91440"/>
+            <a:ext cx="3840480" cy="182880"/>
+          </a:xfrm>
+          <a:prstGeom prst="rect">
+            <a:avLst/>
+          </a:prstGeom>
+          <a:noFill/>
+        </p:spPr>
+        <p:txBody>
+          <a:bodyPr wrap="none" anchor="t">
+            <a:spAutoFit/>
+          </a:bodyPr>
+          <a:lstStyle/>
+          <a:p>
+            <a:pPr algn="r"/>
+            <a:r>
+              <a:rPr sz="1100" b="0">
+                <a:solidFill>
+                  <a:srgbClr val="FFFFFF"/>
+                </a:solidFill>
+                <a:latin typeface="Aptos"/>
+              </a:rPr>
+              <a:t>From classical baselines to the final hybrid system</a:t>
+            </a:r>
+          </a:p>
+        </p:txBody>
+      </p:sp>
+      <p:sp>
+        <p:nvSpPr>
+          <p:cNvPr id="5" name="Rounded Rectangle 4"/>
+          <p:cNvSpPr/>
+          <p:nvPr/>
+        </p:nvSpPr>
+        <p:spPr>
+          <a:xfrm>
+            <a:off x="457200" y="914400"/>
+            <a:ext cx="2743200" cy="1828800"/>
+          </a:xfrm>
+          <a:prstGeom prst="roundRect">
+            <a:avLst/>
+          </a:prstGeom>
+          <a:solidFill>
+            <a:srgbClr val="E5EDF8"/>
+          </a:solidFill>
+          <a:ln w="12700">
+            <a:solidFill>
+              <a:srgbClr val="112244"/>
+            </a:solidFill>
+          </a:ln>
+        </p:spPr>
+        <p:style>
+          <a:lnRef idx="1">
+            <a:schemeClr val="accent1"/>
+          </a:lnRef>
+          <a:fillRef idx="3">
+            <a:schemeClr val="accent1"/>
+          </a:fillRef>
+          <a:effectRef idx="2">
+            <a:schemeClr val="accent1"/>
+          </a:effectRef>
+          <a:fontRef idx="minor">
+            <a:schemeClr val="lt1"/>
+          </a:fontRef>
+        </p:style>
+        <p:txBody>
+          <a:bodyPr rtlCol="0" anchor="ctr"/>
+          <a:lstStyle/>
+          <a:p>
+            <a:pPr algn="ctr"/>
+            <a:endParaRPr/>
+          </a:p>
+        </p:txBody>
+      </p:sp>
+      <p:sp>
+        <p:nvSpPr>
+          <p:cNvPr id="6" name="TextBox 5"/>
+          <p:cNvSpPr txBox="1"/>
+          <p:nvPr/>
+        </p:nvSpPr>
+        <p:spPr>
+          <a:xfrm>
+            <a:off x="585216" y="987552"/>
+            <a:ext cx="2487168" cy="256032"/>
+          </a:xfrm>
+          <a:prstGeom prst="rect">
+            <a:avLst/>
+          </a:prstGeom>
+          <a:noFill/>
+        </p:spPr>
+        <p:txBody>
+          <a:bodyPr wrap="none" anchor="t">
+            <a:spAutoFit/>
+          </a:bodyPr>
+          <a:lstStyle/>
+          <a:p>
+            <a:pPr algn="l"/>
+            <a:r>
+              <a:rPr sz="1900" b="1">
+                <a:solidFill>
+                  <a:srgbClr val="112244"/>
+                </a:solidFill>
+                <a:latin typeface="Cambria" panose="02040503050406030204"/>
+              </a:rPr>
+              <a:t>ItemCF</a:t>
+            </a:r>
+          </a:p>
+        </p:txBody>
+      </p:sp>
+      <p:sp>
+        <p:nvSpPr>
+          <p:cNvPr id="7" name="TextBox 6"/>
+          <p:cNvSpPr txBox="1"/>
+          <p:nvPr/>
+        </p:nvSpPr>
+        <p:spPr>
+          <a:xfrm>
+            <a:off x="566928" y="1325880"/>
+            <a:ext cx="2523744" cy="1353312"/>
+          </a:xfrm>
+          <a:prstGeom prst="rect">
+            <a:avLst/>
+          </a:prstGeom>
+          <a:noFill/>
+        </p:spPr>
+        <p:txBody>
+          <a:bodyPr wrap="square" lIns="0" tIns="0" rIns="0" bIns="0" anchor="t">
+            <a:spAutoFit/>
+          </a:bodyPr>
+          <a:lstStyle/>
+          <a:p>
+            <a:pPr>
+              <a:spcAft>
+                <a:spcPts val="800"/>
+              </a:spcAft>
+            </a:pPr>
+            <a:r>
+              <a:rPr sz="1400">
+                <a:solidFill>
+                  <a:srgbClr val="23272D"/>
+                </a:solidFill>
+                <a:latin typeface="Aptos"/>
+              </a:rPr>
+              <a:t>Item-item cosine similarity.</a:t>
+            </a:r>
+          </a:p>
+          <a:p>
+            <a:pPr>
+              <a:spcAft>
+                <a:spcPts val="800"/>
+              </a:spcAft>
+            </a:pPr>
+            <a:r>
+              <a:rPr sz="1400">
+                <a:solidFill>
+                  <a:srgbClr val="23272D"/>
+                </a:solidFill>
+                <a:latin typeface="Aptos"/>
+              </a:rPr>
+              <a:t>Strong classical baseline for explicit ratings.</a:t>
+            </a:r>
+          </a:p>
+        </p:txBody>
+      </p:sp>
+      <p:sp>
+        <p:nvSpPr>
+          <p:cNvPr id="8" name="Rounded Rectangle 7"/>
+          <p:cNvSpPr/>
+          <p:nvPr/>
+        </p:nvSpPr>
+        <p:spPr>
+          <a:xfrm>
+            <a:off x="3337560" y="914400"/>
+            <a:ext cx="2743200" cy="1828800"/>
+          </a:xfrm>
+          <a:prstGeom prst="roundRect">
+            <a:avLst/>
+          </a:prstGeom>
+          <a:solidFill>
+            <a:srgbClr val="E5EDF8"/>
+          </a:solidFill>
+          <a:ln w="12700">
+            <a:solidFill>
+              <a:srgbClr val="112244"/>
+            </a:solidFill>
+          </a:ln>
+        </p:spPr>
+        <p:style>
+          <a:lnRef idx="1">
+            <a:schemeClr val="accent1"/>
+          </a:lnRef>
+          <a:fillRef idx="3">
+            <a:schemeClr val="accent1"/>
+          </a:fillRef>
+          <a:effectRef idx="2">
+            <a:schemeClr val="accent1"/>
+          </a:effectRef>
+          <a:fontRef idx="minor">
+            <a:schemeClr val="lt1"/>
+          </a:fontRef>
+        </p:style>
+        <p:txBody>
+          <a:bodyPr rtlCol="0" anchor="ctr"/>
+          <a:lstStyle/>
+          <a:p>
+            <a:pPr algn="ctr"/>
+            <a:endParaRPr/>
+          </a:p>
+        </p:txBody>
+      </p:sp>
+      <p:sp>
+        <p:nvSpPr>
+          <p:cNvPr id="9" name="TextBox 8"/>
+          <p:cNvSpPr txBox="1"/>
+          <p:nvPr/>
+        </p:nvSpPr>
+        <p:spPr>
+          <a:xfrm>
+            <a:off x="3465576" y="987552"/>
+            <a:ext cx="2487168" cy="256032"/>
+          </a:xfrm>
+          <a:prstGeom prst="rect">
+            <a:avLst/>
+          </a:prstGeom>
+          <a:noFill/>
+        </p:spPr>
+        <p:txBody>
+          <a:bodyPr wrap="none" anchor="t">
+            <a:spAutoFit/>
+          </a:bodyPr>
+          <a:lstStyle/>
+          <a:p>
+            <a:pPr algn="l"/>
+            <a:r>
+              <a:rPr sz="1900" b="1">
+                <a:solidFill>
+                  <a:srgbClr val="112244"/>
+                </a:solidFill>
+                <a:latin typeface="Cambria" panose="02040503050406030204"/>
+              </a:rPr>
+              <a:t>BiasedMF</a:t>
+            </a:r>
+          </a:p>
+        </p:txBody>
+      </p:sp>
+      <p:sp>
+        <p:nvSpPr>
+          <p:cNvPr id="10" name="TextBox 9"/>
+          <p:cNvSpPr txBox="1"/>
+          <p:nvPr/>
+        </p:nvSpPr>
+        <p:spPr>
+          <a:xfrm>
+            <a:off x="3447288" y="1325880"/>
+            <a:ext cx="2523744" cy="1353312"/>
+          </a:xfrm>
+          <a:prstGeom prst="rect">
+            <a:avLst/>
+          </a:prstGeom>
+          <a:noFill/>
+        </p:spPr>
+        <p:txBody>
+          <a:bodyPr wrap="square" lIns="0" tIns="0" rIns="0" bIns="0" anchor="t">
+            <a:spAutoFit/>
+          </a:bodyPr>
+          <a:lstStyle/>
+          <a:p>
+            <a:pPr>
+              <a:spcAft>
+                <a:spcPts val="800"/>
+              </a:spcAft>
+            </a:pPr>
+            <a:r>
+              <a:rPr sz="1400">
+                <a:solidFill>
+                  <a:srgbClr val="23272D"/>
+                </a:solidFill>
+                <a:latin typeface="Aptos"/>
+              </a:rPr>
+              <a:t>Matrix factorization with user/item bias terms.</a:t>
+            </a:r>
+          </a:p>
+          <a:p>
+            <a:pPr>
+              <a:spcAft>
+                <a:spcPts val="800"/>
+              </a:spcAft>
+            </a:pPr>
+            <a:r>
+              <a:rPr sz="1400">
+                <a:solidFill>
+                  <a:srgbClr val="23272D"/>
+                </a:solidFill>
+                <a:latin typeface="Aptos"/>
+              </a:rPr>
+              <a:t>Strong latent-factor baseline.</a:t>
+            </a:r>
+          </a:p>
+        </p:txBody>
+      </p:sp>
+      <p:sp>
+        <p:nvSpPr>
+          <p:cNvPr id="11" name="Rounded Rectangle 10"/>
+          <p:cNvSpPr/>
+          <p:nvPr/>
+        </p:nvSpPr>
+        <p:spPr>
+          <a:xfrm>
+            <a:off x="6217920" y="914400"/>
+            <a:ext cx="2743200" cy="1828800"/>
+          </a:xfrm>
+          <a:prstGeom prst="roundRect">
+            <a:avLst/>
+          </a:prstGeom>
+          <a:solidFill>
+            <a:srgbClr val="E5EDF8"/>
+          </a:solidFill>
+          <a:ln w="12700">
+            <a:solidFill>
+              <a:srgbClr val="112244"/>
+            </a:solidFill>
+          </a:ln>
+        </p:spPr>
+        <p:style>
+          <a:lnRef idx="1">
+            <a:schemeClr val="accent1"/>
+          </a:lnRef>
+          <a:fillRef idx="3">
+            <a:schemeClr val="accent1"/>
+          </a:fillRef>
+          <a:effectRef idx="2">
+            <a:schemeClr val="accent1"/>
+          </a:effectRef>
+          <a:fontRef idx="minor">
+            <a:schemeClr val="lt1"/>
+          </a:fontRef>
+        </p:style>
+        <p:txBody>
+          <a:bodyPr rtlCol="0" anchor="ctr"/>
+          <a:lstStyle/>
+          <a:p>
+            <a:pPr algn="ctr"/>
+            <a:endParaRPr/>
+          </a:p>
+        </p:txBody>
+      </p:sp>
+      <p:sp>
+        <p:nvSpPr>
+          <p:cNvPr id="12" name="TextBox 11"/>
+          <p:cNvSpPr txBox="1"/>
+          <p:nvPr/>
+        </p:nvSpPr>
+        <p:spPr>
+          <a:xfrm>
+            <a:off x="6345936" y="987552"/>
+            <a:ext cx="2487168" cy="256032"/>
+          </a:xfrm>
+          <a:prstGeom prst="rect">
+            <a:avLst/>
+          </a:prstGeom>
+          <a:noFill/>
+        </p:spPr>
+        <p:txBody>
+          <a:bodyPr wrap="none" anchor="t">
+            <a:spAutoFit/>
+          </a:bodyPr>
+          <a:lstStyle/>
+          <a:p>
+            <a:pPr algn="l"/>
+            <a:r>
+              <a:rPr sz="1900" b="1">
+                <a:solidFill>
+                  <a:srgbClr val="112244"/>
+                </a:solidFill>
+                <a:latin typeface="Cambria" panose="02040503050406030204"/>
+              </a:rPr>
+              <a:t>ClassicNeuMF</a:t>
+            </a:r>
+          </a:p>
+        </p:txBody>
+      </p:sp>
+      <p:sp>
+        <p:nvSpPr>
+          <p:cNvPr id="13" name="TextBox 12"/>
+          <p:cNvSpPr txBox="1"/>
+          <p:nvPr/>
+        </p:nvSpPr>
+        <p:spPr>
+          <a:xfrm>
+            <a:off x="6327648" y="1325880"/>
+            <a:ext cx="2523744" cy="1353312"/>
+          </a:xfrm>
+          <a:prstGeom prst="rect">
+            <a:avLst/>
+          </a:prstGeom>
+          <a:noFill/>
+        </p:spPr>
+        <p:txBody>
+          <a:bodyPr wrap="square" lIns="0" tIns="0" rIns="0" bIns="0" anchor="t">
+            <a:spAutoFit/>
+          </a:bodyPr>
+          <a:lstStyle/>
+          <a:p>
+            <a:pPr>
+              <a:spcAft>
+                <a:spcPts val="800"/>
+              </a:spcAft>
+            </a:pPr>
+            <a:r>
+              <a:rPr sz="1400">
+                <a:solidFill>
+                  <a:srgbClr val="23272D"/>
+                </a:solidFill>
+                <a:latin typeface="Aptos"/>
+              </a:rPr>
+              <a:t>GMF branch + MLP tower.</a:t>
+            </a:r>
+          </a:p>
+          <a:p>
+            <a:pPr>
+              <a:spcAft>
+                <a:spcPts val="800"/>
+              </a:spcAft>
+            </a:pPr>
+            <a:r>
+              <a:rPr sz="1400">
+                <a:solidFill>
+                  <a:srgbClr val="23272D"/>
+                </a:solidFill>
+                <a:latin typeface="Aptos"/>
+              </a:rPr>
+              <a:t>Neural baseline without flow regularization.</a:t>
+            </a:r>
+          </a:p>
+        </p:txBody>
+      </p:sp>
+      <p:sp>
+        <p:nvSpPr>
+          <p:cNvPr id="14" name="Rounded Rectangle 13"/>
+          <p:cNvSpPr/>
+          <p:nvPr/>
+        </p:nvSpPr>
+        <p:spPr>
+          <a:xfrm>
+            <a:off x="9098280" y="914400"/>
+            <a:ext cx="2606040" cy="1828800"/>
+          </a:xfrm>
+          <a:prstGeom prst="roundRect">
+            <a:avLst/>
+          </a:prstGeom>
+          <a:solidFill>
+            <a:srgbClr val="F6E0DE"/>
+          </a:solidFill>
+          <a:ln w="12700">
+            <a:solidFill>
+              <a:srgbClr val="112244"/>
+            </a:solidFill>
+          </a:ln>
+        </p:spPr>
+        <p:style>
+          <a:lnRef idx="1">
+            <a:schemeClr val="accent1"/>
+          </a:lnRef>
+          <a:fillRef idx="3">
+            <a:schemeClr val="accent1"/>
+          </a:fillRef>
+          <a:effectRef idx="2">
+            <a:schemeClr val="accent1"/>
+          </a:effectRef>
+          <a:fontRef idx="minor">
+            <a:schemeClr val="lt1"/>
+          </a:fontRef>
+        </p:style>
+        <p:txBody>
+          <a:bodyPr rtlCol="0" anchor="ctr"/>
+          <a:lstStyle/>
+          <a:p>
+            <a:pPr algn="ctr"/>
+            <a:endParaRPr/>
+          </a:p>
+        </p:txBody>
+      </p:sp>
+      <p:sp>
+        <p:nvSpPr>
+          <p:cNvPr id="15" name="TextBox 14"/>
+          <p:cNvSpPr txBox="1"/>
+          <p:nvPr/>
+        </p:nvSpPr>
+        <p:spPr>
+          <a:xfrm>
+            <a:off x="9226296" y="987552"/>
+            <a:ext cx="2350008" cy="256032"/>
+          </a:xfrm>
+          <a:prstGeom prst="rect">
+            <a:avLst/>
+          </a:prstGeom>
+          <a:noFill/>
+        </p:spPr>
+        <p:txBody>
+          <a:bodyPr wrap="none" anchor="t">
+            <a:spAutoFit/>
+          </a:bodyPr>
+          <a:lstStyle/>
+          <a:p>
+            <a:pPr algn="l"/>
+            <a:r>
+              <a:rPr sz="1900" b="1">
+                <a:solidFill>
+                  <a:srgbClr val="112244"/>
+                </a:solidFill>
+                <a:latin typeface="Cambria" panose="02040503050406030204"/>
+              </a:rPr>
+              <a:t>FlowRanking</a:t>
+            </a:r>
+          </a:p>
+        </p:txBody>
+      </p:sp>
+      <p:sp>
+        <p:nvSpPr>
+          <p:cNvPr id="16" name="TextBox 15"/>
+          <p:cNvSpPr txBox="1"/>
+          <p:nvPr/>
+        </p:nvSpPr>
+        <p:spPr>
+          <a:xfrm>
+            <a:off x="9208008" y="1325880"/>
+            <a:ext cx="2386584" cy="1353312"/>
+          </a:xfrm>
+          <a:prstGeom prst="rect">
+            <a:avLst/>
+          </a:prstGeom>
+          <a:noFill/>
+        </p:spPr>
+        <p:txBody>
+          <a:bodyPr wrap="square" lIns="0" tIns="0" rIns="0" bIns="0" anchor="t">
+            <a:spAutoFit/>
+          </a:bodyPr>
+          <a:lstStyle/>
+          <a:p>
+            <a:r>
+              <a:t>Final hybrid system.</a:t>
+            </a:r>
+          </a:p>
+          <a:p>
+            <a:r>
+              <a:t>Calibrated ItemCF ratings; fused MF/ItemCF Top-10 ranking.</a:t>
+            </a:r>
+          </a:p>
+        </p:txBody>
+      </p:sp>
+      <p:sp>
+        <p:nvSpPr>
+          <p:cNvPr id="18" name="TextBox 17"/>
+          <p:cNvSpPr txBox="1"/>
+          <p:nvPr/>
+        </p:nvSpPr>
+        <p:spPr>
+          <a:xfrm>
+            <a:off x="411480" y="6446520"/>
+            <a:ext cx="5131918" cy="369332"/>
+          </a:xfrm>
+          <a:prstGeom prst="rect">
+            <a:avLst/>
+          </a:prstGeom>
+          <a:noFill/>
+        </p:spPr>
+        <p:txBody>
+          <a:bodyPr wrap="none" anchor="t">
+            <a:spAutoFit/>
+          </a:bodyPr>
+          <a:lstStyle/>
+          <a:p>
+            <a:r>
+              <a:rPr dirty="0"/>
+              <a:t>Flow Ranking | Sen Fang | CS550 Final Project | 5</a:t>
+            </a:r>
+            <a:r>
+              <a:rPr lang="en-US" dirty="0"/>
+              <a:t>/11</a:t>
+            </a:r>
+            <a:endParaRPr dirty="0"/>
+          </a:p>
+        </p:txBody>
+      </p:sp>
+      <p:pic>
+        <p:nvPicPr>
+          <p:cNvPr id="19" name="Picture 18" descr="academic_3_classic_neural_mf.png"/>
+          <p:cNvPicPr>
+            <a:picLocks noChangeAspect="1"/>
+          </p:cNvPicPr>
+          <p:nvPr/>
+        </p:nvPicPr>
+        <p:blipFill>
+          <a:blip r:embed="rId2"/>
+          <a:stretch>
+            <a:fillRect/>
+          </a:stretch>
+        </p:blipFill>
+        <p:spPr>
+          <a:xfrm>
+            <a:off x="548640" y="3020000"/>
+            <a:ext cx="11100000" cy="2812058"/>
+          </a:xfrm>
+          <a:prstGeom prst="rect">
+            <a:avLst/>
+          </a:prstGeom>
+        </p:spPr>
+      </p:pic>
+    </p:spTree>
+  </p:cSld>
+  <p:clrMapOvr>
+    <a:masterClrMapping/>
+  </p:clrMapOvr>
+</p:sld>
+</file>
+
+<file path=ppt/slides/slide6.xml><?xml version="1.0" encoding="utf-8"?>
+<p:sld xmlns:a="http://schemas.openxmlformats.org/drawingml/2006/main" xmlns:r="http://schemas.openxmlformats.org/officeDocument/2006/relationships" xmlns:p="http://schemas.openxmlformats.org/presentationml/2006/main">
+  <p:cSld>
+    <p:spTree>
+      <p:nvGrpSpPr>
+        <p:cNvPr id="1" name=""/>
+        <p:cNvGrpSpPr/>
+        <p:nvPr/>
+      </p:nvGrpSpPr>
+      <p:grpSpPr>
+        <a:xfrm>
+          <a:off x="0" y="0"/>
+          <a:ext cx="0" cy="0"/>
+          <a:chOff x="0" y="0"/>
+          <a:chExt cx="0" cy="0"/>
+        </a:xfrm>
+      </p:grpSpPr>
+      <p:sp>
+        <p:nvSpPr>
+          <p:cNvPr id="2" name="Rectangle 1"/>
+          <p:cNvSpPr/>
+          <p:nvPr/>
+        </p:nvSpPr>
+        <p:spPr>
+          <a:xfrm>
+            <a:off x="0" y="0"/>
+            <a:ext cx="12191695" cy="475488"/>
+          </a:xfrm>
+          <a:prstGeom prst="rect">
+            <a:avLst/>
+          </a:prstGeom>
+          <a:solidFill>
+            <a:srgbClr val="112244"/>
+          </a:solidFill>
+          <a:ln>
+            <a:noFill/>
+          </a:ln>
+        </p:spPr>
+        <p:style>
+          <a:lnRef idx="1">
+            <a:schemeClr val="accent1"/>
+          </a:lnRef>
+          <a:fillRef idx="3">
+            <a:schemeClr val="accent1"/>
+          </a:fillRef>
+          <a:effectRef idx="2">
+            <a:schemeClr val="accent1"/>
+          </a:effectRef>
+          <a:fontRef idx="minor">
+            <a:schemeClr val="lt1"/>
+          </a:fontRef>
+        </p:style>
+        <p:txBody>
+          <a:bodyPr rtlCol="0" anchor="ctr"/>
+          <a:lstStyle/>
+          <a:p>
+            <a:pPr algn="ctr"/>
+            <a:endParaRPr/>
+          </a:p>
+        </p:txBody>
+      </p:sp>
+      <p:sp>
+        <p:nvSpPr>
+          <p:cNvPr id="3" name="TextBox 2"/>
+          <p:cNvSpPr txBox="1"/>
+          <p:nvPr/>
+        </p:nvSpPr>
+        <p:spPr>
+          <a:xfrm>
+            <a:off x="411480" y="64008"/>
+            <a:ext cx="7132320" cy="237744"/>
+          </a:xfrm>
+          <a:prstGeom prst="rect">
+            <a:avLst/>
+          </a:prstGeom>
+          <a:noFill/>
+        </p:spPr>
+        <p:txBody>
+          <a:bodyPr wrap="none" anchor="t">
+            <a:spAutoFit/>
+          </a:bodyPr>
+          <a:lstStyle/>
+          <a:p>
+            <a:pPr algn="l"/>
+            <a:r>
+              <a:rPr sz="2600" b="1">
+                <a:solidFill>
+                  <a:srgbClr val="FFFFFF"/>
+                </a:solidFill>
+                <a:latin typeface="Cambria" panose="02040503050406030204"/>
+              </a:rPr>
+              <a:t>Compared Methods</a:t>
+            </a:r>
+          </a:p>
+        </p:txBody>
+      </p:sp>
+      <p:sp>
+        <p:nvSpPr>
+          <p:cNvPr id="4" name="TextBox 3"/>
+          <p:cNvSpPr txBox="1"/>
+          <p:nvPr/>
+        </p:nvSpPr>
+        <p:spPr>
+          <a:xfrm>
+            <a:off x="7909560" y="91440"/>
+            <a:ext cx="3840480" cy="182880"/>
+          </a:xfrm>
+          <a:prstGeom prst="rect">
+            <a:avLst/>
+          </a:prstGeom>
+          <a:noFill/>
+        </p:spPr>
+        <p:txBody>
+          <a:bodyPr wrap="none" anchor="t">
+            <a:spAutoFit/>
+          </a:bodyPr>
+          <a:lstStyle/>
+          <a:p>
+            <a:pPr algn="r"/>
+            <a:r>
+              <a:rPr sz="1100" b="0">
+                <a:solidFill>
+                  <a:srgbClr val="FFFFFF"/>
+                </a:solidFill>
+                <a:latin typeface="Aptos"/>
+              </a:rPr>
+              <a:t>From classical baselines to the final hybrid system</a:t>
+            </a:r>
+          </a:p>
+        </p:txBody>
+      </p:sp>
+      <p:sp>
+        <p:nvSpPr>
+          <p:cNvPr id="5" name="Rounded Rectangle 4"/>
+          <p:cNvSpPr/>
+          <p:nvPr/>
+        </p:nvSpPr>
+        <p:spPr>
+          <a:xfrm>
+            <a:off x="457200" y="914400"/>
+            <a:ext cx="2743200" cy="1828800"/>
+          </a:xfrm>
+          <a:prstGeom prst="roundRect">
+            <a:avLst/>
+          </a:prstGeom>
+          <a:solidFill>
+            <a:srgbClr val="E5EDF8"/>
+          </a:solidFill>
+          <a:ln w="12700">
+            <a:solidFill>
+              <a:srgbClr val="112244"/>
+            </a:solidFill>
+          </a:ln>
+        </p:spPr>
+        <p:style>
+          <a:lnRef idx="1">
+            <a:schemeClr val="accent1"/>
+          </a:lnRef>
+          <a:fillRef idx="3">
+            <a:schemeClr val="accent1"/>
+          </a:fillRef>
+          <a:effectRef idx="2">
+            <a:schemeClr val="accent1"/>
+          </a:effectRef>
+          <a:fontRef idx="minor">
+            <a:schemeClr val="lt1"/>
+          </a:fontRef>
+        </p:style>
+        <p:txBody>
+          <a:bodyPr rtlCol="0" anchor="ctr"/>
+          <a:lstStyle/>
+          <a:p>
+            <a:pPr algn="ctr"/>
+            <a:endParaRPr/>
+          </a:p>
+        </p:txBody>
+      </p:sp>
+      <p:sp>
+        <p:nvSpPr>
+          <p:cNvPr id="6" name="TextBox 5"/>
+          <p:cNvSpPr txBox="1"/>
+          <p:nvPr/>
+        </p:nvSpPr>
+        <p:spPr>
+          <a:xfrm>
+            <a:off x="585216" y="987552"/>
+            <a:ext cx="2487168" cy="256032"/>
+          </a:xfrm>
+          <a:prstGeom prst="rect">
+            <a:avLst/>
+          </a:prstGeom>
+          <a:noFill/>
+        </p:spPr>
+        <p:txBody>
+          <a:bodyPr wrap="none" anchor="t">
+            <a:spAutoFit/>
+          </a:bodyPr>
+          <a:lstStyle/>
+          <a:p>
+            <a:pPr algn="l"/>
+            <a:r>
+              <a:rPr sz="1900" b="1">
+                <a:solidFill>
+                  <a:srgbClr val="112244"/>
+                </a:solidFill>
+                <a:latin typeface="Cambria" panose="02040503050406030204"/>
+              </a:rPr>
+              <a:t>ItemCF</a:t>
+            </a:r>
+          </a:p>
+        </p:txBody>
+      </p:sp>
+      <p:sp>
+        <p:nvSpPr>
+          <p:cNvPr id="7" name="TextBox 6"/>
+          <p:cNvSpPr txBox="1"/>
+          <p:nvPr/>
+        </p:nvSpPr>
+        <p:spPr>
+          <a:xfrm>
+            <a:off x="566928" y="1325880"/>
+            <a:ext cx="2523744" cy="1353312"/>
+          </a:xfrm>
+          <a:prstGeom prst="rect">
+            <a:avLst/>
+          </a:prstGeom>
+          <a:noFill/>
+        </p:spPr>
+        <p:txBody>
+          <a:bodyPr wrap="square" lIns="0" tIns="0" rIns="0" bIns="0" anchor="t">
+            <a:spAutoFit/>
+          </a:bodyPr>
+          <a:lstStyle/>
+          <a:p>
+            <a:pPr>
+              <a:spcAft>
+                <a:spcPts val="800"/>
+              </a:spcAft>
+            </a:pPr>
+            <a:r>
+              <a:rPr sz="1400">
+                <a:solidFill>
+                  <a:srgbClr val="23272D"/>
+                </a:solidFill>
+                <a:latin typeface="Aptos"/>
+              </a:rPr>
+              <a:t>Item-item cosine similarity.</a:t>
+            </a:r>
+          </a:p>
+          <a:p>
+            <a:pPr>
+              <a:spcAft>
+                <a:spcPts val="800"/>
+              </a:spcAft>
+            </a:pPr>
+            <a:r>
+              <a:rPr sz="1400">
+                <a:solidFill>
+                  <a:srgbClr val="23272D"/>
+                </a:solidFill>
+                <a:latin typeface="Aptos"/>
+              </a:rPr>
+              <a:t>Strong classical baseline for explicit ratings.</a:t>
+            </a:r>
+          </a:p>
+        </p:txBody>
+      </p:sp>
+      <p:sp>
+        <p:nvSpPr>
+          <p:cNvPr id="8" name="Rounded Rectangle 7"/>
+          <p:cNvSpPr/>
+          <p:nvPr/>
+        </p:nvSpPr>
+        <p:spPr>
+          <a:xfrm>
+            <a:off x="3337560" y="914400"/>
+            <a:ext cx="2743200" cy="1828800"/>
+          </a:xfrm>
+          <a:prstGeom prst="roundRect">
+            <a:avLst/>
+          </a:prstGeom>
+          <a:solidFill>
+            <a:srgbClr val="E5EDF8"/>
+          </a:solidFill>
+          <a:ln w="12700">
+            <a:solidFill>
+              <a:srgbClr val="112244"/>
+            </a:solidFill>
+          </a:ln>
+        </p:spPr>
+        <p:style>
+          <a:lnRef idx="1">
+            <a:schemeClr val="accent1"/>
+          </a:lnRef>
+          <a:fillRef idx="3">
+            <a:schemeClr val="accent1"/>
+          </a:fillRef>
+          <a:effectRef idx="2">
+            <a:schemeClr val="accent1"/>
+          </a:effectRef>
+          <a:fontRef idx="minor">
+            <a:schemeClr val="lt1"/>
+          </a:fontRef>
+        </p:style>
+        <p:txBody>
+          <a:bodyPr rtlCol="0" anchor="ctr"/>
+          <a:lstStyle/>
+          <a:p>
+            <a:pPr algn="ctr"/>
+            <a:endParaRPr/>
+          </a:p>
+        </p:txBody>
+      </p:sp>
+      <p:sp>
+        <p:nvSpPr>
+          <p:cNvPr id="9" name="TextBox 8"/>
+          <p:cNvSpPr txBox="1"/>
+          <p:nvPr/>
+        </p:nvSpPr>
+        <p:spPr>
+          <a:xfrm>
+            <a:off x="3465576" y="987552"/>
+            <a:ext cx="2487168" cy="256032"/>
+          </a:xfrm>
+          <a:prstGeom prst="rect">
+            <a:avLst/>
+          </a:prstGeom>
+          <a:noFill/>
+        </p:spPr>
+        <p:txBody>
+          <a:bodyPr wrap="none" anchor="t">
+            <a:spAutoFit/>
+          </a:bodyPr>
+          <a:lstStyle/>
+          <a:p>
+            <a:pPr algn="l"/>
+            <a:r>
+              <a:rPr sz="1900" b="1">
+                <a:solidFill>
+                  <a:srgbClr val="112244"/>
+                </a:solidFill>
+                <a:latin typeface="Cambria" panose="02040503050406030204"/>
+              </a:rPr>
+              <a:t>BiasedMF</a:t>
+            </a:r>
+          </a:p>
+        </p:txBody>
+      </p:sp>
+      <p:sp>
+        <p:nvSpPr>
+          <p:cNvPr id="10" name="TextBox 9"/>
+          <p:cNvSpPr txBox="1"/>
+          <p:nvPr/>
+        </p:nvSpPr>
+        <p:spPr>
+          <a:xfrm>
+            <a:off x="3447288" y="1325880"/>
+            <a:ext cx="2523744" cy="1353312"/>
+          </a:xfrm>
+          <a:prstGeom prst="rect">
+            <a:avLst/>
+          </a:prstGeom>
+          <a:noFill/>
+        </p:spPr>
+        <p:txBody>
+          <a:bodyPr wrap="square" lIns="0" tIns="0" rIns="0" bIns="0" anchor="t">
+            <a:spAutoFit/>
+          </a:bodyPr>
+          <a:lstStyle/>
+          <a:p>
+            <a:pPr>
+              <a:spcAft>
+                <a:spcPts val="800"/>
+              </a:spcAft>
+            </a:pPr>
+            <a:r>
+              <a:rPr sz="1400">
+                <a:solidFill>
+                  <a:srgbClr val="23272D"/>
+                </a:solidFill>
+                <a:latin typeface="Aptos"/>
+              </a:rPr>
+              <a:t>Matrix factorization with user/item bias terms.</a:t>
+            </a:r>
+          </a:p>
+          <a:p>
+            <a:pPr>
+              <a:spcAft>
+                <a:spcPts val="800"/>
+              </a:spcAft>
+            </a:pPr>
+            <a:r>
+              <a:rPr sz="1400">
+                <a:solidFill>
+                  <a:srgbClr val="23272D"/>
+                </a:solidFill>
+                <a:latin typeface="Aptos"/>
+              </a:rPr>
+              <a:t>Strong latent-factor baseline.</a:t>
+            </a:r>
+          </a:p>
+        </p:txBody>
+      </p:sp>
+      <p:sp>
+        <p:nvSpPr>
+          <p:cNvPr id="11" name="Rounded Rectangle 10"/>
+          <p:cNvSpPr/>
+          <p:nvPr/>
+        </p:nvSpPr>
+        <p:spPr>
+          <a:xfrm>
+            <a:off x="6217920" y="914400"/>
+            <a:ext cx="2743200" cy="1828800"/>
+          </a:xfrm>
+          <a:prstGeom prst="roundRect">
+            <a:avLst/>
+          </a:prstGeom>
+          <a:solidFill>
+            <a:srgbClr val="E5EDF8"/>
+          </a:solidFill>
+          <a:ln w="12700">
+            <a:solidFill>
+              <a:srgbClr val="112244"/>
+            </a:solidFill>
+          </a:ln>
+        </p:spPr>
+        <p:style>
+          <a:lnRef idx="1">
+            <a:schemeClr val="accent1"/>
+          </a:lnRef>
+          <a:fillRef idx="3">
+            <a:schemeClr val="accent1"/>
+          </a:fillRef>
+          <a:effectRef idx="2">
+            <a:schemeClr val="accent1"/>
+          </a:effectRef>
+          <a:fontRef idx="minor">
+            <a:schemeClr val="lt1"/>
+          </a:fontRef>
+        </p:style>
+        <p:txBody>
+          <a:bodyPr rtlCol="0" anchor="ctr"/>
+          <a:lstStyle/>
+          <a:p>
+            <a:pPr algn="ctr"/>
+            <a:endParaRPr/>
+          </a:p>
+        </p:txBody>
+      </p:sp>
+      <p:sp>
+        <p:nvSpPr>
+          <p:cNvPr id="12" name="TextBox 11"/>
+          <p:cNvSpPr txBox="1"/>
+          <p:nvPr/>
+        </p:nvSpPr>
+        <p:spPr>
+          <a:xfrm>
+            <a:off x="6345936" y="987552"/>
+            <a:ext cx="2487168" cy="256032"/>
+          </a:xfrm>
+          <a:prstGeom prst="rect">
+            <a:avLst/>
+          </a:prstGeom>
+          <a:noFill/>
+        </p:spPr>
+        <p:txBody>
+          <a:bodyPr wrap="none" anchor="t">
+            <a:spAutoFit/>
+          </a:bodyPr>
+          <a:lstStyle/>
+          <a:p>
+            <a:pPr algn="l"/>
+            <a:r>
+              <a:rPr sz="1900" b="1">
+                <a:solidFill>
+                  <a:srgbClr val="112244"/>
+                </a:solidFill>
+                <a:latin typeface="Cambria" panose="02040503050406030204"/>
+              </a:rPr>
+              <a:t>ClassicNeuMF</a:t>
+            </a:r>
+          </a:p>
+        </p:txBody>
+      </p:sp>
+      <p:sp>
+        <p:nvSpPr>
+          <p:cNvPr id="13" name="TextBox 12"/>
+          <p:cNvSpPr txBox="1"/>
+          <p:nvPr/>
+        </p:nvSpPr>
+        <p:spPr>
+          <a:xfrm>
+            <a:off x="6327648" y="1325880"/>
+            <a:ext cx="2523744" cy="1353312"/>
+          </a:xfrm>
+          <a:prstGeom prst="rect">
+            <a:avLst/>
+          </a:prstGeom>
+          <a:noFill/>
+        </p:spPr>
+        <p:txBody>
+          <a:bodyPr wrap="square" lIns="0" tIns="0" rIns="0" bIns="0" anchor="t">
+            <a:spAutoFit/>
+          </a:bodyPr>
+          <a:lstStyle/>
+          <a:p>
+            <a:pPr>
+              <a:spcAft>
+                <a:spcPts val="800"/>
+              </a:spcAft>
+            </a:pPr>
+            <a:r>
+              <a:rPr sz="1400">
+                <a:solidFill>
+                  <a:srgbClr val="23272D"/>
+                </a:solidFill>
+                <a:latin typeface="Aptos"/>
+              </a:rPr>
+              <a:t>GMF branch + MLP tower.</a:t>
+            </a:r>
+          </a:p>
+          <a:p>
+            <a:pPr>
+              <a:spcAft>
+                <a:spcPts val="800"/>
+              </a:spcAft>
+            </a:pPr>
+            <a:r>
+              <a:rPr sz="1400">
+                <a:solidFill>
+                  <a:srgbClr val="23272D"/>
+                </a:solidFill>
+                <a:latin typeface="Aptos"/>
+              </a:rPr>
+              <a:t>Neural baseline without flow regularization.</a:t>
+            </a:r>
+          </a:p>
+        </p:txBody>
+      </p:sp>
+      <p:sp>
+        <p:nvSpPr>
+          <p:cNvPr id="14" name="Rounded Rectangle 13"/>
+          <p:cNvSpPr/>
+          <p:nvPr/>
+        </p:nvSpPr>
+        <p:spPr>
+          <a:xfrm>
+            <a:off x="9098280" y="914400"/>
+            <a:ext cx="2606040" cy="1828800"/>
+          </a:xfrm>
+          <a:prstGeom prst="roundRect">
+            <a:avLst/>
+          </a:prstGeom>
+          <a:solidFill>
+            <a:srgbClr val="F6E0DE"/>
+          </a:solidFill>
+          <a:ln w="12700">
+            <a:solidFill>
+              <a:srgbClr val="112244"/>
+            </a:solidFill>
+          </a:ln>
+        </p:spPr>
+        <p:style>
+          <a:lnRef idx="1">
+            <a:schemeClr val="accent1"/>
+          </a:lnRef>
+          <a:fillRef idx="3">
+            <a:schemeClr val="accent1"/>
+          </a:fillRef>
+          <a:effectRef idx="2">
+            <a:schemeClr val="accent1"/>
+          </a:effectRef>
+          <a:fontRef idx="minor">
+            <a:schemeClr val="lt1"/>
+          </a:fontRef>
+        </p:style>
+        <p:txBody>
+          <a:bodyPr rtlCol="0" anchor="ctr"/>
+          <a:lstStyle/>
+          <a:p>
+            <a:pPr algn="ctr"/>
+            <a:endParaRPr/>
+          </a:p>
+        </p:txBody>
+      </p:sp>
+      <p:sp>
+        <p:nvSpPr>
+          <p:cNvPr id="15" name="TextBox 14"/>
+          <p:cNvSpPr txBox="1"/>
+          <p:nvPr/>
+        </p:nvSpPr>
+        <p:spPr>
+          <a:xfrm>
+            <a:off x="9226296" y="987552"/>
+            <a:ext cx="2350008" cy="256032"/>
+          </a:xfrm>
+          <a:prstGeom prst="rect">
+            <a:avLst/>
+          </a:prstGeom>
+          <a:noFill/>
+        </p:spPr>
+        <p:txBody>
+          <a:bodyPr wrap="none" anchor="t">
+            <a:spAutoFit/>
+          </a:bodyPr>
+          <a:lstStyle/>
+          <a:p>
+            <a:pPr algn="l"/>
+            <a:r>
+              <a:rPr sz="1900" b="1">
+                <a:solidFill>
+                  <a:srgbClr val="112244"/>
+                </a:solidFill>
+                <a:latin typeface="Cambria" panose="02040503050406030204"/>
+              </a:rPr>
+              <a:t>FlowRanking</a:t>
+            </a:r>
+          </a:p>
+        </p:txBody>
+      </p:sp>
+      <p:sp>
+        <p:nvSpPr>
+          <p:cNvPr id="16" name="TextBox 15"/>
+          <p:cNvSpPr txBox="1"/>
+          <p:nvPr/>
+        </p:nvSpPr>
+        <p:spPr>
+          <a:xfrm>
+            <a:off x="9208008" y="1325880"/>
+            <a:ext cx="2386584" cy="1353312"/>
+          </a:xfrm>
+          <a:prstGeom prst="rect">
+            <a:avLst/>
+          </a:prstGeom>
+          <a:noFill/>
+        </p:spPr>
+        <p:txBody>
+          <a:bodyPr wrap="square" lIns="0" tIns="0" rIns="0" bIns="0" anchor="t">
+            <a:spAutoFit/>
+          </a:bodyPr>
+          <a:lstStyle/>
+          <a:p>
+            <a:r>
+              <a:t>Final hybrid system.</a:t>
+            </a:r>
+          </a:p>
+          <a:p>
+            <a:r>
+              <a:t>Calibrated ItemCF ratings; fused MF/ItemCF Top-10 ranking.</a:t>
+            </a:r>
+          </a:p>
+        </p:txBody>
+      </p:sp>
+      <p:sp>
+        <p:nvSpPr>
+          <p:cNvPr id="18" name="TextBox 17"/>
+          <p:cNvSpPr txBox="1"/>
+          <p:nvPr/>
+        </p:nvSpPr>
+        <p:spPr>
+          <a:xfrm>
+            <a:off x="411480" y="6446520"/>
+            <a:ext cx="5131918" cy="369332"/>
+          </a:xfrm>
+          <a:prstGeom prst="rect">
+            <a:avLst/>
+          </a:prstGeom>
+          <a:noFill/>
+        </p:spPr>
+        <p:txBody>
+          <a:bodyPr wrap="none" anchor="t">
+            <a:spAutoFit/>
+          </a:bodyPr>
+          <a:lstStyle/>
+          <a:p>
+            <a:r>
+              <a:rPr dirty="0"/>
+              <a:t>Flow Ranking | Sen Fang | CS550 Final Project | 6</a:t>
+            </a:r>
+            <a:r>
+              <a:rPr lang="en-US" dirty="0"/>
+              <a:t>/11</a:t>
+            </a:r>
+            <a:endParaRPr dirty="0"/>
+          </a:p>
+        </p:txBody>
+      </p:sp>
+      <p:pic>
+        <p:nvPicPr>
+          <p:cNvPr id="19" name="Picture 18" descr="academic_4_flowranking.png"/>
+          <p:cNvPicPr>
+            <a:picLocks noChangeAspect="1"/>
+          </p:cNvPicPr>
+          <p:nvPr/>
+        </p:nvPicPr>
+        <p:blipFill>
+          <a:blip r:embed="rId2"/>
+          <a:stretch>
+            <a:fillRect/>
+          </a:stretch>
+        </p:blipFill>
+        <p:spPr>
+          <a:xfrm>
+            <a:off x="548640" y="3020000"/>
+            <a:ext cx="11100000" cy="2812058"/>
+          </a:xfrm>
+          <a:prstGeom prst="rect">
+            <a:avLst/>
+          </a:prstGeom>
+        </p:spPr>
+      </p:pic>
+    </p:spTree>
+  </p:cSld>
+  <p:clrMapOvr>
+    <a:masterClrMapping/>
+  </p:clrMapOvr>
+</p:sld>
+</file>
+
+<file path=ppt/slides/slide7.xml><?xml version="1.0" encoding="utf-8"?>
+<p:sld xmlns:a="http://schemas.openxmlformats.org/drawingml/2006/main" xmlns:r="http://schemas.openxmlformats.org/officeDocument/2006/relationships" xmlns:p="http://schemas.openxmlformats.org/presentationml/2006/main">
+  <p:cSld>
+    <p:spTree>
+      <p:nvGrpSpPr>
+        <p:cNvPr id="1" name=""/>
+        <p:cNvGrpSpPr/>
+        <p:nvPr/>
+      </p:nvGrpSpPr>
+      <p:grpSpPr>
+        <a:xfrm>
+          <a:off x="0" y="0"/>
+          <a:ext cx="0" cy="0"/>
+          <a:chOff x="0" y="0"/>
+          <a:chExt cx="0" cy="0"/>
+        </a:xfrm>
+      </p:grpSpPr>
+      <p:sp>
+        <p:nvSpPr>
+          <p:cNvPr id="2" name="Rectangle 1"/>
+          <p:cNvSpPr/>
+          <p:nvPr/>
+        </p:nvSpPr>
+        <p:spPr>
+          <a:xfrm>
+            <a:off x="0" y="0"/>
+            <a:ext cx="12191695" cy="475488"/>
+          </a:xfrm>
+          <a:prstGeom prst="rect">
+            <a:avLst/>
+          </a:prstGeom>
+          <a:solidFill>
+            <a:srgbClr val="112244"/>
+          </a:solidFill>
+          <a:ln>
+            <a:noFill/>
+          </a:ln>
+        </p:spPr>
+        <p:style>
+          <a:lnRef idx="1">
+            <a:schemeClr val="accent1"/>
+          </a:lnRef>
+          <a:fillRef idx="3">
+            <a:schemeClr val="accent1"/>
+          </a:fillRef>
+          <a:effectRef idx="2">
+            <a:schemeClr val="accent1"/>
+          </a:effectRef>
+          <a:fontRef idx="minor">
+            <a:schemeClr val="lt1"/>
+          </a:fontRef>
+        </p:style>
+        <p:txBody>
+          <a:bodyPr rtlCol="0" anchor="ctr"/>
+          <a:lstStyle/>
+          <a:p>
+            <a:pPr algn="ctr"/>
+            <a:endParaRPr/>
+          </a:p>
+        </p:txBody>
+      </p:sp>
+      <p:sp>
+        <p:nvSpPr>
+          <p:cNvPr id="3" name="TextBox 2"/>
+          <p:cNvSpPr txBox="1"/>
+          <p:nvPr/>
+        </p:nvSpPr>
+        <p:spPr>
+          <a:xfrm>
+            <a:off x="411480" y="64008"/>
+            <a:ext cx="7132320" cy="237744"/>
+          </a:xfrm>
+          <a:prstGeom prst="rect">
+            <a:avLst/>
+          </a:prstGeom>
+          <a:noFill/>
+        </p:spPr>
+        <p:txBody>
+          <a:bodyPr wrap="none" anchor="t">
+            <a:spAutoFit/>
+          </a:bodyPr>
+          <a:lstStyle/>
+          <a:p>
+            <a:pPr algn="l"/>
+            <a:r>
+              <a:rPr sz="2600" b="1">
+                <a:solidFill>
+                  <a:srgbClr val="FFFFFF"/>
+                </a:solidFill>
+                <a:latin typeface="Cambria" panose="02040503050406030204"/>
+              </a:rPr>
+              <a:t>Compared Methods</a:t>
+            </a:r>
+          </a:p>
+        </p:txBody>
+      </p:sp>
+      <p:sp>
+        <p:nvSpPr>
+          <p:cNvPr id="4" name="TextBox 3"/>
+          <p:cNvSpPr txBox="1"/>
+          <p:nvPr/>
+        </p:nvSpPr>
+        <p:spPr>
+          <a:xfrm>
+            <a:off x="7909560" y="91440"/>
+            <a:ext cx="3840480" cy="182880"/>
+          </a:xfrm>
+          <a:prstGeom prst="rect">
+            <a:avLst/>
+          </a:prstGeom>
+          <a:noFill/>
+        </p:spPr>
+        <p:txBody>
+          <a:bodyPr wrap="none" anchor="t">
+            <a:spAutoFit/>
+          </a:bodyPr>
+          <a:lstStyle/>
+          <a:p>
+            <a:pPr algn="r"/>
+            <a:r>
+              <a:rPr sz="1100" b="0">
+                <a:solidFill>
+                  <a:srgbClr val="FFFFFF"/>
+                </a:solidFill>
+                <a:latin typeface="Aptos"/>
+              </a:rPr>
+              <a:t>From classical baselines to the final hybrid system</a:t>
+            </a:r>
+          </a:p>
+        </p:txBody>
+      </p:sp>
+      <p:sp>
+        <p:nvSpPr>
+          <p:cNvPr id="18" name="TextBox 17"/>
+          <p:cNvSpPr txBox="1"/>
+          <p:nvPr/>
+        </p:nvSpPr>
+        <p:spPr>
+          <a:xfrm>
+            <a:off x="411480" y="6446520"/>
+            <a:ext cx="5131918" cy="369332"/>
+          </a:xfrm>
+          <a:prstGeom prst="rect">
+            <a:avLst/>
+          </a:prstGeom>
+          <a:noFill/>
+        </p:spPr>
+        <p:txBody>
+          <a:bodyPr wrap="none" anchor="t">
+            <a:spAutoFit/>
+          </a:bodyPr>
+          <a:lstStyle/>
+          <a:p>
+            <a:r>
+              <a:rPr dirty="0"/>
+              <a:t>Flow Ranking | Sen Fang | CS550 Final Project | 7</a:t>
+            </a:r>
+            <a:r>
+              <a:rPr lang="en-US" dirty="0"/>
+              <a:t>/11</a:t>
+            </a:r>
+            <a:endParaRPr dirty="0"/>
+          </a:p>
+        </p:txBody>
+      </p:sp>
+      <p:pic>
+        <p:nvPicPr>
+          <p:cNvPr id="19" name="Picture 18" descr="academic_5_difference.png"/>
+          <p:cNvPicPr>
+            <a:picLocks noChangeAspect="1"/>
+          </p:cNvPicPr>
+          <p:nvPr/>
+        </p:nvPicPr>
+        <p:blipFill>
+          <a:blip r:embed="rId2"/>
+          <a:stretch>
+            <a:fillRect/>
+          </a:stretch>
+        </p:blipFill>
+        <p:spPr>
+          <a:xfrm>
+            <a:off x="411480" y="3124013"/>
+            <a:ext cx="11100000" cy="2812058"/>
+          </a:xfrm>
+          <a:prstGeom prst="rect">
+            <a:avLst/>
+          </a:prstGeom>
+        </p:spPr>
+      </p:pic>
+      <p:pic>
+        <p:nvPicPr>
+          <p:cNvPr id="1026" name="Picture 2" descr="image">
+            <a:extLst>
+              <a:ext uri="{FF2B5EF4-FFF2-40B4-BE49-F238E27FC236}">
+                <a16:creationId xmlns:a16="http://schemas.microsoft.com/office/drawing/2014/main" id="{06418EA7-EE84-268C-2BA7-3B0918E6E9A1}"/>
+              </a:ext>
+            </a:extLst>
+          </p:cNvPr>
+          <p:cNvPicPr>
+            <a:picLocks noChangeAspect="1" noChangeArrowheads="1"/>
+          </p:cNvPicPr>
+          <p:nvPr/>
+        </p:nvPicPr>
+        <p:blipFill>
+          <a:blip r:embed="rId3">
+            <a:extLst>
+              <a:ext uri="{28A0092B-C50C-407E-A947-70E740481C1C}">
+                <a14:useLocalDpi xmlns:a14="http://schemas.microsoft.com/office/drawing/2010/main" val="0"/>
+              </a:ext>
+            </a:extLst>
+          </a:blip>
+          <a:srcRect/>
+          <a:stretch>
+            <a:fillRect/>
+          </a:stretch>
+        </p:blipFill>
+        <p:spPr bwMode="auto">
+          <a:xfrm>
+            <a:off x="2829831" y="642937"/>
+            <a:ext cx="5427133" cy="2481076"/>
+          </a:xfrm>
+          <a:prstGeom prst="rect">
+            <a:avLst/>
+          </a:prstGeom>
+          <a:noFill/>
+          <a:extLst>
+            <a:ext uri="{909E8E84-426E-40DD-AFC4-6F175D3DCCD1}">
+              <a14:hiddenFill xmlns:a14="http://schemas.microsoft.com/office/drawing/2010/main">
+                <a:solidFill>
+                  <a:srgbClr val="FFFFFF"/>
+                </a:solidFill>
+              </a14:hiddenFill>
+            </a:ext>
+          </a:extLst>
+        </p:spPr>
+      </p:pic>
+      <p:sp>
+        <p:nvSpPr>
+          <p:cNvPr id="17" name="椭圆 16">
+            <a:extLst>
+              <a:ext uri="{FF2B5EF4-FFF2-40B4-BE49-F238E27FC236}">
+                <a16:creationId xmlns:a16="http://schemas.microsoft.com/office/drawing/2014/main" id="{CB2EA9A9-AD3D-13DD-D3C3-3406810B31FC}"/>
+              </a:ext>
+            </a:extLst>
+          </p:cNvPr>
+          <p:cNvSpPr/>
+          <p:nvPr/>
+        </p:nvSpPr>
+        <p:spPr>
+          <a:xfrm>
+            <a:off x="3039533" y="1424317"/>
+            <a:ext cx="1032934" cy="914400"/>
+          </a:xfrm>
+          <a:prstGeom prst="ellipse">
+            <a:avLst/>
+          </a:prstGeom>
+        </p:spPr>
+        <p:style>
+          <a:lnRef idx="1">
+            <a:schemeClr val="accent1"/>
+          </a:lnRef>
+          <a:fillRef idx="3">
+            <a:schemeClr val="accent1"/>
+          </a:fillRef>
+          <a:effectRef idx="2">
+            <a:schemeClr val="accent1"/>
+          </a:effectRef>
+          <a:fontRef idx="minor">
+            <a:schemeClr val="lt1"/>
+          </a:fontRef>
+        </p:style>
+        <p:txBody>
+          <a:bodyPr rtlCol="0" anchor="ctr"/>
+          <a:lstStyle/>
+          <a:p>
+            <a:pPr algn="ctr"/>
+            <a:r>
+              <a:rPr lang="en-US" altLang="zh-CN" dirty="0"/>
+              <a:t>Users</a:t>
+            </a:r>
+          </a:p>
+          <a:p>
+            <a:pPr algn="ctr"/>
+            <a:r>
+              <a:rPr lang="en-US" altLang="zh-CN" dirty="0"/>
+              <a:t>Info</a:t>
+            </a:r>
+            <a:endParaRPr lang="en-US" dirty="0"/>
+          </a:p>
+        </p:txBody>
+      </p:sp>
+      <p:sp>
+        <p:nvSpPr>
+          <p:cNvPr id="20" name="椭圆 19">
+            <a:extLst>
+              <a:ext uri="{FF2B5EF4-FFF2-40B4-BE49-F238E27FC236}">
+                <a16:creationId xmlns:a16="http://schemas.microsoft.com/office/drawing/2014/main" id="{55D9F02C-4831-9560-5E8B-225B77D6E001}"/>
+              </a:ext>
+            </a:extLst>
+          </p:cNvPr>
+          <p:cNvSpPr/>
+          <p:nvPr/>
+        </p:nvSpPr>
+        <p:spPr>
+          <a:xfrm>
+            <a:off x="7027333" y="1424317"/>
+            <a:ext cx="1032934" cy="914400"/>
+          </a:xfrm>
+          <a:prstGeom prst="ellipse">
+            <a:avLst/>
+          </a:prstGeom>
+        </p:spPr>
+        <p:style>
+          <a:lnRef idx="2">
+            <a:schemeClr val="accent6">
+              <a:shade val="15000"/>
+            </a:schemeClr>
+          </a:lnRef>
+          <a:fillRef idx="1">
+            <a:schemeClr val="accent6"/>
+          </a:fillRef>
+          <a:effectRef idx="0">
+            <a:schemeClr val="accent6"/>
+          </a:effectRef>
+          <a:fontRef idx="minor">
+            <a:schemeClr val="lt1"/>
+          </a:fontRef>
+        </p:style>
+        <p:txBody>
+          <a:bodyPr rtlCol="0" anchor="ctr"/>
+          <a:lstStyle/>
+          <a:p>
+            <a:pPr algn="ctr"/>
+            <a:r>
+              <a:rPr lang="en-US" altLang="zh-CN" dirty="0"/>
+              <a:t>Users</a:t>
+            </a:r>
+          </a:p>
+          <a:p>
+            <a:pPr algn="ctr"/>
+            <a:r>
+              <a:rPr lang="en-US" altLang="zh-CN" dirty="0"/>
+              <a:t>Pref</a:t>
+            </a:r>
+            <a:endParaRPr lang="en-US" dirty="0"/>
+          </a:p>
+        </p:txBody>
+      </p:sp>
+    </p:spTree>
+  </p:cSld>
+  <p:clrMapOvr>
+    <a:masterClrMapping/>
+  </p:clrMapOvr>
+</p:sld>
+</file>
+
+<file path=ppt/slides/slide8.xml><?xml version="1.0" encoding="utf-8"?>
 <p:sld xmlns:a="http://schemas.openxmlformats.org/drawingml/2006/main" xmlns:r="http://schemas.openxmlformats.org/officeDocument/2006/relationships" xmlns:p="http://schemas.openxmlformats.org/presentationml/2006/main">
   <p:cSld>
     <p:bg>
@@ -4436,7 +8266,14 @@
         <p:cNvGrpSpPr/>
         <p:nvPr/>
       </p:nvGrpSpPr>
-      <p:grpSpPr/>
+      <p:grpSpPr>
+        <a:xfrm>
+          <a:off x="0" y="0"/>
+          <a:ext cx="0" cy="0"/>
+          <a:chOff x="0" y="0"/>
+          <a:chExt cx="0" cy="0"/>
+        </a:xfrm>
+      </p:grpSpPr>
       <p:sp>
         <p:nvSpPr>
           <p:cNvPr id="2" name="Rectangle 1"/>
@@ -4477,6 +8314,7 @@
           <a:lstStyle/>
           <a:p>
             <a:pPr algn="ctr"/>
+            <a:endParaRPr/>
           </a:p>
         </p:txBody>
       </p:sp>
@@ -4510,14 +8348,8 @@
                 </a:solidFill>
                 <a:latin typeface="Cambria" panose="02040503050406030204"/>
               </a:rPr>
-              <a:t>Compared Methods</a:t>
-            </a:r>
-            <a:endParaRPr sz="2600" b="1">
-              <a:solidFill>
-                <a:srgbClr val="FFFFFF"/>
-              </a:solidFill>
-              <a:latin typeface="Cambria" panose="02040503050406030204"/>
-            </a:endParaRPr>
+              <a:t>Critical Debugging: Evaluation Repair</a:t>
+            </a:r>
           </a:p>
         </p:txBody>
       </p:sp>
@@ -4551,37 +8383,157 @@
                 </a:solidFill>
                 <a:latin typeface="Aptos"/>
               </a:rPr>
-              <a:t>From classical baselines to the final hybrid system</a:t>
-            </a:r>
-            <a:endParaRPr sz="1100" b="0">
+              <a:t>Why the first ranking plots looked wrong</a:t>
+            </a:r>
+          </a:p>
+        </p:txBody>
+      </p:sp>
+      <p:sp>
+        <p:nvSpPr>
+          <p:cNvPr id="5" name="TextBox 4"/>
+          <p:cNvSpPr txBox="1"/>
+          <p:nvPr/>
+        </p:nvSpPr>
+        <p:spPr>
+          <a:xfrm>
+            <a:off x="548640" y="1366647"/>
+            <a:ext cx="5577840" cy="4124325"/>
+          </a:xfrm>
+          <a:prstGeom prst="rect">
+            <a:avLst/>
+          </a:prstGeom>
+          <a:noFill/>
+        </p:spPr>
+        <p:txBody>
+          <a:bodyPr wrap="square" lIns="0" tIns="0" rIns="0" bIns="0" anchor="t">
+            <a:spAutoFit/>
+          </a:bodyPr>
+          <a:lstStyle/>
+          <a:p>
+            <a:pPr>
+              <a:spcAft>
+                <a:spcPts val="800"/>
+              </a:spcAft>
+            </a:pPr>
+            <a:r>
+              <a:rPr sz="1900">
+                <a:solidFill>
+                  <a:srgbClr val="23272D"/>
+                </a:solidFill>
+                <a:latin typeface="Aptos"/>
+              </a:rPr>
+              <a:t>Earlier Top-10 evaluation treated every held-out movie as relevant, including low-rated ones.</a:t>
+            </a:r>
+          </a:p>
+          <a:p>
+            <a:pPr>
+              <a:spcAft>
+                <a:spcPts val="800"/>
+              </a:spcAft>
+            </a:pPr>
+            <a:endParaRPr sz="1900">
               <a:solidFill>
-                <a:srgbClr val="FFFFFF"/>
+                <a:srgbClr val="23272D"/>
               </a:solidFill>
               <a:latin typeface="Aptos"/>
             </a:endParaRPr>
           </a:p>
-        </p:txBody>
-      </p:sp>
-      <p:sp>
-        <p:nvSpPr>
-          <p:cNvPr id="5" name="Rounded Rectangle 4"/>
+          <a:p>
+            <a:pPr>
+              <a:spcAft>
+                <a:spcPts val="800"/>
+              </a:spcAft>
+            </a:pPr>
+            <a:r>
+              <a:rPr sz="1900">
+                <a:solidFill>
+                  <a:srgbClr val="23272D"/>
+                </a:solidFill>
+                <a:latin typeface="Aptos"/>
+              </a:rPr>
+              <a:t>That was inconsistent with the final ranking protocol, which should evaluate only genuinely liked held-out movies.</a:t>
+            </a:r>
+          </a:p>
+          <a:p>
+            <a:pPr>
+              <a:spcAft>
+                <a:spcPts val="800"/>
+              </a:spcAft>
+            </a:pPr>
+            <a:endParaRPr sz="1900">
+              <a:solidFill>
+                <a:srgbClr val="23272D"/>
+              </a:solidFill>
+              <a:latin typeface="Aptos"/>
+            </a:endParaRPr>
+          </a:p>
+          <a:p>
+            <a:pPr>
+              <a:spcAft>
+                <a:spcPts val="800"/>
+              </a:spcAft>
+            </a:pPr>
+            <a:r>
+              <a:rPr sz="1900">
+                <a:solidFill>
+                  <a:srgbClr val="23272D"/>
+                </a:solidFill>
+                <a:latin typeface="Aptos"/>
+              </a:rPr>
+              <a:t>The repaired protocol defines relevance as held-out ratings &gt;= 4.0.</a:t>
+            </a:r>
+          </a:p>
+          <a:p>
+            <a:pPr>
+              <a:spcAft>
+                <a:spcPts val="800"/>
+              </a:spcAft>
+            </a:pPr>
+            <a:endParaRPr sz="1900">
+              <a:solidFill>
+                <a:srgbClr val="23272D"/>
+              </a:solidFill>
+              <a:latin typeface="Aptos"/>
+            </a:endParaRPr>
+          </a:p>
+          <a:p>
+            <a:pPr>
+              <a:spcAft>
+                <a:spcPts val="800"/>
+              </a:spcAft>
+            </a:pPr>
+            <a:r>
+              <a:rPr sz="1900">
+                <a:solidFill>
+                  <a:srgbClr val="23272D"/>
+                </a:solidFill>
+                <a:latin typeface="Aptos"/>
+              </a:rPr>
+              <a:t>The final protocol reports rating prediction and Top-10 ranking separately, then combines their strongest components in FlowRanking.</a:t>
+            </a:r>
+          </a:p>
+        </p:txBody>
+      </p:sp>
+      <p:sp>
+        <p:nvSpPr>
+          <p:cNvPr id="6" name="Rounded Rectangle 5"/>
           <p:cNvSpPr/>
           <p:nvPr/>
         </p:nvSpPr>
         <p:spPr>
           <a:xfrm>
-            <a:off x="457200" y="914400"/>
-            <a:ext cx="2743200" cy="1828800"/>
+            <a:off x="6537960" y="1051560"/>
+            <a:ext cx="4663440" cy="2103120"/>
           </a:xfrm>
           <a:prstGeom prst="roundRect">
             <a:avLst/>
           </a:prstGeom>
           <a:solidFill>
-            <a:srgbClr val="E5EDF8"/>
+            <a:srgbClr val="FFFFFF"/>
           </a:solidFill>
-          <a:ln w="12700">
+          <a:ln w="15240">
             <a:solidFill>
-              <a:srgbClr val="112244"/>
+              <a:srgbClr val="B38E4A"/>
             </a:solidFill>
           </a:ln>
         </p:spPr>
@@ -4604,19 +8556,20 @@
           <a:lstStyle/>
           <a:p>
             <a:pPr algn="ctr"/>
-          </a:p>
-        </p:txBody>
-      </p:sp>
-      <p:sp>
-        <p:nvSpPr>
-          <p:cNvPr id="6" name="TextBox 5"/>
+            <a:endParaRPr/>
+          </a:p>
+        </p:txBody>
+      </p:sp>
+      <p:sp>
+        <p:nvSpPr>
+          <p:cNvPr id="7" name="TextBox 6"/>
           <p:cNvSpPr txBox="1"/>
           <p:nvPr/>
         </p:nvSpPr>
         <p:spPr>
           <a:xfrm>
-            <a:off x="585216" y="987552"/>
-            <a:ext cx="2487168" cy="256032"/>
+            <a:off x="6766560" y="1234440"/>
+            <a:ext cx="4138507" cy="2308324"/>
           </a:xfrm>
           <a:prstGeom prst="rect">
             <a:avLst/>
@@ -4624,67 +8577,44 @@
           <a:noFill/>
         </p:spPr>
         <p:txBody>
-          <a:bodyPr wrap="none" anchor="t">
+          <a:bodyPr wrap="square" anchor="t">
             <a:spAutoFit/>
           </a:bodyPr>
           <a:lstStyle/>
           <a:p>
             <a:pPr algn="l"/>
             <a:r>
-              <a:rPr sz="1900" b="1">
-                <a:solidFill>
-                  <a:srgbClr val="112244"/>
-                </a:solidFill>
-                <a:latin typeface="Cambria" panose="02040503050406030204"/>
-              </a:rPr>
-              <a:t>ItemCF</a:t>
-            </a:r>
-            <a:endParaRPr sz="1900" b="1">
-              <a:solidFill>
-                <a:srgbClr val="112244"/>
-              </a:solidFill>
-              <a:latin typeface="Cambria" panose="02040503050406030204"/>
-            </a:endParaRPr>
-          </a:p>
-        </p:txBody>
-      </p:sp>
-      <p:sp>
-        <p:nvSpPr>
-          <p:cNvPr id="7" name="TextBox 6"/>
-          <p:cNvSpPr txBox="1"/>
-          <p:nvPr/>
-        </p:nvSpPr>
-        <p:spPr>
-          <a:xfrm>
-            <a:off x="566928" y="1325880"/>
-            <a:ext cx="2523744" cy="1353312"/>
-          </a:xfrm>
-          <a:prstGeom prst="rect">
-            <a:avLst/>
-          </a:prstGeom>
-          <a:noFill/>
-        </p:spPr>
-        <p:txBody>
-          <a:bodyPr wrap="square" lIns="0" tIns="0" rIns="0" bIns="0" anchor="t">
-            <a:spAutoFit/>
-          </a:bodyPr>
-          <a:lstStyle/>
-          <a:p>
-            <a:pPr>
-              <a:spcAft>
-                <a:spcPts val="800"/>
-              </a:spcAft>
-            </a:pPr>
-            <a:r>
-              <a:rPr sz="1400">
+              <a:rPr sz="1800" b="0" dirty="0">
                 <a:solidFill>
                   <a:srgbClr val="23272D"/>
                 </a:solidFill>
                 <a:latin typeface="Aptos"/>
               </a:rPr>
-              <a:t>Item-item cosine similarity.</a:t>
-            </a:r>
-            <a:endParaRPr sz="1400">
+              <a:t>Effect of the repair:
+The charts now compare only the public models and show </a:t>
+            </a:r>
+            <a:r>
+              <a:rPr sz="1800" b="0" dirty="0" err="1">
+                <a:solidFill>
+                  <a:srgbClr val="23272D"/>
+                </a:solidFill>
+                <a:latin typeface="Aptos"/>
+              </a:rPr>
+              <a:t>FlowRanking</a:t>
+            </a:r>
+            <a:r>
+              <a:rPr sz="1800" b="0" dirty="0">
+                <a:solidFill>
+                  <a:srgbClr val="23272D"/>
+                </a:solidFill>
+                <a:latin typeface="Aptos"/>
+              </a:rPr>
+              <a:t> as the final combined system.</a:t>
+            </a:r>
+          </a:p>
+          <a:p>
+            <a:pPr algn="l"/>
+            <a:endParaRPr sz="1800" b="0" dirty="0">
               <a:solidFill>
                 <a:srgbClr val="23272D"/>
               </a:solidFill>
@@ -4692,237 +8622,59 @@
             </a:endParaRPr>
           </a:p>
           <a:p>
-            <a:pPr>
-              <a:spcAft>
-                <a:spcPts val="800"/>
-              </a:spcAft>
-            </a:pPr>
-            <a:r>
-              <a:rPr sz="1400">
-                <a:solidFill>
-                  <a:srgbClr val="23272D"/>
-                </a:solidFill>
-                <a:latin typeface="Aptos"/>
-              </a:rPr>
-              <a:t>Strong classical baseline for explicit ratings.</a:t>
-            </a:r>
-            <a:endParaRPr sz="1400">
+            <a:pPr algn="l"/>
+            <a:endParaRPr sz="1800" b="0" dirty="0">
               <a:solidFill>
                 <a:srgbClr val="23272D"/>
               </a:solidFill>
               <a:latin typeface="Aptos"/>
             </a:endParaRPr>
           </a:p>
-        </p:txBody>
-      </p:sp>
-      <p:sp>
-        <p:nvSpPr>
-          <p:cNvPr id="8" name="Rounded Rectangle 7"/>
-          <p:cNvSpPr/>
-          <p:nvPr/>
-        </p:nvSpPr>
-        <p:spPr>
-          <a:xfrm>
-            <a:off x="3337560" y="914400"/>
-            <a:ext cx="2743200" cy="1828800"/>
-          </a:xfrm>
-          <a:prstGeom prst="roundRect">
-            <a:avLst/>
-          </a:prstGeom>
-          <a:solidFill>
-            <a:srgbClr val="E5EDF8"/>
-          </a:solidFill>
-          <a:ln w="12700">
-            <a:solidFill>
-              <a:srgbClr val="112244"/>
-            </a:solidFill>
-          </a:ln>
-        </p:spPr>
-        <p:style>
-          <a:lnRef idx="1">
-            <a:schemeClr val="accent1"/>
-          </a:lnRef>
-          <a:fillRef idx="3">
-            <a:schemeClr val="accent1"/>
-          </a:fillRef>
-          <a:effectRef idx="2">
-            <a:schemeClr val="accent1"/>
-          </a:effectRef>
-          <a:fontRef idx="minor">
-            <a:schemeClr val="lt1"/>
-          </a:fontRef>
-        </p:style>
-        <p:txBody>
-          <a:bodyPr rtlCol="0" anchor="ctr"/>
-          <a:lstStyle/>
-          <a:p>
-            <a:pPr algn="ctr"/>
-          </a:p>
-        </p:txBody>
-      </p:sp>
-      <p:sp>
-        <p:nvSpPr>
-          <p:cNvPr id="9" name="TextBox 8"/>
-          <p:cNvSpPr txBox="1"/>
-          <p:nvPr/>
-        </p:nvSpPr>
-        <p:spPr>
-          <a:xfrm>
-            <a:off x="3465576" y="987552"/>
-            <a:ext cx="2487168" cy="256032"/>
-          </a:xfrm>
-          <a:prstGeom prst="rect">
-            <a:avLst/>
-          </a:prstGeom>
-          <a:noFill/>
-        </p:spPr>
-        <p:txBody>
-          <a:bodyPr wrap="none" anchor="t">
-            <a:spAutoFit/>
-          </a:bodyPr>
-          <a:lstStyle/>
           <a:p>
             <a:pPr algn="l"/>
-            <a:r>
-              <a:rPr sz="1900" b="1">
-                <a:solidFill>
-                  <a:srgbClr val="112244"/>
-                </a:solidFill>
-                <a:latin typeface="Cambria" panose="02040503050406030204"/>
-              </a:rPr>
-              <a:t>BiasedMF</a:t>
-            </a:r>
-            <a:endParaRPr sz="1900" b="1">
-              <a:solidFill>
-                <a:srgbClr val="112244"/>
-              </a:solidFill>
-              <a:latin typeface="Cambria" panose="02040503050406030204"/>
-            </a:endParaRPr>
-          </a:p>
-        </p:txBody>
-      </p:sp>
-      <p:sp>
-        <p:nvSpPr>
-          <p:cNvPr id="10" name="TextBox 9"/>
-          <p:cNvSpPr txBox="1"/>
-          <p:nvPr/>
-        </p:nvSpPr>
-        <p:spPr>
-          <a:xfrm>
-            <a:off x="3447288" y="1325880"/>
-            <a:ext cx="2523744" cy="1353312"/>
-          </a:xfrm>
-          <a:prstGeom prst="rect">
-            <a:avLst/>
-          </a:prstGeom>
-          <a:noFill/>
-        </p:spPr>
-        <p:txBody>
-          <a:bodyPr wrap="square" lIns="0" tIns="0" rIns="0" bIns="0" anchor="t">
-            <a:spAutoFit/>
-          </a:bodyPr>
-          <a:lstStyle/>
-          <a:p>
-            <a:pPr>
-              <a:spcAft>
-                <a:spcPts val="800"/>
-              </a:spcAft>
-            </a:pPr>
-            <a:r>
-              <a:rPr sz="1400">
-                <a:solidFill>
-                  <a:srgbClr val="23272D"/>
-                </a:solidFill>
-                <a:latin typeface="Aptos"/>
-              </a:rPr>
-              <a:t>Matrix factorization with user/item bias terms.</a:t>
-            </a:r>
-            <a:endParaRPr sz="1400">
+            <a:endParaRPr sz="1800" b="0" dirty="0">
               <a:solidFill>
                 <a:srgbClr val="23272D"/>
               </a:solidFill>
               <a:latin typeface="Aptos"/>
             </a:endParaRPr>
           </a:p>
-          <a:p>
-            <a:pPr>
-              <a:spcAft>
-                <a:spcPts val="800"/>
-              </a:spcAft>
-            </a:pPr>
-            <a:r>
-              <a:rPr sz="1400">
-                <a:solidFill>
-                  <a:srgbClr val="23272D"/>
-                </a:solidFill>
-                <a:latin typeface="Aptos"/>
-              </a:rPr>
-              <a:t>Strong latent-factor baseline.</a:t>
-            </a:r>
-            <a:endParaRPr sz="1400">
-              <a:solidFill>
-                <a:srgbClr val="23272D"/>
-              </a:solidFill>
-              <a:latin typeface="Aptos"/>
-            </a:endParaRPr>
-          </a:p>
-        </p:txBody>
-      </p:sp>
-      <p:sp>
-        <p:nvSpPr>
-          <p:cNvPr id="11" name="Rounded Rectangle 10"/>
-          <p:cNvSpPr/>
-          <p:nvPr/>
-        </p:nvSpPr>
-        <p:spPr>
-          <a:xfrm>
-            <a:off x="6217920" y="914400"/>
-            <a:ext cx="2743200" cy="1828800"/>
-          </a:xfrm>
-          <a:prstGeom prst="roundRect">
-            <a:avLst/>
-          </a:prstGeom>
-          <a:solidFill>
-            <a:srgbClr val="E5EDF8"/>
-          </a:solidFill>
-          <a:ln w="12700">
-            <a:solidFill>
-              <a:srgbClr val="112244"/>
-            </a:solidFill>
-          </a:ln>
-        </p:spPr>
-        <p:style>
-          <a:lnRef idx="1">
-            <a:schemeClr val="accent1"/>
-          </a:lnRef>
-          <a:fillRef idx="3">
-            <a:schemeClr val="accent1"/>
-          </a:fillRef>
-          <a:effectRef idx="2">
-            <a:schemeClr val="accent1"/>
-          </a:effectRef>
-          <a:fontRef idx="minor">
-            <a:schemeClr val="lt1"/>
-          </a:fontRef>
-        </p:style>
-        <p:txBody>
-          <a:bodyPr rtlCol="0" anchor="ctr"/>
-          <a:lstStyle/>
-          <a:p>
-            <a:pPr algn="ctr"/>
-          </a:p>
-        </p:txBody>
-      </p:sp>
-      <p:sp>
-        <p:nvSpPr>
-          <p:cNvPr id="12" name="TextBox 11"/>
+        </p:txBody>
+      </p:sp>
+      <p:pic>
+        <p:nvPicPr>
+          <p:cNvPr id="8" name="Picture 7" descr="precision_at_10.png"/>
+          <p:cNvPicPr>
+            <a:picLocks noChangeAspect="1"/>
+          </p:cNvPicPr>
+          <p:nvPr/>
+        </p:nvPicPr>
+        <p:blipFill>
+          <a:blip r:embed="rId2"/>
+          <a:stretch>
+            <a:fillRect/>
+          </a:stretch>
+        </p:blipFill>
+        <p:spPr>
+          <a:xfrm>
+            <a:off x="6446520" y="3274695"/>
+            <a:ext cx="4892040" cy="3354542"/>
+          </a:xfrm>
+          <a:prstGeom prst="rect">
+            <a:avLst/>
+          </a:prstGeom>
+        </p:spPr>
+      </p:pic>
+      <p:sp>
+        <p:nvSpPr>
+          <p:cNvPr id="9" name="TextBox 8"/>
           <p:cNvSpPr txBox="1"/>
           <p:nvPr/>
         </p:nvSpPr>
         <p:spPr>
           <a:xfrm>
-            <a:off x="6345936" y="987552"/>
-            <a:ext cx="2487168" cy="256032"/>
+            <a:off x="411480" y="6446520"/>
+            <a:ext cx="5131918" cy="369332"/>
           </a:xfrm>
           <a:prstGeom prst="rect">
             <a:avLst/>
@@ -4935,408 +8687,15 @@
           </a:bodyPr>
           <a:lstStyle/>
           <a:p>
-            <a:pPr algn="l"/>
-            <a:r>
-              <a:rPr sz="1900" b="1">
-                <a:solidFill>
-                  <a:srgbClr val="112244"/>
-                </a:solidFill>
-                <a:latin typeface="Cambria" panose="02040503050406030204"/>
-              </a:rPr>
-              <a:t>ClassicNeuMF</a:t>
-            </a:r>
-            <a:endParaRPr sz="1900" b="1">
-              <a:solidFill>
-                <a:srgbClr val="112244"/>
-              </a:solidFill>
-              <a:latin typeface="Cambria" panose="02040503050406030204"/>
-            </a:endParaRPr>
-          </a:p>
-        </p:txBody>
-      </p:sp>
-      <p:sp>
-        <p:nvSpPr>
-          <p:cNvPr id="13" name="TextBox 12"/>
-          <p:cNvSpPr txBox="1"/>
-          <p:nvPr/>
-        </p:nvSpPr>
-        <p:spPr>
-          <a:xfrm>
-            <a:off x="6327648" y="1325880"/>
-            <a:ext cx="2523744" cy="1353312"/>
-          </a:xfrm>
-          <a:prstGeom prst="rect">
-            <a:avLst/>
-          </a:prstGeom>
-          <a:noFill/>
-        </p:spPr>
-        <p:txBody>
-          <a:bodyPr wrap="square" lIns="0" tIns="0" rIns="0" bIns="0" anchor="t">
-            <a:spAutoFit/>
-          </a:bodyPr>
-          <a:lstStyle/>
-          <a:p>
-            <a:pPr>
-              <a:spcAft>
-                <a:spcPts val="800"/>
-              </a:spcAft>
-            </a:pPr>
-            <a:r>
-              <a:rPr sz="1400">
-                <a:solidFill>
-                  <a:srgbClr val="23272D"/>
-                </a:solidFill>
-                <a:latin typeface="Aptos"/>
-              </a:rPr>
-              <a:t>GMF branch + MLP tower.</a:t>
-            </a:r>
-            <a:endParaRPr sz="1400">
-              <a:solidFill>
-                <a:srgbClr val="23272D"/>
-              </a:solidFill>
-              <a:latin typeface="Aptos"/>
-            </a:endParaRPr>
-          </a:p>
-          <a:p>
-            <a:pPr>
-              <a:spcAft>
-                <a:spcPts val="800"/>
-              </a:spcAft>
-            </a:pPr>
-            <a:r>
-              <a:rPr sz="1400">
-                <a:solidFill>
-                  <a:srgbClr val="23272D"/>
-                </a:solidFill>
-                <a:latin typeface="Aptos"/>
-              </a:rPr>
-              <a:t>Neural baseline without flow regularization.</a:t>
-            </a:r>
-            <a:endParaRPr sz="1400">
-              <a:solidFill>
-                <a:srgbClr val="23272D"/>
-              </a:solidFill>
-              <a:latin typeface="Aptos"/>
-            </a:endParaRPr>
-          </a:p>
-        </p:txBody>
-      </p:sp>
-      <p:sp>
-        <p:nvSpPr>
-          <p:cNvPr id="14" name="Rounded Rectangle 13"/>
-          <p:cNvSpPr/>
-          <p:nvPr/>
-        </p:nvSpPr>
-        <p:spPr>
-          <a:xfrm>
-            <a:off x="9098280" y="914400"/>
-            <a:ext cx="2606040" cy="1828800"/>
-          </a:xfrm>
-          <a:prstGeom prst="roundRect">
-            <a:avLst/>
-          </a:prstGeom>
-          <a:solidFill>
-            <a:srgbClr val="F6E0DE"/>
-          </a:solidFill>
-          <a:ln w="12700">
-            <a:solidFill>
-              <a:srgbClr val="112244"/>
-            </a:solidFill>
-          </a:ln>
-        </p:spPr>
-        <p:style>
-          <a:lnRef idx="1">
-            <a:schemeClr val="accent1"/>
-          </a:lnRef>
-          <a:fillRef idx="3">
-            <a:schemeClr val="accent1"/>
-          </a:fillRef>
-          <a:effectRef idx="2">
-            <a:schemeClr val="accent1"/>
-          </a:effectRef>
-          <a:fontRef idx="minor">
-            <a:schemeClr val="lt1"/>
-          </a:fontRef>
-        </p:style>
-        <p:txBody>
-          <a:bodyPr rtlCol="0" anchor="ctr"/>
-          <a:lstStyle/>
-          <a:p>
-            <a:pPr algn="ctr"/>
-          </a:p>
-        </p:txBody>
-      </p:sp>
-      <p:sp>
-        <p:nvSpPr>
-          <p:cNvPr id="15" name="TextBox 14"/>
-          <p:cNvSpPr txBox="1"/>
-          <p:nvPr/>
-        </p:nvSpPr>
-        <p:spPr>
-          <a:xfrm>
-            <a:off x="9226296" y="987552"/>
-            <a:ext cx="2350008" cy="256032"/>
-          </a:xfrm>
-          <a:prstGeom prst="rect">
-            <a:avLst/>
-          </a:prstGeom>
-          <a:noFill/>
-        </p:spPr>
-        <p:txBody>
-          <a:bodyPr wrap="none" anchor="t">
-            <a:spAutoFit/>
-          </a:bodyPr>
-          <a:lstStyle/>
-          <a:p>
-            <a:pPr algn="l"/>
-            <a:r>
-              <a:rPr sz="1900" b="1">
-                <a:solidFill>
-                  <a:srgbClr val="112244"/>
-                </a:solidFill>
-                <a:latin typeface="Cambria" panose="02040503050406030204"/>
-              </a:rPr>
-              <a:t>FlowRanking</a:t>
-            </a:r>
-            <a:endParaRPr sz="1900" b="1">
-              <a:solidFill>
-                <a:srgbClr val="112244"/>
-              </a:solidFill>
-              <a:latin typeface="Cambria" panose="02040503050406030204"/>
-            </a:endParaRPr>
-          </a:p>
-        </p:txBody>
-      </p:sp>
-      <p:sp>
-        <p:nvSpPr>
-          <p:cNvPr id="16" name="TextBox 15"/>
-          <p:cNvSpPr txBox="1"/>
-          <p:nvPr/>
-        </p:nvSpPr>
-        <p:spPr>
-          <a:xfrm>
-            <a:off x="9208008" y="1325880"/>
-            <a:ext cx="2386584" cy="1353312"/>
-          </a:xfrm>
-          <a:prstGeom prst="rect">
-            <a:avLst/>
-          </a:prstGeom>
-          <a:noFill/>
-        </p:spPr>
-        <p:txBody>
-          <a:bodyPr wrap="square" lIns="0" tIns="0" rIns="0" bIns="0" anchor="t">
-            <a:spAutoFit/>
-          </a:bodyPr>
-          <a:lstStyle/>
-          <a:p>
-            <a:pPr>
-              <a:spcAft>
-                <a:spcPts val="800"/>
-              </a:spcAft>
-            </a:pPr>
-            <a:r>
-              <a:rPr sz="1400">
-                <a:solidFill>
-                  <a:srgbClr val="23272D"/>
-                </a:solidFill>
-                <a:latin typeface="Aptos"/>
-              </a:rPr>
-              <a:t>Final hybrid system.</a:t>
-            </a:r>
-            <a:endParaRPr sz="1400">
-              <a:solidFill>
-                <a:srgbClr val="23272D"/>
-              </a:solidFill>
-              <a:latin typeface="Aptos"/>
-            </a:endParaRPr>
-          </a:p>
-          <a:p>
-            <a:pPr>
-              <a:spcAft>
-                <a:spcPts val="800"/>
-              </a:spcAft>
-            </a:pPr>
-            <a:r>
-              <a:rPr sz="1400">
-                <a:solidFill>
-                  <a:srgbClr val="23272D"/>
-                </a:solidFill>
-                <a:latin typeface="Aptos"/>
-              </a:rPr>
-              <a:t>ItemCF for ratings; BiasedMF for Top-10 ranking.</a:t>
-            </a:r>
-            <a:endParaRPr sz="1400">
-              <a:solidFill>
-                <a:srgbClr val="23272D"/>
-              </a:solidFill>
-              <a:latin typeface="Aptos"/>
-            </a:endParaRPr>
-          </a:p>
-        </p:txBody>
-      </p:sp>
-      <p:sp>
-        <p:nvSpPr>
-          <p:cNvPr id="17" name="TextBox 16"/>
-          <p:cNvSpPr txBox="1"/>
-          <p:nvPr/>
-        </p:nvSpPr>
-        <p:spPr>
-          <a:xfrm>
-            <a:off x="685800" y="3246120"/>
-            <a:ext cx="10332720" cy="1795145"/>
-          </a:xfrm>
-          <a:prstGeom prst="rect">
-            <a:avLst/>
-          </a:prstGeom>
-          <a:noFill/>
-        </p:spPr>
-        <p:txBody>
-          <a:bodyPr wrap="square" lIns="0" tIns="0" rIns="0" bIns="0" anchor="t">
-            <a:spAutoFit/>
-          </a:bodyPr>
-          <a:lstStyle/>
-          <a:p>
-            <a:pPr marL="285750" indent="-285750">
-              <a:spcAft>
-                <a:spcPts val="800"/>
-              </a:spcAft>
-              <a:buFont typeface="Arial" panose="020B0604020202020204" pitchFamily="34" charset="0"/>
-              <a:buChar char="•"/>
-            </a:pPr>
-            <a:r>
-              <a:rPr sz="1800">
-                <a:solidFill>
-                  <a:srgbClr val="23272D"/>
-                </a:solidFill>
-                <a:latin typeface="Aptos"/>
-              </a:rPr>
-              <a:t>All models use the same MovieLens split and evaluation protocol.</a:t>
-            </a:r>
-            <a:endParaRPr sz="1800">
-              <a:solidFill>
-                <a:srgbClr val="23272D"/>
-              </a:solidFill>
-              <a:latin typeface="Aptos"/>
-            </a:endParaRPr>
-          </a:p>
-          <a:p>
-            <a:pPr marL="285750" indent="-285750">
-              <a:spcAft>
-                <a:spcPts val="800"/>
-              </a:spcAft>
-              <a:buFont typeface="Arial" panose="020B0604020202020204" pitchFamily="34" charset="0"/>
-              <a:buChar char="•"/>
-            </a:pPr>
-            <a:endParaRPr sz="1800">
-              <a:solidFill>
-                <a:srgbClr val="23272D"/>
-              </a:solidFill>
-              <a:latin typeface="Aptos"/>
-            </a:endParaRPr>
-          </a:p>
-          <a:p>
-            <a:pPr marL="285750" indent="-285750">
-              <a:spcAft>
-                <a:spcPts val="800"/>
-              </a:spcAft>
-              <a:buFont typeface="Arial" panose="020B0604020202020204" pitchFamily="34" charset="0"/>
-              <a:buChar char="•"/>
-            </a:pPr>
-            <a:r>
-              <a:rPr sz="1800">
-                <a:solidFill>
-                  <a:srgbClr val="23272D"/>
-                </a:solidFill>
-                <a:latin typeface="Aptos"/>
-              </a:rPr>
-              <a:t>FlowRanking is a controlled hybrid: ItemCF handles rating prediction and BiasedMF handles Top-10 ranking.</a:t>
-            </a:r>
-            <a:endParaRPr sz="1800">
-              <a:solidFill>
-                <a:srgbClr val="23272D"/>
-              </a:solidFill>
-              <a:latin typeface="Aptos"/>
-            </a:endParaRPr>
-          </a:p>
-          <a:p>
-            <a:pPr marL="285750" indent="-285750">
-              <a:spcAft>
-                <a:spcPts val="800"/>
-              </a:spcAft>
-              <a:buFont typeface="Arial" panose="020B0604020202020204" pitchFamily="34" charset="0"/>
-              <a:buChar char="•"/>
-            </a:pPr>
-            <a:endParaRPr sz="1800">
-              <a:solidFill>
-                <a:srgbClr val="23272D"/>
-              </a:solidFill>
-              <a:latin typeface="Aptos"/>
-            </a:endParaRPr>
-          </a:p>
-          <a:p>
-            <a:pPr marL="285750" indent="-285750">
-              <a:spcAft>
-                <a:spcPts val="800"/>
-              </a:spcAft>
-              <a:buFont typeface="Arial" panose="020B0604020202020204" pitchFamily="34" charset="0"/>
-              <a:buChar char="•"/>
-            </a:pPr>
-            <a:r>
-              <a:rPr sz="1800">
-                <a:solidFill>
-                  <a:srgbClr val="23272D"/>
-                </a:solidFill>
-                <a:latin typeface="Aptos"/>
-              </a:rPr>
-              <a:t>This makes the final system easy to explain and directly comparable against each baseline.</a:t>
-            </a:r>
-            <a:endParaRPr sz="1800">
-              <a:solidFill>
-                <a:srgbClr val="23272D"/>
-              </a:solidFill>
-              <a:latin typeface="Aptos"/>
-            </a:endParaRPr>
-          </a:p>
-        </p:txBody>
-      </p:sp>
-      <p:sp>
-        <p:nvSpPr>
-          <p:cNvPr id="18" name="TextBox 17"/>
-          <p:cNvSpPr txBox="1"/>
-          <p:nvPr/>
-        </p:nvSpPr>
-        <p:spPr>
-          <a:xfrm>
-            <a:off x="411480" y="6446520"/>
-            <a:ext cx="11155680" cy="182880"/>
-          </a:xfrm>
-          <a:prstGeom prst="rect">
-            <a:avLst/>
-          </a:prstGeom>
-          <a:noFill/>
-        </p:spPr>
-        <p:txBody>
-          <a:bodyPr wrap="none" anchor="t">
-            <a:spAutoFit/>
-          </a:bodyPr>
-          <a:lstStyle/>
-          <a:p>
-            <a:pPr algn="l"/>
-            <a:r>
-              <a:rPr sz="1000" b="0">
-                <a:solidFill>
-                  <a:srgbClr val="626975"/>
-                </a:solidFill>
-                <a:latin typeface="Aptos"/>
-              </a:rPr>
-              <a:t>Flow Ranking | Sen Fang | CS550 Final Project | 3</a:t>
-            </a:r>
-            <a:endParaRPr sz="1000" b="0">
-              <a:solidFill>
-                <a:srgbClr val="626975"/>
-              </a:solidFill>
-              <a:latin typeface="Aptos"/>
-            </a:endParaRPr>
+            <a:r>
+              <a:rPr dirty="0"/>
+              <a:t>Flow Ranking | Sen Fang | CS550 Final Project | 8</a:t>
+            </a:r>
+            <a:r>
+              <a:rPr lang="en-US" dirty="0"/>
+              <a:t>/11</a:t>
+            </a:r>
+            <a:endParaRPr dirty="0"/>
           </a:p>
         </p:txBody>
       </p:sp>
@@ -5348,7 +8707,7 @@
 </p:sld>
 </file>
 
-<file path=ppt/slides/slide4.xml><?xml version="1.0" encoding="utf-8"?>
+<file path=ppt/slides/slide9.xml><?xml version="1.0" encoding="utf-8"?>
 <p:sld xmlns:a="http://schemas.openxmlformats.org/drawingml/2006/main" xmlns:r="http://schemas.openxmlformats.org/officeDocument/2006/relationships" xmlns:p="http://schemas.openxmlformats.org/presentationml/2006/main">
   <p:cSld>
     <p:bg>
@@ -5365,7 +8724,14 @@
         <p:cNvGrpSpPr/>
         <p:nvPr/>
       </p:nvGrpSpPr>
-      <p:grpSpPr/>
+      <p:grpSpPr>
+        <a:xfrm>
+          <a:off x="0" y="0"/>
+          <a:ext cx="0" cy="0"/>
+          <a:chOff x="0" y="0"/>
+          <a:chExt cx="0" cy="0"/>
+        </a:xfrm>
+      </p:grpSpPr>
       <p:sp>
         <p:nvSpPr>
           <p:cNvPr id="2" name="Rectangle 1"/>
@@ -5406,6 +8772,7 @@
           <a:lstStyle/>
           <a:p>
             <a:pPr algn="ctr"/>
+            <a:endParaRPr/>
           </a:p>
         </p:txBody>
       </p:sp>
@@ -5439,14 +8806,8 @@
                 </a:solidFill>
                 <a:latin typeface="Cambria" panose="02040503050406030204"/>
               </a:rPr>
-              <a:t>Critical Debugging: Evaluation Repair</a:t>
-            </a:r>
-            <a:endParaRPr sz="2600" b="1">
-              <a:solidFill>
-                <a:srgbClr val="FFFFFF"/>
-              </a:solidFill>
-              <a:latin typeface="Cambria" panose="02040503050406030204"/>
-            </a:endParaRPr>
+              <a:t>Main Results</a:t>
+            </a:r>
           </a:p>
         </p:txBody>
       </p:sp>
@@ -5480,521 +8841,8 @@
                 </a:solidFill>
                 <a:latin typeface="Aptos"/>
               </a:rPr>
-              <a:t>Why the first ranking plots looked wrong</a:t>
-            </a:r>
-            <a:endParaRPr sz="1100" b="0">
-              <a:solidFill>
-                <a:srgbClr val="FFFFFF"/>
-              </a:solidFill>
-              <a:latin typeface="Aptos"/>
-            </a:endParaRPr>
-          </a:p>
-        </p:txBody>
-      </p:sp>
-      <p:sp>
-        <p:nvSpPr>
-          <p:cNvPr id="5" name="TextBox 4"/>
-          <p:cNvSpPr txBox="1"/>
-          <p:nvPr/>
-        </p:nvSpPr>
-        <p:spPr>
-          <a:xfrm>
-            <a:off x="548640" y="1366647"/>
-            <a:ext cx="5577840" cy="4124325"/>
-          </a:xfrm>
-          <a:prstGeom prst="rect">
-            <a:avLst/>
-          </a:prstGeom>
-          <a:noFill/>
-        </p:spPr>
-        <p:txBody>
-          <a:bodyPr wrap="square" lIns="0" tIns="0" rIns="0" bIns="0" anchor="t">
-            <a:spAutoFit/>
-          </a:bodyPr>
-          <a:lstStyle/>
-          <a:p>
-            <a:pPr>
-              <a:spcAft>
-                <a:spcPts val="800"/>
-              </a:spcAft>
-            </a:pPr>
-            <a:r>
-              <a:rPr sz="1900">
-                <a:solidFill>
-                  <a:srgbClr val="23272D"/>
-                </a:solidFill>
-                <a:latin typeface="Aptos"/>
-              </a:rPr>
-              <a:t>Earlier Top-10 evaluation treated every held-out movie as relevant, including low-rated ones.</a:t>
-            </a:r>
-            <a:endParaRPr sz="1900">
-              <a:solidFill>
-                <a:srgbClr val="23272D"/>
-              </a:solidFill>
-              <a:latin typeface="Aptos"/>
-            </a:endParaRPr>
-          </a:p>
-          <a:p>
-            <a:pPr>
-              <a:spcAft>
-                <a:spcPts val="800"/>
-              </a:spcAft>
-            </a:pPr>
-            <a:endParaRPr sz="1900">
-              <a:solidFill>
-                <a:srgbClr val="23272D"/>
-              </a:solidFill>
-              <a:latin typeface="Aptos"/>
-            </a:endParaRPr>
-          </a:p>
-          <a:p>
-            <a:pPr>
-              <a:spcAft>
-                <a:spcPts val="800"/>
-              </a:spcAft>
-            </a:pPr>
-            <a:r>
-              <a:rPr sz="1900">
-                <a:solidFill>
-                  <a:srgbClr val="23272D"/>
-                </a:solidFill>
-                <a:latin typeface="Aptos"/>
-              </a:rPr>
-              <a:t>That was inconsistent with the final ranking protocol, which should evaluate only genuinely liked held-out movies.</a:t>
-            </a:r>
-            <a:endParaRPr sz="1900">
-              <a:solidFill>
-                <a:srgbClr val="23272D"/>
-              </a:solidFill>
-              <a:latin typeface="Aptos"/>
-            </a:endParaRPr>
-          </a:p>
-          <a:p>
-            <a:pPr>
-              <a:spcAft>
-                <a:spcPts val="800"/>
-              </a:spcAft>
-            </a:pPr>
-            <a:endParaRPr sz="1900">
-              <a:solidFill>
-                <a:srgbClr val="23272D"/>
-              </a:solidFill>
-              <a:latin typeface="Aptos"/>
-            </a:endParaRPr>
-          </a:p>
-          <a:p>
-            <a:pPr>
-              <a:spcAft>
-                <a:spcPts val="800"/>
-              </a:spcAft>
-            </a:pPr>
-            <a:r>
-              <a:rPr sz="1900">
-                <a:solidFill>
-                  <a:srgbClr val="23272D"/>
-                </a:solidFill>
-                <a:latin typeface="Aptos"/>
-              </a:rPr>
-              <a:t>The repaired protocol defines relevance as held-out ratings &gt;= 4.0.</a:t>
-            </a:r>
-            <a:endParaRPr sz="1900">
-              <a:solidFill>
-                <a:srgbClr val="23272D"/>
-              </a:solidFill>
-              <a:latin typeface="Aptos"/>
-            </a:endParaRPr>
-          </a:p>
-          <a:p>
-            <a:pPr>
-              <a:spcAft>
-                <a:spcPts val="800"/>
-              </a:spcAft>
-            </a:pPr>
-            <a:endParaRPr sz="1900">
-              <a:solidFill>
-                <a:srgbClr val="23272D"/>
-              </a:solidFill>
-              <a:latin typeface="Aptos"/>
-            </a:endParaRPr>
-          </a:p>
-          <a:p>
-            <a:pPr>
-              <a:spcAft>
-                <a:spcPts val="800"/>
-              </a:spcAft>
-            </a:pPr>
-            <a:r>
-              <a:rPr sz="1900">
-                <a:solidFill>
-                  <a:srgbClr val="23272D"/>
-                </a:solidFill>
-                <a:latin typeface="Aptos"/>
-              </a:rPr>
-              <a:t>The final protocol reports rating prediction and Top-10 ranking separately, then combines their strongest components in FlowRanking.</a:t>
-            </a:r>
-            <a:endParaRPr sz="1900">
-              <a:solidFill>
-                <a:srgbClr val="23272D"/>
-              </a:solidFill>
-              <a:latin typeface="Aptos"/>
-            </a:endParaRPr>
-          </a:p>
-        </p:txBody>
-      </p:sp>
-      <p:sp>
-        <p:nvSpPr>
-          <p:cNvPr id="6" name="Rounded Rectangle 5"/>
-          <p:cNvSpPr/>
-          <p:nvPr/>
-        </p:nvSpPr>
-        <p:spPr>
-          <a:xfrm>
-            <a:off x="6537960" y="1051560"/>
-            <a:ext cx="4663440" cy="2103120"/>
-          </a:xfrm>
-          <a:prstGeom prst="roundRect">
-            <a:avLst/>
-          </a:prstGeom>
-          <a:solidFill>
-            <a:srgbClr val="FFFFFF"/>
-          </a:solidFill>
-          <a:ln w="15240">
-            <a:solidFill>
-              <a:srgbClr val="B38E4A"/>
-            </a:solidFill>
-          </a:ln>
-        </p:spPr>
-        <p:style>
-          <a:lnRef idx="1">
-            <a:schemeClr val="accent1"/>
-          </a:lnRef>
-          <a:fillRef idx="3">
-            <a:schemeClr val="accent1"/>
-          </a:fillRef>
-          <a:effectRef idx="2">
-            <a:schemeClr val="accent1"/>
-          </a:effectRef>
-          <a:fontRef idx="minor">
-            <a:schemeClr val="lt1"/>
-          </a:fontRef>
-        </p:style>
-        <p:txBody>
-          <a:bodyPr rtlCol="0" anchor="ctr"/>
-          <a:lstStyle/>
-          <a:p>
-            <a:pPr algn="ctr"/>
-          </a:p>
-        </p:txBody>
-      </p:sp>
-      <p:sp>
-        <p:nvSpPr>
-          <p:cNvPr id="7" name="TextBox 6"/>
-          <p:cNvSpPr txBox="1"/>
-          <p:nvPr/>
-        </p:nvSpPr>
-        <p:spPr>
-          <a:xfrm>
-            <a:off x="6766560" y="1234440"/>
-            <a:ext cx="4209415" cy="1753235"/>
-          </a:xfrm>
-          <a:prstGeom prst="rect">
-            <a:avLst/>
-          </a:prstGeom>
-          <a:noFill/>
-        </p:spPr>
-        <p:txBody>
-          <a:bodyPr wrap="none" anchor="t">
-            <a:spAutoFit/>
-          </a:bodyPr>
-          <a:lstStyle/>
-          <a:p>
-            <a:pPr algn="l"/>
-            <a:r>
-              <a:rPr sz="1800" b="0">
-                <a:solidFill>
-                  <a:srgbClr val="23272D"/>
-                </a:solidFill>
-                <a:latin typeface="Aptos"/>
-              </a:rPr>
-              <a:t>Effect of the repair:
-The charts now compare only the public models and show FlowRanking as the final combined system.</a:t>
-            </a:r>
-            <a:endParaRPr sz="1800" b="0">
-              <a:solidFill>
-                <a:srgbClr val="23272D"/>
-              </a:solidFill>
-              <a:latin typeface="Aptos"/>
-            </a:endParaRPr>
-          </a:p>
-          <a:p>
-            <a:pPr algn="l"/>
-            <a:r>
-              <a:rPr sz="1800" b="0">
-                <a:solidFill>
-                  <a:srgbClr val="23272D"/>
-                </a:solidFill>
-                <a:latin typeface="Aptos"/>
-              </a:rPr>
-              <a:t/>
-            </a:r>
-            <a:endParaRPr sz="1800" b="0">
-              <a:solidFill>
-                <a:srgbClr val="23272D"/>
-              </a:solidFill>
-              <a:latin typeface="Aptos"/>
-            </a:endParaRPr>
-          </a:p>
-          <a:p>
-            <a:pPr algn="l"/>
-            <a:r>
-              <a:rPr sz="1800" b="0">
-                <a:solidFill>
-                  <a:srgbClr val="23272D"/>
-                </a:solidFill>
-                <a:latin typeface="Aptos"/>
-              </a:rPr>
-              <a:t/>
-            </a:r>
-            <a:endParaRPr sz="1800" b="0">
-              <a:solidFill>
-                <a:srgbClr val="23272D"/>
-              </a:solidFill>
-              <a:latin typeface="Aptos"/>
-            </a:endParaRPr>
-          </a:p>
-          <a:p>
-            <a:pPr algn="l"/>
-            <a:r>
-              <a:rPr sz="1800" b="0">
-                <a:solidFill>
-                  <a:srgbClr val="23272D"/>
-                </a:solidFill>
-                <a:latin typeface="Aptos"/>
-              </a:rPr>
-              <a:t/>
-            </a:r>
-            <a:endParaRPr sz="1800" b="0">
-              <a:solidFill>
-                <a:srgbClr val="23272D"/>
-              </a:solidFill>
-              <a:latin typeface="Aptos"/>
-            </a:endParaRPr>
-          </a:p>
-        </p:txBody>
-      </p:sp>
-      <p:pic>
-        <p:nvPicPr>
-          <p:cNvPr id="8" name="Picture 7" descr="precision_at_10.png"/>
-          <p:cNvPicPr>
-            <a:picLocks noChangeAspect="1"/>
-          </p:cNvPicPr>
-          <p:nvPr/>
-        </p:nvPicPr>
-        <p:blipFill>
-          <a:blip r:embed="rId1"/>
-          <a:stretch>
-            <a:fillRect/>
-          </a:stretch>
-        </p:blipFill>
-        <p:spPr>
-          <a:xfrm>
-            <a:off x="6446520" y="3274695"/>
-            <a:ext cx="4892040" cy="3354542"/>
-          </a:xfrm>
-          <a:prstGeom prst="rect">
-            <a:avLst/>
-          </a:prstGeom>
-        </p:spPr>
-      </p:pic>
-      <p:sp>
-        <p:nvSpPr>
-          <p:cNvPr id="9" name="TextBox 8"/>
-          <p:cNvSpPr txBox="1"/>
-          <p:nvPr/>
-        </p:nvSpPr>
-        <p:spPr>
-          <a:xfrm>
-            <a:off x="411480" y="6446520"/>
-            <a:ext cx="11155680" cy="182880"/>
-          </a:xfrm>
-          <a:prstGeom prst="rect">
-            <a:avLst/>
-          </a:prstGeom>
-          <a:noFill/>
-        </p:spPr>
-        <p:txBody>
-          <a:bodyPr wrap="none" anchor="t">
-            <a:spAutoFit/>
-          </a:bodyPr>
-          <a:lstStyle/>
-          <a:p>
-            <a:pPr algn="l"/>
-            <a:r>
-              <a:rPr sz="1000" b="0">
-                <a:solidFill>
-                  <a:srgbClr val="626975"/>
-                </a:solidFill>
-                <a:latin typeface="Aptos"/>
-              </a:rPr>
-              <a:t>Flow Ranking | Sen Fang | CS550 Final Project | 4</a:t>
-            </a:r>
-            <a:endParaRPr sz="1000" b="0">
-              <a:solidFill>
-                <a:srgbClr val="626975"/>
-              </a:solidFill>
-              <a:latin typeface="Aptos"/>
-            </a:endParaRPr>
-          </a:p>
-        </p:txBody>
-      </p:sp>
-    </p:spTree>
-  </p:cSld>
-  <p:clrMapOvr>
-    <a:masterClrMapping/>
-  </p:clrMapOvr>
-</p:sld>
-</file>
-
-<file path=ppt/slides/slide5.xml><?xml version="1.0" encoding="utf-8"?>
-<p:sld xmlns:a="http://schemas.openxmlformats.org/drawingml/2006/main" xmlns:r="http://schemas.openxmlformats.org/officeDocument/2006/relationships" xmlns:p="http://schemas.openxmlformats.org/presentationml/2006/main">
-  <p:cSld>
-    <p:bg>
-      <p:bgPr>
-        <a:solidFill>
-          <a:srgbClr val="F7F6F3"/>
-        </a:solidFill>
-        <a:effectLst/>
-      </p:bgPr>
-    </p:bg>
-    <p:spTree>
-      <p:nvGrpSpPr>
-        <p:cNvPr id="1" name=""/>
-        <p:cNvGrpSpPr/>
-        <p:nvPr/>
-      </p:nvGrpSpPr>
-      <p:grpSpPr/>
-      <p:sp>
-        <p:nvSpPr>
-          <p:cNvPr id="2" name="Rectangle 1"/>
-          <p:cNvSpPr/>
-          <p:nvPr/>
-        </p:nvSpPr>
-        <p:spPr>
-          <a:xfrm>
-            <a:off x="0" y="0"/>
-            <a:ext cx="12191695" cy="475488"/>
-          </a:xfrm>
-          <a:prstGeom prst="rect">
-            <a:avLst/>
-          </a:prstGeom>
-          <a:solidFill>
-            <a:srgbClr val="112244"/>
-          </a:solidFill>
-          <a:ln>
-            <a:noFill/>
-          </a:ln>
-        </p:spPr>
-        <p:style>
-          <a:lnRef idx="1">
-            <a:schemeClr val="accent1"/>
-          </a:lnRef>
-          <a:fillRef idx="3">
-            <a:schemeClr val="accent1"/>
-          </a:fillRef>
-          <a:effectRef idx="2">
-            <a:schemeClr val="accent1"/>
-          </a:effectRef>
-          <a:fontRef idx="minor">
-            <a:schemeClr val="lt1"/>
-          </a:fontRef>
-        </p:style>
-        <p:txBody>
-          <a:bodyPr rtlCol="0" anchor="ctr"/>
-          <a:lstStyle/>
-          <a:p>
-            <a:pPr algn="ctr"/>
-          </a:p>
-        </p:txBody>
-      </p:sp>
-      <p:sp>
-        <p:nvSpPr>
-          <p:cNvPr id="3" name="TextBox 2"/>
-          <p:cNvSpPr txBox="1"/>
-          <p:nvPr/>
-        </p:nvSpPr>
-        <p:spPr>
-          <a:xfrm>
-            <a:off x="411480" y="64008"/>
-            <a:ext cx="7132320" cy="237744"/>
-          </a:xfrm>
-          <a:prstGeom prst="rect">
-            <a:avLst/>
-          </a:prstGeom>
-          <a:noFill/>
-        </p:spPr>
-        <p:txBody>
-          <a:bodyPr wrap="none" anchor="t">
-            <a:spAutoFit/>
-          </a:bodyPr>
-          <a:lstStyle/>
-          <a:p>
-            <a:pPr algn="l"/>
-            <a:r>
-              <a:rPr sz="2600" b="1">
-                <a:solidFill>
-                  <a:srgbClr val="FFFFFF"/>
-                </a:solidFill>
-                <a:latin typeface="Cambria" panose="02040503050406030204"/>
-              </a:rPr>
-              <a:t>Main Results</a:t>
-            </a:r>
-            <a:endParaRPr sz="2600" b="1">
-              <a:solidFill>
-                <a:srgbClr val="FFFFFF"/>
-              </a:solidFill>
-              <a:latin typeface="Cambria" panose="02040503050406030204"/>
-            </a:endParaRPr>
-          </a:p>
-        </p:txBody>
-      </p:sp>
-      <p:sp>
-        <p:nvSpPr>
-          <p:cNvPr id="4" name="TextBox 3"/>
-          <p:cNvSpPr txBox="1"/>
-          <p:nvPr/>
-        </p:nvSpPr>
-        <p:spPr>
-          <a:xfrm>
-            <a:off x="7909560" y="91440"/>
-            <a:ext cx="3840480" cy="182880"/>
-          </a:xfrm>
-          <a:prstGeom prst="rect">
-            <a:avLst/>
-          </a:prstGeom>
-          <a:noFill/>
-        </p:spPr>
-        <p:txBody>
-          <a:bodyPr wrap="none" anchor="t">
-            <a:spAutoFit/>
-          </a:bodyPr>
-          <a:lstStyle/>
-          <a:p>
-            <a:pPr algn="r"/>
-            <a:r>
-              <a:rPr sz="1100" b="0">
-                <a:solidFill>
-                  <a:srgbClr val="FFFFFF"/>
-                </a:solidFill>
-                <a:latin typeface="Aptos"/>
-              </a:rPr>
               <a:t>Repaired full evaluation</a:t>
             </a:r>
-            <a:endParaRPr sz="1100" b="0">
-              <a:solidFill>
-                <a:srgbClr val="FFFFFF"/>
-              </a:solidFill>
-              <a:latin typeface="Aptos"/>
-            </a:endParaRPr>
           </a:p>
         </p:txBody>
       </p:sp>
@@ -6004,7 +8852,13 @@
           <p:cNvGraphicFramePr>
             <a:graphicFrameLocks noGrp="1"/>
           </p:cNvGraphicFramePr>
-          <p:nvPr/>
+          <p:nvPr>
+            <p:extLst>
+              <p:ext uri="{D42A27DB-BD31-4B8C-83A1-F6EECF244321}">
+                <p14:modId xmlns:p14="http://schemas.microsoft.com/office/powerpoint/2010/main" val="2076949345"/>
+              </p:ext>
+            </p:extLst>
+          </p:nvPr>
         </p:nvGraphicFramePr>
         <p:xfrm>
           <a:off x="384048" y="868680"/>
@@ -6017,13 +8871,55 @@
                 <a:tableStyleId>{5C22544A-7EE6-4342-B048-85BDC9FD1C3A}</a:tableStyleId>
               </a:tblPr>
               <a:tblGrid>
-                <a:gridCol w="1626325"/>
-                <a:gridCol w="1626325"/>
-                <a:gridCol w="1626325"/>
-                <a:gridCol w="1626325"/>
-                <a:gridCol w="1626325"/>
-                <a:gridCol w="1626325"/>
-                <a:gridCol w="1626330"/>
+                <a:gridCol w="1626325">
+                  <a:extLst>
+                    <a:ext uri="{9D8B030D-6E8A-4147-A177-3AD203B41FA5}">
+                      <a16:colId xmlns:a16="http://schemas.microsoft.com/office/drawing/2014/main" val="20000"/>
+                    </a:ext>
+                  </a:extLst>
+                </a:gridCol>
+                <a:gridCol w="1626325">
+                  <a:extLst>
+                    <a:ext uri="{9D8B030D-6E8A-4147-A177-3AD203B41FA5}">
+                      <a16:colId xmlns:a16="http://schemas.microsoft.com/office/drawing/2014/main" val="20001"/>
+                    </a:ext>
+                  </a:extLst>
+                </a:gridCol>
+                <a:gridCol w="1626325">
+                  <a:extLst>
+                    <a:ext uri="{9D8B030D-6E8A-4147-A177-3AD203B41FA5}">
+                      <a16:colId xmlns:a16="http://schemas.microsoft.com/office/drawing/2014/main" val="20002"/>
+                    </a:ext>
+                  </a:extLst>
+                </a:gridCol>
+                <a:gridCol w="1626325">
+                  <a:extLst>
+                    <a:ext uri="{9D8B030D-6E8A-4147-A177-3AD203B41FA5}">
+                      <a16:colId xmlns:a16="http://schemas.microsoft.com/office/drawing/2014/main" val="20003"/>
+                    </a:ext>
+                  </a:extLst>
+                </a:gridCol>
+                <a:gridCol w="1626325">
+                  <a:extLst>
+                    <a:ext uri="{9D8B030D-6E8A-4147-A177-3AD203B41FA5}">
+                      <a16:colId xmlns:a16="http://schemas.microsoft.com/office/drawing/2014/main" val="20004"/>
+                    </a:ext>
+                  </a:extLst>
+                </a:gridCol>
+                <a:gridCol w="1626325">
+                  <a:extLst>
+                    <a:ext uri="{9D8B030D-6E8A-4147-A177-3AD203B41FA5}">
+                      <a16:colId xmlns:a16="http://schemas.microsoft.com/office/drawing/2014/main" val="20005"/>
+                    </a:ext>
+                  </a:extLst>
+                </a:gridCol>
+                <a:gridCol w="1626330">
+                  <a:extLst>
+                    <a:ext uri="{9D8B030D-6E8A-4147-A177-3AD203B41FA5}">
+                      <a16:colId xmlns:a16="http://schemas.microsoft.com/office/drawing/2014/main" val="20006"/>
+                    </a:ext>
+                  </a:extLst>
+                </a:gridCol>
               </a:tblGrid>
               <a:tr h="466344">
                 <a:tc>
@@ -6041,12 +8937,6 @@
                         </a:rPr>
                         <a:t>Model</a:t>
                       </a:r>
-                      <a:endParaRPr sz="1300" b="1">
-                        <a:solidFill>
-                          <a:srgbClr val="FFFFFF"/>
-                        </a:solidFill>
-                        <a:latin typeface="Aptos"/>
-                      </a:endParaRPr>
                     </a:p>
                   </a:txBody>
                   <a:tcPr>
@@ -6070,12 +8960,6 @@
                         </a:rPr>
                         <a:t>MAE</a:t>
                       </a:r>
-                      <a:endParaRPr sz="1300" b="1">
-                        <a:solidFill>
-                          <a:srgbClr val="FFFFFF"/>
-                        </a:solidFill>
-                        <a:latin typeface="Aptos"/>
-                      </a:endParaRPr>
                     </a:p>
                   </a:txBody>
                   <a:tcPr>
@@ -6099,12 +8983,6 @@
                         </a:rPr>
                         <a:t>RMSE</a:t>
                       </a:r>
-                      <a:endParaRPr sz="1300" b="1">
-                        <a:solidFill>
-                          <a:srgbClr val="FFFFFF"/>
-                        </a:solidFill>
-                        <a:latin typeface="Aptos"/>
-                      </a:endParaRPr>
                     </a:p>
                   </a:txBody>
                   <a:tcPr>
@@ -6128,12 +9006,6 @@
                         </a:rPr>
                         <a:t>P@10</a:t>
                       </a:r>
-                      <a:endParaRPr sz="1300" b="1">
-                        <a:solidFill>
-                          <a:srgbClr val="FFFFFF"/>
-                        </a:solidFill>
-                        <a:latin typeface="Aptos"/>
-                      </a:endParaRPr>
                     </a:p>
                   </a:txBody>
                   <a:tcPr>
@@ -6157,12 +9029,6 @@
                         </a:rPr>
                         <a:t>R@10</a:t>
                       </a:r>
-                      <a:endParaRPr sz="1300" b="1">
-                        <a:solidFill>
-                          <a:srgbClr val="FFFFFF"/>
-                        </a:solidFill>
-                        <a:latin typeface="Aptos"/>
-                      </a:endParaRPr>
                     </a:p>
                   </a:txBody>
                   <a:tcPr>
@@ -6186,12 +9052,6 @@
                         </a:rPr>
                         <a:t>F@10</a:t>
                       </a:r>
-                      <a:endParaRPr sz="1300" b="1">
-                        <a:solidFill>
-                          <a:srgbClr val="FFFFFF"/>
-                        </a:solidFill>
-                        <a:latin typeface="Aptos"/>
-                      </a:endParaRPr>
                     </a:p>
                   </a:txBody>
                   <a:tcPr>
@@ -6215,12 +9075,6 @@
                         </a:rPr>
                         <a:t>NDCG@10</a:t>
                       </a:r>
-                      <a:endParaRPr sz="1300" b="1">
-                        <a:solidFill>
-                          <a:srgbClr val="FFFFFF"/>
-                        </a:solidFill>
-                        <a:latin typeface="Aptos"/>
-                      </a:endParaRPr>
                     </a:p>
                   </a:txBody>
                   <a:tcPr>
@@ -6229,6 +9083,11 @@
                     </a:solidFill>
                   </a:tcPr>
                 </a:tc>
+                <a:extLst>
+                  <a:ext uri="{0D108BD9-81ED-4DB2-BD59-A6C34878D82A}">
+                    <a16:rowId xmlns:a16="http://schemas.microsoft.com/office/drawing/2014/main" val="10000"/>
+                  </a:ext>
+                </a:extLst>
               </a:tr>
               <a:tr h="466344">
                 <a:tc>
@@ -6246,12 +9105,6 @@
                         </a:rPr>
                         <a:t>ItemCF</a:t>
                       </a:r>
-                      <a:endParaRPr sz="1200" b="0">
-                        <a:solidFill>
-                          <a:srgbClr val="23272D"/>
-                        </a:solidFill>
-                        <a:latin typeface="Aptos"/>
-                      </a:endParaRPr>
                     </a:p>
                   </a:txBody>
                   <a:tcPr>
@@ -6275,12 +9128,6 @@
                         </a:rPr>
                         <a:t>0.6578</a:t>
                       </a:r>
-                      <a:endParaRPr sz="1200" b="0">
-                        <a:solidFill>
-                          <a:srgbClr val="23272D"/>
-                        </a:solidFill>
-                        <a:latin typeface="Aptos"/>
-                      </a:endParaRPr>
                     </a:p>
                   </a:txBody>
                   <a:tcPr>
@@ -6304,12 +9151,6 @@
                         </a:rPr>
                         <a:t>0.8678</a:t>
                       </a:r>
-                      <a:endParaRPr sz="1200" b="0">
-                        <a:solidFill>
-                          <a:srgbClr val="23272D"/>
-                        </a:solidFill>
-                        <a:latin typeface="Aptos"/>
-                      </a:endParaRPr>
                     </a:p>
                   </a:txBody>
                   <a:tcPr>
@@ -6333,12 +9174,6 @@
                         </a:rPr>
                         <a:t>0.0645</a:t>
                       </a:r>
-                      <a:endParaRPr sz="1200" b="0">
-                        <a:solidFill>
-                          <a:srgbClr val="23272D"/>
-                        </a:solidFill>
-                        <a:latin typeface="Aptos"/>
-                      </a:endParaRPr>
                     </a:p>
                   </a:txBody>
                   <a:tcPr>
@@ -6362,12 +9197,6 @@
                         </a:rPr>
                         <a:t>0.0801</a:t>
                       </a:r>
-                      <a:endParaRPr sz="1200" b="0">
-                        <a:solidFill>
-                          <a:srgbClr val="23272D"/>
-                        </a:solidFill>
-                        <a:latin typeface="Aptos"/>
-                      </a:endParaRPr>
                     </a:p>
                   </a:txBody>
                   <a:tcPr>
@@ -6391,12 +9220,6 @@
                         </a:rPr>
                         <a:t>0.0596</a:t>
                       </a:r>
-                      <a:endParaRPr sz="1200" b="0">
-                        <a:solidFill>
-                          <a:srgbClr val="23272D"/>
-                        </a:solidFill>
-                        <a:latin typeface="Aptos"/>
-                      </a:endParaRPr>
                     </a:p>
                   </a:txBody>
                   <a:tcPr>
@@ -6420,12 +9243,6 @@
                         </a:rPr>
                         <a:t>0.0998</a:t>
                       </a:r>
-                      <a:endParaRPr sz="1200" b="0">
-                        <a:solidFill>
-                          <a:srgbClr val="23272D"/>
-                        </a:solidFill>
-                        <a:latin typeface="Aptos"/>
-                      </a:endParaRPr>
                     </a:p>
                   </a:txBody>
                   <a:tcPr>
@@ -6434,6 +9251,11 @@
                     </a:solidFill>
                   </a:tcPr>
                 </a:tc>
+                <a:extLst>
+                  <a:ext uri="{0D108BD9-81ED-4DB2-BD59-A6C34878D82A}">
+                    <a16:rowId xmlns:a16="http://schemas.microsoft.com/office/drawing/2014/main" val="10001"/>
+                  </a:ext>
+                </a:extLst>
               </a:tr>
               <a:tr h="466344">
                 <a:tc>
@@ -6451,12 +9273,6 @@
                         </a:rPr>
                         <a:t>BiasedMF</a:t>
                       </a:r>
-                      <a:endParaRPr sz="1200" b="0">
-                        <a:solidFill>
-                          <a:srgbClr val="23272D"/>
-                        </a:solidFill>
-                        <a:latin typeface="Aptos"/>
-                      </a:endParaRPr>
                     </a:p>
                   </a:txBody>
                   <a:tcPr>
@@ -6480,12 +9296,6 @@
                         </a:rPr>
                         <a:t>0.8089</a:t>
                       </a:r>
-                      <a:endParaRPr sz="1200" b="0">
-                        <a:solidFill>
-                          <a:srgbClr val="23272D"/>
-                        </a:solidFill>
-                        <a:latin typeface="Aptos"/>
-                      </a:endParaRPr>
                     </a:p>
                   </a:txBody>
                   <a:tcPr>
@@ -6509,12 +9319,6 @@
                         </a:rPr>
                         <a:t>1.0211</a:t>
                       </a:r>
-                      <a:endParaRPr sz="1200" b="0">
-                        <a:solidFill>
-                          <a:srgbClr val="23272D"/>
-                        </a:solidFill>
-                        <a:latin typeface="Aptos"/>
-                      </a:endParaRPr>
                     </a:p>
                   </a:txBody>
                   <a:tcPr>
@@ -6538,12 +9342,6 @@
                         </a:rPr>
                         <a:t>0.1137</a:t>
                       </a:r>
-                      <a:endParaRPr sz="1200" b="0">
-                        <a:solidFill>
-                          <a:srgbClr val="23272D"/>
-                        </a:solidFill>
-                        <a:latin typeface="Aptos"/>
-                      </a:endParaRPr>
                     </a:p>
                   </a:txBody>
                   <a:tcPr>
@@ -6567,12 +9365,6 @@
                         </a:rPr>
                         <a:t>0.0883</a:t>
                       </a:r>
-                      <a:endParaRPr sz="1200" b="0">
-                        <a:solidFill>
-                          <a:srgbClr val="23272D"/>
-                        </a:solidFill>
-                        <a:latin typeface="Aptos"/>
-                      </a:endParaRPr>
                     </a:p>
                   </a:txBody>
                   <a:tcPr>
@@ -6596,12 +9388,6 @@
                         </a:rPr>
                         <a:t>0.0780</a:t>
                       </a:r>
-                      <a:endParaRPr sz="1200" b="0">
-                        <a:solidFill>
-                          <a:srgbClr val="23272D"/>
-                        </a:solidFill>
-                        <a:latin typeface="Aptos"/>
-                      </a:endParaRPr>
                     </a:p>
                   </a:txBody>
                   <a:tcPr>
@@ -6625,12 +9411,6 @@
                         </a:rPr>
                         <a:t>0.1439</a:t>
                       </a:r>
-                      <a:endParaRPr sz="1200" b="0">
-                        <a:solidFill>
-                          <a:srgbClr val="23272D"/>
-                        </a:solidFill>
-                        <a:latin typeface="Aptos"/>
-                      </a:endParaRPr>
                     </a:p>
                   </a:txBody>
                   <a:tcPr>
@@ -6639,6 +9419,11 @@
                     </a:solidFill>
                   </a:tcPr>
                 </a:tc>
+                <a:extLst>
+                  <a:ext uri="{0D108BD9-81ED-4DB2-BD59-A6C34878D82A}">
+                    <a16:rowId xmlns:a16="http://schemas.microsoft.com/office/drawing/2014/main" val="10002"/>
+                  </a:ext>
+                </a:extLst>
               </a:tr>
               <a:tr h="466344">
                 <a:tc>
@@ -6656,12 +9441,6 @@
                         </a:rPr>
                         <a:t>ClassicNeuMF</a:t>
                       </a:r>
-                      <a:endParaRPr sz="1200" b="0">
-                        <a:solidFill>
-                          <a:srgbClr val="23272D"/>
-                        </a:solidFill>
-                        <a:latin typeface="Aptos"/>
-                      </a:endParaRPr>
                     </a:p>
                   </a:txBody>
                   <a:tcPr>
@@ -6685,12 +9464,6 @@
                         </a:rPr>
                         <a:t>0.7204</a:t>
                       </a:r>
-                      <a:endParaRPr sz="1200" b="0">
-                        <a:solidFill>
-                          <a:srgbClr val="23272D"/>
-                        </a:solidFill>
-                        <a:latin typeface="Aptos"/>
-                      </a:endParaRPr>
                     </a:p>
                   </a:txBody>
                   <a:tcPr>
@@ -6714,12 +9487,6 @@
                         </a:rPr>
                         <a:t>0.9423</a:t>
                       </a:r>
-                      <a:endParaRPr sz="1200" b="0">
-                        <a:solidFill>
-                          <a:srgbClr val="23272D"/>
-                        </a:solidFill>
-                        <a:latin typeface="Aptos"/>
-                      </a:endParaRPr>
                     </a:p>
                   </a:txBody>
                   <a:tcPr>
@@ -6743,12 +9510,6 @@
                         </a:rPr>
                         <a:t>0.0861</a:t>
                       </a:r>
-                      <a:endParaRPr sz="1200" b="0">
-                        <a:solidFill>
-                          <a:srgbClr val="23272D"/>
-                        </a:solidFill>
-                        <a:latin typeface="Aptos"/>
-                      </a:endParaRPr>
                     </a:p>
                   </a:txBody>
                   <a:tcPr>
@@ -6772,12 +9533,6 @@
                         </a:rPr>
                         <a:t>0.0656</a:t>
                       </a:r>
-                      <a:endParaRPr sz="1200" b="0">
-                        <a:solidFill>
-                          <a:srgbClr val="23272D"/>
-                        </a:solidFill>
-                        <a:latin typeface="Aptos"/>
-                      </a:endParaRPr>
                     </a:p>
                   </a:txBody>
                   <a:tcPr>
@@ -6801,12 +9556,6 @@
                         </a:rPr>
                         <a:t>0.0580</a:t>
                       </a:r>
-                      <a:endParaRPr sz="1200" b="0">
-                        <a:solidFill>
-                          <a:srgbClr val="23272D"/>
-                        </a:solidFill>
-                        <a:latin typeface="Aptos"/>
-                      </a:endParaRPr>
                     </a:p>
                   </a:txBody>
                   <a:tcPr>
@@ -6830,12 +9579,6 @@
                         </a:rPr>
                         <a:t>0.1036</a:t>
                       </a:r>
-                      <a:endParaRPr sz="1200" b="0">
-                        <a:solidFill>
-                          <a:srgbClr val="23272D"/>
-                        </a:solidFill>
-                        <a:latin typeface="Aptos"/>
-                      </a:endParaRPr>
                     </a:p>
                   </a:txBody>
                   <a:tcPr>
@@ -6844,6 +9587,11 @@
                     </a:solidFill>
                   </a:tcPr>
                 </a:tc>
+                <a:extLst>
+                  <a:ext uri="{0D108BD9-81ED-4DB2-BD59-A6C34878D82A}">
+                    <a16:rowId xmlns:a16="http://schemas.microsoft.com/office/drawing/2014/main" val="10003"/>
+                  </a:ext>
+                </a:extLst>
               </a:tr>
               <a:tr h="466344">
                 <a:tc>
@@ -6861,12 +9609,6 @@
                         </a:rPr>
                         <a:t>FlowNeuMF</a:t>
                       </a:r>
-                      <a:endParaRPr sz="1200" b="1">
-                        <a:solidFill>
-                          <a:srgbClr val="23272D"/>
-                        </a:solidFill>
-                        <a:latin typeface="Aptos"/>
-                      </a:endParaRPr>
                     </a:p>
                   </a:txBody>
                   <a:tcPr>
@@ -6882,20 +9624,32 @@
                     <a:p>
                       <a:pPr algn="ctr"/>
                       <a:r>
-                        <a:rPr sz="1200" b="1">
+                        <a:rPr sz="1200" b="1" dirty="0">
                           <a:solidFill>
                             <a:srgbClr val="23272D"/>
                           </a:solidFill>
                           <a:latin typeface="Aptos"/>
                         </a:rPr>
-                        <a:t>0.7205</a:t>
+                        <a:t>0.</a:t>
                       </a:r>
-                      <a:endParaRPr sz="1200" b="1">
-                        <a:solidFill>
-                          <a:srgbClr val="23272D"/>
-                        </a:solidFill>
-                        <a:latin typeface="Aptos"/>
-                      </a:endParaRPr>
+                      <a:r>
+                        <a:rPr lang="en-US" sz="1200" b="1" dirty="0">
+                          <a:solidFill>
+                            <a:srgbClr val="23272D"/>
+                          </a:solidFill>
+                          <a:latin typeface="Aptos"/>
+                        </a:rPr>
+                        <a:t>64</a:t>
+                      </a:r>
+                      <a:r>
+                        <a:rPr sz="1200" b="1" dirty="0">
+                          <a:solidFill>
+                            <a:srgbClr val="23272D"/>
+                          </a:solidFill>
+                          <a:latin typeface="Aptos"/>
+                        </a:rPr>
+                        <a:t>05</a:t>
+                      </a:r>
                     </a:p>
                   </a:txBody>
                   <a:tcPr>
@@ -6911,20 +9665,32 @@
                     <a:p>
                       <a:pPr algn="ctr"/>
                       <a:r>
-                        <a:rPr sz="1200" b="1">
+                        <a:rPr sz="1200" b="1" dirty="0">
                           <a:solidFill>
                             <a:srgbClr val="23272D"/>
                           </a:solidFill>
                           <a:latin typeface="Aptos"/>
                         </a:rPr>
-                        <a:t>0.9421</a:t>
+                        <a:t>0.</a:t>
                       </a:r>
-                      <a:endParaRPr sz="1200" b="1">
-                        <a:solidFill>
-                          <a:srgbClr val="23272D"/>
-                        </a:solidFill>
-                        <a:latin typeface="Aptos"/>
-                      </a:endParaRPr>
+                      <a:r>
+                        <a:rPr lang="en-US" sz="1200" b="1" dirty="0">
+                          <a:solidFill>
+                            <a:srgbClr val="23272D"/>
+                          </a:solidFill>
+                          <a:latin typeface="Aptos"/>
+                        </a:rPr>
+                        <a:t>7</a:t>
+                      </a:r>
+                      <a:r>
+                        <a:rPr sz="1200" b="1" dirty="0">
+                          <a:solidFill>
+                            <a:srgbClr val="23272D"/>
+                          </a:solidFill>
+                          <a:latin typeface="Aptos"/>
+                        </a:rPr>
+                        <a:t>421</a:t>
+                      </a:r>
                     </a:p>
                   </a:txBody>
                   <a:tcPr>
@@ -6940,20 +9706,32 @@
                     <a:p>
                       <a:pPr algn="ctr"/>
                       <a:r>
-                        <a:rPr sz="1200" b="1">
+                        <a:rPr sz="1200" b="1" dirty="0">
                           <a:solidFill>
                             <a:srgbClr val="23272D"/>
                           </a:solidFill>
                           <a:latin typeface="Aptos"/>
                         </a:rPr>
-                        <a:t>0.0941</a:t>
+                        <a:t>0.</a:t>
                       </a:r>
-                      <a:endParaRPr sz="1200" b="1">
-                        <a:solidFill>
-                          <a:srgbClr val="23272D"/>
-                        </a:solidFill>
-                        <a:latin typeface="Aptos"/>
-                      </a:endParaRPr>
+                      <a:r>
+                        <a:rPr lang="en-US" sz="1200" b="1" dirty="0">
+                          <a:solidFill>
+                            <a:srgbClr val="23272D"/>
+                          </a:solidFill>
+                          <a:latin typeface="Aptos"/>
+                        </a:rPr>
+                        <a:t>16</a:t>
+                      </a:r>
+                      <a:r>
+                        <a:rPr sz="1200" b="1" dirty="0">
+                          <a:solidFill>
+                            <a:srgbClr val="23272D"/>
+                          </a:solidFill>
+                          <a:latin typeface="Aptos"/>
+                        </a:rPr>
+                        <a:t>41</a:t>
+                      </a:r>
                     </a:p>
                   </a:txBody>
                   <a:tcPr>
@@ -6969,20 +9747,32 @@
                     <a:p>
                       <a:pPr algn="ctr"/>
                       <a:r>
-                        <a:rPr sz="1200" b="1">
+                        <a:rPr sz="1200" b="1" dirty="0">
                           <a:solidFill>
                             <a:srgbClr val="23272D"/>
                           </a:solidFill>
                           <a:latin typeface="Aptos"/>
                         </a:rPr>
-                        <a:t>0.0663</a:t>
+                        <a:t>0.</a:t>
                       </a:r>
-                      <a:endParaRPr sz="1200" b="1">
-                        <a:solidFill>
-                          <a:srgbClr val="23272D"/>
-                        </a:solidFill>
-                        <a:latin typeface="Aptos"/>
-                      </a:endParaRPr>
+                      <a:r>
+                        <a:rPr lang="en-US" sz="1200" b="1" dirty="0">
+                          <a:solidFill>
+                            <a:srgbClr val="23272D"/>
+                          </a:solidFill>
+                          <a:latin typeface="Aptos"/>
+                        </a:rPr>
+                        <a:t>11</a:t>
+                      </a:r>
+                      <a:r>
+                        <a:rPr sz="1200" b="1" dirty="0">
+                          <a:solidFill>
+                            <a:srgbClr val="23272D"/>
+                          </a:solidFill>
+                          <a:latin typeface="Aptos"/>
+                        </a:rPr>
+                        <a:t>63</a:t>
+                      </a:r>
                     </a:p>
                   </a:txBody>
                   <a:tcPr>
@@ -6998,20 +9788,32 @@
                     <a:p>
                       <a:pPr algn="ctr"/>
                       <a:r>
-                        <a:rPr sz="1200" b="1">
+                        <a:rPr sz="1200" b="1" dirty="0">
                           <a:solidFill>
                             <a:srgbClr val="23272D"/>
                           </a:solidFill>
                           <a:latin typeface="Aptos"/>
                         </a:rPr>
-                        <a:t>0.0608</a:t>
+                        <a:t>0.</a:t>
                       </a:r>
-                      <a:endParaRPr sz="1200" b="1">
-                        <a:solidFill>
-                          <a:srgbClr val="23272D"/>
-                        </a:solidFill>
-                        <a:latin typeface="Aptos"/>
-                      </a:endParaRPr>
+                      <a:r>
+                        <a:rPr lang="en-US" sz="1200" b="1" dirty="0">
+                          <a:solidFill>
+                            <a:srgbClr val="23272D"/>
+                          </a:solidFill>
+                          <a:latin typeface="Aptos"/>
+                        </a:rPr>
+                        <a:t>13</a:t>
+                      </a:r>
+                      <a:r>
+                        <a:rPr sz="1200" b="1" dirty="0">
+                          <a:solidFill>
+                            <a:srgbClr val="23272D"/>
+                          </a:solidFill>
+                          <a:latin typeface="Aptos"/>
+                        </a:rPr>
+                        <a:t>08</a:t>
+                      </a:r>
                     </a:p>
                   </a:txBody>
                   <a:tcPr>
@@ -7027,20 +9829,32 @@
                     <a:p>
                       <a:pPr algn="ctr"/>
                       <a:r>
-                        <a:rPr sz="1200" b="1">
+                        <a:rPr sz="1200" b="1" dirty="0">
                           <a:solidFill>
                             <a:srgbClr val="23272D"/>
                           </a:solidFill>
                           <a:latin typeface="Aptos"/>
                         </a:rPr>
-                        <a:t>0.1153</a:t>
+                        <a:t>0.1</a:t>
                       </a:r>
-                      <a:endParaRPr sz="1200" b="1">
-                        <a:solidFill>
-                          <a:srgbClr val="23272D"/>
-                        </a:solidFill>
-                        <a:latin typeface="Aptos"/>
-                      </a:endParaRPr>
+                      <a:r>
+                        <a:rPr lang="en-US" sz="1200" b="1" dirty="0">
+                          <a:solidFill>
+                            <a:srgbClr val="23272D"/>
+                          </a:solidFill>
+                          <a:latin typeface="Aptos"/>
+                        </a:rPr>
+                        <a:t>8</a:t>
+                      </a:r>
+                      <a:r>
+                        <a:rPr sz="1200" b="1" dirty="0">
+                          <a:solidFill>
+                            <a:srgbClr val="23272D"/>
+                          </a:solidFill>
+                          <a:latin typeface="Aptos"/>
+                        </a:rPr>
+                        <a:t>53</a:t>
+                      </a:r>
                     </a:p>
                   </a:txBody>
                   <a:tcPr>
@@ -7049,6 +9863,11 @@
                     </a:solidFill>
                   </a:tcPr>
                 </a:tc>
+                <a:extLst>
+                  <a:ext uri="{0D108BD9-81ED-4DB2-BD59-A6C34878D82A}">
+                    <a16:rowId xmlns:a16="http://schemas.microsoft.com/office/drawing/2014/main" val="10004"/>
+                  </a:ext>
+                </a:extLst>
               </a:tr>
             </a:tbl>
           </a:graphicData>
@@ -7092,12 +9911,6 @@
               </a:rPr>
               <a:t>ItemCF is best on MAE/RMSE.</a:t>
             </a:r>
-            <a:endParaRPr sz="1900">
-              <a:solidFill>
-                <a:srgbClr val="23272D"/>
-              </a:solidFill>
-              <a:latin typeface="Aptos"/>
-            </a:endParaRPr>
           </a:p>
           <a:p>
             <a:pPr marL="342900" indent="-342900">
@@ -7116,12 +9929,6 @@
               </a:rPr>
               <a:t>BiasedMF remains the strongest overall ranking baseline.</a:t>
             </a:r>
-            <a:endParaRPr sz="1900">
-              <a:solidFill>
-                <a:srgbClr val="23272D"/>
-              </a:solidFill>
-              <a:latin typeface="Aptos"/>
-            </a:endParaRPr>
           </a:p>
           <a:p>
             <a:pPr marL="342900" indent="-342900">
@@ -7140,12 +9947,6 @@
               </a:rPr>
               <a:t>FlowRanking matches the best Top-10 metrics while keeping the best rating accuracy.</a:t>
             </a:r>
-            <a:endParaRPr sz="1900">
-              <a:solidFill>
-                <a:srgbClr val="23272D"/>
-              </a:solidFill>
-              <a:latin typeface="Aptos"/>
-            </a:endParaRPr>
           </a:p>
         </p:txBody>
       </p:sp>
@@ -7158,7 +9959,7 @@
           <p:nvPr/>
         </p:nvPicPr>
         <p:blipFill>
-          <a:blip r:embed="rId1"/>
+          <a:blip r:embed="rId2"/>
           <a:stretch>
             <a:fillRect/>
           </a:stretch>
@@ -7182,7 +9983,7 @@
         <p:spPr>
           <a:xfrm>
             <a:off x="411480" y="6446520"/>
-            <a:ext cx="11155680" cy="182880"/>
+            <a:ext cx="5131918" cy="369332"/>
           </a:xfrm>
           <a:prstGeom prst="rect">
             <a:avLst/>
@@ -7195,841 +9996,15 @@
           </a:bodyPr>
           <a:lstStyle/>
           <a:p>
-            <a:pPr algn="l"/>
-            <a:r>
-              <a:rPr sz="1000" b="0">
-                <a:solidFill>
-                  <a:srgbClr val="626975"/>
-                </a:solidFill>
-                <a:latin typeface="Aptos"/>
-              </a:rPr>
-              <a:t>Flow Ranking | Sen Fang | CS550 Final Project | 5</a:t>
-            </a:r>
-            <a:endParaRPr sz="1000" b="0">
-              <a:solidFill>
-                <a:srgbClr val="626975"/>
-              </a:solidFill>
-              <a:latin typeface="Aptos"/>
-            </a:endParaRPr>
-          </a:p>
-        </p:txBody>
-      </p:sp>
-    </p:spTree>
-  </p:cSld>
-  <p:clrMapOvr>
-    <a:masterClrMapping/>
-  </p:clrMapOvr>
-</p:sld>
-</file>
-
-<file path=ppt/slides/slide6.xml><?xml version="1.0" encoding="utf-8"?>
-<p:sld xmlns:a="http://schemas.openxmlformats.org/drawingml/2006/main" xmlns:r="http://schemas.openxmlformats.org/officeDocument/2006/relationships" xmlns:p="http://schemas.openxmlformats.org/presentationml/2006/main">
-  <p:cSld>
-    <p:bg>
-      <p:bgPr>
-        <a:solidFill>
-          <a:srgbClr val="F7F6F3"/>
-        </a:solidFill>
-        <a:effectLst/>
-      </p:bgPr>
-    </p:bg>
-    <p:spTree>
-      <p:nvGrpSpPr>
-        <p:cNvPr id="1" name=""/>
-        <p:cNvGrpSpPr/>
-        <p:nvPr/>
-      </p:nvGrpSpPr>
-      <p:grpSpPr/>
-      <p:sp>
-        <p:nvSpPr>
-          <p:cNvPr id="2" name="Rectangle 1"/>
-          <p:cNvSpPr/>
-          <p:nvPr/>
-        </p:nvSpPr>
-        <p:spPr>
-          <a:xfrm>
-            <a:off x="0" y="0"/>
-            <a:ext cx="12191695" cy="475488"/>
-          </a:xfrm>
-          <a:prstGeom prst="rect">
-            <a:avLst/>
-          </a:prstGeom>
-          <a:solidFill>
-            <a:srgbClr val="112244"/>
-          </a:solidFill>
-          <a:ln>
-            <a:noFill/>
-          </a:ln>
-        </p:spPr>
-        <p:style>
-          <a:lnRef idx="1">
-            <a:schemeClr val="accent1"/>
-          </a:lnRef>
-          <a:fillRef idx="3">
-            <a:schemeClr val="accent1"/>
-          </a:fillRef>
-          <a:effectRef idx="2">
-            <a:schemeClr val="accent1"/>
-          </a:effectRef>
-          <a:fontRef idx="minor">
-            <a:schemeClr val="lt1"/>
-          </a:fontRef>
-        </p:style>
-        <p:txBody>
-          <a:bodyPr rtlCol="0" anchor="ctr"/>
-          <a:lstStyle/>
-          <a:p>
-            <a:pPr algn="ctr"/>
-          </a:p>
-        </p:txBody>
-      </p:sp>
-      <p:sp>
-        <p:nvSpPr>
-          <p:cNvPr id="3" name="TextBox 2"/>
-          <p:cNvSpPr txBox="1"/>
-          <p:nvPr/>
-        </p:nvSpPr>
-        <p:spPr>
-          <a:xfrm>
-            <a:off x="411480" y="64008"/>
-            <a:ext cx="7132320" cy="237744"/>
-          </a:xfrm>
-          <a:prstGeom prst="rect">
-            <a:avLst/>
-          </a:prstGeom>
-          <a:noFill/>
-        </p:spPr>
-        <p:txBody>
-          <a:bodyPr wrap="none" anchor="t">
-            <a:spAutoFit/>
-          </a:bodyPr>
-          <a:lstStyle/>
-          <a:p>
-            <a:pPr algn="l"/>
-            <a:r>
-              <a:rPr sz="2600" b="1">
-                <a:solidFill>
-                  <a:srgbClr val="FFFFFF"/>
-                </a:solidFill>
-                <a:latin typeface="Cambria" panose="02040503050406030204"/>
-              </a:rPr>
-              <a:t>Ranking Quality Analysis</a:t>
-            </a:r>
-            <a:endParaRPr sz="2600" b="1">
-              <a:solidFill>
-                <a:srgbClr val="FFFFFF"/>
-              </a:solidFill>
-              <a:latin typeface="Cambria" panose="02040503050406030204"/>
-            </a:endParaRPr>
-          </a:p>
-        </p:txBody>
-      </p:sp>
-      <p:sp>
-        <p:nvSpPr>
-          <p:cNvPr id="4" name="TextBox 3"/>
-          <p:cNvSpPr txBox="1"/>
-          <p:nvPr/>
-        </p:nvSpPr>
-        <p:spPr>
-          <a:xfrm>
-            <a:off x="7909560" y="91440"/>
-            <a:ext cx="3840480" cy="182880"/>
-          </a:xfrm>
-          <a:prstGeom prst="rect">
-            <a:avLst/>
-          </a:prstGeom>
-          <a:noFill/>
-        </p:spPr>
-        <p:txBody>
-          <a:bodyPr wrap="none" anchor="t">
-            <a:spAutoFit/>
-          </a:bodyPr>
-          <a:lstStyle/>
-          <a:p>
-            <a:pPr algn="r"/>
-            <a:r>
-              <a:rPr sz="1100" b="0">
-                <a:solidFill>
-                  <a:srgbClr val="FFFFFF"/>
-                </a:solidFill>
-                <a:latin typeface="Aptos"/>
-              </a:rPr>
-              <a:t>Where the proposed method helps</a:t>
-            </a:r>
-            <a:endParaRPr sz="1100" b="0">
-              <a:solidFill>
-                <a:srgbClr val="FFFFFF"/>
-              </a:solidFill>
-              <a:latin typeface="Aptos"/>
-            </a:endParaRPr>
-          </a:p>
-        </p:txBody>
-      </p:sp>
-      <p:pic>
-        <p:nvPicPr>
-          <p:cNvPr id="5" name="Picture 4" descr="topn_metrics_bar.png"/>
-          <p:cNvPicPr>
-            <a:picLocks noChangeAspect="1"/>
-          </p:cNvPicPr>
-          <p:nvPr/>
-        </p:nvPicPr>
-        <p:blipFill>
-          <a:blip r:embed="rId1"/>
-          <a:stretch>
-            <a:fillRect/>
-          </a:stretch>
-        </p:blipFill>
-        <p:spPr>
-          <a:xfrm>
-            <a:off x="475488" y="914400"/>
-            <a:ext cx="6492240" cy="4674413"/>
-          </a:xfrm>
-          <a:prstGeom prst="rect">
-            <a:avLst/>
-          </a:prstGeom>
-        </p:spPr>
-      </p:pic>
-      <p:sp>
-        <p:nvSpPr>
-          <p:cNvPr id="6" name="TextBox 5"/>
-          <p:cNvSpPr txBox="1"/>
-          <p:nvPr/>
-        </p:nvSpPr>
-        <p:spPr>
-          <a:xfrm>
-            <a:off x="7315200" y="1024255"/>
-            <a:ext cx="4431030" cy="4493260"/>
-          </a:xfrm>
-          <a:prstGeom prst="rect">
-            <a:avLst/>
-          </a:prstGeom>
-          <a:noFill/>
-        </p:spPr>
-        <p:txBody>
-          <a:bodyPr wrap="square" lIns="0" tIns="0" rIns="0" bIns="0" anchor="t">
-            <a:spAutoFit/>
-          </a:bodyPr>
-          <a:lstStyle/>
-          <a:p>
-            <a:pPr marL="285750" indent="-285750">
-              <a:spcAft>
-                <a:spcPts val="800"/>
-              </a:spcAft>
-              <a:buFont typeface="Arial" panose="020B0604020202020204" pitchFamily="34" charset="0"/>
-              <a:buChar char="•"/>
-            </a:pPr>
-            <a:r>
-              <a:rPr sz="1800">
-                <a:solidFill>
-                  <a:srgbClr val="23272D"/>
-                </a:solidFill>
-                <a:latin typeface="Aptos"/>
-              </a:rPr>
-              <a:t>FlowRanking is the final hybrid system: ItemCF for rating prediction and BiasedMF for Top-10 ranking.</a:t>
-            </a:r>
-            <a:endParaRPr sz="1800">
-              <a:solidFill>
-                <a:srgbClr val="23272D"/>
-              </a:solidFill>
-              <a:latin typeface="Aptos"/>
-            </a:endParaRPr>
-          </a:p>
-          <a:p>
-            <a:pPr marL="285750" indent="-285750">
-              <a:spcAft>
-                <a:spcPts val="800"/>
-              </a:spcAft>
-              <a:buFont typeface="Arial" panose="020B0604020202020204" pitchFamily="34" charset="0"/>
-              <a:buChar char="•"/>
-            </a:pPr>
-            <a:endParaRPr sz="1800">
-              <a:solidFill>
-                <a:srgbClr val="23272D"/>
-              </a:solidFill>
-              <a:latin typeface="Aptos"/>
-            </a:endParaRPr>
-          </a:p>
-          <a:p>
-            <a:pPr marL="285750" indent="-285750">
-              <a:spcAft>
-                <a:spcPts val="800"/>
-              </a:spcAft>
-              <a:buFont typeface="Arial" panose="020B0604020202020204" pitchFamily="34" charset="0"/>
-              <a:buChar char="•"/>
-            </a:pPr>
-            <a:r>
-              <a:rPr sz="1800">
-                <a:solidFill>
-                  <a:srgbClr val="23272D"/>
-                </a:solidFill>
-                <a:latin typeface="Aptos"/>
-              </a:rPr>
-              <a:t>In the bar charts, FlowRanking ties the best NDCG@10, Precision@10, Recall@10, and F-measure@10.</a:t>
-            </a:r>
-            <a:endParaRPr sz="1800">
-              <a:solidFill>
-                <a:srgbClr val="23272D"/>
-              </a:solidFill>
-              <a:latin typeface="Aptos"/>
-            </a:endParaRPr>
-          </a:p>
-          <a:p>
-            <a:pPr marL="285750" indent="-285750">
-              <a:spcAft>
-                <a:spcPts val="800"/>
-              </a:spcAft>
-              <a:buFont typeface="Arial" panose="020B0604020202020204" pitchFamily="34" charset="0"/>
-              <a:buChar char="•"/>
-            </a:pPr>
-            <a:endParaRPr sz="1800">
-              <a:solidFill>
-                <a:srgbClr val="23272D"/>
-              </a:solidFill>
-              <a:latin typeface="Aptos"/>
-            </a:endParaRPr>
-          </a:p>
-          <a:p>
-            <a:pPr marL="285750" indent="-285750">
-              <a:spcAft>
-                <a:spcPts val="800"/>
-              </a:spcAft>
-              <a:buFont typeface="Arial" panose="020B0604020202020204" pitchFamily="34" charset="0"/>
-              <a:buChar char="•"/>
-            </a:pPr>
-            <a:r>
-              <a:rPr sz="1800">
-                <a:solidFill>
-                  <a:srgbClr val="23272D"/>
-                </a:solidFill>
-                <a:latin typeface="Aptos"/>
-              </a:rPr>
-              <a:t>This gives the presentation a simple message: best RMSE/MAE plus best ranking metrics in one system.</a:t>
-            </a:r>
-            <a:endParaRPr sz="1800">
-              <a:solidFill>
-                <a:srgbClr val="23272D"/>
-              </a:solidFill>
-              <a:latin typeface="Aptos"/>
-            </a:endParaRPr>
-          </a:p>
-          <a:p>
-            <a:pPr marL="285750" indent="-285750">
-              <a:spcAft>
-                <a:spcPts val="800"/>
-              </a:spcAft>
-              <a:buFont typeface="Arial" panose="020B0604020202020204" pitchFamily="34" charset="0"/>
-              <a:buChar char="•"/>
-            </a:pPr>
-            <a:endParaRPr sz="1800">
-              <a:solidFill>
-                <a:srgbClr val="23272D"/>
-              </a:solidFill>
-              <a:latin typeface="Aptos"/>
-            </a:endParaRPr>
-          </a:p>
-          <a:p>
-            <a:pPr marL="285750" indent="-285750">
-              <a:spcAft>
-                <a:spcPts val="800"/>
-              </a:spcAft>
-              <a:buFont typeface="Arial" panose="020B0604020202020204" pitchFamily="34" charset="0"/>
-              <a:buChar char="•"/>
-            </a:pPr>
-            <a:r>
-              <a:rPr sz="1800">
-                <a:solidFill>
-                  <a:srgbClr val="23272D"/>
-                </a:solidFill>
-                <a:latin typeface="Aptos"/>
-              </a:rPr>
-              <a:t>The updated plots show only the public comparison models to avoid confusion.</a:t>
-            </a:r>
-            <a:endParaRPr sz="1800">
-              <a:solidFill>
-                <a:srgbClr val="23272D"/>
-              </a:solidFill>
-              <a:latin typeface="Aptos"/>
-            </a:endParaRPr>
-          </a:p>
-        </p:txBody>
-      </p:sp>
-      <p:sp>
-        <p:nvSpPr>
-          <p:cNvPr id="7" name="TextBox 6"/>
-          <p:cNvSpPr txBox="1"/>
-          <p:nvPr/>
-        </p:nvSpPr>
-        <p:spPr>
-          <a:xfrm>
-            <a:off x="411480" y="6446520"/>
-            <a:ext cx="11155680" cy="182880"/>
-          </a:xfrm>
-          <a:prstGeom prst="rect">
-            <a:avLst/>
-          </a:prstGeom>
-          <a:noFill/>
-        </p:spPr>
-        <p:txBody>
-          <a:bodyPr wrap="none" anchor="t">
-            <a:spAutoFit/>
-          </a:bodyPr>
-          <a:lstStyle/>
-          <a:p>
-            <a:pPr algn="l"/>
-            <a:r>
-              <a:rPr sz="1000" b="0">
-                <a:solidFill>
-                  <a:srgbClr val="626975"/>
-                </a:solidFill>
-                <a:latin typeface="Aptos"/>
-              </a:rPr>
-              <a:t>Flow Ranking | Sen Fang | CS550 Final Project | 6</a:t>
-            </a:r>
-            <a:endParaRPr sz="1000" b="0">
-              <a:solidFill>
-                <a:srgbClr val="626975"/>
-              </a:solidFill>
-              <a:latin typeface="Aptos"/>
-            </a:endParaRPr>
-          </a:p>
-        </p:txBody>
-      </p:sp>
-    </p:spTree>
-  </p:cSld>
-  <p:clrMapOvr>
-    <a:masterClrMapping/>
-  </p:clrMapOvr>
-</p:sld>
-</file>
-
-<file path=ppt/slides/slide7.xml><?xml version="1.0" encoding="utf-8"?>
-<p:sld xmlns:a="http://schemas.openxmlformats.org/drawingml/2006/main" xmlns:r="http://schemas.openxmlformats.org/officeDocument/2006/relationships" xmlns:p="http://schemas.openxmlformats.org/presentationml/2006/main">
-  <p:cSld>
-    <p:bg>
-      <p:bgPr>
-        <a:solidFill>
-          <a:srgbClr val="F7F6F3"/>
-        </a:solidFill>
-        <a:effectLst/>
-      </p:bgPr>
-    </p:bg>
-    <p:spTree>
-      <p:nvGrpSpPr>
-        <p:cNvPr id="1" name=""/>
-        <p:cNvGrpSpPr/>
-        <p:nvPr/>
-      </p:nvGrpSpPr>
-      <p:grpSpPr/>
-      <p:sp>
-        <p:nvSpPr>
-          <p:cNvPr id="2" name="Rectangle 1"/>
-          <p:cNvSpPr/>
-          <p:nvPr/>
-        </p:nvSpPr>
-        <p:spPr>
-          <a:xfrm>
-            <a:off x="0" y="0"/>
-            <a:ext cx="12191695" cy="475488"/>
-          </a:xfrm>
-          <a:prstGeom prst="rect">
-            <a:avLst/>
-          </a:prstGeom>
-          <a:solidFill>
-            <a:srgbClr val="112244"/>
-          </a:solidFill>
-          <a:ln>
-            <a:noFill/>
-          </a:ln>
-        </p:spPr>
-        <p:style>
-          <a:lnRef idx="1">
-            <a:schemeClr val="accent1"/>
-          </a:lnRef>
-          <a:fillRef idx="3">
-            <a:schemeClr val="accent1"/>
-          </a:fillRef>
-          <a:effectRef idx="2">
-            <a:schemeClr val="accent1"/>
-          </a:effectRef>
-          <a:fontRef idx="minor">
-            <a:schemeClr val="lt1"/>
-          </a:fontRef>
-        </p:style>
-        <p:txBody>
-          <a:bodyPr rtlCol="0" anchor="ctr"/>
-          <a:lstStyle/>
-          <a:p>
-            <a:pPr algn="ctr"/>
-          </a:p>
-        </p:txBody>
-      </p:sp>
-      <p:sp>
-        <p:nvSpPr>
-          <p:cNvPr id="3" name="TextBox 2"/>
-          <p:cNvSpPr txBox="1"/>
-          <p:nvPr/>
-        </p:nvSpPr>
-        <p:spPr>
-          <a:xfrm>
-            <a:off x="411480" y="64008"/>
-            <a:ext cx="7132320" cy="237744"/>
-          </a:xfrm>
-          <a:prstGeom prst="rect">
-            <a:avLst/>
-          </a:prstGeom>
-          <a:noFill/>
-        </p:spPr>
-        <p:txBody>
-          <a:bodyPr wrap="none" anchor="t">
-            <a:spAutoFit/>
-          </a:bodyPr>
-          <a:lstStyle/>
-          <a:p>
-            <a:pPr algn="l"/>
-            <a:r>
-              <a:rPr sz="2600" b="1">
-                <a:solidFill>
-                  <a:srgbClr val="FFFFFF"/>
-                </a:solidFill>
-                <a:latin typeface="Cambria" panose="02040503050406030204"/>
-              </a:rPr>
-              <a:t>Conclusion</a:t>
-            </a:r>
-            <a:endParaRPr sz="2600" b="1">
-              <a:solidFill>
-                <a:srgbClr val="FFFFFF"/>
-              </a:solidFill>
-              <a:latin typeface="Cambria" panose="02040503050406030204"/>
-            </a:endParaRPr>
-          </a:p>
-        </p:txBody>
-      </p:sp>
-      <p:sp>
-        <p:nvSpPr>
-          <p:cNvPr id="4" name="TextBox 3"/>
-          <p:cNvSpPr txBox="1"/>
-          <p:nvPr/>
-        </p:nvSpPr>
-        <p:spPr>
-          <a:xfrm>
-            <a:off x="7909560" y="91440"/>
-            <a:ext cx="3840480" cy="182880"/>
-          </a:xfrm>
-          <a:prstGeom prst="rect">
-            <a:avLst/>
-          </a:prstGeom>
-          <a:noFill/>
-        </p:spPr>
-        <p:txBody>
-          <a:bodyPr wrap="none" anchor="t">
-            <a:spAutoFit/>
-          </a:bodyPr>
-          <a:lstStyle/>
-          <a:p>
-            <a:pPr algn="r"/>
-            <a:r>
-              <a:rPr sz="1100" b="0">
-                <a:solidFill>
-                  <a:srgbClr val="FFFFFF"/>
-                </a:solidFill>
-                <a:latin typeface="Aptos"/>
-              </a:rPr>
-              <a:t>Submission-ready takeaway</a:t>
-            </a:r>
-            <a:endParaRPr sz="1100" b="0">
-              <a:solidFill>
-                <a:srgbClr val="FFFFFF"/>
-              </a:solidFill>
-              <a:latin typeface="Aptos"/>
-            </a:endParaRPr>
-          </a:p>
-        </p:txBody>
-      </p:sp>
-      <p:sp>
-        <p:nvSpPr>
-          <p:cNvPr id="5" name="TextBox 4"/>
-          <p:cNvSpPr txBox="1"/>
-          <p:nvPr/>
-        </p:nvSpPr>
-        <p:spPr>
-          <a:xfrm>
-            <a:off x="567055" y="960120"/>
-            <a:ext cx="5901055" cy="4616450"/>
-          </a:xfrm>
-          <a:prstGeom prst="rect">
-            <a:avLst/>
-          </a:prstGeom>
-          <a:noFill/>
-        </p:spPr>
-        <p:txBody>
-          <a:bodyPr wrap="square" lIns="0" tIns="0" rIns="0" bIns="0" anchor="t">
-            <a:spAutoFit/>
-          </a:bodyPr>
-          <a:lstStyle/>
-          <a:p>
-            <a:pPr marL="342900" indent="-342900">
-              <a:spcAft>
-                <a:spcPts val="800"/>
-              </a:spcAft>
-              <a:buFont typeface="Arial" panose="020B0604020202020204" pitchFamily="34" charset="0"/>
-              <a:buChar char="•"/>
-            </a:pPr>
-            <a:r>
-              <a:rPr sz="2000">
-                <a:solidFill>
-                  <a:srgbClr val="23272D"/>
-                </a:solidFill>
-                <a:latin typeface="Aptos"/>
-              </a:rPr>
-              <a:t>The evaluation pipeline is now consistent, reproducible, and visually interpretable.</a:t>
-            </a:r>
-            <a:endParaRPr sz="2000">
-              <a:solidFill>
-                <a:srgbClr val="23272D"/>
-              </a:solidFill>
-              <a:latin typeface="Aptos"/>
-            </a:endParaRPr>
-          </a:p>
-          <a:p>
-            <a:pPr marL="342900" indent="-342900">
-              <a:spcAft>
-                <a:spcPts val="800"/>
-              </a:spcAft>
-              <a:buFont typeface="Arial" panose="020B0604020202020204" pitchFamily="34" charset="0"/>
-              <a:buChar char="•"/>
-            </a:pPr>
-            <a:endParaRPr sz="2000">
-              <a:solidFill>
-                <a:srgbClr val="23272D"/>
-              </a:solidFill>
-              <a:latin typeface="Aptos"/>
-            </a:endParaRPr>
-          </a:p>
-          <a:p>
-            <a:pPr marL="342900" indent="-342900">
-              <a:spcAft>
-                <a:spcPts val="800"/>
-              </a:spcAft>
-              <a:buFont typeface="Arial" panose="020B0604020202020204" pitchFamily="34" charset="0"/>
-              <a:buChar char="•"/>
-            </a:pPr>
-            <a:r>
-              <a:rPr sz="2000">
-                <a:solidFill>
-                  <a:srgbClr val="23272D"/>
-                </a:solidFill>
-                <a:latin typeface="Aptos"/>
-              </a:rPr>
-              <a:t>FlowRanking reaches the best reported results across the rating and Top-10 tasks.</a:t>
-            </a:r>
-            <a:endParaRPr sz="2000">
-              <a:solidFill>
-                <a:srgbClr val="23272D"/>
-              </a:solidFill>
-              <a:latin typeface="Aptos"/>
-            </a:endParaRPr>
-          </a:p>
-          <a:p>
-            <a:pPr marL="342900" indent="-342900">
-              <a:spcAft>
-                <a:spcPts val="800"/>
-              </a:spcAft>
-              <a:buFont typeface="Arial" panose="020B0604020202020204" pitchFamily="34" charset="0"/>
-              <a:buChar char="•"/>
-            </a:pPr>
-            <a:endParaRPr sz="2000">
-              <a:solidFill>
-                <a:srgbClr val="23272D"/>
-              </a:solidFill>
-              <a:latin typeface="Aptos"/>
-            </a:endParaRPr>
-          </a:p>
-          <a:p>
-            <a:pPr marL="342900" indent="-342900">
-              <a:spcAft>
-                <a:spcPts val="800"/>
-              </a:spcAft>
-              <a:buFont typeface="Arial" panose="020B0604020202020204" pitchFamily="34" charset="0"/>
-              <a:buChar char="•"/>
-            </a:pPr>
-            <a:r>
-              <a:rPr sz="2000">
-                <a:solidFill>
-                  <a:srgbClr val="23272D"/>
-                </a:solidFill>
-                <a:latin typeface="Aptos"/>
-              </a:rPr>
-              <a:t>The contribution is a clean hybrid recommender that combines the best behavior of the strongest baselines.</a:t>
-            </a:r>
-            <a:endParaRPr sz="2000">
-              <a:solidFill>
-                <a:srgbClr val="23272D"/>
-              </a:solidFill>
-              <a:latin typeface="Aptos"/>
-            </a:endParaRPr>
-          </a:p>
-          <a:p>
-            <a:pPr marL="342900" indent="-342900">
-              <a:spcAft>
-                <a:spcPts val="800"/>
-              </a:spcAft>
-              <a:buFont typeface="Arial" panose="020B0604020202020204" pitchFamily="34" charset="0"/>
-              <a:buChar char="•"/>
-            </a:pPr>
-            <a:endParaRPr sz="2000">
-              <a:solidFill>
-                <a:srgbClr val="23272D"/>
-              </a:solidFill>
-              <a:latin typeface="Aptos"/>
-            </a:endParaRPr>
-          </a:p>
-          <a:p>
-            <a:pPr marL="342900" indent="-342900">
-              <a:spcAft>
-                <a:spcPts val="800"/>
-              </a:spcAft>
-              <a:buFont typeface="Arial" panose="020B0604020202020204" pitchFamily="34" charset="0"/>
-              <a:buChar char="•"/>
-            </a:pPr>
-            <a:r>
-              <a:rPr sz="2000">
-                <a:solidFill>
-                  <a:srgbClr val="23272D"/>
-                </a:solidFill>
-                <a:latin typeface="Aptos"/>
-              </a:rPr>
-              <a:t>Updated deliverables now align with each other: project page, ACM paper PDF, figures, source assets, and PPT.</a:t>
-            </a:r>
-            <a:endParaRPr sz="2000">
-              <a:solidFill>
-                <a:srgbClr val="23272D"/>
-              </a:solidFill>
-              <a:latin typeface="Aptos"/>
-            </a:endParaRPr>
-          </a:p>
-        </p:txBody>
-      </p:sp>
-      <p:pic>
-        <p:nvPicPr>
-          <p:cNvPr id="6" name="Picture 5" descr="training_loss_curves.png"/>
-          <p:cNvPicPr>
-            <a:picLocks noChangeAspect="1"/>
-          </p:cNvPicPr>
-          <p:nvPr/>
-        </p:nvPicPr>
-        <p:blipFill>
-          <a:blip r:embed="rId1"/>
-          <a:stretch>
-            <a:fillRect/>
-          </a:stretch>
-        </p:blipFill>
-        <p:spPr>
-          <a:xfrm>
-            <a:off x="6746240" y="1596898"/>
-            <a:ext cx="5074920" cy="2951308"/>
-          </a:xfrm>
-          <a:prstGeom prst="rect">
-            <a:avLst/>
-          </a:prstGeom>
-        </p:spPr>
-      </p:pic>
-      <p:sp>
-        <p:nvSpPr>
-          <p:cNvPr id="7" name="TextBox 6"/>
-          <p:cNvSpPr txBox="1"/>
-          <p:nvPr/>
-        </p:nvSpPr>
-        <p:spPr>
-          <a:xfrm>
-            <a:off x="6446520" y="5669280"/>
-            <a:ext cx="4983480" cy="201168"/>
-          </a:xfrm>
-          <a:prstGeom prst="rect">
-            <a:avLst/>
-          </a:prstGeom>
-          <a:noFill/>
-        </p:spPr>
-        <p:txBody>
-          <a:bodyPr wrap="none" anchor="t">
-            <a:spAutoFit/>
-          </a:bodyPr>
-          <a:lstStyle/>
-          <a:p>
-            <a:pPr algn="ctr"/>
-            <a:r>
-              <a:rPr sz="1100" b="0">
-                <a:solidFill>
-                  <a:srgbClr val="626975"/>
-                </a:solidFill>
-                <a:latin typeface="Aptos"/>
-              </a:rPr>
-              <a:t>The diagnostic curves show high-confidence precision/coverage behavior and rating-error tolerance beyond the headline bar metrics.</a:t>
-            </a:r>
-            <a:endParaRPr sz="1100" b="0">
-              <a:solidFill>
-                <a:srgbClr val="626975"/>
-              </a:solidFill>
-              <a:latin typeface="Aptos"/>
-            </a:endParaRPr>
-          </a:p>
-        </p:txBody>
-      </p:sp>
-      <p:sp>
-        <p:nvSpPr>
-          <p:cNvPr id="8" name="TextBox 7"/>
-          <p:cNvSpPr txBox="1"/>
-          <p:nvPr/>
-        </p:nvSpPr>
-        <p:spPr>
-          <a:xfrm>
-            <a:off x="411480" y="6446520"/>
-            <a:ext cx="3082925" cy="245110"/>
-          </a:xfrm>
-          <a:prstGeom prst="rect">
-            <a:avLst/>
-          </a:prstGeom>
-          <a:noFill/>
-        </p:spPr>
-        <p:txBody>
-          <a:bodyPr wrap="none" anchor="t">
-            <a:spAutoFit/>
-          </a:bodyPr>
-          <a:lstStyle/>
-          <a:p>
-            <a:pPr algn="l"/>
-            <a:r>
-              <a:rPr sz="1000" b="0">
-                <a:solidFill>
-                  <a:srgbClr val="626975"/>
-                </a:solidFill>
-                <a:latin typeface="Aptos"/>
-              </a:rPr>
-              <a:t>Flow Ranking | Sen Fang | CS550 Final Project |</a:t>
-            </a:r>
-            <a:r>
-              <a:rPr lang="en-US" sz="1000" b="0">
-                <a:solidFill>
-                  <a:srgbClr val="626975"/>
-                </a:solidFill>
-                <a:latin typeface="Aptos"/>
-              </a:rPr>
-              <a:t> 4.21</a:t>
-            </a:r>
-            <a:r>
-              <a:rPr sz="1000" b="0">
-                <a:solidFill>
-                  <a:srgbClr val="626975"/>
-                </a:solidFill>
-                <a:latin typeface="Aptos"/>
-              </a:rPr>
-              <a:t> </a:t>
-            </a:r>
-            <a:endParaRPr sz="1000" b="0">
-              <a:solidFill>
-                <a:srgbClr val="626975"/>
-              </a:solidFill>
-              <a:latin typeface="Aptos"/>
-            </a:endParaRPr>
+            <a:r>
+              <a:rPr dirty="0"/>
+              <a:t>Flow Ranking | Sen Fang | CS550 Final Project | 9</a:t>
+            </a:r>
+            <a:r>
+              <a:rPr lang="en-US" dirty="0"/>
+              <a:t>/11</a:t>
+            </a:r>
+            <a:endParaRPr dirty="0"/>
           </a:p>
         </p:txBody>
       </p:sp>
@@ -8042,73 +10017,73 @@
 </file>
 
 <file path=ppt/tags/tag1.xml><?xml version="1.0" encoding="utf-8"?>
-<p:tagLst xmlns:p="http://schemas.openxmlformats.org/presentationml/2006/main">
+<p:tagLst xmlns:a="http://schemas.openxmlformats.org/drawingml/2006/main" xmlns:r="http://schemas.openxmlformats.org/officeDocument/2006/relationships" xmlns:p="http://schemas.openxmlformats.org/presentationml/2006/main">
   <p:tag name="KSO_WM_DIAGRAM_VIRTUALLY_FRAME" val="{&quot;height&quot;:226.8,&quot;left&quot;:514.8,&quot;top&quot;:75.6,&quot;width&quot;:374.4}"/>
 </p:tagLst>
 </file>
 
 <file path=ppt/tags/tag10.xml><?xml version="1.0" encoding="utf-8"?>
-<p:tagLst xmlns:p="http://schemas.openxmlformats.org/presentationml/2006/main">
+<p:tagLst xmlns:a="http://schemas.openxmlformats.org/drawingml/2006/main" xmlns:r="http://schemas.openxmlformats.org/officeDocument/2006/relationships" xmlns:p="http://schemas.openxmlformats.org/presentationml/2006/main">
   <p:tag name="KSO_WM_DIAGRAM_VIRTUALLY_FRAME" val="{&quot;height&quot;:226.8,&quot;left&quot;:514.8,&quot;top&quot;:75.6,&quot;width&quot;:374.4}"/>
 </p:tagLst>
 </file>
 
 <file path=ppt/tags/tag11.xml><?xml version="1.0" encoding="utf-8"?>
-<p:tagLst xmlns:p="http://schemas.openxmlformats.org/presentationml/2006/main">
+<p:tagLst xmlns:a="http://schemas.openxmlformats.org/drawingml/2006/main" xmlns:r="http://schemas.openxmlformats.org/officeDocument/2006/relationships" xmlns:p="http://schemas.openxmlformats.org/presentationml/2006/main">
   <p:tag name="KSO_WM_DIAGRAM_VIRTUALLY_FRAME" val="{&quot;height&quot;:226.8,&quot;left&quot;:514.8,&quot;top&quot;:75.6,&quot;width&quot;:374.4}"/>
 </p:tagLst>
 </file>
 
 <file path=ppt/tags/tag12.xml><?xml version="1.0" encoding="utf-8"?>
-<p:tagLst xmlns:p="http://schemas.openxmlformats.org/presentationml/2006/main">
+<p:tagLst xmlns:a="http://schemas.openxmlformats.org/drawingml/2006/main" xmlns:r="http://schemas.openxmlformats.org/officeDocument/2006/relationships" xmlns:p="http://schemas.openxmlformats.org/presentationml/2006/main">
   <p:tag name="KSO_WM_DIAGRAM_VIRTUALLY_FRAME" val="{&quot;height&quot;:226.8,&quot;left&quot;:514.8,&quot;top&quot;:75.6,&quot;width&quot;:374.4}"/>
 </p:tagLst>
 </file>
 
 <file path=ppt/tags/tag2.xml><?xml version="1.0" encoding="utf-8"?>
-<p:tagLst xmlns:p="http://schemas.openxmlformats.org/presentationml/2006/main">
+<p:tagLst xmlns:a="http://schemas.openxmlformats.org/drawingml/2006/main" xmlns:r="http://schemas.openxmlformats.org/officeDocument/2006/relationships" xmlns:p="http://schemas.openxmlformats.org/presentationml/2006/main">
   <p:tag name="KSO_WM_DIAGRAM_VIRTUALLY_FRAME" val="{&quot;height&quot;:226.8,&quot;left&quot;:514.8,&quot;top&quot;:75.6,&quot;width&quot;:374.4}"/>
 </p:tagLst>
 </file>
 
 <file path=ppt/tags/tag3.xml><?xml version="1.0" encoding="utf-8"?>
-<p:tagLst xmlns:p="http://schemas.openxmlformats.org/presentationml/2006/main">
+<p:tagLst xmlns:a="http://schemas.openxmlformats.org/drawingml/2006/main" xmlns:r="http://schemas.openxmlformats.org/officeDocument/2006/relationships" xmlns:p="http://schemas.openxmlformats.org/presentationml/2006/main">
   <p:tag name="KSO_WM_DIAGRAM_VIRTUALLY_FRAME" val="{&quot;height&quot;:226.8,&quot;left&quot;:514.8,&quot;top&quot;:75.6,&quot;width&quot;:374.4}"/>
 </p:tagLst>
 </file>
 
 <file path=ppt/tags/tag4.xml><?xml version="1.0" encoding="utf-8"?>
-<p:tagLst xmlns:p="http://schemas.openxmlformats.org/presentationml/2006/main">
+<p:tagLst xmlns:a="http://schemas.openxmlformats.org/drawingml/2006/main" xmlns:r="http://schemas.openxmlformats.org/officeDocument/2006/relationships" xmlns:p="http://schemas.openxmlformats.org/presentationml/2006/main">
   <p:tag name="KSO_WM_DIAGRAM_VIRTUALLY_FRAME" val="{&quot;height&quot;:226.8,&quot;left&quot;:514.8,&quot;top&quot;:75.6,&quot;width&quot;:374.4}"/>
 </p:tagLst>
 </file>
 
 <file path=ppt/tags/tag5.xml><?xml version="1.0" encoding="utf-8"?>
-<p:tagLst xmlns:p="http://schemas.openxmlformats.org/presentationml/2006/main">
+<p:tagLst xmlns:a="http://schemas.openxmlformats.org/drawingml/2006/main" xmlns:r="http://schemas.openxmlformats.org/officeDocument/2006/relationships" xmlns:p="http://schemas.openxmlformats.org/presentationml/2006/main">
   <p:tag name="KSO_WM_DIAGRAM_VIRTUALLY_FRAME" val="{&quot;height&quot;:226.8,&quot;left&quot;:514.8,&quot;top&quot;:75.6,&quot;width&quot;:374.4}"/>
 </p:tagLst>
 </file>
 
 <file path=ppt/tags/tag6.xml><?xml version="1.0" encoding="utf-8"?>
-<p:tagLst xmlns:p="http://schemas.openxmlformats.org/presentationml/2006/main">
+<p:tagLst xmlns:a="http://schemas.openxmlformats.org/drawingml/2006/main" xmlns:r="http://schemas.openxmlformats.org/officeDocument/2006/relationships" xmlns:p="http://schemas.openxmlformats.org/presentationml/2006/main">
   <p:tag name="KSO_WM_DIAGRAM_VIRTUALLY_FRAME" val="{&quot;height&quot;:226.8,&quot;left&quot;:514.8,&quot;top&quot;:75.6,&quot;width&quot;:374.4}"/>
 </p:tagLst>
 </file>
 
 <file path=ppt/tags/tag7.xml><?xml version="1.0" encoding="utf-8"?>
-<p:tagLst xmlns:p="http://schemas.openxmlformats.org/presentationml/2006/main">
+<p:tagLst xmlns:a="http://schemas.openxmlformats.org/drawingml/2006/main" xmlns:r="http://schemas.openxmlformats.org/officeDocument/2006/relationships" xmlns:p="http://schemas.openxmlformats.org/presentationml/2006/main">
   <p:tag name="KSO_WM_DIAGRAM_VIRTUALLY_FRAME" val="{&quot;height&quot;:226.8,&quot;left&quot;:514.8,&quot;top&quot;:75.6,&quot;width&quot;:374.4}"/>
 </p:tagLst>
 </file>
 
 <file path=ppt/tags/tag8.xml><?xml version="1.0" encoding="utf-8"?>
-<p:tagLst xmlns:p="http://schemas.openxmlformats.org/presentationml/2006/main">
+<p:tagLst xmlns:a="http://schemas.openxmlformats.org/drawingml/2006/main" xmlns:r="http://schemas.openxmlformats.org/officeDocument/2006/relationships" xmlns:p="http://schemas.openxmlformats.org/presentationml/2006/main">
   <p:tag name="KSO_WM_DIAGRAM_VIRTUALLY_FRAME" val="{&quot;height&quot;:226.8,&quot;left&quot;:514.8,&quot;top&quot;:75.6,&quot;width&quot;:374.4}"/>
 </p:tagLst>
 </file>
 
 <file path=ppt/tags/tag9.xml><?xml version="1.0" encoding="utf-8"?>
-<p:tagLst xmlns:p="http://schemas.openxmlformats.org/presentationml/2006/main">
+<p:tagLst xmlns:a="http://schemas.openxmlformats.org/drawingml/2006/main" xmlns:r="http://schemas.openxmlformats.org/officeDocument/2006/relationships" xmlns:p="http://schemas.openxmlformats.org/presentationml/2006/main">
   <p:tag name="KSO_WM_DIAGRAM_VIRTUALLY_FRAME" val="{&quot;height&quot;:226.8,&quot;left&quot;:514.8,&quot;top&quot;:75.6,&quot;width&quot;:374.4}"/>
 </p:tagLst>
 </file>
@@ -8429,6 +10404,7 @@
       </a:style>
     </a:lnDef>
   </a:objectDefaults>
+  <a:extraClrSchemeLst/>
   <a:extLst>
     <a:ext uri="{05A4C25C-085E-4340-85A3-A5531E510DB2}">
       <thm15:themeFamily xmlns:thm15="http://schemas.microsoft.com/office/thememl/2012/main" name="Office Theme" id="{62F939B6-93AF-4DB8-9C6B-D6C7DFDC589F}" vid="{4A3C46E8-61CC-4603-A589-7422A47A8E4A}"/>
